--- a/Презентация_ВКР_АРМ_салона.pptx
+++ b/Презентация_ВКР_АРМ_салона.pptx
@@ -9,6 +9,7 @@
     <p:sldId id="257" r:id="rId3"/>
     <p:sldId id="258" r:id="rId4"/>
     <p:sldId id="259" r:id="rId5"/>
+    <p:sldId id="270" r:id="rId21"/>
     <p:sldId id="260" r:id="rId6"/>
     <p:sldId id="261" r:id="rId7"/>
     <p:sldId id="262" r:id="rId8"/>
@@ -2053,6 +2054,10 @@
             <a:prstDash val="solid"/>
           </a:ln>
         </p:spPr>
+        <p:txBody>
+          <a:bodyPr/>
+          <a:p/>
+        </p:txBody>
       </p:sp>
       <p:sp>
         <p:nvSpPr>
@@ -2291,6 +2296,10 @@
           </a:solidFill>
           <a:ln/>
         </p:spPr>
+        <p:txBody>
+          <a:bodyPr/>
+          <a:p/>
+        </p:txBody>
       </p:sp>
       <p:sp>
         <p:nvSpPr>
@@ -2485,6 +2494,1001 @@
 </file>
 
 <file path=ppt/slides/slide10.xml><?xml version="1.0" encoding="utf-8"?>
+<p:sld xmlns:a="http://schemas.openxmlformats.org/drawingml/2006/main" xmlns:r="http://schemas.openxmlformats.org/officeDocument/2006/relationships" xmlns:p="http://schemas.openxmlformats.org/presentationml/2006/main">
+  <p:cSld name="Slide 9">
+    <p:bg>
+      <p:bgPr>
+        <a:solidFill>
+          <a:srgbClr val="FFFFFF"/>
+        </a:solidFill>
+      </p:bgPr>
+    </p:bg>
+    <p:spTree>
+      <p:nvGrpSpPr>
+        <p:cNvPr id="1" name=""/>
+        <p:cNvGrpSpPr/>
+        <p:nvPr/>
+      </p:nvGrpSpPr>
+      <p:grpSpPr>
+        <a:xfrm>
+          <a:off x="0" y="0"/>
+          <a:ext cx="0" cy="0"/>
+          <a:chOff x="0" y="0"/>
+          <a:chExt cx="0" cy="0"/>
+        </a:xfrm>
+      </p:grpSpPr>
+      <p:sp>
+        <p:nvSpPr>
+          <p:cNvPr id="2" name="Shape 0"/>
+          <p:cNvSpPr/>
+          <p:nvPr/>
+        </p:nvSpPr>
+        <p:spPr>
+          <a:xfrm>
+            <a:off x="566928" y="448056"/>
+            <a:ext cx="155448" cy="155448"/>
+          </a:xfrm>
+          <a:prstGeom prst="rect">
+            <a:avLst/>
+          </a:prstGeom>
+          <a:solidFill>
+            <a:srgbClr val="B08D3E"/>
+          </a:solidFill>
+          <a:ln/>
+        </p:spPr>
+        <p:txBody>
+          <a:bodyPr/>
+          <a:p/>
+        </p:txBody>
+      </p:sp>
+      <p:sp>
+        <p:nvSpPr>
+          <p:cNvPr id="3" name="Text 1"/>
+          <p:cNvSpPr/>
+          <p:nvPr/>
+        </p:nvSpPr>
+        <p:spPr>
+          <a:xfrm>
+            <a:off x="841248" y="384048"/>
+            <a:ext cx="10783519" cy="274320"/>
+          </a:xfrm>
+          <a:prstGeom prst="rect">
+            <a:avLst/>
+          </a:prstGeom>
+          <a:noFill/>
+          <a:ln/>
+        </p:spPr>
+        <p:txBody>
+          <a:bodyPr wrap="square" lIns="0" tIns="0" rIns="0" bIns="0" rtlCol="0" anchor="ctr"/>
+          <a:lstStyle/>
+          <a:p>
+            <a:pPr indent="0" marL="0">
+              <a:buNone/>
+            </a:pPr>
+            <a:r>
+              <a:rPr lang="en-US" sz="1250" b="1" spc="300" kern="0" dirty="0">
+                <a:solidFill>
+                  <a:srgbClr val="B08D3E"/>
+                </a:solidFill>
+                <a:latin typeface="PT Sans" pitchFamily="34" charset="0"/>
+                <a:ea typeface="PT Sans" pitchFamily="34" charset="-122"/>
+                <a:cs typeface="PT Sans" pitchFamily="34" charset="-120"/>
+              </a:rPr>
+              <a:t>ПРОЕКТИРОВАНИЕ · ЛОГИКА</a:t>
+            </a:r>
+            <a:endParaRPr lang="en-US" sz="1250" dirty="0"/>
+          </a:p>
+        </p:txBody>
+      </p:sp>
+      <p:sp>
+        <p:nvSpPr>
+          <p:cNvPr id="4" name="Text 2"/>
+          <p:cNvSpPr/>
+          <p:nvPr/>
+        </p:nvSpPr>
+        <p:spPr>
+          <a:xfrm>
+            <a:off x="566928" y="694944"/>
+            <a:ext cx="11057839" cy="658368"/>
+          </a:xfrm>
+          <a:prstGeom prst="rect">
+            <a:avLst/>
+          </a:prstGeom>
+          <a:noFill/>
+          <a:ln/>
+        </p:spPr>
+        <p:txBody>
+          <a:bodyPr wrap="square" lIns="0" tIns="0" rIns="0" bIns="0" rtlCol="0" anchor="ctr"/>
+          <a:lstStyle/>
+          <a:p>
+            <a:pPr indent="0" marL="0">
+              <a:buNone/>
+            </a:pPr>
+            <a:r>
+              <a:rPr lang="en-US" sz="2900" b="1" dirty="0">
+                <a:solidFill>
+                  <a:srgbClr val="1E3A5F"/>
+                </a:solidFill>
+                <a:latin typeface="PT Serif" pitchFamily="34" charset="0"/>
+                <a:ea typeface="PT Serif" pitchFamily="34" charset="-122"/>
+                <a:cs typeface="PT Serif" pitchFamily="34" charset="-120"/>
+              </a:rPr>
+              <a:t>Логика обработки и роли</a:t>
+            </a:r>
+            <a:endParaRPr lang="en-US" sz="2900" dirty="0"/>
+          </a:p>
+        </p:txBody>
+      </p:sp>
+      <p:sp>
+        <p:nvSpPr>
+          <p:cNvPr id="5" name="Shape 3"/>
+          <p:cNvSpPr/>
+          <p:nvPr/>
+        </p:nvSpPr>
+        <p:spPr>
+          <a:xfrm>
+            <a:off x="502920" y="1538900"/>
+            <a:ext cx="4974336" cy="4164247"/>
+          </a:xfrm>
+          <a:prstGeom prst="rect">
+            <a:avLst/>
+          </a:prstGeom>
+          <a:solidFill>
+            <a:srgbClr val="FFFFFF"/>
+          </a:solidFill>
+          <a:ln w="12700">
+            <a:solidFill>
+              <a:srgbClr val="D5DEE9"/>
+            </a:solidFill>
+            <a:prstDash val="solid"/>
+          </a:ln>
+          <a:effectLst>
+            <a:outerShdw sx="100000" sy="100000" kx="0" ky="0" algn="bl" rotWithShape="0" blurRad="101600" dist="38100" dir="5400000">
+              <a:srgbClr val="8499B5">
+                <a:alpha val="22000"/>
+              </a:srgbClr>
+            </a:outerShdw>
+          </a:effectLst>
+        </p:spPr>
+        <p:txBody>
+          <a:bodyPr/>
+          <a:p/>
+        </p:txBody>
+      </p:sp>
+      <p:pic>
+        <p:nvPicPr>
+          <p:cNvPr id="6" name="Image 0" descr="/Users/m/Documents/VKR_Stats/build/img_final/image13.png">    </p:cNvPr>
+          <p:cNvPicPr>
+            <a:picLocks noChangeAspect="1"/>
+          </p:cNvPicPr>
+          <p:nvPr/>
+        </p:nvPicPr>
+        <p:blipFill>
+          <a:blip r:embed="rId1"/>
+          <a:stretch>
+            <a:fillRect/>
+          </a:stretch>
+        </p:blipFill>
+        <p:spPr>
+          <a:xfrm>
+            <a:off x="566928" y="1602908"/>
+            <a:ext cx="4846320" cy="4036231"/>
+          </a:xfrm>
+          <a:prstGeom prst="rect">
+            <a:avLst/>
+          </a:prstGeom>
+        </p:spPr>
+      </p:pic>
+      <p:sp>
+        <p:nvSpPr>
+          <p:cNvPr id="7" name="Text 4"/>
+          <p:cNvSpPr/>
+          <p:nvPr/>
+        </p:nvSpPr>
+        <p:spPr>
+          <a:xfrm>
+            <a:off x="566928" y="5797296"/>
+            <a:ext cx="5029200" cy="365760"/>
+          </a:xfrm>
+          <a:prstGeom prst="rect">
+            <a:avLst/>
+          </a:prstGeom>
+          <a:noFill/>
+          <a:ln/>
+        </p:spPr>
+        <p:txBody>
+          <a:bodyPr wrap="square" lIns="0" tIns="0" rIns="0" bIns="0" rtlCol="0" anchor="t"/>
+          <a:lstStyle/>
+          <a:p>
+            <a:pPr algn="ctr" indent="0" marL="0">
+              <a:buNone/>
+            </a:pPr>
+            <a:r>
+              <a:rPr lang="en-US" sz="1200" i="1" dirty="0">
+                <a:solidFill>
+                  <a:srgbClr val="657384"/>
+                </a:solidFill>
+                <a:latin typeface="PT Sans" pitchFamily="34" charset="0"/>
+                <a:ea typeface="PT Sans" pitchFamily="34" charset="-122"/>
+                <a:cs typeface="PT Sans" pitchFamily="34" charset="-120"/>
+              </a:rPr>
+              <a:t>EPC: обработка заявки клиента</a:t>
+            </a:r>
+            <a:endParaRPr lang="en-US" sz="1200" dirty="0"/>
+          </a:p>
+        </p:txBody>
+      </p:sp>
+      <p:sp>
+        <p:nvSpPr>
+          <p:cNvPr id="8" name="Shape 5"/>
+          <p:cNvSpPr/>
+          <p:nvPr/>
+        </p:nvSpPr>
+        <p:spPr>
+          <a:xfrm>
+            <a:off x="5715000" y="1492027"/>
+            <a:ext cx="5973775" cy="2520635"/>
+          </a:xfrm>
+          <a:prstGeom prst="rect">
+            <a:avLst/>
+          </a:prstGeom>
+          <a:solidFill>
+            <a:srgbClr val="FFFFFF"/>
+          </a:solidFill>
+          <a:ln w="12700">
+            <a:solidFill>
+              <a:srgbClr val="D5DEE9"/>
+            </a:solidFill>
+            <a:prstDash val="solid"/>
+          </a:ln>
+          <a:effectLst>
+            <a:outerShdw sx="100000" sy="100000" kx="0" ky="0" algn="bl" rotWithShape="0" blurRad="101600" dist="38100" dir="5400000">
+              <a:srgbClr val="8499B5">
+                <a:alpha val="22000"/>
+              </a:srgbClr>
+            </a:outerShdw>
+          </a:effectLst>
+        </p:spPr>
+        <p:txBody>
+          <a:bodyPr/>
+          <a:p/>
+        </p:txBody>
+      </p:sp>
+      <p:pic>
+        <p:nvPicPr>
+          <p:cNvPr id="9" name="Image 1" descr="/Users/m/Documents/VKR_Stats/build/img_final/image14.png">    </p:cNvPr>
+          <p:cNvPicPr>
+            <a:picLocks noChangeAspect="1"/>
+          </p:cNvPicPr>
+          <p:nvPr/>
+        </p:nvPicPr>
+        <p:blipFill>
+          <a:blip r:embed="rId2"/>
+          <a:stretch>
+            <a:fillRect/>
+          </a:stretch>
+        </p:blipFill>
+        <p:spPr>
+          <a:xfrm>
+            <a:off x="5779008" y="1556035"/>
+            <a:ext cx="5845759" cy="2392619"/>
+          </a:xfrm>
+          <a:prstGeom prst="rect">
+            <a:avLst/>
+          </a:prstGeom>
+        </p:spPr>
+      </p:pic>
+      <p:sp>
+        <p:nvSpPr>
+          <p:cNvPr id="10" name="Text 6"/>
+          <p:cNvSpPr/>
+          <p:nvPr/>
+        </p:nvSpPr>
+        <p:spPr>
+          <a:xfrm>
+            <a:off x="5779008" y="4041648"/>
+            <a:ext cx="5845759" cy="310896"/>
+          </a:xfrm>
+          <a:prstGeom prst="rect">
+            <a:avLst/>
+          </a:prstGeom>
+          <a:noFill/>
+          <a:ln/>
+        </p:spPr>
+        <p:txBody>
+          <a:bodyPr wrap="square" lIns="0" tIns="0" rIns="0" bIns="0" rtlCol="0" anchor="t"/>
+          <a:lstStyle/>
+          <a:p>
+            <a:pPr algn="ctr" indent="0" marL="0">
+              <a:buNone/>
+            </a:pPr>
+            <a:r>
+              <a:rPr lang="en-US" sz="1200" i="1" dirty="0">
+                <a:solidFill>
+                  <a:srgbClr val="657384"/>
+                </a:solidFill>
+                <a:latin typeface="PT Sans" pitchFamily="34" charset="0"/>
+                <a:ea typeface="PT Sans" pitchFamily="34" charset="-122"/>
+                <a:cs typeface="PT Sans" pitchFamily="34" charset="-120"/>
+              </a:rPr>
+              <a:t>UML use-case: роли пользователей</a:t>
+            </a:r>
+            <a:endParaRPr lang="en-US" sz="1200" dirty="0"/>
+          </a:p>
+        </p:txBody>
+      </p:sp>
+      <p:sp>
+        <p:nvSpPr>
+          <p:cNvPr id="11" name="Shape 7"/>
+          <p:cNvSpPr/>
+          <p:nvPr/>
+        </p:nvSpPr>
+        <p:spPr>
+          <a:xfrm>
+            <a:off x="5779008" y="4553712"/>
+            <a:ext cx="1796186" cy="1417320"/>
+          </a:xfrm>
+          <a:prstGeom prst="rect">
+            <a:avLst/>
+          </a:prstGeom>
+          <a:solidFill>
+            <a:srgbClr val="FFFFFF"/>
+          </a:solidFill>
+          <a:ln w="12700">
+            <a:solidFill>
+              <a:srgbClr val="D5DEE9"/>
+            </a:solidFill>
+            <a:prstDash val="solid"/>
+          </a:ln>
+          <a:effectLst>
+            <a:outerShdw sx="100000" sy="100000" kx="0" ky="0" algn="bl" rotWithShape="0" blurRad="101600" dist="38100" dir="5400000">
+              <a:srgbClr val="8499B5">
+                <a:alpha val="22000"/>
+              </a:srgbClr>
+            </a:outerShdw>
+          </a:effectLst>
+        </p:spPr>
+        <p:txBody>
+          <a:bodyPr/>
+          <a:p/>
+        </p:txBody>
+      </p:sp>
+      <p:sp>
+        <p:nvSpPr>
+          <p:cNvPr id="12" name="Shape 8"/>
+          <p:cNvSpPr/>
+          <p:nvPr/>
+        </p:nvSpPr>
+        <p:spPr>
+          <a:xfrm>
+            <a:off x="5779008" y="4553712"/>
+            <a:ext cx="82296" cy="1417320"/>
+          </a:xfrm>
+          <a:prstGeom prst="rect">
+            <a:avLst/>
+          </a:prstGeom>
+          <a:solidFill>
+            <a:srgbClr val="1E3A5F"/>
+          </a:solidFill>
+          <a:ln/>
+        </p:spPr>
+        <p:txBody>
+          <a:bodyPr/>
+          <a:p/>
+        </p:txBody>
+      </p:sp>
+      <p:sp>
+        <p:nvSpPr>
+          <p:cNvPr id="13" name="Shape 9"/>
+          <p:cNvSpPr/>
+          <p:nvPr/>
+        </p:nvSpPr>
+        <p:spPr>
+          <a:xfrm>
+            <a:off x="6384493" y="4754880"/>
+            <a:ext cx="585216" cy="585216"/>
+          </a:xfrm>
+          <a:prstGeom prst="ellipse">
+            <a:avLst/>
+          </a:prstGeom>
+          <a:solidFill>
+            <a:srgbClr val="1E3A5F"/>
+          </a:solidFill>
+          <a:ln/>
+        </p:spPr>
+        <p:txBody>
+          <a:bodyPr/>
+          <a:p/>
+        </p:txBody>
+      </p:sp>
+      <p:pic>
+        <p:nvPicPr>
+          <p:cNvPr id="14" name="Image 2" descr="preencoded.png">    </p:cNvPr>
+          <p:cNvPicPr>
+            <a:picLocks noChangeAspect="1"/>
+          </p:cNvPicPr>
+          <p:nvPr/>
+        </p:nvPicPr>
+        <p:blipFill>
+          <a:blip r:embed="rId3"/>
+          <a:stretch>
+            <a:fillRect/>
+          </a:stretch>
+        </p:blipFill>
+        <p:spPr>
+          <a:xfrm>
+            <a:off x="6542502" y="4912888"/>
+            <a:ext cx="269199" cy="269199"/>
+          </a:xfrm>
+          <a:prstGeom prst="rect">
+            <a:avLst/>
+          </a:prstGeom>
+        </p:spPr>
+      </p:pic>
+      <p:sp>
+        <p:nvSpPr>
+          <p:cNvPr id="15" name="Text 10"/>
+          <p:cNvSpPr/>
+          <p:nvPr/>
+        </p:nvSpPr>
+        <p:spPr>
+          <a:xfrm>
+            <a:off x="5870448" y="5394960"/>
+            <a:ext cx="1613306" cy="292608"/>
+          </a:xfrm>
+          <a:prstGeom prst="rect">
+            <a:avLst/>
+          </a:prstGeom>
+          <a:noFill/>
+          <a:ln/>
+        </p:spPr>
+        <p:txBody>
+          <a:bodyPr wrap="square" lIns="0" tIns="0" rIns="0" bIns="0" rtlCol="0" anchor="ctr"/>
+          <a:lstStyle/>
+          <a:p>
+            <a:pPr algn="ctr" indent="0" marL="0">
+              <a:buNone/>
+            </a:pPr>
+            <a:r>
+              <a:rPr lang="en-US" sz="1500" b="1" dirty="0">
+                <a:solidFill>
+                  <a:srgbClr val="1E3A5F"/>
+                </a:solidFill>
+                <a:latin typeface="PT Sans" pitchFamily="34" charset="0"/>
+                <a:ea typeface="PT Sans" pitchFamily="34" charset="-122"/>
+                <a:cs typeface="PT Sans" pitchFamily="34" charset="-120"/>
+              </a:rPr>
+              <a:t>Менеджер</a:t>
+            </a:r>
+            <a:endParaRPr lang="en-US" sz="1500" dirty="0"/>
+          </a:p>
+        </p:txBody>
+      </p:sp>
+      <p:sp>
+        <p:nvSpPr>
+          <p:cNvPr id="16" name="Text 11"/>
+          <p:cNvSpPr/>
+          <p:nvPr/>
+        </p:nvSpPr>
+        <p:spPr>
+          <a:xfrm>
+            <a:off x="5852160" y="5660136"/>
+            <a:ext cx="1649882" cy="274320"/>
+          </a:xfrm>
+          <a:prstGeom prst="rect">
+            <a:avLst/>
+          </a:prstGeom>
+          <a:noFill/>
+          <a:ln/>
+        </p:spPr>
+        <p:txBody>
+          <a:bodyPr wrap="square" lIns="0" tIns="0" rIns="0" bIns="0" rtlCol="0" anchor="t"/>
+          <a:lstStyle/>
+          <a:p>
+            <a:pPr algn="ctr" indent="0" marL="0">
+              <a:buNone/>
+            </a:pPr>
+            <a:r>
+              <a:rPr lang="en-US" sz="1050" dirty="0">
+                <a:solidFill>
+                  <a:srgbClr val="657384"/>
+                </a:solidFill>
+                <a:latin typeface="PT Sans" pitchFamily="34" charset="0"/>
+                <a:ea typeface="PT Sans" pitchFamily="34" charset="-122"/>
+                <a:cs typeface="PT Sans" pitchFamily="34" charset="-120"/>
+              </a:rPr>
+              <a:t>запись, контроль, отчёты</a:t>
+            </a:r>
+            <a:endParaRPr lang="en-US" sz="1050" dirty="0"/>
+          </a:p>
+        </p:txBody>
+      </p:sp>
+      <p:sp>
+        <p:nvSpPr>
+          <p:cNvPr id="17" name="Shape 12"/>
+          <p:cNvSpPr/>
+          <p:nvPr/>
+        </p:nvSpPr>
+        <p:spPr>
+          <a:xfrm>
+            <a:off x="7803794" y="4553712"/>
+            <a:ext cx="1796186" cy="1417320"/>
+          </a:xfrm>
+          <a:prstGeom prst="rect">
+            <a:avLst/>
+          </a:prstGeom>
+          <a:solidFill>
+            <a:srgbClr val="FFFFFF"/>
+          </a:solidFill>
+          <a:ln w="12700">
+            <a:solidFill>
+              <a:srgbClr val="D5DEE9"/>
+            </a:solidFill>
+            <a:prstDash val="solid"/>
+          </a:ln>
+          <a:effectLst>
+            <a:outerShdw sx="100000" sy="100000" kx="0" ky="0" algn="bl" rotWithShape="0" blurRad="101600" dist="38100" dir="5400000">
+              <a:srgbClr val="8499B5">
+                <a:alpha val="22000"/>
+              </a:srgbClr>
+            </a:outerShdw>
+          </a:effectLst>
+        </p:spPr>
+        <p:txBody>
+          <a:bodyPr/>
+          <a:p/>
+        </p:txBody>
+      </p:sp>
+      <p:sp>
+        <p:nvSpPr>
+          <p:cNvPr id="18" name="Shape 13"/>
+          <p:cNvSpPr/>
+          <p:nvPr/>
+        </p:nvSpPr>
+        <p:spPr>
+          <a:xfrm>
+            <a:off x="7803794" y="4553712"/>
+            <a:ext cx="82296" cy="1417320"/>
+          </a:xfrm>
+          <a:prstGeom prst="rect">
+            <a:avLst/>
+          </a:prstGeom>
+          <a:solidFill>
+            <a:srgbClr val="1E3A5F"/>
+          </a:solidFill>
+          <a:ln/>
+        </p:spPr>
+        <p:txBody>
+          <a:bodyPr/>
+          <a:p/>
+        </p:txBody>
+      </p:sp>
+      <p:sp>
+        <p:nvSpPr>
+          <p:cNvPr id="19" name="Shape 14"/>
+          <p:cNvSpPr/>
+          <p:nvPr/>
+        </p:nvSpPr>
+        <p:spPr>
+          <a:xfrm>
+            <a:off x="8409280" y="4754880"/>
+            <a:ext cx="585216" cy="585216"/>
+          </a:xfrm>
+          <a:prstGeom prst="ellipse">
+            <a:avLst/>
+          </a:prstGeom>
+          <a:solidFill>
+            <a:srgbClr val="1E3A5F"/>
+          </a:solidFill>
+          <a:ln/>
+        </p:spPr>
+        <p:txBody>
+          <a:bodyPr/>
+          <a:p/>
+        </p:txBody>
+      </p:sp>
+      <p:pic>
+        <p:nvPicPr>
+          <p:cNvPr id="20" name="Image 3" descr="preencoded.png">    </p:cNvPr>
+          <p:cNvPicPr>
+            <a:picLocks noChangeAspect="1"/>
+          </p:cNvPicPr>
+          <p:nvPr/>
+        </p:nvPicPr>
+        <p:blipFill>
+          <a:blip r:embed="rId4"/>
+          <a:stretch>
+            <a:fillRect/>
+          </a:stretch>
+        </p:blipFill>
+        <p:spPr>
+          <a:xfrm>
+            <a:off x="8567288" y="4912888"/>
+            <a:ext cx="269199" cy="269199"/>
+          </a:xfrm>
+          <a:prstGeom prst="rect">
+            <a:avLst/>
+          </a:prstGeom>
+        </p:spPr>
+      </p:pic>
+      <p:sp>
+        <p:nvSpPr>
+          <p:cNvPr id="21" name="Text 15"/>
+          <p:cNvSpPr/>
+          <p:nvPr/>
+        </p:nvSpPr>
+        <p:spPr>
+          <a:xfrm>
+            <a:off x="7895234" y="5394960"/>
+            <a:ext cx="1613306" cy="292608"/>
+          </a:xfrm>
+          <a:prstGeom prst="rect">
+            <a:avLst/>
+          </a:prstGeom>
+          <a:noFill/>
+          <a:ln/>
+        </p:spPr>
+        <p:txBody>
+          <a:bodyPr wrap="square" lIns="0" tIns="0" rIns="0" bIns="0" rtlCol="0" anchor="ctr"/>
+          <a:lstStyle/>
+          <a:p>
+            <a:pPr algn="ctr" indent="0" marL="0">
+              <a:buNone/>
+            </a:pPr>
+            <a:r>
+              <a:rPr lang="en-US" sz="1500" b="1" dirty="0">
+                <a:solidFill>
+                  <a:srgbClr val="1E3A5F"/>
+                </a:solidFill>
+                <a:latin typeface="PT Sans" pitchFamily="34" charset="0"/>
+                <a:ea typeface="PT Sans" pitchFamily="34" charset="-122"/>
+                <a:cs typeface="PT Sans" pitchFamily="34" charset="-120"/>
+              </a:rPr>
+              <a:t>Мастер</a:t>
+            </a:r>
+            <a:endParaRPr lang="en-US" sz="1500" dirty="0"/>
+          </a:p>
+        </p:txBody>
+      </p:sp>
+      <p:sp>
+        <p:nvSpPr>
+          <p:cNvPr id="22" name="Text 16"/>
+          <p:cNvSpPr/>
+          <p:nvPr/>
+        </p:nvSpPr>
+        <p:spPr>
+          <a:xfrm>
+            <a:off x="7876946" y="5660136"/>
+            <a:ext cx="1649882" cy="274320"/>
+          </a:xfrm>
+          <a:prstGeom prst="rect">
+            <a:avLst/>
+          </a:prstGeom>
+          <a:noFill/>
+          <a:ln/>
+        </p:spPr>
+        <p:txBody>
+          <a:bodyPr wrap="square" lIns="0" tIns="0" rIns="0" bIns="0" rtlCol="0" anchor="t"/>
+          <a:lstStyle/>
+          <a:p>
+            <a:pPr algn="ctr" indent="0" marL="0">
+              <a:buNone/>
+            </a:pPr>
+            <a:r>
+              <a:rPr lang="en-US" sz="1050" dirty="0">
+                <a:solidFill>
+                  <a:srgbClr val="657384"/>
+                </a:solidFill>
+                <a:latin typeface="PT Sans" pitchFamily="34" charset="0"/>
+                <a:ea typeface="PT Sans" pitchFamily="34" charset="-122"/>
+                <a:cs typeface="PT Sans" pitchFamily="34" charset="-120"/>
+              </a:rPr>
+              <a:t>свой график, статусы</a:t>
+            </a:r>
+            <a:endParaRPr lang="en-US" sz="1050" dirty="0"/>
+          </a:p>
+        </p:txBody>
+      </p:sp>
+      <p:sp>
+        <p:nvSpPr>
+          <p:cNvPr id="23" name="Shape 17"/>
+          <p:cNvSpPr/>
+          <p:nvPr/>
+        </p:nvSpPr>
+        <p:spPr>
+          <a:xfrm>
+            <a:off x="9828581" y="4553712"/>
+            <a:ext cx="1796186" cy="1417320"/>
+          </a:xfrm>
+          <a:prstGeom prst="rect">
+            <a:avLst/>
+          </a:prstGeom>
+          <a:solidFill>
+            <a:srgbClr val="FFFFFF"/>
+          </a:solidFill>
+          <a:ln w="12700">
+            <a:solidFill>
+              <a:srgbClr val="D5DEE9"/>
+            </a:solidFill>
+            <a:prstDash val="solid"/>
+          </a:ln>
+          <a:effectLst>
+            <a:outerShdw sx="100000" sy="100000" kx="0" ky="0" algn="bl" rotWithShape="0" blurRad="101600" dist="38100" dir="5400000">
+              <a:srgbClr val="8499B5">
+                <a:alpha val="22000"/>
+              </a:srgbClr>
+            </a:outerShdw>
+          </a:effectLst>
+        </p:spPr>
+        <p:txBody>
+          <a:bodyPr/>
+          <a:p/>
+        </p:txBody>
+      </p:sp>
+      <p:sp>
+        <p:nvSpPr>
+          <p:cNvPr id="24" name="Shape 18"/>
+          <p:cNvSpPr/>
+          <p:nvPr/>
+        </p:nvSpPr>
+        <p:spPr>
+          <a:xfrm>
+            <a:off x="9828581" y="4553712"/>
+            <a:ext cx="82296" cy="1417320"/>
+          </a:xfrm>
+          <a:prstGeom prst="rect">
+            <a:avLst/>
+          </a:prstGeom>
+          <a:solidFill>
+            <a:srgbClr val="1E3A5F"/>
+          </a:solidFill>
+          <a:ln/>
+        </p:spPr>
+        <p:txBody>
+          <a:bodyPr/>
+          <a:p/>
+        </p:txBody>
+      </p:sp>
+      <p:sp>
+        <p:nvSpPr>
+          <p:cNvPr id="25" name="Shape 19"/>
+          <p:cNvSpPr/>
+          <p:nvPr/>
+        </p:nvSpPr>
+        <p:spPr>
+          <a:xfrm>
+            <a:off x="10434066" y="4754880"/>
+            <a:ext cx="585216" cy="585216"/>
+          </a:xfrm>
+          <a:prstGeom prst="ellipse">
+            <a:avLst/>
+          </a:prstGeom>
+          <a:solidFill>
+            <a:srgbClr val="1E3A5F"/>
+          </a:solidFill>
+          <a:ln/>
+        </p:spPr>
+        <p:txBody>
+          <a:bodyPr/>
+          <a:p/>
+        </p:txBody>
+      </p:sp>
+      <p:pic>
+        <p:nvPicPr>
+          <p:cNvPr id="26" name="Image 4" descr="preencoded.png">    </p:cNvPr>
+          <p:cNvPicPr>
+            <a:picLocks noChangeAspect="1"/>
+          </p:cNvPicPr>
+          <p:nvPr/>
+        </p:nvPicPr>
+        <p:blipFill>
+          <a:blip r:embed="rId5"/>
+          <a:stretch>
+            <a:fillRect/>
+          </a:stretch>
+        </p:blipFill>
+        <p:spPr>
+          <a:xfrm>
+            <a:off x="10592074" y="4912888"/>
+            <a:ext cx="269199" cy="269199"/>
+          </a:xfrm>
+          <a:prstGeom prst="rect">
+            <a:avLst/>
+          </a:prstGeom>
+        </p:spPr>
+      </p:pic>
+      <p:sp>
+        <p:nvSpPr>
+          <p:cNvPr id="27" name="Text 20"/>
+          <p:cNvSpPr/>
+          <p:nvPr/>
+        </p:nvSpPr>
+        <p:spPr>
+          <a:xfrm>
+            <a:off x="9920021" y="5394960"/>
+            <a:ext cx="1613306" cy="292608"/>
+          </a:xfrm>
+          <a:prstGeom prst="rect">
+            <a:avLst/>
+          </a:prstGeom>
+          <a:noFill/>
+          <a:ln/>
+        </p:spPr>
+        <p:txBody>
+          <a:bodyPr wrap="square" lIns="0" tIns="0" rIns="0" bIns="0" rtlCol="0" anchor="ctr"/>
+          <a:lstStyle/>
+          <a:p>
+            <a:pPr algn="ctr" indent="0" marL="0">
+              <a:buNone/>
+            </a:pPr>
+            <a:r>
+              <a:rPr lang="en-US" sz="1500" b="1" dirty="0">
+                <a:solidFill>
+                  <a:srgbClr val="1E3A5F"/>
+                </a:solidFill>
+                <a:latin typeface="PT Sans" pitchFamily="34" charset="0"/>
+                <a:ea typeface="PT Sans" pitchFamily="34" charset="-122"/>
+                <a:cs typeface="PT Sans" pitchFamily="34" charset="-120"/>
+              </a:rPr>
+              <a:t>Руководитель</a:t>
+            </a:r>
+            <a:endParaRPr lang="en-US" sz="1500" dirty="0"/>
+          </a:p>
+        </p:txBody>
+      </p:sp>
+      <p:sp>
+        <p:nvSpPr>
+          <p:cNvPr id="28" name="Text 21"/>
+          <p:cNvSpPr/>
+          <p:nvPr/>
+        </p:nvSpPr>
+        <p:spPr>
+          <a:xfrm>
+            <a:off x="9901733" y="5660136"/>
+            <a:ext cx="1649882" cy="274320"/>
+          </a:xfrm>
+          <a:prstGeom prst="rect">
+            <a:avLst/>
+          </a:prstGeom>
+          <a:noFill/>
+          <a:ln/>
+        </p:spPr>
+        <p:txBody>
+          <a:bodyPr wrap="square" lIns="0" tIns="0" rIns="0" bIns="0" rtlCol="0" anchor="t"/>
+          <a:lstStyle/>
+          <a:p>
+            <a:pPr algn="ctr" indent="0" marL="0">
+              <a:buNone/>
+            </a:pPr>
+            <a:r>
+              <a:rPr lang="en-US" sz="1050" dirty="0">
+                <a:solidFill>
+                  <a:srgbClr val="657384"/>
+                </a:solidFill>
+                <a:latin typeface="PT Sans" pitchFamily="34" charset="0"/>
+                <a:ea typeface="PT Sans" pitchFamily="34" charset="-122"/>
+                <a:cs typeface="PT Sans" pitchFamily="34" charset="-120"/>
+              </a:rPr>
+              <a:t>сводки и показатели</a:t>
+            </a:r>
+            <a:endParaRPr lang="en-US" sz="1050" dirty="0"/>
+          </a:p>
+        </p:txBody>
+      </p:sp>
+      <p:sp>
+        <p:nvSpPr>
+          <p:cNvPr id="29" name="Shape 22"/>
+          <p:cNvSpPr/>
+          <p:nvPr/>
+        </p:nvSpPr>
+        <p:spPr>
+          <a:xfrm>
+            <a:off x="566928" y="6437376"/>
+            <a:ext cx="11057839" cy="0"/>
+          </a:xfrm>
+          <a:prstGeom prst="line">
+            <a:avLst/>
+          </a:prstGeom>
+          <a:noFill/>
+          <a:ln w="9525">
+            <a:solidFill>
+              <a:srgbClr val="E0E6EE"/>
+            </a:solidFill>
+            <a:prstDash val="solid"/>
+          </a:ln>
+        </p:spPr>
+        <p:txBody>
+          <a:bodyPr/>
+          <a:p/>
+        </p:txBody>
+      </p:sp>
+      <p:sp>
+        <p:nvSpPr>
+          <p:cNvPr id="30" name="Text 23"/>
+          <p:cNvSpPr/>
+          <p:nvPr/>
+        </p:nvSpPr>
+        <p:spPr>
+          <a:xfrm>
+            <a:off x="566928" y="6464808"/>
+            <a:ext cx="8229600" cy="292608"/>
+          </a:xfrm>
+          <a:prstGeom prst="rect">
+            <a:avLst/>
+          </a:prstGeom>
+          <a:noFill/>
+          <a:ln/>
+        </p:spPr>
+        <p:txBody>
+          <a:bodyPr wrap="square" lIns="0" tIns="0" rIns="0" bIns="0" rtlCol="0" anchor="ctr"/>
+          <a:lstStyle/>
+          <a:p>
+            <a:pPr indent="0" marL="0">
+              <a:buNone/>
+            </a:pPr>
+            <a:r>
+              <a:rPr lang="en-US" sz="950" dirty="0">
+                <a:solidFill>
+                  <a:srgbClr val="657384"/>
+                </a:solidFill>
+                <a:latin typeface="PT Sans" pitchFamily="34" charset="0"/>
+                <a:ea typeface="PT Sans" pitchFamily="34" charset="-122"/>
+                <a:cs typeface="PT Sans" pitchFamily="34" charset="-120"/>
+              </a:rPr>
+              <a:t>АРМ менеджера салона красоты  ·  ВСГУТУ  ·  Улан-Удэ, 2026</a:t>
+            </a:r>
+            <a:endParaRPr lang="en-US" sz="950" dirty="0"/>
+          </a:p>
+        </p:txBody>
+      </p:sp>
+      <p:sp>
+        <p:nvSpPr>
+          <p:cNvPr id="31" name="Text 24"/>
+          <p:cNvSpPr/>
+          <p:nvPr/>
+        </p:nvSpPr>
+        <p:spPr>
+          <a:xfrm>
+            <a:off x="9795967" y="6464808"/>
+            <a:ext cx="1828800" cy="292608"/>
+          </a:xfrm>
+          <a:prstGeom prst="rect">
+            <a:avLst/>
+          </a:prstGeom>
+          <a:noFill/>
+          <a:ln/>
+        </p:spPr>
+        <p:txBody>
+          <a:bodyPr wrap="square" lIns="0" tIns="0" rIns="0" bIns="0" rtlCol="0" anchor="ctr"/>
+          <a:lstStyle/>
+          <a:p>
+            <a:pPr algn="r" indent="0" marL="0">
+              <a:buNone/>
+            </a:pPr>
+            <a:r>
+              <a:rPr lang="en-US" sz="950" dirty="0">
+                <a:solidFill>
+                  <a:srgbClr val="657384"/>
+                </a:solidFill>
+                <a:latin typeface="PT Sans" pitchFamily="34" charset="0"/>
+                <a:ea typeface="PT Sans" pitchFamily="34" charset="-122"/>
+                <a:cs typeface="PT Sans" pitchFamily="34" charset="-120"/>
+              </a:rPr>
+              <a:t>10 / 15</a:t>
+            </a:r>
+            <a:endParaRPr lang="en-US" sz="950" dirty="0"/>
+          </a:p>
+        </p:txBody>
+      </p:sp>
+    </p:spTree>
+  </p:cSld>
+  <p:clrMapOvr>
+    <a:masterClrMapping/>
+  </p:clrMapOvr>
+</p:sld>
+</file>
+
+<file path=ppt/slides/slide11.xml><?xml version="1.0" encoding="utf-8"?>
 <p:sld xmlns:a="http://schemas.openxmlformats.org/drawingml/2006/main" xmlns:r="http://schemas.openxmlformats.org/officeDocument/2006/relationships" xmlns:p="http://schemas.openxmlformats.org/presentationml/2006/main">
   <p:cSld name="Slide 10">
     <p:bg>
@@ -2527,6 +3531,10 @@
           </a:solidFill>
           <a:ln/>
         </p:spPr>
+        <p:txBody>
+          <a:bodyPr/>
+          <a:p/>
+        </p:txBody>
       </p:sp>
       <p:sp>
         <p:nvSpPr>
@@ -2637,6 +3645,10 @@
             </a:outerShdw>
           </a:effectLst>
         </p:spPr>
+        <p:txBody>
+          <a:bodyPr/>
+          <a:p/>
+        </p:txBody>
       </p:sp>
       <p:pic>
         <p:nvPicPr>
@@ -2732,6 +3744,10 @@
             </a:outerShdw>
           </a:effectLst>
         </p:spPr>
+        <p:txBody>
+          <a:bodyPr/>
+          <a:p/>
+        </p:txBody>
       </p:sp>
       <p:sp>
         <p:nvSpPr>
@@ -2752,6 +3768,10 @@
           </a:solidFill>
           <a:ln/>
         </p:spPr>
+        <p:txBody>
+          <a:bodyPr/>
+          <a:p/>
+        </p:txBody>
       </p:sp>
       <p:sp>
         <p:nvSpPr>
@@ -2857,6 +3877,10 @@
             <a:prstDash val="solid"/>
           </a:ln>
         </p:spPr>
+        <p:txBody>
+          <a:bodyPr/>
+          <a:p/>
+        </p:txBody>
       </p:sp>
       <p:sp>
         <p:nvSpPr>
@@ -2923,6 +3947,10 @@
             <a:prstDash val="solid"/>
           </a:ln>
         </p:spPr>
+        <p:txBody>
+          <a:bodyPr/>
+          <a:p/>
+        </p:txBody>
       </p:sp>
       <p:sp>
         <p:nvSpPr>
@@ -2989,6 +4017,10 @@
             <a:prstDash val="solid"/>
           </a:ln>
         </p:spPr>
+        <p:txBody>
+          <a:bodyPr/>
+          <a:p/>
+        </p:txBody>
       </p:sp>
       <p:sp>
         <p:nvSpPr>
@@ -3055,6 +4087,10 @@
             <a:prstDash val="solid"/>
           </a:ln>
         </p:spPr>
+        <p:txBody>
+          <a:bodyPr/>
+          <a:p/>
+        </p:txBody>
       </p:sp>
       <p:sp>
         <p:nvSpPr>
@@ -3121,6 +4157,10 @@
             <a:prstDash val="solid"/>
           </a:ln>
         </p:spPr>
+        <p:txBody>
+          <a:bodyPr/>
+          <a:p/>
+        </p:txBody>
       </p:sp>
       <p:sp>
         <p:nvSpPr>
@@ -3187,6 +4227,10 @@
             <a:prstDash val="solid"/>
           </a:ln>
         </p:spPr>
+        <p:txBody>
+          <a:bodyPr/>
+          <a:p/>
+        </p:txBody>
       </p:sp>
       <p:sp>
         <p:nvSpPr>
@@ -3253,6 +4297,10 @@
             <a:prstDash val="solid"/>
           </a:ln>
         </p:spPr>
+        <p:txBody>
+          <a:bodyPr/>
+          <a:p/>
+        </p:txBody>
       </p:sp>
       <p:sp>
         <p:nvSpPr>
@@ -3319,6 +4367,10 @@
             <a:prstDash val="solid"/>
           </a:ln>
         </p:spPr>
+        <p:txBody>
+          <a:bodyPr/>
+          <a:p/>
+        </p:txBody>
       </p:sp>
       <p:sp>
         <p:nvSpPr>
@@ -3385,6 +4437,10 @@
             <a:prstDash val="solid"/>
           </a:ln>
         </p:spPr>
+        <p:txBody>
+          <a:bodyPr/>
+          <a:p/>
+        </p:txBody>
       </p:sp>
       <p:sp>
         <p:nvSpPr>
@@ -3456,6 +4512,10 @@
             </a:outerShdw>
           </a:effectLst>
         </p:spPr>
+        <p:txBody>
+          <a:bodyPr/>
+          <a:p/>
+        </p:txBody>
       </p:sp>
       <p:sp>
         <p:nvSpPr>
@@ -3476,6 +4536,10 @@
           </a:solidFill>
           <a:ln/>
         </p:spPr>
+        <p:txBody>
+          <a:bodyPr/>
+          <a:p/>
+        </p:txBody>
       </p:sp>
       <p:sp>
         <p:nvSpPr>
@@ -3629,6 +4693,10 @@
             </a:outerShdw>
           </a:effectLst>
         </p:spPr>
+        <p:txBody>
+          <a:bodyPr/>
+          <a:p/>
+        </p:txBody>
       </p:sp>
       <p:sp>
         <p:nvSpPr>
@@ -3649,6 +4717,10 @@
           </a:solidFill>
           <a:ln/>
         </p:spPr>
+        <p:txBody>
+          <a:bodyPr/>
+          <a:p/>
+        </p:txBody>
       </p:sp>
       <p:sp>
         <p:nvSpPr>
@@ -3669,6 +4741,10 @@
           </a:solidFill>
           <a:ln/>
         </p:spPr>
+        <p:txBody>
+          <a:bodyPr/>
+          <a:p/>
+        </p:txBody>
       </p:sp>
       <p:pic>
         <p:nvPicPr>
@@ -3858,6 +4934,10 @@
             <a:prstDash val="solid"/>
           </a:ln>
         </p:spPr>
+        <p:txBody>
+          <a:bodyPr/>
+          <a:p/>
+        </p:txBody>
       </p:sp>
       <p:sp>
         <p:nvSpPr>
@@ -3931,7 +5011,7 @@
                 <a:ea typeface="PT Sans" pitchFamily="34" charset="-122"/>
                 <a:cs typeface="PT Sans" pitchFamily="34" charset="-120"/>
               </a:rPr>
-              <a:t>10 / 14</a:t>
+              <a:t>11 / 15</a:t>
             </a:r>
             <a:endParaRPr lang="en-US" sz="950" dirty="0"/>
           </a:p>
@@ -3945,7 +5025,7 @@
 </p:sld>
 </file>
 
-<file path=ppt/slides/slide11.xml><?xml version="1.0" encoding="utf-8"?>
+<file path=ppt/slides/slide12.xml><?xml version="1.0" encoding="utf-8"?>
 <p:sld xmlns:a="http://schemas.openxmlformats.org/drawingml/2006/main" xmlns:r="http://schemas.openxmlformats.org/officeDocument/2006/relationships" xmlns:p="http://schemas.openxmlformats.org/presentationml/2006/main">
   <p:cSld name="Slide 11">
     <p:bg>
@@ -3988,6 +5068,10 @@
           </a:solidFill>
           <a:ln/>
         </p:spPr>
+        <p:txBody>
+          <a:bodyPr/>
+          <a:p/>
+        </p:txBody>
       </p:sp>
       <p:sp>
         <p:nvSpPr>
@@ -4098,6 +5182,10 @@
             </a:outerShdw>
           </a:effectLst>
         </p:spPr>
+        <p:txBody>
+          <a:bodyPr/>
+          <a:p/>
+        </p:txBody>
       </p:sp>
       <p:pic>
         <p:nvPicPr>
@@ -4193,6 +5281,10 @@
             </a:outerShdw>
           </a:effectLst>
         </p:spPr>
+        <p:txBody>
+          <a:bodyPr/>
+          <a:p/>
+        </p:txBody>
       </p:sp>
       <p:pic>
         <p:nvPicPr>
@@ -4288,6 +5380,10 @@
             </a:outerShdw>
           </a:effectLst>
         </p:spPr>
+        <p:txBody>
+          <a:bodyPr/>
+          <a:p/>
+        </p:txBody>
       </p:sp>
       <p:pic>
         <p:nvPicPr>
@@ -4383,6 +5479,10 @@
             </a:outerShdw>
           </a:effectLst>
         </p:spPr>
+        <p:txBody>
+          <a:bodyPr/>
+          <a:p/>
+        </p:txBody>
       </p:sp>
       <p:pic>
         <p:nvPicPr>
@@ -4478,6 +5578,10 @@
             </a:outerShdw>
           </a:effectLst>
         </p:spPr>
+        <p:txBody>
+          <a:bodyPr/>
+          <a:p/>
+        </p:txBody>
       </p:sp>
       <p:sp>
         <p:nvSpPr>
@@ -4498,6 +5602,10 @@
           </a:solidFill>
           <a:ln/>
         </p:spPr>
+        <p:txBody>
+          <a:bodyPr/>
+          <a:p/>
+        </p:txBody>
       </p:sp>
       <p:sp>
         <p:nvSpPr>
@@ -4574,6 +5682,10 @@
             <a:prstDash val="solid"/>
           </a:ln>
         </p:spPr>
+        <p:txBody>
+          <a:bodyPr/>
+          <a:p/>
+        </p:txBody>
       </p:sp>
       <p:sp>
         <p:nvSpPr>
@@ -4647,7 +5759,7 @@
                 <a:ea typeface="PT Sans" pitchFamily="34" charset="-122"/>
                 <a:cs typeface="PT Sans" pitchFamily="34" charset="-120"/>
               </a:rPr>
-              <a:t>11 / 14</a:t>
+              <a:t>12 / 15</a:t>
             </a:r>
             <a:endParaRPr lang="en-US" sz="950" dirty="0"/>
           </a:p>
@@ -4661,7 +5773,7 @@
 </p:sld>
 </file>
 
-<file path=ppt/slides/slide12.xml><?xml version="1.0" encoding="utf-8"?>
+<file path=ppt/slides/slide13.xml><?xml version="1.0" encoding="utf-8"?>
 <p:sld xmlns:a="http://schemas.openxmlformats.org/drawingml/2006/main" xmlns:r="http://schemas.openxmlformats.org/officeDocument/2006/relationships" xmlns:p="http://schemas.openxmlformats.org/presentationml/2006/main">
   <p:cSld name="Slide 12">
     <p:bg>
@@ -4704,6 +5816,10 @@
           </a:solidFill>
           <a:ln/>
         </p:spPr>
+        <p:txBody>
+          <a:bodyPr/>
+          <a:p/>
+        </p:txBody>
       </p:sp>
       <p:sp>
         <p:nvSpPr>
@@ -4814,6 +5930,10 @@
             </a:outerShdw>
           </a:effectLst>
         </p:spPr>
+        <p:txBody>
+          <a:bodyPr/>
+          <a:p/>
+        </p:txBody>
       </p:sp>
       <p:sp>
         <p:nvSpPr>
@@ -4834,6 +5954,10 @@
           </a:solidFill>
           <a:ln/>
         </p:spPr>
+        <p:txBody>
+          <a:bodyPr/>
+          <a:p/>
+        </p:txBody>
       </p:sp>
       <p:sp>
         <p:nvSpPr>
@@ -4854,6 +5978,10 @@
           </a:solidFill>
           <a:ln/>
         </p:spPr>
+        <p:txBody>
+          <a:bodyPr/>
+          <a:p/>
+        </p:txBody>
       </p:sp>
       <p:pic>
         <p:nvPicPr>
@@ -5065,6 +6193,10 @@
             <a:prstDash val="solid"/>
           </a:ln>
         </p:spPr>
+        <p:txBody>
+          <a:bodyPr/>
+          <a:p/>
+        </p:txBody>
       </p:sp>
       <p:sp>
         <p:nvSpPr>
@@ -5131,6 +6263,10 @@
             <a:prstDash val="solid"/>
           </a:ln>
         </p:spPr>
+        <p:txBody>
+          <a:bodyPr/>
+          <a:p/>
+        </p:txBody>
       </p:sp>
       <p:sp>
         <p:nvSpPr>
@@ -5197,6 +6333,10 @@
             <a:prstDash val="solid"/>
           </a:ln>
         </p:spPr>
+        <p:txBody>
+          <a:bodyPr/>
+          <a:p/>
+        </p:txBody>
       </p:sp>
       <p:sp>
         <p:nvSpPr>
@@ -5263,6 +6403,10 @@
             <a:prstDash val="solid"/>
           </a:ln>
         </p:spPr>
+        <p:txBody>
+          <a:bodyPr/>
+          <a:p/>
+        </p:txBody>
       </p:sp>
       <p:sp>
         <p:nvSpPr>
@@ -5373,6 +6517,10 @@
             </a:outerShdw>
           </a:effectLst>
         </p:spPr>
+        <p:txBody>
+          <a:bodyPr/>
+          <a:p/>
+        </p:txBody>
       </p:sp>
       <p:sp>
         <p:nvSpPr>
@@ -5393,6 +6541,10 @@
           </a:solidFill>
           <a:ln/>
         </p:spPr>
+        <p:txBody>
+          <a:bodyPr/>
+          <a:p/>
+        </p:txBody>
       </p:sp>
       <p:sp>
         <p:nvSpPr>
@@ -5413,6 +6565,10 @@
           </a:solidFill>
           <a:ln/>
         </p:spPr>
+        <p:txBody>
+          <a:bodyPr/>
+          <a:p/>
+        </p:txBody>
       </p:sp>
       <p:pic>
         <p:nvPicPr>
@@ -5586,6 +6742,10 @@
             </a:outerShdw>
           </a:effectLst>
         </p:spPr>
+        <p:txBody>
+          <a:bodyPr/>
+          <a:p/>
+        </p:txBody>
       </p:sp>
       <p:sp>
         <p:nvSpPr>
@@ -5606,6 +6766,10 @@
           </a:solidFill>
           <a:ln/>
         </p:spPr>
+        <p:txBody>
+          <a:bodyPr/>
+          <a:p/>
+        </p:txBody>
       </p:sp>
       <p:sp>
         <p:nvSpPr>
@@ -5626,6 +6790,10 @@
           </a:solidFill>
           <a:ln/>
         </p:spPr>
+        <p:txBody>
+          <a:bodyPr/>
+          <a:p/>
+        </p:txBody>
       </p:sp>
       <p:pic>
         <p:nvPicPr>
@@ -5799,6 +6967,10 @@
             </a:outerShdw>
           </a:effectLst>
         </p:spPr>
+        <p:txBody>
+          <a:bodyPr/>
+          <a:p/>
+        </p:txBody>
       </p:sp>
       <p:sp>
         <p:nvSpPr>
@@ -5819,6 +6991,10 @@
           </a:solidFill>
           <a:ln/>
         </p:spPr>
+        <p:txBody>
+          <a:bodyPr/>
+          <a:p/>
+        </p:txBody>
       </p:sp>
       <p:sp>
         <p:nvSpPr>
@@ -5839,6 +7015,10 @@
           </a:solidFill>
           <a:ln/>
         </p:spPr>
+        <p:txBody>
+          <a:bodyPr/>
+          <a:p/>
+        </p:txBody>
       </p:sp>
       <p:pic>
         <p:nvPicPr>
@@ -6003,6 +7183,10 @@
             <a:prstDash val="solid"/>
           </a:ln>
         </p:spPr>
+        <p:txBody>
+          <a:bodyPr/>
+          <a:p/>
+        </p:txBody>
       </p:sp>
       <p:sp>
         <p:nvSpPr>
@@ -6076,7 +7260,7 @@
                 <a:ea typeface="PT Sans" pitchFamily="34" charset="-122"/>
                 <a:cs typeface="PT Sans" pitchFamily="34" charset="-120"/>
               </a:rPr>
-              <a:t>12 / 14</a:t>
+              <a:t>13 / 15</a:t>
             </a:r>
             <a:endParaRPr lang="en-US" sz="950" dirty="0"/>
           </a:p>
@@ -6090,7 +7274,7 @@
 </p:sld>
 </file>
 
-<file path=ppt/slides/slide13.xml><?xml version="1.0" encoding="utf-8"?>
+<file path=ppt/slides/slide14.xml><?xml version="1.0" encoding="utf-8"?>
 <p:sld xmlns:a="http://schemas.openxmlformats.org/drawingml/2006/main" xmlns:r="http://schemas.openxmlformats.org/officeDocument/2006/relationships" xmlns:p="http://schemas.openxmlformats.org/presentationml/2006/main">
   <p:cSld name="Slide 13">
     <p:bg>
@@ -6133,6 +7317,10 @@
           </a:solidFill>
           <a:ln/>
         </p:spPr>
+        <p:txBody>
+          <a:bodyPr/>
+          <a:p/>
+        </p:txBody>
       </p:sp>
       <p:sp>
         <p:nvSpPr>
@@ -6243,6 +7431,10 @@
             </a:outerShdw>
           </a:effectLst>
         </p:spPr>
+        <p:txBody>
+          <a:bodyPr/>
+          <a:p/>
+        </p:txBody>
       </p:sp>
       <p:sp>
         <p:nvSpPr>
@@ -6263,6 +7455,10 @@
           </a:solidFill>
           <a:ln/>
         </p:spPr>
+        <p:txBody>
+          <a:bodyPr/>
+          <a:p/>
+        </p:txBody>
       </p:sp>
       <p:sp>
         <p:nvSpPr>
@@ -6283,6 +7479,10 @@
           </a:solidFill>
           <a:ln/>
         </p:spPr>
+        <p:txBody>
+          <a:bodyPr/>
+          <a:p/>
+        </p:txBody>
       </p:sp>
       <p:pic>
         <p:nvPicPr>
@@ -6392,6 +7592,10 @@
             </a:outerShdw>
           </a:effectLst>
         </p:spPr>
+        <p:txBody>
+          <a:bodyPr/>
+          <a:p/>
+        </p:txBody>
       </p:sp>
       <p:sp>
         <p:nvSpPr>
@@ -6412,6 +7616,10 @@
           </a:solidFill>
           <a:ln/>
         </p:spPr>
+        <p:txBody>
+          <a:bodyPr/>
+          <a:p/>
+        </p:txBody>
       </p:sp>
       <p:sp>
         <p:nvSpPr>
@@ -6536,6 +7744,10 @@
             </a:outerShdw>
           </a:effectLst>
         </p:spPr>
+        <p:txBody>
+          <a:bodyPr/>
+          <a:p/>
+        </p:txBody>
       </p:sp>
       <p:sp>
         <p:nvSpPr>
@@ -6556,6 +7768,10 @@
           </a:solidFill>
           <a:ln/>
         </p:spPr>
+        <p:txBody>
+          <a:bodyPr/>
+          <a:p/>
+        </p:txBody>
       </p:sp>
       <p:sp>
         <p:nvSpPr>
@@ -6576,6 +7792,10 @@
           </a:solidFill>
           <a:ln/>
         </p:spPr>
+        <p:txBody>
+          <a:bodyPr/>
+          <a:p/>
+        </p:txBody>
       </p:sp>
       <p:pic>
         <p:nvPicPr>
@@ -6671,6 +7891,10 @@
             </a:outerShdw>
           </a:effectLst>
         </p:spPr>
+        <p:txBody>
+          <a:bodyPr/>
+          <a:p/>
+        </p:txBody>
       </p:sp>
       <p:sp>
         <p:nvSpPr>
@@ -6691,6 +7915,10 @@
           </a:solidFill>
           <a:ln/>
         </p:spPr>
+        <p:txBody>
+          <a:bodyPr/>
+          <a:p/>
+        </p:txBody>
       </p:sp>
       <p:sp>
         <p:nvSpPr>
@@ -6711,6 +7939,10 @@
           </a:solidFill>
           <a:ln/>
         </p:spPr>
+        <p:txBody>
+          <a:bodyPr/>
+          <a:p/>
+        </p:txBody>
       </p:sp>
       <p:pic>
         <p:nvPicPr>
@@ -6806,6 +8038,10 @@
             </a:outerShdw>
           </a:effectLst>
         </p:spPr>
+        <p:txBody>
+          <a:bodyPr/>
+          <a:p/>
+        </p:txBody>
       </p:sp>
       <p:sp>
         <p:nvSpPr>
@@ -6826,6 +8062,10 @@
           </a:solidFill>
           <a:ln/>
         </p:spPr>
+        <p:txBody>
+          <a:bodyPr/>
+          <a:p/>
+        </p:txBody>
       </p:sp>
       <p:sp>
         <p:nvSpPr>
@@ -6846,6 +8086,10 @@
           </a:solidFill>
           <a:ln/>
         </p:spPr>
+        <p:txBody>
+          <a:bodyPr/>
+          <a:p/>
+        </p:txBody>
       </p:sp>
       <p:pic>
         <p:nvPicPr>
@@ -6941,6 +8185,10 @@
             </a:outerShdw>
           </a:effectLst>
         </p:spPr>
+        <p:txBody>
+          <a:bodyPr/>
+          <a:p/>
+        </p:txBody>
       </p:sp>
       <p:sp>
         <p:nvSpPr>
@@ -6961,6 +8209,10 @@
           </a:solidFill>
           <a:ln/>
         </p:spPr>
+        <p:txBody>
+          <a:bodyPr/>
+          <a:p/>
+        </p:txBody>
       </p:sp>
       <p:sp>
         <p:nvSpPr>
@@ -6981,6 +8233,10 @@
           </a:solidFill>
           <a:ln/>
         </p:spPr>
+        <p:txBody>
+          <a:bodyPr/>
+          <a:p/>
+        </p:txBody>
       </p:sp>
       <p:pic>
         <p:nvPicPr>
@@ -7067,6 +8323,10 @@
             <a:prstDash val="solid"/>
           </a:ln>
         </p:spPr>
+        <p:txBody>
+          <a:bodyPr/>
+          <a:p/>
+        </p:txBody>
       </p:sp>
       <p:sp>
         <p:nvSpPr>
@@ -7140,7 +8400,7 @@
                 <a:ea typeface="PT Sans" pitchFamily="34" charset="-122"/>
                 <a:cs typeface="PT Sans" pitchFamily="34" charset="-120"/>
               </a:rPr>
-              <a:t>13 / 14</a:t>
+              <a:t>14 / 15</a:t>
             </a:r>
             <a:endParaRPr lang="en-US" sz="950" dirty="0"/>
           </a:p>
@@ -7154,7 +8414,7 @@
 </p:sld>
 </file>
 
-<file path=ppt/slides/slide14.xml><?xml version="1.0" encoding="utf-8"?>
+<file path=ppt/slides/slide15.xml><?xml version="1.0" encoding="utf-8"?>
 <p:sld xmlns:a="http://schemas.openxmlformats.org/drawingml/2006/main" xmlns:r="http://schemas.openxmlformats.org/officeDocument/2006/relationships" xmlns:p="http://schemas.openxmlformats.org/presentationml/2006/main">
   <p:cSld name="Slide 14">
     <p:bg>
@@ -7199,6 +8459,10 @@
             <a:prstDash val="solid"/>
           </a:ln>
         </p:spPr>
+        <p:txBody>
+          <a:bodyPr/>
+          <a:p/>
+        </p:txBody>
       </p:sp>
       <p:sp>
         <p:nvSpPr>
@@ -7219,6 +8483,10 @@
           </a:solidFill>
           <a:ln/>
         </p:spPr>
+        <p:txBody>
+          <a:bodyPr/>
+          <a:p/>
+        </p:txBody>
       </p:sp>
       <p:pic>
         <p:nvPicPr>
@@ -7302,6 +8570,10 @@
           </a:solidFill>
           <a:ln/>
         </p:spPr>
+        <p:txBody>
+          <a:bodyPr/>
+          <a:p/>
+        </p:txBody>
       </p:sp>
       <p:sp>
         <p:nvSpPr>
@@ -7432,6 +8704,10 @@
           </a:solidFill>
           <a:ln/>
         </p:spPr>
+        <p:txBody>
+          <a:bodyPr/>
+          <a:p/>
+        </p:txBody>
       </p:sp>
       <p:sp>
         <p:nvSpPr>
@@ -7542,6 +8818,10 @@
             </a:outerShdw>
           </a:effectLst>
         </p:spPr>
+        <p:txBody>
+          <a:bodyPr/>
+          <a:p/>
+        </p:txBody>
       </p:sp>
       <p:sp>
         <p:nvSpPr>
@@ -7562,6 +8842,10 @@
           </a:solidFill>
           <a:ln/>
         </p:spPr>
+        <p:txBody>
+          <a:bodyPr/>
+          <a:p/>
+        </p:txBody>
       </p:sp>
       <p:sp>
         <p:nvSpPr>
@@ -7582,6 +8866,10 @@
           </a:solidFill>
           <a:ln/>
         </p:spPr>
+        <p:txBody>
+          <a:bodyPr/>
+          <a:p/>
+        </p:txBody>
       </p:sp>
       <p:pic>
         <p:nvPicPr>
@@ -7716,6 +9004,10 @@
             </a:outerShdw>
           </a:effectLst>
         </p:spPr>
+        <p:txBody>
+          <a:bodyPr/>
+          <a:p/>
+        </p:txBody>
       </p:sp>
       <p:sp>
         <p:nvSpPr>
@@ -7736,6 +9028,10 @@
           </a:solidFill>
           <a:ln/>
         </p:spPr>
+        <p:txBody>
+          <a:bodyPr/>
+          <a:p/>
+        </p:txBody>
       </p:sp>
       <p:sp>
         <p:nvSpPr>
@@ -7756,6 +9052,10 @@
           </a:solidFill>
           <a:ln/>
         </p:spPr>
+        <p:txBody>
+          <a:bodyPr/>
+          <a:p/>
+        </p:txBody>
       </p:sp>
       <p:pic>
         <p:nvPicPr>
@@ -7814,7 +9114,7 @@
                 <a:ea typeface="PT Sans" pitchFamily="34" charset="-122"/>
                 <a:cs typeface="PT Sans" pitchFamily="34" charset="-120"/>
               </a:rPr>
-              <a:t>Двойные брони и потери</a:t>
+              <a:t>Двойные записи и потери</a:t>
             </a:r>
             <a:endParaRPr lang="en-US" sz="1800" dirty="0"/>
           </a:p>
@@ -7890,6 +9190,10 @@
             </a:outerShdw>
           </a:effectLst>
         </p:spPr>
+        <p:txBody>
+          <a:bodyPr/>
+          <a:p/>
+        </p:txBody>
       </p:sp>
       <p:sp>
         <p:nvSpPr>
@@ -7910,6 +9214,10 @@
           </a:solidFill>
           <a:ln/>
         </p:spPr>
+        <p:txBody>
+          <a:bodyPr/>
+          <a:p/>
+        </p:txBody>
       </p:sp>
       <p:sp>
         <p:nvSpPr>
@@ -7930,6 +9238,10 @@
           </a:solidFill>
           <a:ln/>
         </p:spPr>
+        <p:txBody>
+          <a:bodyPr/>
+          <a:p/>
+        </p:txBody>
       </p:sp>
       <p:pic>
         <p:nvPicPr>
@@ -7988,7 +9300,7 @@
                 <a:ea typeface="PT Sans" pitchFamily="34" charset="-122"/>
                 <a:cs typeface="PT Sans" pitchFamily="34" charset="-120"/>
               </a:rPr>
-              <a:t>Рассинхрон каналов</a:t>
+              <a:t>Несогласованность каналов</a:t>
             </a:r>
             <a:endParaRPr lang="en-US" sz="1800" dirty="0"/>
           </a:p>
@@ -8064,6 +9376,10 @@
             </a:outerShdw>
           </a:effectLst>
         </p:spPr>
+        <p:txBody>
+          <a:bodyPr/>
+          <a:p/>
+        </p:txBody>
       </p:sp>
       <p:sp>
         <p:nvSpPr>
@@ -8084,6 +9400,10 @@
           </a:solidFill>
           <a:ln/>
         </p:spPr>
+        <p:txBody>
+          <a:bodyPr/>
+          <a:p/>
+        </p:txBody>
       </p:sp>
       <p:sp>
         <p:nvSpPr>
@@ -8104,6 +9424,10 @@
           </a:solidFill>
           <a:ln/>
         </p:spPr>
+        <p:txBody>
+          <a:bodyPr/>
+          <a:p/>
+        </p:txBody>
       </p:sp>
       <p:pic>
         <p:nvPicPr>
@@ -8238,6 +9562,10 @@
             </a:outerShdw>
           </a:effectLst>
         </p:spPr>
+        <p:txBody>
+          <a:bodyPr/>
+          <a:p/>
+        </p:txBody>
       </p:sp>
       <p:sp>
         <p:nvSpPr>
@@ -8258,6 +9586,10 @@
           </a:solidFill>
           <a:ln/>
         </p:spPr>
+        <p:txBody>
+          <a:bodyPr/>
+          <a:p/>
+        </p:txBody>
       </p:sp>
       <p:sp>
         <p:nvSpPr>
@@ -8331,7 +9663,7 @@
                 <a:ea typeface="PT Sans" pitchFamily="34" charset="-122"/>
                 <a:cs typeface="PT Sans" pitchFamily="34" charset="-120"/>
               </a:rPr>
-              <a:t>ошибок — из-за рассинхрона каналов записи</a:t>
+              <a:t>ошибок — из-за несогласованности каналов записи</a:t>
             </a:r>
             <a:endParaRPr lang="en-US" sz="1300" dirty="0"/>
           </a:p>
@@ -8368,6 +9700,10 @@
             </a:outerShdw>
           </a:effectLst>
         </p:spPr>
+        <p:txBody>
+          <a:bodyPr/>
+          <a:p/>
+        </p:txBody>
       </p:sp>
       <p:pic>
         <p:nvPicPr>
@@ -8454,6 +9790,10 @@
             <a:prstDash val="solid"/>
           </a:ln>
         </p:spPr>
+        <p:txBody>
+          <a:bodyPr/>
+          <a:p/>
+        </p:txBody>
       </p:sp>
       <p:sp>
         <p:nvSpPr>
@@ -8527,7 +9867,7 @@
                 <a:ea typeface="PT Sans" pitchFamily="34" charset="-122"/>
                 <a:cs typeface="PT Sans" pitchFamily="34" charset="-120"/>
               </a:rPr>
-              <a:t>02 / 14</a:t>
+              <a:t>02 / 15</a:t>
             </a:r>
             <a:endParaRPr lang="en-US" sz="950" dirty="0"/>
           </a:p>
@@ -8584,6 +9924,10 @@
           </a:solidFill>
           <a:ln/>
         </p:spPr>
+        <p:txBody>
+          <a:bodyPr/>
+          <a:p/>
+        </p:txBody>
       </p:sp>
       <p:sp>
         <p:nvSpPr>
@@ -8694,6 +10038,10 @@
             </a:outerShdw>
           </a:effectLst>
         </p:spPr>
+        <p:txBody>
+          <a:bodyPr/>
+          <a:p/>
+        </p:txBody>
       </p:sp>
       <p:sp>
         <p:nvSpPr>
@@ -8714,6 +10062,10 @@
           </a:solidFill>
           <a:ln/>
         </p:spPr>
+        <p:txBody>
+          <a:bodyPr/>
+          <a:p/>
+        </p:txBody>
       </p:sp>
       <p:sp>
         <p:nvSpPr>
@@ -8762,7 +10114,7 @@
                 <a:ea typeface="PT Sans" pitchFamily="34" charset="-122"/>
                 <a:cs typeface="PT Sans" pitchFamily="34" charset="-120"/>
               </a:rPr>
-              <a:t>Спроектировать АРМ менеджера салона на базе Excel — учёт клиентов, график мастеров, расходники, заказы, обучение и оперативную отчётность.</a:t>
+              <a:t>Спроектировать АРМ менеджера салона на базе Excel — учёт клиентов, график мастеров, расходные материалы, заказы, обучение и оперативную отчётность.</a:t>
             </a:r>
             <a:endParaRPr lang="en-US" sz="1700" dirty="0"/>
           </a:p>
@@ -8799,6 +10151,10 @@
             </a:outerShdw>
           </a:effectLst>
         </p:spPr>
+        <p:txBody>
+          <a:bodyPr/>
+          <a:p/>
+        </p:txBody>
       </p:sp>
       <p:sp>
         <p:nvSpPr>
@@ -8819,6 +10175,10 @@
           </a:solidFill>
           <a:ln/>
         </p:spPr>
+        <p:txBody>
+          <a:bodyPr/>
+          <a:p/>
+        </p:txBody>
       </p:sp>
       <p:sp>
         <p:nvSpPr>
@@ -8839,6 +10199,10 @@
           </a:solidFill>
           <a:ln/>
         </p:spPr>
+        <p:txBody>
+          <a:bodyPr/>
+          <a:p/>
+        </p:txBody>
       </p:sp>
       <p:pic>
         <p:nvPicPr>
@@ -8925,6 +10289,10 @@
             <a:prstDash val="solid"/>
           </a:ln>
         </p:spPr>
+        <p:txBody>
+          <a:bodyPr/>
+          <a:p/>
+        </p:txBody>
       </p:sp>
       <p:sp>
         <p:nvSpPr>
@@ -9042,6 +10410,10 @@
             </a:outerShdw>
           </a:effectLst>
         </p:spPr>
+        <p:txBody>
+          <a:bodyPr/>
+          <a:p/>
+        </p:txBody>
       </p:sp>
       <p:sp>
         <p:nvSpPr>
@@ -9062,6 +10434,10 @@
           </a:solidFill>
           <a:ln/>
         </p:spPr>
+        <p:txBody>
+          <a:bodyPr/>
+          <a:p/>
+        </p:txBody>
       </p:sp>
       <p:sp>
         <p:nvSpPr>
@@ -9082,6 +10458,10 @@
           </a:solidFill>
           <a:ln/>
         </p:spPr>
+        <p:txBody>
+          <a:bodyPr/>
+          <a:p/>
+        </p:txBody>
       </p:sp>
       <p:pic>
         <p:nvPicPr>
@@ -9168,6 +10548,10 @@
             <a:prstDash val="solid"/>
           </a:ln>
         </p:spPr>
+        <p:txBody>
+          <a:bodyPr/>
+          <a:p/>
+        </p:txBody>
       </p:sp>
       <p:sp>
         <p:nvSpPr>
@@ -9285,6 +10669,10 @@
             </a:outerShdw>
           </a:effectLst>
         </p:spPr>
+        <p:txBody>
+          <a:bodyPr/>
+          <a:p/>
+        </p:txBody>
       </p:sp>
       <p:sp>
         <p:nvSpPr>
@@ -9305,6 +10693,10 @@
           </a:solidFill>
           <a:ln/>
         </p:spPr>
+        <p:txBody>
+          <a:bodyPr/>
+          <a:p/>
+        </p:txBody>
       </p:sp>
       <p:sp>
         <p:nvSpPr>
@@ -9325,6 +10717,10 @@
           </a:solidFill>
           <a:ln/>
         </p:spPr>
+        <p:txBody>
+          <a:bodyPr/>
+          <a:p/>
+        </p:txBody>
       </p:sp>
       <p:pic>
         <p:nvPicPr>
@@ -9411,6 +10807,10 @@
             <a:prstDash val="solid"/>
           </a:ln>
         </p:spPr>
+        <p:txBody>
+          <a:bodyPr/>
+          <a:p/>
+        </p:txBody>
       </p:sp>
       <p:sp>
         <p:nvSpPr>
@@ -9519,6 +10919,10 @@
             <a:prstDash val="solid"/>
           </a:ln>
         </p:spPr>
+        <p:txBody>
+          <a:bodyPr/>
+          <a:p/>
+        </p:txBody>
       </p:sp>
       <p:sp>
         <p:nvSpPr>
@@ -9592,7 +10996,7 @@
                 <a:ea typeface="PT Sans" pitchFamily="34" charset="-122"/>
                 <a:cs typeface="PT Sans" pitchFamily="34" charset="-120"/>
               </a:rPr>
-              <a:t>03 / 14</a:t>
+              <a:t>03 / 15</a:t>
             </a:r>
             <a:endParaRPr lang="en-US" sz="950" dirty="0"/>
           </a:p>
@@ -9649,6 +11053,10 @@
           </a:solidFill>
           <a:ln/>
         </p:spPr>
+        <p:txBody>
+          <a:bodyPr/>
+          <a:p/>
+        </p:txBody>
       </p:sp>
       <p:sp>
         <p:nvSpPr>
@@ -9759,6 +11167,10 @@
             </a:outerShdw>
           </a:effectLst>
         </p:spPr>
+        <p:txBody>
+          <a:bodyPr/>
+          <a:p/>
+        </p:txBody>
       </p:sp>
       <p:sp>
         <p:nvSpPr>
@@ -9779,6 +11191,10 @@
           </a:solidFill>
           <a:ln/>
         </p:spPr>
+        <p:txBody>
+          <a:bodyPr/>
+          <a:p/>
+        </p:txBody>
       </p:sp>
       <p:sp>
         <p:nvSpPr>
@@ -9799,6 +11215,10 @@
           </a:solidFill>
           <a:ln/>
         </p:spPr>
+        <p:txBody>
+          <a:bodyPr/>
+          <a:p/>
+        </p:txBody>
       </p:sp>
       <p:pic>
         <p:nvPicPr>
@@ -9933,6 +11353,10 @@
             </a:outerShdw>
           </a:effectLst>
         </p:spPr>
+        <p:txBody>
+          <a:bodyPr/>
+          <a:p/>
+        </p:txBody>
       </p:sp>
       <p:sp>
         <p:nvSpPr>
@@ -9953,6 +11377,10 @@
           </a:solidFill>
           <a:ln/>
         </p:spPr>
+        <p:txBody>
+          <a:bodyPr/>
+          <a:p/>
+        </p:txBody>
       </p:sp>
       <p:sp>
         <p:nvSpPr>
@@ -9973,6 +11401,10 @@
           </a:solidFill>
           <a:ln/>
         </p:spPr>
+        <p:txBody>
+          <a:bodyPr/>
+          <a:p/>
+        </p:txBody>
       </p:sp>
       <p:pic>
         <p:nvPicPr>
@@ -10070,7 +11502,7 @@
                 <a:ea typeface="PT Sans" pitchFamily="34" charset="-122"/>
                 <a:cs typeface="PT Sans" pitchFamily="34" charset="-120"/>
               </a:rPr>
-              <a:t>брови, губы, межресничка + обучающие курсы</a:t>
+              <a:t>брови, губы, межресничное пространство + обучающие курсы</a:t>
             </a:r>
             <a:endParaRPr lang="en-US" sz="1350" dirty="0"/>
           </a:p>
@@ -10107,6 +11539,10 @@
             </a:outerShdw>
           </a:effectLst>
         </p:spPr>
+        <p:txBody>
+          <a:bodyPr/>
+          <a:p/>
+        </p:txBody>
       </p:sp>
       <p:sp>
         <p:nvSpPr>
@@ -10127,6 +11563,10 @@
           </a:solidFill>
           <a:ln/>
         </p:spPr>
+        <p:txBody>
+          <a:bodyPr/>
+          <a:p/>
+        </p:txBody>
       </p:sp>
       <p:sp>
         <p:nvSpPr>
@@ -10147,6 +11587,10 @@
           </a:solidFill>
           <a:ln/>
         </p:spPr>
+        <p:txBody>
+          <a:bodyPr/>
+          <a:p/>
+        </p:txBody>
       </p:sp>
       <p:pic>
         <p:nvPicPr>
@@ -10244,7 +11688,7 @@
                 <a:ea typeface="PT Sans" pitchFamily="34" charset="-122"/>
                 <a:cs typeface="PT Sans" pitchFamily="34" charset="-120"/>
               </a:rPr>
-              <a:t>руководитель + ~3 мастера, 2 кабинета, 3 позиции расходников</a:t>
+              <a:t>руководитель + ~3 мастера, 2 кабинета, 3 позиции расходных материалов</a:t>
             </a:r>
             <a:endParaRPr lang="en-US" sz="1350" dirty="0"/>
           </a:p>
@@ -10281,6 +11725,10 @@
             </a:outerShdw>
           </a:effectLst>
         </p:spPr>
+        <p:txBody>
+          <a:bodyPr/>
+          <a:p/>
+        </p:txBody>
       </p:sp>
       <p:sp>
         <p:nvSpPr>
@@ -10301,6 +11749,10 @@
           </a:solidFill>
           <a:ln/>
         </p:spPr>
+        <p:txBody>
+          <a:bodyPr/>
+          <a:p/>
+        </p:txBody>
       </p:sp>
       <p:sp>
         <p:nvSpPr>
@@ -10321,6 +11773,10 @@
           </a:solidFill>
           <a:ln/>
         </p:spPr>
+        <p:txBody>
+          <a:bodyPr/>
+          <a:p/>
+        </p:txBody>
       </p:sp>
       <p:pic>
         <p:nvPicPr>
@@ -10455,6 +11911,10 @@
             </a:outerShdw>
           </a:effectLst>
         </p:spPr>
+        <p:txBody>
+          <a:bodyPr/>
+          <a:p/>
+        </p:txBody>
       </p:sp>
       <p:pic>
         <p:nvPicPr>
@@ -10541,6 +12001,10 @@
             <a:prstDash val="solid"/>
           </a:ln>
         </p:spPr>
+        <p:txBody>
+          <a:bodyPr/>
+          <a:p/>
+        </p:txBody>
       </p:sp>
       <p:sp>
         <p:nvSpPr>
@@ -10614,7 +12078,7 @@
                 <a:ea typeface="PT Sans" pitchFamily="34" charset="-122"/>
                 <a:cs typeface="PT Sans" pitchFamily="34" charset="-120"/>
               </a:rPr>
-              <a:t>04 / 14</a:t>
+              <a:t>04 / 15</a:t>
             </a:r>
             <a:endParaRPr lang="en-US" sz="950" dirty="0"/>
           </a:p>
@@ -10629,6 +12093,292 @@
 </file>
 
 <file path=ppt/slides/slide5.xml><?xml version="1.0" encoding="utf-8"?>
+<p:sld xmlns:a="http://schemas.openxmlformats.org/drawingml/2006/main" xmlns:p="http://schemas.openxmlformats.org/presentationml/2006/main" xmlns:r="http://schemas.openxmlformats.org/officeDocument/2006/relationships">
+  <p:cSld>
+    <p:spTree>
+      <p:nvGrpSpPr>
+        <p:cNvPr id="1" name=""/>
+        <p:cNvGrpSpPr/>
+        <p:nvPr/>
+      </p:nvGrpSpPr>
+      <p:grpSpPr/>
+      <p:sp>
+        <p:nvSpPr>
+          <p:cNvPr id="2" name="Shape 0"/>
+          <p:cNvSpPr/>
+          <p:nvPr/>
+        </p:nvSpPr>
+        <p:spPr>
+          <a:xfrm>
+            <a:off x="566928" y="448056"/>
+            <a:ext cx="155448" cy="155448"/>
+          </a:xfrm>
+          <a:prstGeom prst="rect">
+            <a:avLst/>
+          </a:prstGeom>
+          <a:solidFill>
+            <a:srgbClr val="B08D3E"/>
+          </a:solidFill>
+          <a:ln/>
+        </p:spPr>
+        <p:txBody>
+          <a:bodyPr/>
+          <a:p/>
+        </p:txBody>
+      </p:sp>
+      <p:sp>
+        <p:nvSpPr>
+          <p:cNvPr id="3" name="Text 1"/>
+          <p:cNvSpPr/>
+          <p:nvPr/>
+        </p:nvSpPr>
+        <p:spPr>
+          <a:xfrm>
+            <a:off x="841248" y="384048"/>
+            <a:ext cx="10783519" cy="274320"/>
+          </a:xfrm>
+          <a:prstGeom prst="rect">
+            <a:avLst/>
+          </a:prstGeom>
+          <a:noFill/>
+          <a:ln/>
+        </p:spPr>
+        <p:txBody>
+          <a:bodyPr wrap="square" lIns="0" tIns="0" rIns="0" bIns="0" rtlCol="0" anchor="ctr"/>
+          <a:lstStyle/>
+          <a:p>
+            <a:pPr indent="0" marL="0">
+              <a:buNone/>
+            </a:pPr>
+            <a:r>
+              <a:rPr lang="en-US" sz="1250" b="1" spc="300" kern="0" dirty="0">
+                <a:solidFill>
+                  <a:srgbClr val="B08D3E"/>
+                </a:solidFill>
+                <a:latin typeface="PT Sans" pitchFamily="34" charset="0"/>
+                <a:ea typeface="PT Sans" pitchFamily="34" charset="-122"/>
+                <a:cs typeface="PT Sans" pitchFamily="34" charset="-120"/>
+              </a:rPr>
+              <a:t>ОБЪЕКТ</a:t>
+            </a:r>
+            <a:endParaRPr lang="en-US" sz="1250" dirty="0"/>
+          </a:p>
+        </p:txBody>
+      </p:sp>
+      <p:sp>
+        <p:nvSpPr>
+          <p:cNvPr id="4" name="Text 2"/>
+          <p:cNvSpPr/>
+          <p:nvPr/>
+        </p:nvSpPr>
+        <p:spPr>
+          <a:xfrm>
+            <a:off x="566928" y="694944"/>
+            <a:ext cx="11057839" cy="658368"/>
+          </a:xfrm>
+          <a:prstGeom prst="rect">
+            <a:avLst/>
+          </a:prstGeom>
+          <a:noFill/>
+          <a:ln/>
+        </p:spPr>
+        <p:txBody>
+          <a:bodyPr wrap="square" lIns="0" tIns="0" rIns="0" bIns="0" rtlCol="0" anchor="ctr"/>
+          <a:lstStyle/>
+          <a:p>
+            <a:pPr indent="0" marL="0">
+              <a:buNone/>
+            </a:pPr>
+            <a:r>
+              <a:rPr lang="en-US" sz="2900" b="1" dirty="0">
+                <a:solidFill>
+                  <a:srgbClr val="1E3A5F"/>
+                </a:solidFill>
+                <a:latin typeface="PT Serif" pitchFamily="34" charset="0"/>
+                <a:ea typeface="PT Serif" pitchFamily="34" charset="-122"/>
+                <a:cs typeface="PT Serif" pitchFamily="34" charset="-120"/>
+              </a:rPr>
+              <a:t>Карточка студии «Ли Белекмы» · КДЦ «Арун», оф. 610</a:t>
+            </a:r>
+            <a:endParaRPr lang="en-US" sz="2900" dirty="0"/>
+          </a:p>
+        </p:txBody>
+      </p:sp>
+      <p:sp>
+        <p:nvSpPr>
+          <p:cNvPr id="29" name="Shape 23"/>
+          <p:cNvSpPr/>
+          <p:nvPr/>
+        </p:nvSpPr>
+        <p:spPr>
+          <a:xfrm>
+            <a:off x="1980344" y="1289304"/>
+            <a:ext cx="8231006" cy="5065776"/>
+          </a:xfrm>
+          <a:prstGeom prst="rect">
+            <a:avLst/>
+          </a:prstGeom>
+          <a:solidFill>
+            <a:srgbClr val="FFFFFF"/>
+          </a:solidFill>
+          <a:ln w="12700">
+            <a:solidFill>
+              <a:srgbClr val="D5DEE9"/>
+            </a:solidFill>
+            <a:prstDash val="solid"/>
+          </a:ln>
+          <a:effectLst>
+            <a:outerShdw sx="100000" sy="100000" kx="0" ky="0" algn="bl" rotWithShape="0" blurRad="101600" dist="38100" dir="5400000">
+              <a:srgbClr val="8499B5">
+                <a:alpha val="22000"/>
+              </a:srgbClr>
+            </a:outerShdw>
+          </a:effectLst>
+        </p:spPr>
+        <p:txBody>
+          <a:bodyPr/>
+          <a:p/>
+        </p:txBody>
+      </p:sp>
+      <p:pic>
+        <p:nvPicPr>
+          <p:cNvPr id="30" name="Image 4" descr="/Users/m/Documents/VKR_Stats/build/img_final/image4.png">    </p:cNvPr>
+          <p:cNvPicPr>
+            <a:picLocks noChangeAspect="1"/>
+          </p:cNvPicPr>
+          <p:nvPr/>
+        </p:nvPicPr>
+        <p:blipFill>
+          <a:blip r:embed="rId6"/>
+          <a:srcRect b="35000"/>
+          <a:stretch>
+            <a:fillRect/>
+          </a:stretch>
+        </p:blipFill>
+        <p:spPr>
+          <a:xfrm>
+            <a:off x="2044352" y="1353312"/>
+            <a:ext cx="8102990" cy="4937760"/>
+          </a:xfrm>
+          <a:prstGeom prst="rect">
+            <a:avLst/>
+          </a:prstGeom>
+        </p:spPr>
+      </p:pic>
+      <p:sp>
+        <p:nvSpPr>
+          <p:cNvPr id="32" name="Shape 25"/>
+          <p:cNvSpPr/>
+          <p:nvPr/>
+        </p:nvSpPr>
+        <p:spPr>
+          <a:xfrm>
+            <a:off x="566928" y="6437376"/>
+            <a:ext cx="11057839" cy="0"/>
+          </a:xfrm>
+          <a:prstGeom prst="line">
+            <a:avLst/>
+          </a:prstGeom>
+          <a:noFill/>
+          <a:ln w="9525">
+            <a:solidFill>
+              <a:srgbClr val="E0E6EE"/>
+            </a:solidFill>
+            <a:prstDash val="solid"/>
+          </a:ln>
+        </p:spPr>
+        <p:txBody>
+          <a:bodyPr/>
+          <a:p/>
+        </p:txBody>
+      </p:sp>
+      <p:sp>
+        <p:nvSpPr>
+          <p:cNvPr id="33" name="Text 26"/>
+          <p:cNvSpPr/>
+          <p:nvPr/>
+        </p:nvSpPr>
+        <p:spPr>
+          <a:xfrm>
+            <a:off x="566928" y="6464808"/>
+            <a:ext cx="8229600" cy="292608"/>
+          </a:xfrm>
+          <a:prstGeom prst="rect">
+            <a:avLst/>
+          </a:prstGeom>
+          <a:noFill/>
+          <a:ln/>
+        </p:spPr>
+        <p:txBody>
+          <a:bodyPr wrap="square" lIns="0" tIns="0" rIns="0" bIns="0" rtlCol="0" anchor="ctr"/>
+          <a:lstStyle/>
+          <a:p>
+            <a:pPr indent="0" marL="0">
+              <a:buNone/>
+            </a:pPr>
+            <a:r>
+              <a:rPr lang="en-US" sz="950" dirty="0">
+                <a:solidFill>
+                  <a:srgbClr val="657384"/>
+                </a:solidFill>
+                <a:latin typeface="PT Sans" pitchFamily="34" charset="0"/>
+                <a:ea typeface="PT Sans" pitchFamily="34" charset="-122"/>
+                <a:cs typeface="PT Sans" pitchFamily="34" charset="-120"/>
+              </a:rPr>
+              <a:t>АРМ менеджера салона красоты  ·  ВСГУТУ  ·  Улан-Удэ, 2026</a:t>
+            </a:r>
+            <a:endParaRPr lang="en-US" sz="950" dirty="0"/>
+          </a:p>
+        </p:txBody>
+      </p:sp>
+      <p:sp>
+        <p:nvSpPr>
+          <p:cNvPr id="34" name="Text 27"/>
+          <p:cNvSpPr/>
+          <p:nvPr/>
+        </p:nvSpPr>
+        <p:spPr>
+          <a:xfrm>
+            <a:off x="9795967" y="6464808"/>
+            <a:ext cx="1828800" cy="292608"/>
+          </a:xfrm>
+          <a:prstGeom prst="rect">
+            <a:avLst/>
+          </a:prstGeom>
+          <a:noFill/>
+          <a:ln/>
+        </p:spPr>
+        <p:txBody>
+          <a:bodyPr wrap="square" lIns="0" tIns="0" rIns="0" bIns="0" rtlCol="0" anchor="ctr"/>
+          <a:lstStyle/>
+          <a:p>
+            <a:pPr algn="r" indent="0" marL="0">
+              <a:buNone/>
+            </a:pPr>
+            <a:r>
+              <a:rPr lang="en-US" sz="950" dirty="0">
+                <a:solidFill>
+                  <a:srgbClr val="657384"/>
+                </a:solidFill>
+                <a:latin typeface="PT Sans" pitchFamily="34" charset="0"/>
+                <a:ea typeface="PT Sans" pitchFamily="34" charset="-122"/>
+                <a:cs typeface="PT Sans" pitchFamily="34" charset="-120"/>
+              </a:rPr>
+              <a:t>05 / 15</a:t>
+            </a:r>
+            <a:endParaRPr lang="en-US" sz="950" dirty="0"/>
+          </a:p>
+        </p:txBody>
+      </p:sp>
+    </p:spTree>
+  </p:cSld>
+  <p:clrMapOvr>
+    <a:masterClrMapping/>
+  </p:clrMapOvr>
+</p:sld>
+</file>
+
+<file path=ppt/slides/slide6.xml><?xml version="1.0" encoding="utf-8"?>
 <p:sld xmlns:a="http://schemas.openxmlformats.org/drawingml/2006/main" xmlns:r="http://schemas.openxmlformats.org/officeDocument/2006/relationships" xmlns:p="http://schemas.openxmlformats.org/presentationml/2006/main">
   <p:cSld name="Slide 5">
     <p:bg>
@@ -10671,6 +12421,10 @@
           </a:solidFill>
           <a:ln/>
         </p:spPr>
+        <p:txBody>
+          <a:bodyPr/>
+          <a:p/>
+        </p:txBody>
       </p:sp>
       <p:sp>
         <p:nvSpPr>
@@ -10781,6 +12535,10 @@
             </a:outerShdw>
           </a:effectLst>
         </p:spPr>
+        <p:txBody>
+          <a:bodyPr/>
+          <a:p/>
+        </p:txBody>
       </p:sp>
       <p:sp>
         <p:nvSpPr>
@@ -10801,6 +12559,10 @@
           </a:solidFill>
           <a:ln/>
         </p:spPr>
+        <p:txBody>
+          <a:bodyPr/>
+          <a:p/>
+        </p:txBody>
       </p:sp>
       <p:sp>
         <p:nvSpPr>
@@ -10821,6 +12583,10 @@
           </a:solidFill>
           <a:ln/>
         </p:spPr>
+        <p:txBody>
+          <a:bodyPr/>
+          <a:p/>
+        </p:txBody>
       </p:sp>
       <p:pic>
         <p:nvPicPr>
@@ -10955,6 +12721,10 @@
             </a:outerShdw>
           </a:effectLst>
         </p:spPr>
+        <p:txBody>
+          <a:bodyPr/>
+          <a:p/>
+        </p:txBody>
       </p:sp>
       <p:sp>
         <p:nvSpPr>
@@ -10975,6 +12745,10 @@
           </a:solidFill>
           <a:ln/>
         </p:spPr>
+        <p:txBody>
+          <a:bodyPr/>
+          <a:p/>
+        </p:txBody>
       </p:sp>
       <p:sp>
         <p:nvSpPr>
@@ -10995,6 +12769,10 @@
           </a:solidFill>
           <a:ln/>
         </p:spPr>
+        <p:txBody>
+          <a:bodyPr/>
+          <a:p/>
+        </p:txBody>
       </p:sp>
       <p:pic>
         <p:nvPicPr>
@@ -11092,7 +12870,7 @@
                 <a:ea typeface="PT Sans" pitchFamily="34" charset="-122"/>
                 <a:cs typeface="PT Sans" pitchFamily="34" charset="-120"/>
               </a:rPr>
-              <a:t>расходники, заказы поставщикам, контроль остатков</a:t>
+              <a:t>расходные материалы, заказы поставщикам, контроль остатков</a:t>
             </a:r>
             <a:endParaRPr lang="en-US" sz="1400" dirty="0"/>
           </a:p>
@@ -11129,6 +12907,10 @@
             </a:outerShdw>
           </a:effectLst>
         </p:spPr>
+        <p:txBody>
+          <a:bodyPr/>
+          <a:p/>
+        </p:txBody>
       </p:sp>
       <p:sp>
         <p:nvSpPr>
@@ -11149,6 +12931,10 @@
           </a:solidFill>
           <a:ln/>
         </p:spPr>
+        <p:txBody>
+          <a:bodyPr/>
+          <a:p/>
+        </p:txBody>
       </p:sp>
       <p:sp>
         <p:nvSpPr>
@@ -11169,6 +12955,10 @@
           </a:solidFill>
           <a:ln/>
         </p:spPr>
+        <p:txBody>
+          <a:bodyPr/>
+          <a:p/>
+        </p:txBody>
       </p:sp>
       <p:pic>
         <p:nvPicPr>
@@ -11303,6 +13093,10 @@
             </a:outerShdw>
           </a:effectLst>
         </p:spPr>
+        <p:txBody>
+          <a:bodyPr/>
+          <a:p/>
+        </p:txBody>
       </p:sp>
       <p:sp>
         <p:nvSpPr>
@@ -11323,6 +13117,10 @@
           </a:solidFill>
           <a:ln/>
         </p:spPr>
+        <p:txBody>
+          <a:bodyPr/>
+          <a:p/>
+        </p:txBody>
       </p:sp>
       <p:sp>
         <p:nvSpPr>
@@ -11343,6 +13141,10 @@
           </a:solidFill>
           <a:ln/>
         </p:spPr>
+        <p:txBody>
+          <a:bodyPr/>
+          <a:p/>
+        </p:txBody>
       </p:sp>
       <p:pic>
         <p:nvPicPr>
@@ -11477,6 +13279,10 @@
             </a:outerShdw>
           </a:effectLst>
         </p:spPr>
+        <p:txBody>
+          <a:bodyPr/>
+          <a:p/>
+        </p:txBody>
       </p:sp>
       <p:sp>
         <p:nvSpPr>
@@ -11497,6 +13303,10 @@
           </a:solidFill>
           <a:ln/>
         </p:spPr>
+        <p:txBody>
+          <a:bodyPr/>
+          <a:p/>
+        </p:txBody>
       </p:sp>
       <p:sp>
         <p:nvSpPr>
@@ -11517,6 +13327,10 @@
           </a:solidFill>
           <a:ln/>
         </p:spPr>
+        <p:txBody>
+          <a:bodyPr/>
+          <a:p/>
+        </p:txBody>
       </p:sp>
       <p:pic>
         <p:nvPicPr>
@@ -11631,6 +13445,10 @@
             <a:prstDash val="solid"/>
           </a:ln>
         </p:spPr>
+        <p:txBody>
+          <a:bodyPr/>
+          <a:p/>
+        </p:txBody>
       </p:sp>
       <p:sp>
         <p:nvSpPr>
@@ -11704,7 +13522,7 @@
                 <a:ea typeface="PT Sans" pitchFamily="34" charset="-122"/>
                 <a:cs typeface="PT Sans" pitchFamily="34" charset="-120"/>
               </a:rPr>
-              <a:t>05 / 14</a:t>
+              <a:t>06 / 15</a:t>
             </a:r>
             <a:endParaRPr lang="en-US" sz="950" dirty="0"/>
           </a:p>
@@ -11718,7 +13536,7 @@
 </p:sld>
 </file>
 
-<file path=ppt/slides/slide6.xml><?xml version="1.0" encoding="utf-8"?>
+<file path=ppt/slides/slide7.xml><?xml version="1.0" encoding="utf-8"?>
 <p:sld xmlns:a="http://schemas.openxmlformats.org/drawingml/2006/main" xmlns:r="http://schemas.openxmlformats.org/officeDocument/2006/relationships" xmlns:p="http://schemas.openxmlformats.org/presentationml/2006/main">
   <p:cSld name="Slide 6">
     <p:bg>
@@ -11761,6 +13579,10 @@
           </a:solidFill>
           <a:ln/>
         </p:spPr>
+        <p:txBody>
+          <a:bodyPr/>
+          <a:p/>
+        </p:txBody>
       </p:sp>
       <p:sp>
         <p:nvSpPr>
@@ -11871,6 +13693,10 @@
             </a:outerShdw>
           </a:effectLst>
         </p:spPr>
+        <p:txBody>
+          <a:bodyPr/>
+          <a:p/>
+        </p:txBody>
       </p:sp>
       <p:pic>
         <p:nvPicPr>
@@ -11927,6 +13753,10 @@
             </a:outerShdw>
           </a:effectLst>
         </p:spPr>
+        <p:txBody>
+          <a:bodyPr/>
+          <a:p/>
+        </p:txBody>
       </p:sp>
       <p:sp>
         <p:nvSpPr>
@@ -11947,6 +13777,10 @@
           </a:solidFill>
           <a:ln/>
         </p:spPr>
+        <p:txBody>
+          <a:bodyPr/>
+          <a:p/>
+        </p:txBody>
       </p:sp>
       <p:sp>
         <p:nvSpPr>
@@ -11995,7 +13829,7 @@
                 <a:ea typeface="PT Sans" pitchFamily="34" charset="-122"/>
                 <a:cs typeface="PT Sans" pitchFamily="34" charset="-120"/>
               </a:rPr>
-              <a:t>ручные сверки  ·  потери заявок  ·  нет единой картины дня  ·  двойные брони</a:t>
+              <a:t>ручные сверки  ·  потери заявок  ·  нет единой картины дня  ·  двойные записи</a:t>
             </a:r>
             <a:endParaRPr lang="en-US" sz="1500" dirty="0"/>
           </a:p>
@@ -12023,6 +13857,10 @@
             <a:prstDash val="solid"/>
           </a:ln>
         </p:spPr>
+        <p:txBody>
+          <a:bodyPr/>
+          <a:p/>
+        </p:txBody>
       </p:sp>
       <p:sp>
         <p:nvSpPr>
@@ -12096,7 +13934,7 @@
                 <a:ea typeface="PT Sans" pitchFamily="34" charset="-122"/>
                 <a:cs typeface="PT Sans" pitchFamily="34" charset="-120"/>
               </a:rPr>
-              <a:t>06 / 14</a:t>
+              <a:t>07 / 15</a:t>
             </a:r>
             <a:endParaRPr lang="en-US" sz="950" dirty="0"/>
           </a:p>
@@ -12110,7 +13948,7 @@
 </p:sld>
 </file>
 
-<file path=ppt/slides/slide7.xml><?xml version="1.0" encoding="utf-8"?>
+<file path=ppt/slides/slide8.xml><?xml version="1.0" encoding="utf-8"?>
 <p:sld xmlns:a="http://schemas.openxmlformats.org/drawingml/2006/main" xmlns:r="http://schemas.openxmlformats.org/officeDocument/2006/relationships" xmlns:p="http://schemas.openxmlformats.org/presentationml/2006/main">
   <p:cSld name="Slide 7">
     <p:bg>
@@ -12153,6 +13991,10 @@
           </a:solidFill>
           <a:ln/>
         </p:spPr>
+        <p:txBody>
+          <a:bodyPr/>
+          <a:p/>
+        </p:txBody>
       </p:sp>
       <p:sp>
         <p:nvSpPr>
@@ -12263,6 +14105,10 @@
             </a:outerShdw>
           </a:effectLst>
         </p:spPr>
+        <p:txBody>
+          <a:bodyPr/>
+          <a:p/>
+        </p:txBody>
       </p:sp>
       <p:pic>
         <p:nvPicPr>
@@ -12319,6 +14165,10 @@
             </a:outerShdw>
           </a:effectLst>
         </p:spPr>
+        <p:txBody>
+          <a:bodyPr/>
+          <a:p/>
+        </p:txBody>
       </p:sp>
       <p:sp>
         <p:nvSpPr>
@@ -12339,6 +14189,10 @@
           </a:solidFill>
           <a:ln/>
         </p:spPr>
+        <p:txBody>
+          <a:bodyPr/>
+          <a:p/>
+        </p:txBody>
       </p:sp>
       <p:sp>
         <p:nvSpPr>
@@ -12449,6 +14303,10 @@
             </a:outerShdw>
           </a:effectLst>
         </p:spPr>
+        <p:txBody>
+          <a:bodyPr/>
+          <a:p/>
+        </p:txBody>
       </p:sp>
       <p:sp>
         <p:nvSpPr>
@@ -12469,6 +14327,10 @@
           </a:solidFill>
           <a:ln/>
         </p:spPr>
+        <p:txBody>
+          <a:bodyPr/>
+          <a:p/>
+        </p:txBody>
       </p:sp>
       <p:sp>
         <p:nvSpPr>
@@ -12579,6 +14441,10 @@
             </a:outerShdw>
           </a:effectLst>
         </p:spPr>
+        <p:txBody>
+          <a:bodyPr/>
+          <a:p/>
+        </p:txBody>
       </p:sp>
       <p:sp>
         <p:nvSpPr>
@@ -12599,6 +14465,10 @@
           </a:solidFill>
           <a:ln/>
         </p:spPr>
+        <p:txBody>
+          <a:bodyPr/>
+          <a:p/>
+        </p:txBody>
       </p:sp>
       <p:sp>
         <p:nvSpPr>
@@ -12700,6 +14570,10 @@
             <a:prstDash val="solid"/>
           </a:ln>
         </p:spPr>
+        <p:txBody>
+          <a:bodyPr/>
+          <a:p/>
+        </p:txBody>
       </p:sp>
       <p:sp>
         <p:nvSpPr>
@@ -12773,7 +14647,7 @@
                 <a:ea typeface="PT Sans" pitchFamily="34" charset="-122"/>
                 <a:cs typeface="PT Sans" pitchFamily="34" charset="-120"/>
               </a:rPr>
-              <a:t>07 / 14</a:t>
+              <a:t>08 / 15</a:t>
             </a:r>
             <a:endParaRPr lang="en-US" sz="950" dirty="0"/>
           </a:p>
@@ -12787,7 +14661,7 @@
 </p:sld>
 </file>
 
-<file path=ppt/slides/slide8.xml><?xml version="1.0" encoding="utf-8"?>
+<file path=ppt/slides/slide9.xml><?xml version="1.0" encoding="utf-8"?>
 <p:sld xmlns:a="http://schemas.openxmlformats.org/drawingml/2006/main" xmlns:r="http://schemas.openxmlformats.org/officeDocument/2006/relationships" xmlns:p="http://schemas.openxmlformats.org/presentationml/2006/main">
   <p:cSld name="Slide 8">
     <p:bg>
@@ -12830,6 +14704,10 @@
           </a:solidFill>
           <a:ln/>
         </p:spPr>
+        <p:txBody>
+          <a:bodyPr/>
+          <a:p/>
+        </p:txBody>
       </p:sp>
       <p:sp>
         <p:nvSpPr>
@@ -12940,6 +14818,10 @@
             </a:outerShdw>
           </a:effectLst>
         </p:spPr>
+        <p:txBody>
+          <a:bodyPr/>
+          <a:p/>
+        </p:txBody>
       </p:sp>
       <p:pic>
         <p:nvPicPr>
@@ -12996,6 +14878,10 @@
             </a:outerShdw>
           </a:effectLst>
         </p:spPr>
+        <p:txBody>
+          <a:bodyPr/>
+          <a:p/>
+        </p:txBody>
       </p:sp>
       <p:sp>
         <p:nvSpPr>
@@ -13016,6 +14902,10 @@
           </a:solidFill>
           <a:ln/>
         </p:spPr>
+        <p:txBody>
+          <a:bodyPr/>
+          <a:p/>
+        </p:txBody>
       </p:sp>
       <p:sp>
         <p:nvSpPr>
@@ -13036,6 +14926,10 @@
           </a:solidFill>
           <a:ln/>
         </p:spPr>
+        <p:txBody>
+          <a:bodyPr/>
+          <a:p/>
+        </p:txBody>
       </p:sp>
       <p:pic>
         <p:nvPicPr>
@@ -13354,6 +15248,10 @@
             <a:prstDash val="solid"/>
           </a:ln>
         </p:spPr>
+        <p:txBody>
+          <a:bodyPr/>
+          <a:p/>
+        </p:txBody>
       </p:sp>
       <p:sp>
         <p:nvSpPr>
@@ -13427,950 +15325,7 @@
                 <a:ea typeface="PT Sans" pitchFamily="34" charset="-122"/>
                 <a:cs typeface="PT Sans" pitchFamily="34" charset="-120"/>
               </a:rPr>
-              <a:t>08 / 14</a:t>
-            </a:r>
-            <a:endParaRPr lang="en-US" sz="950" dirty="0"/>
-          </a:p>
-        </p:txBody>
-      </p:sp>
-    </p:spTree>
-  </p:cSld>
-  <p:clrMapOvr>
-    <a:masterClrMapping/>
-  </p:clrMapOvr>
-</p:sld>
-</file>
-
-<file path=ppt/slides/slide9.xml><?xml version="1.0" encoding="utf-8"?>
-<p:sld xmlns:a="http://schemas.openxmlformats.org/drawingml/2006/main" xmlns:r="http://schemas.openxmlformats.org/officeDocument/2006/relationships" xmlns:p="http://schemas.openxmlformats.org/presentationml/2006/main">
-  <p:cSld name="Slide 9">
-    <p:bg>
-      <p:bgPr>
-        <a:solidFill>
-          <a:srgbClr val="FFFFFF"/>
-        </a:solidFill>
-      </p:bgPr>
-    </p:bg>
-    <p:spTree>
-      <p:nvGrpSpPr>
-        <p:cNvPr id="1" name=""/>
-        <p:cNvGrpSpPr/>
-        <p:nvPr/>
-      </p:nvGrpSpPr>
-      <p:grpSpPr>
-        <a:xfrm>
-          <a:off x="0" y="0"/>
-          <a:ext cx="0" cy="0"/>
-          <a:chOff x="0" y="0"/>
-          <a:chExt cx="0" cy="0"/>
-        </a:xfrm>
-      </p:grpSpPr>
-      <p:sp>
-        <p:nvSpPr>
-          <p:cNvPr id="2" name="Shape 0"/>
-          <p:cNvSpPr/>
-          <p:nvPr/>
-        </p:nvSpPr>
-        <p:spPr>
-          <a:xfrm>
-            <a:off x="566928" y="448056"/>
-            <a:ext cx="155448" cy="155448"/>
-          </a:xfrm>
-          <a:prstGeom prst="rect">
-            <a:avLst/>
-          </a:prstGeom>
-          <a:solidFill>
-            <a:srgbClr val="B08D3E"/>
-          </a:solidFill>
-          <a:ln/>
-        </p:spPr>
-      </p:sp>
-      <p:sp>
-        <p:nvSpPr>
-          <p:cNvPr id="3" name="Text 1"/>
-          <p:cNvSpPr/>
-          <p:nvPr/>
-        </p:nvSpPr>
-        <p:spPr>
-          <a:xfrm>
-            <a:off x="841248" y="384048"/>
-            <a:ext cx="10783519" cy="274320"/>
-          </a:xfrm>
-          <a:prstGeom prst="rect">
-            <a:avLst/>
-          </a:prstGeom>
-          <a:noFill/>
-          <a:ln/>
-        </p:spPr>
-        <p:txBody>
-          <a:bodyPr wrap="square" lIns="0" tIns="0" rIns="0" bIns="0" rtlCol="0" anchor="ctr"/>
-          <a:lstStyle/>
-          <a:p>
-            <a:pPr indent="0" marL="0">
-              <a:buNone/>
-            </a:pPr>
-            <a:r>
-              <a:rPr lang="en-US" sz="1250" b="1" spc="300" kern="0" dirty="0">
-                <a:solidFill>
-                  <a:srgbClr val="B08D3E"/>
-                </a:solidFill>
-                <a:latin typeface="PT Sans" pitchFamily="34" charset="0"/>
-                <a:ea typeface="PT Sans" pitchFamily="34" charset="-122"/>
-                <a:cs typeface="PT Sans" pitchFamily="34" charset="-120"/>
-              </a:rPr>
-              <a:t>ПРОЕКТИРОВАНИЕ · ЛОГИКА</a:t>
-            </a:r>
-            <a:endParaRPr lang="en-US" sz="1250" dirty="0"/>
-          </a:p>
-        </p:txBody>
-      </p:sp>
-      <p:sp>
-        <p:nvSpPr>
-          <p:cNvPr id="4" name="Text 2"/>
-          <p:cNvSpPr/>
-          <p:nvPr/>
-        </p:nvSpPr>
-        <p:spPr>
-          <a:xfrm>
-            <a:off x="566928" y="694944"/>
-            <a:ext cx="11057839" cy="658368"/>
-          </a:xfrm>
-          <a:prstGeom prst="rect">
-            <a:avLst/>
-          </a:prstGeom>
-          <a:noFill/>
-          <a:ln/>
-        </p:spPr>
-        <p:txBody>
-          <a:bodyPr wrap="square" lIns="0" tIns="0" rIns="0" bIns="0" rtlCol="0" anchor="ctr"/>
-          <a:lstStyle/>
-          <a:p>
-            <a:pPr indent="0" marL="0">
-              <a:buNone/>
-            </a:pPr>
-            <a:r>
-              <a:rPr lang="en-US" sz="2900" b="1" dirty="0">
-                <a:solidFill>
-                  <a:srgbClr val="1E3A5F"/>
-                </a:solidFill>
-                <a:latin typeface="PT Serif" pitchFamily="34" charset="0"/>
-                <a:ea typeface="PT Serif" pitchFamily="34" charset="-122"/>
-                <a:cs typeface="PT Serif" pitchFamily="34" charset="-120"/>
-              </a:rPr>
-              <a:t>Логика обработки и роли</a:t>
-            </a:r>
-            <a:endParaRPr lang="en-US" sz="2900" dirty="0"/>
-          </a:p>
-        </p:txBody>
-      </p:sp>
-      <p:sp>
-        <p:nvSpPr>
-          <p:cNvPr id="5" name="Shape 3"/>
-          <p:cNvSpPr/>
-          <p:nvPr/>
-        </p:nvSpPr>
-        <p:spPr>
-          <a:xfrm>
-            <a:off x="502920" y="1538900"/>
-            <a:ext cx="4974336" cy="4164247"/>
-          </a:xfrm>
-          <a:prstGeom prst="rect">
-            <a:avLst/>
-          </a:prstGeom>
-          <a:solidFill>
-            <a:srgbClr val="FFFFFF"/>
-          </a:solidFill>
-          <a:ln w="12700">
-            <a:solidFill>
-              <a:srgbClr val="D5DEE9"/>
-            </a:solidFill>
-            <a:prstDash val="solid"/>
-          </a:ln>
-          <a:effectLst>
-            <a:outerShdw sx="100000" sy="100000" kx="0" ky="0" algn="bl" rotWithShape="0" blurRad="101600" dist="38100" dir="5400000">
-              <a:srgbClr val="8499B5">
-                <a:alpha val="22000"/>
-              </a:srgbClr>
-            </a:outerShdw>
-          </a:effectLst>
-        </p:spPr>
-      </p:sp>
-      <p:pic>
-        <p:nvPicPr>
-          <p:cNvPr id="6" name="Image 0" descr="/Users/m/Documents/VKR_Stats/build/img_final/image13.png">    </p:cNvPr>
-          <p:cNvPicPr>
-            <a:picLocks noChangeAspect="1"/>
-          </p:cNvPicPr>
-          <p:nvPr/>
-        </p:nvPicPr>
-        <p:blipFill>
-          <a:blip r:embed="rId1"/>
-          <a:stretch>
-            <a:fillRect/>
-          </a:stretch>
-        </p:blipFill>
-        <p:spPr>
-          <a:xfrm>
-            <a:off x="566928" y="1602908"/>
-            <a:ext cx="4846320" cy="4036231"/>
-          </a:xfrm>
-          <a:prstGeom prst="rect">
-            <a:avLst/>
-          </a:prstGeom>
-        </p:spPr>
-      </p:pic>
-      <p:sp>
-        <p:nvSpPr>
-          <p:cNvPr id="7" name="Text 4"/>
-          <p:cNvSpPr/>
-          <p:nvPr/>
-        </p:nvSpPr>
-        <p:spPr>
-          <a:xfrm>
-            <a:off x="566928" y="5797296"/>
-            <a:ext cx="5029200" cy="365760"/>
-          </a:xfrm>
-          <a:prstGeom prst="rect">
-            <a:avLst/>
-          </a:prstGeom>
-          <a:noFill/>
-          <a:ln/>
-        </p:spPr>
-        <p:txBody>
-          <a:bodyPr wrap="square" lIns="0" tIns="0" rIns="0" bIns="0" rtlCol="0" anchor="t"/>
-          <a:lstStyle/>
-          <a:p>
-            <a:pPr algn="ctr" indent="0" marL="0">
-              <a:buNone/>
-            </a:pPr>
-            <a:r>
-              <a:rPr lang="en-US" sz="1200" i="1" dirty="0">
-                <a:solidFill>
-                  <a:srgbClr val="657384"/>
-                </a:solidFill>
-                <a:latin typeface="PT Sans" pitchFamily="34" charset="0"/>
-                <a:ea typeface="PT Sans" pitchFamily="34" charset="-122"/>
-                <a:cs typeface="PT Sans" pitchFamily="34" charset="-120"/>
-              </a:rPr>
-              <a:t>EPC: обработка заявки клиента</a:t>
-            </a:r>
-            <a:endParaRPr lang="en-US" sz="1200" dirty="0"/>
-          </a:p>
-        </p:txBody>
-      </p:sp>
-      <p:sp>
-        <p:nvSpPr>
-          <p:cNvPr id="8" name="Shape 5"/>
-          <p:cNvSpPr/>
-          <p:nvPr/>
-        </p:nvSpPr>
-        <p:spPr>
-          <a:xfrm>
-            <a:off x="5715000" y="1492027"/>
-            <a:ext cx="5973775" cy="2520635"/>
-          </a:xfrm>
-          <a:prstGeom prst="rect">
-            <a:avLst/>
-          </a:prstGeom>
-          <a:solidFill>
-            <a:srgbClr val="FFFFFF"/>
-          </a:solidFill>
-          <a:ln w="12700">
-            <a:solidFill>
-              <a:srgbClr val="D5DEE9"/>
-            </a:solidFill>
-            <a:prstDash val="solid"/>
-          </a:ln>
-          <a:effectLst>
-            <a:outerShdw sx="100000" sy="100000" kx="0" ky="0" algn="bl" rotWithShape="0" blurRad="101600" dist="38100" dir="5400000">
-              <a:srgbClr val="8499B5">
-                <a:alpha val="22000"/>
-              </a:srgbClr>
-            </a:outerShdw>
-          </a:effectLst>
-        </p:spPr>
-      </p:sp>
-      <p:pic>
-        <p:nvPicPr>
-          <p:cNvPr id="9" name="Image 1" descr="/Users/m/Documents/VKR_Stats/build/img_final/image14.png">    </p:cNvPr>
-          <p:cNvPicPr>
-            <a:picLocks noChangeAspect="1"/>
-          </p:cNvPicPr>
-          <p:nvPr/>
-        </p:nvPicPr>
-        <p:blipFill>
-          <a:blip r:embed="rId2"/>
-          <a:stretch>
-            <a:fillRect/>
-          </a:stretch>
-        </p:blipFill>
-        <p:spPr>
-          <a:xfrm>
-            <a:off x="5779008" y="1556035"/>
-            <a:ext cx="5845759" cy="2392619"/>
-          </a:xfrm>
-          <a:prstGeom prst="rect">
-            <a:avLst/>
-          </a:prstGeom>
-        </p:spPr>
-      </p:pic>
-      <p:sp>
-        <p:nvSpPr>
-          <p:cNvPr id="10" name="Text 6"/>
-          <p:cNvSpPr/>
-          <p:nvPr/>
-        </p:nvSpPr>
-        <p:spPr>
-          <a:xfrm>
-            <a:off x="5779008" y="4041648"/>
-            <a:ext cx="5845759" cy="310896"/>
-          </a:xfrm>
-          <a:prstGeom prst="rect">
-            <a:avLst/>
-          </a:prstGeom>
-          <a:noFill/>
-          <a:ln/>
-        </p:spPr>
-        <p:txBody>
-          <a:bodyPr wrap="square" lIns="0" tIns="0" rIns="0" bIns="0" rtlCol="0" anchor="t"/>
-          <a:lstStyle/>
-          <a:p>
-            <a:pPr algn="ctr" indent="0" marL="0">
-              <a:buNone/>
-            </a:pPr>
-            <a:r>
-              <a:rPr lang="en-US" sz="1200" i="1" dirty="0">
-                <a:solidFill>
-                  <a:srgbClr val="657384"/>
-                </a:solidFill>
-                <a:latin typeface="PT Sans" pitchFamily="34" charset="0"/>
-                <a:ea typeface="PT Sans" pitchFamily="34" charset="-122"/>
-                <a:cs typeface="PT Sans" pitchFamily="34" charset="-120"/>
-              </a:rPr>
-              <a:t>UML use-case: роли пользователей</a:t>
-            </a:r>
-            <a:endParaRPr lang="en-US" sz="1200" dirty="0"/>
-          </a:p>
-        </p:txBody>
-      </p:sp>
-      <p:sp>
-        <p:nvSpPr>
-          <p:cNvPr id="11" name="Shape 7"/>
-          <p:cNvSpPr/>
-          <p:nvPr/>
-        </p:nvSpPr>
-        <p:spPr>
-          <a:xfrm>
-            <a:off x="5779008" y="4553712"/>
-            <a:ext cx="1796186" cy="1417320"/>
-          </a:xfrm>
-          <a:prstGeom prst="rect">
-            <a:avLst/>
-          </a:prstGeom>
-          <a:solidFill>
-            <a:srgbClr val="FFFFFF"/>
-          </a:solidFill>
-          <a:ln w="12700">
-            <a:solidFill>
-              <a:srgbClr val="D5DEE9"/>
-            </a:solidFill>
-            <a:prstDash val="solid"/>
-          </a:ln>
-          <a:effectLst>
-            <a:outerShdw sx="100000" sy="100000" kx="0" ky="0" algn="bl" rotWithShape="0" blurRad="101600" dist="38100" dir="5400000">
-              <a:srgbClr val="8499B5">
-                <a:alpha val="22000"/>
-              </a:srgbClr>
-            </a:outerShdw>
-          </a:effectLst>
-        </p:spPr>
-      </p:sp>
-      <p:sp>
-        <p:nvSpPr>
-          <p:cNvPr id="12" name="Shape 8"/>
-          <p:cNvSpPr/>
-          <p:nvPr/>
-        </p:nvSpPr>
-        <p:spPr>
-          <a:xfrm>
-            <a:off x="5779008" y="4553712"/>
-            <a:ext cx="82296" cy="1417320"/>
-          </a:xfrm>
-          <a:prstGeom prst="rect">
-            <a:avLst/>
-          </a:prstGeom>
-          <a:solidFill>
-            <a:srgbClr val="1E3A5F"/>
-          </a:solidFill>
-          <a:ln/>
-        </p:spPr>
-      </p:sp>
-      <p:sp>
-        <p:nvSpPr>
-          <p:cNvPr id="13" name="Shape 9"/>
-          <p:cNvSpPr/>
-          <p:nvPr/>
-        </p:nvSpPr>
-        <p:spPr>
-          <a:xfrm>
-            <a:off x="6384493" y="4754880"/>
-            <a:ext cx="585216" cy="585216"/>
-          </a:xfrm>
-          <a:prstGeom prst="ellipse">
-            <a:avLst/>
-          </a:prstGeom>
-          <a:solidFill>
-            <a:srgbClr val="1E3A5F"/>
-          </a:solidFill>
-          <a:ln/>
-        </p:spPr>
-      </p:sp>
-      <p:pic>
-        <p:nvPicPr>
-          <p:cNvPr id="14" name="Image 2" descr="preencoded.png">    </p:cNvPr>
-          <p:cNvPicPr>
-            <a:picLocks noChangeAspect="1"/>
-          </p:cNvPicPr>
-          <p:nvPr/>
-        </p:nvPicPr>
-        <p:blipFill>
-          <a:blip r:embed="rId3"/>
-          <a:stretch>
-            <a:fillRect/>
-          </a:stretch>
-        </p:blipFill>
-        <p:spPr>
-          <a:xfrm>
-            <a:off x="6542502" y="4912888"/>
-            <a:ext cx="269199" cy="269199"/>
-          </a:xfrm>
-          <a:prstGeom prst="rect">
-            <a:avLst/>
-          </a:prstGeom>
-        </p:spPr>
-      </p:pic>
-      <p:sp>
-        <p:nvSpPr>
-          <p:cNvPr id="15" name="Text 10"/>
-          <p:cNvSpPr/>
-          <p:nvPr/>
-        </p:nvSpPr>
-        <p:spPr>
-          <a:xfrm>
-            <a:off x="5870448" y="5394960"/>
-            <a:ext cx="1613306" cy="292608"/>
-          </a:xfrm>
-          <a:prstGeom prst="rect">
-            <a:avLst/>
-          </a:prstGeom>
-          <a:noFill/>
-          <a:ln/>
-        </p:spPr>
-        <p:txBody>
-          <a:bodyPr wrap="square" lIns="0" tIns="0" rIns="0" bIns="0" rtlCol="0" anchor="ctr"/>
-          <a:lstStyle/>
-          <a:p>
-            <a:pPr algn="ctr" indent="0" marL="0">
-              <a:buNone/>
-            </a:pPr>
-            <a:r>
-              <a:rPr lang="en-US" sz="1500" b="1" dirty="0">
-                <a:solidFill>
-                  <a:srgbClr val="1E3A5F"/>
-                </a:solidFill>
-                <a:latin typeface="PT Sans" pitchFamily="34" charset="0"/>
-                <a:ea typeface="PT Sans" pitchFamily="34" charset="-122"/>
-                <a:cs typeface="PT Sans" pitchFamily="34" charset="-120"/>
-              </a:rPr>
-              <a:t>Менеджер</a:t>
-            </a:r>
-            <a:endParaRPr lang="en-US" sz="1500" dirty="0"/>
-          </a:p>
-        </p:txBody>
-      </p:sp>
-      <p:sp>
-        <p:nvSpPr>
-          <p:cNvPr id="16" name="Text 11"/>
-          <p:cNvSpPr/>
-          <p:nvPr/>
-        </p:nvSpPr>
-        <p:spPr>
-          <a:xfrm>
-            <a:off x="5852160" y="5660136"/>
-            <a:ext cx="1649882" cy="274320"/>
-          </a:xfrm>
-          <a:prstGeom prst="rect">
-            <a:avLst/>
-          </a:prstGeom>
-          <a:noFill/>
-          <a:ln/>
-        </p:spPr>
-        <p:txBody>
-          <a:bodyPr wrap="square" lIns="0" tIns="0" rIns="0" bIns="0" rtlCol="0" anchor="t"/>
-          <a:lstStyle/>
-          <a:p>
-            <a:pPr algn="ctr" indent="0" marL="0">
-              <a:buNone/>
-            </a:pPr>
-            <a:r>
-              <a:rPr lang="en-US" sz="1050" dirty="0">
-                <a:solidFill>
-                  <a:srgbClr val="657384"/>
-                </a:solidFill>
-                <a:latin typeface="PT Sans" pitchFamily="34" charset="0"/>
-                <a:ea typeface="PT Sans" pitchFamily="34" charset="-122"/>
-                <a:cs typeface="PT Sans" pitchFamily="34" charset="-120"/>
-              </a:rPr>
-              <a:t>запись, контроль, отчёты</a:t>
-            </a:r>
-            <a:endParaRPr lang="en-US" sz="1050" dirty="0"/>
-          </a:p>
-        </p:txBody>
-      </p:sp>
-      <p:sp>
-        <p:nvSpPr>
-          <p:cNvPr id="17" name="Shape 12"/>
-          <p:cNvSpPr/>
-          <p:nvPr/>
-        </p:nvSpPr>
-        <p:spPr>
-          <a:xfrm>
-            <a:off x="7803794" y="4553712"/>
-            <a:ext cx="1796186" cy="1417320"/>
-          </a:xfrm>
-          <a:prstGeom prst="rect">
-            <a:avLst/>
-          </a:prstGeom>
-          <a:solidFill>
-            <a:srgbClr val="FFFFFF"/>
-          </a:solidFill>
-          <a:ln w="12700">
-            <a:solidFill>
-              <a:srgbClr val="D5DEE9"/>
-            </a:solidFill>
-            <a:prstDash val="solid"/>
-          </a:ln>
-          <a:effectLst>
-            <a:outerShdw sx="100000" sy="100000" kx="0" ky="0" algn="bl" rotWithShape="0" blurRad="101600" dist="38100" dir="5400000">
-              <a:srgbClr val="8499B5">
-                <a:alpha val="22000"/>
-              </a:srgbClr>
-            </a:outerShdw>
-          </a:effectLst>
-        </p:spPr>
-      </p:sp>
-      <p:sp>
-        <p:nvSpPr>
-          <p:cNvPr id="18" name="Shape 13"/>
-          <p:cNvSpPr/>
-          <p:nvPr/>
-        </p:nvSpPr>
-        <p:spPr>
-          <a:xfrm>
-            <a:off x="7803794" y="4553712"/>
-            <a:ext cx="82296" cy="1417320"/>
-          </a:xfrm>
-          <a:prstGeom prst="rect">
-            <a:avLst/>
-          </a:prstGeom>
-          <a:solidFill>
-            <a:srgbClr val="1E3A5F"/>
-          </a:solidFill>
-          <a:ln/>
-        </p:spPr>
-      </p:sp>
-      <p:sp>
-        <p:nvSpPr>
-          <p:cNvPr id="19" name="Shape 14"/>
-          <p:cNvSpPr/>
-          <p:nvPr/>
-        </p:nvSpPr>
-        <p:spPr>
-          <a:xfrm>
-            <a:off x="8409280" y="4754880"/>
-            <a:ext cx="585216" cy="585216"/>
-          </a:xfrm>
-          <a:prstGeom prst="ellipse">
-            <a:avLst/>
-          </a:prstGeom>
-          <a:solidFill>
-            <a:srgbClr val="1E3A5F"/>
-          </a:solidFill>
-          <a:ln/>
-        </p:spPr>
-      </p:sp>
-      <p:pic>
-        <p:nvPicPr>
-          <p:cNvPr id="20" name="Image 3" descr="preencoded.png">    </p:cNvPr>
-          <p:cNvPicPr>
-            <a:picLocks noChangeAspect="1"/>
-          </p:cNvPicPr>
-          <p:nvPr/>
-        </p:nvPicPr>
-        <p:blipFill>
-          <a:blip r:embed="rId4"/>
-          <a:stretch>
-            <a:fillRect/>
-          </a:stretch>
-        </p:blipFill>
-        <p:spPr>
-          <a:xfrm>
-            <a:off x="8567288" y="4912888"/>
-            <a:ext cx="269199" cy="269199"/>
-          </a:xfrm>
-          <a:prstGeom prst="rect">
-            <a:avLst/>
-          </a:prstGeom>
-        </p:spPr>
-      </p:pic>
-      <p:sp>
-        <p:nvSpPr>
-          <p:cNvPr id="21" name="Text 15"/>
-          <p:cNvSpPr/>
-          <p:nvPr/>
-        </p:nvSpPr>
-        <p:spPr>
-          <a:xfrm>
-            <a:off x="7895234" y="5394960"/>
-            <a:ext cx="1613306" cy="292608"/>
-          </a:xfrm>
-          <a:prstGeom prst="rect">
-            <a:avLst/>
-          </a:prstGeom>
-          <a:noFill/>
-          <a:ln/>
-        </p:spPr>
-        <p:txBody>
-          <a:bodyPr wrap="square" lIns="0" tIns="0" rIns="0" bIns="0" rtlCol="0" anchor="ctr"/>
-          <a:lstStyle/>
-          <a:p>
-            <a:pPr algn="ctr" indent="0" marL="0">
-              <a:buNone/>
-            </a:pPr>
-            <a:r>
-              <a:rPr lang="en-US" sz="1500" b="1" dirty="0">
-                <a:solidFill>
-                  <a:srgbClr val="1E3A5F"/>
-                </a:solidFill>
-                <a:latin typeface="PT Sans" pitchFamily="34" charset="0"/>
-                <a:ea typeface="PT Sans" pitchFamily="34" charset="-122"/>
-                <a:cs typeface="PT Sans" pitchFamily="34" charset="-120"/>
-              </a:rPr>
-              <a:t>Мастер</a:t>
-            </a:r>
-            <a:endParaRPr lang="en-US" sz="1500" dirty="0"/>
-          </a:p>
-        </p:txBody>
-      </p:sp>
-      <p:sp>
-        <p:nvSpPr>
-          <p:cNvPr id="22" name="Text 16"/>
-          <p:cNvSpPr/>
-          <p:nvPr/>
-        </p:nvSpPr>
-        <p:spPr>
-          <a:xfrm>
-            <a:off x="7876946" y="5660136"/>
-            <a:ext cx="1649882" cy="274320"/>
-          </a:xfrm>
-          <a:prstGeom prst="rect">
-            <a:avLst/>
-          </a:prstGeom>
-          <a:noFill/>
-          <a:ln/>
-        </p:spPr>
-        <p:txBody>
-          <a:bodyPr wrap="square" lIns="0" tIns="0" rIns="0" bIns="0" rtlCol="0" anchor="t"/>
-          <a:lstStyle/>
-          <a:p>
-            <a:pPr algn="ctr" indent="0" marL="0">
-              <a:buNone/>
-            </a:pPr>
-            <a:r>
-              <a:rPr lang="en-US" sz="1050" dirty="0">
-                <a:solidFill>
-                  <a:srgbClr val="657384"/>
-                </a:solidFill>
-                <a:latin typeface="PT Sans" pitchFamily="34" charset="0"/>
-                <a:ea typeface="PT Sans" pitchFamily="34" charset="-122"/>
-                <a:cs typeface="PT Sans" pitchFamily="34" charset="-120"/>
-              </a:rPr>
-              <a:t>свой график, статусы</a:t>
-            </a:r>
-            <a:endParaRPr lang="en-US" sz="1050" dirty="0"/>
-          </a:p>
-        </p:txBody>
-      </p:sp>
-      <p:sp>
-        <p:nvSpPr>
-          <p:cNvPr id="23" name="Shape 17"/>
-          <p:cNvSpPr/>
-          <p:nvPr/>
-        </p:nvSpPr>
-        <p:spPr>
-          <a:xfrm>
-            <a:off x="9828581" y="4553712"/>
-            <a:ext cx="1796186" cy="1417320"/>
-          </a:xfrm>
-          <a:prstGeom prst="rect">
-            <a:avLst/>
-          </a:prstGeom>
-          <a:solidFill>
-            <a:srgbClr val="FFFFFF"/>
-          </a:solidFill>
-          <a:ln w="12700">
-            <a:solidFill>
-              <a:srgbClr val="D5DEE9"/>
-            </a:solidFill>
-            <a:prstDash val="solid"/>
-          </a:ln>
-          <a:effectLst>
-            <a:outerShdw sx="100000" sy="100000" kx="0" ky="0" algn="bl" rotWithShape="0" blurRad="101600" dist="38100" dir="5400000">
-              <a:srgbClr val="8499B5">
-                <a:alpha val="22000"/>
-              </a:srgbClr>
-            </a:outerShdw>
-          </a:effectLst>
-        </p:spPr>
-      </p:sp>
-      <p:sp>
-        <p:nvSpPr>
-          <p:cNvPr id="24" name="Shape 18"/>
-          <p:cNvSpPr/>
-          <p:nvPr/>
-        </p:nvSpPr>
-        <p:spPr>
-          <a:xfrm>
-            <a:off x="9828581" y="4553712"/>
-            <a:ext cx="82296" cy="1417320"/>
-          </a:xfrm>
-          <a:prstGeom prst="rect">
-            <a:avLst/>
-          </a:prstGeom>
-          <a:solidFill>
-            <a:srgbClr val="1E3A5F"/>
-          </a:solidFill>
-          <a:ln/>
-        </p:spPr>
-      </p:sp>
-      <p:sp>
-        <p:nvSpPr>
-          <p:cNvPr id="25" name="Shape 19"/>
-          <p:cNvSpPr/>
-          <p:nvPr/>
-        </p:nvSpPr>
-        <p:spPr>
-          <a:xfrm>
-            <a:off x="10434066" y="4754880"/>
-            <a:ext cx="585216" cy="585216"/>
-          </a:xfrm>
-          <a:prstGeom prst="ellipse">
-            <a:avLst/>
-          </a:prstGeom>
-          <a:solidFill>
-            <a:srgbClr val="1E3A5F"/>
-          </a:solidFill>
-          <a:ln/>
-        </p:spPr>
-      </p:sp>
-      <p:pic>
-        <p:nvPicPr>
-          <p:cNvPr id="26" name="Image 4" descr="preencoded.png">    </p:cNvPr>
-          <p:cNvPicPr>
-            <a:picLocks noChangeAspect="1"/>
-          </p:cNvPicPr>
-          <p:nvPr/>
-        </p:nvPicPr>
-        <p:blipFill>
-          <a:blip r:embed="rId5"/>
-          <a:stretch>
-            <a:fillRect/>
-          </a:stretch>
-        </p:blipFill>
-        <p:spPr>
-          <a:xfrm>
-            <a:off x="10592074" y="4912888"/>
-            <a:ext cx="269199" cy="269199"/>
-          </a:xfrm>
-          <a:prstGeom prst="rect">
-            <a:avLst/>
-          </a:prstGeom>
-        </p:spPr>
-      </p:pic>
-      <p:sp>
-        <p:nvSpPr>
-          <p:cNvPr id="27" name="Text 20"/>
-          <p:cNvSpPr/>
-          <p:nvPr/>
-        </p:nvSpPr>
-        <p:spPr>
-          <a:xfrm>
-            <a:off x="9920021" y="5394960"/>
-            <a:ext cx="1613306" cy="292608"/>
-          </a:xfrm>
-          <a:prstGeom prst="rect">
-            <a:avLst/>
-          </a:prstGeom>
-          <a:noFill/>
-          <a:ln/>
-        </p:spPr>
-        <p:txBody>
-          <a:bodyPr wrap="square" lIns="0" tIns="0" rIns="0" bIns="0" rtlCol="0" anchor="ctr"/>
-          <a:lstStyle/>
-          <a:p>
-            <a:pPr algn="ctr" indent="0" marL="0">
-              <a:buNone/>
-            </a:pPr>
-            <a:r>
-              <a:rPr lang="en-US" sz="1500" b="1" dirty="0">
-                <a:solidFill>
-                  <a:srgbClr val="1E3A5F"/>
-                </a:solidFill>
-                <a:latin typeface="PT Sans" pitchFamily="34" charset="0"/>
-                <a:ea typeface="PT Sans" pitchFamily="34" charset="-122"/>
-                <a:cs typeface="PT Sans" pitchFamily="34" charset="-120"/>
-              </a:rPr>
-              <a:t>Руководитель</a:t>
-            </a:r>
-            <a:endParaRPr lang="en-US" sz="1500" dirty="0"/>
-          </a:p>
-        </p:txBody>
-      </p:sp>
-      <p:sp>
-        <p:nvSpPr>
-          <p:cNvPr id="28" name="Text 21"/>
-          <p:cNvSpPr/>
-          <p:nvPr/>
-        </p:nvSpPr>
-        <p:spPr>
-          <a:xfrm>
-            <a:off x="9901733" y="5660136"/>
-            <a:ext cx="1649882" cy="274320"/>
-          </a:xfrm>
-          <a:prstGeom prst="rect">
-            <a:avLst/>
-          </a:prstGeom>
-          <a:noFill/>
-          <a:ln/>
-        </p:spPr>
-        <p:txBody>
-          <a:bodyPr wrap="square" lIns="0" tIns="0" rIns="0" bIns="0" rtlCol="0" anchor="t"/>
-          <a:lstStyle/>
-          <a:p>
-            <a:pPr algn="ctr" indent="0" marL="0">
-              <a:buNone/>
-            </a:pPr>
-            <a:r>
-              <a:rPr lang="en-US" sz="1050" dirty="0">
-                <a:solidFill>
-                  <a:srgbClr val="657384"/>
-                </a:solidFill>
-                <a:latin typeface="PT Sans" pitchFamily="34" charset="0"/>
-                <a:ea typeface="PT Sans" pitchFamily="34" charset="-122"/>
-                <a:cs typeface="PT Sans" pitchFamily="34" charset="-120"/>
-              </a:rPr>
-              <a:t>сводки и показатели</a:t>
-            </a:r>
-            <a:endParaRPr lang="en-US" sz="1050" dirty="0"/>
-          </a:p>
-        </p:txBody>
-      </p:sp>
-      <p:sp>
-        <p:nvSpPr>
-          <p:cNvPr id="29" name="Shape 22"/>
-          <p:cNvSpPr/>
-          <p:nvPr/>
-        </p:nvSpPr>
-        <p:spPr>
-          <a:xfrm>
-            <a:off x="566928" y="6437376"/>
-            <a:ext cx="11057839" cy="0"/>
-          </a:xfrm>
-          <a:prstGeom prst="line">
-            <a:avLst/>
-          </a:prstGeom>
-          <a:noFill/>
-          <a:ln w="9525">
-            <a:solidFill>
-              <a:srgbClr val="E0E6EE"/>
-            </a:solidFill>
-            <a:prstDash val="solid"/>
-          </a:ln>
-        </p:spPr>
-      </p:sp>
-      <p:sp>
-        <p:nvSpPr>
-          <p:cNvPr id="30" name="Text 23"/>
-          <p:cNvSpPr/>
-          <p:nvPr/>
-        </p:nvSpPr>
-        <p:spPr>
-          <a:xfrm>
-            <a:off x="566928" y="6464808"/>
-            <a:ext cx="8229600" cy="292608"/>
-          </a:xfrm>
-          <a:prstGeom prst="rect">
-            <a:avLst/>
-          </a:prstGeom>
-          <a:noFill/>
-          <a:ln/>
-        </p:spPr>
-        <p:txBody>
-          <a:bodyPr wrap="square" lIns="0" tIns="0" rIns="0" bIns="0" rtlCol="0" anchor="ctr"/>
-          <a:lstStyle/>
-          <a:p>
-            <a:pPr indent="0" marL="0">
-              <a:buNone/>
-            </a:pPr>
-            <a:r>
-              <a:rPr lang="en-US" sz="950" dirty="0">
-                <a:solidFill>
-                  <a:srgbClr val="657384"/>
-                </a:solidFill>
-                <a:latin typeface="PT Sans" pitchFamily="34" charset="0"/>
-                <a:ea typeface="PT Sans" pitchFamily="34" charset="-122"/>
-                <a:cs typeface="PT Sans" pitchFamily="34" charset="-120"/>
-              </a:rPr>
-              <a:t>АРМ менеджера салона красоты  ·  ВСГУТУ  ·  Улан-Удэ, 2026</a:t>
-            </a:r>
-            <a:endParaRPr lang="en-US" sz="950" dirty="0"/>
-          </a:p>
-        </p:txBody>
-      </p:sp>
-      <p:sp>
-        <p:nvSpPr>
-          <p:cNvPr id="31" name="Text 24"/>
-          <p:cNvSpPr/>
-          <p:nvPr/>
-        </p:nvSpPr>
-        <p:spPr>
-          <a:xfrm>
-            <a:off x="9795967" y="6464808"/>
-            <a:ext cx="1828800" cy="292608"/>
-          </a:xfrm>
-          <a:prstGeom prst="rect">
-            <a:avLst/>
-          </a:prstGeom>
-          <a:noFill/>
-          <a:ln/>
-        </p:spPr>
-        <p:txBody>
-          <a:bodyPr wrap="square" lIns="0" tIns="0" rIns="0" bIns="0" rtlCol="0" anchor="ctr"/>
-          <a:lstStyle/>
-          <a:p>
-            <a:pPr algn="r" indent="0" marL="0">
-              <a:buNone/>
-            </a:pPr>
-            <a:r>
-              <a:rPr lang="en-US" sz="950" dirty="0">
-                <a:solidFill>
-                  <a:srgbClr val="657384"/>
-                </a:solidFill>
-                <a:latin typeface="PT Sans" pitchFamily="34" charset="0"/>
-                <a:ea typeface="PT Sans" pitchFamily="34" charset="-122"/>
-                <a:cs typeface="PT Sans" pitchFamily="34" charset="-120"/>
-              </a:rPr>
-              <a:t>09 / 14</a:t>
+              <a:t>09 / 15</a:t>
             </a:r>
             <a:endParaRPr lang="en-US" sz="950" dirty="0"/>
           </a:p>

--- a/Презентация_ВКР_АРМ_салона.pptx
+++ b/Презентация_ВКР_АРМ_салона.pptx
@@ -11145,7 +11145,7 @@
         <p:spPr>
           <a:xfrm>
             <a:off x="566928" y="1572768"/>
-            <a:ext cx="6446520" cy="960120"/>
+            <a:ext cx="11055096" cy="960120"/>
           </a:xfrm>
           <a:prstGeom prst="rect">
             <a:avLst/>
@@ -11253,7 +11253,7 @@
         <p:spPr>
           <a:xfrm>
             <a:off x="1527048" y="1691640"/>
-            <a:ext cx="5303520" cy="365760"/>
+            <a:ext cx="9692640" cy="365760"/>
           </a:xfrm>
           <a:prstGeom prst="rect">
             <a:avLst/>
@@ -11292,7 +11292,7 @@
         <p:spPr>
           <a:xfrm>
             <a:off x="1527048" y="2057400"/>
-            <a:ext cx="5303520" cy="402336"/>
+            <a:ext cx="9692640" cy="402336"/>
           </a:xfrm>
           <a:prstGeom prst="rect">
             <a:avLst/>
@@ -11331,7 +11331,7 @@
         <p:spPr>
           <a:xfrm>
             <a:off x="566928" y="2683764"/>
-            <a:ext cx="6446520" cy="960120"/>
+            <a:ext cx="11055096" cy="960120"/>
           </a:xfrm>
           <a:prstGeom prst="rect">
             <a:avLst/>
@@ -11439,7 +11439,7 @@
         <p:spPr>
           <a:xfrm>
             <a:off x="1527048" y="2802636"/>
-            <a:ext cx="5303520" cy="365760"/>
+            <a:ext cx="9692640" cy="365760"/>
           </a:xfrm>
           <a:prstGeom prst="rect">
             <a:avLst/>
@@ -11478,7 +11478,7 @@
         <p:spPr>
           <a:xfrm>
             <a:off x="1527048" y="3168396"/>
-            <a:ext cx="5303520" cy="402336"/>
+            <a:ext cx="9692640" cy="402336"/>
           </a:xfrm>
           <a:prstGeom prst="rect">
             <a:avLst/>
@@ -11517,7 +11517,7 @@
         <p:spPr>
           <a:xfrm>
             <a:off x="566928" y="3794760"/>
-            <a:ext cx="6446520" cy="960120"/>
+            <a:ext cx="11055096" cy="960120"/>
           </a:xfrm>
           <a:prstGeom prst="rect">
             <a:avLst/>
@@ -11625,7 +11625,7 @@
         <p:spPr>
           <a:xfrm>
             <a:off x="1527048" y="3913632"/>
-            <a:ext cx="5303520" cy="365760"/>
+            <a:ext cx="9692640" cy="365760"/>
           </a:xfrm>
           <a:prstGeom prst="rect">
             <a:avLst/>
@@ -11664,7 +11664,7 @@
         <p:spPr>
           <a:xfrm>
             <a:off x="1527048" y="4279392"/>
-            <a:ext cx="5303520" cy="402336"/>
+            <a:ext cx="9692640" cy="402336"/>
           </a:xfrm>
           <a:prstGeom prst="rect">
             <a:avLst/>
@@ -11703,7 +11703,7 @@
         <p:spPr>
           <a:xfrm>
             <a:off x="566928" y="4905756"/>
-            <a:ext cx="6446520" cy="960120"/>
+            <a:ext cx="11055096" cy="960120"/>
           </a:xfrm>
           <a:prstGeom prst="rect">
             <a:avLst/>
@@ -11811,7 +11811,7 @@
         <p:spPr>
           <a:xfrm>
             <a:off x="1527048" y="5024628"/>
-            <a:ext cx="5303520" cy="365760"/>
+            <a:ext cx="9692640" cy="365760"/>
           </a:xfrm>
           <a:prstGeom prst="rect">
             <a:avLst/>
@@ -11850,7 +11850,7 @@
         <p:spPr>
           <a:xfrm>
             <a:off x="1527048" y="5390388"/>
-            <a:ext cx="5303520" cy="402336"/>
+            <a:ext cx="9692640" cy="402336"/>
           </a:xfrm>
           <a:prstGeom prst="rect">
             <a:avLst/>
@@ -11877,105 +11877,6 @@
               <a:t>данные разрознены: WhatsApp · Telegram · бумага · таблица</a:t>
             </a:r>
             <a:endParaRPr lang="en-US" sz="1350" dirty="0"/>
-          </a:p>
-        </p:txBody>
-      </p:sp>
-      <p:sp>
-        <p:nvSpPr>
-          <p:cNvPr id="29" name="Shape 23"/>
-          <p:cNvSpPr/>
-          <p:nvPr/>
-        </p:nvSpPr>
-        <p:spPr>
-          <a:xfrm>
-            <a:off x="7310780" y="1508760"/>
-            <a:ext cx="4336694" cy="4073652"/>
-          </a:xfrm>
-          <a:prstGeom prst="rect">
-            <a:avLst/>
-          </a:prstGeom>
-          <a:solidFill>
-            <a:srgbClr val="FFFFFF"/>
-          </a:solidFill>
-          <a:ln w="12700">
-            <a:solidFill>
-              <a:srgbClr val="D5DEE9"/>
-            </a:solidFill>
-            <a:prstDash val="solid"/>
-          </a:ln>
-          <a:effectLst>
-            <a:outerShdw sx="100000" sy="100000" kx="0" ky="0" algn="bl" rotWithShape="0" blurRad="101600" dist="38100" dir="5400000">
-              <a:srgbClr val="8499B5">
-                <a:alpha val="22000"/>
-              </a:srgbClr>
-            </a:outerShdw>
-          </a:effectLst>
-        </p:spPr>
-        <p:txBody>
-          <a:bodyPr/>
-          <a:p/>
-        </p:txBody>
-      </p:sp>
-      <p:pic>
-        <p:nvPicPr>
-          <p:cNvPr id="30" name="Image 4" descr="/Users/m/Documents/VKR_Stats/build/img_final/image4.png">    </p:cNvPr>
-          <p:cNvPicPr>
-            <a:picLocks noChangeAspect="1"/>
-          </p:cNvPicPr>
-          <p:nvPr/>
-        </p:nvPicPr>
-        <p:blipFill>
-          <a:blip r:embed="rId5"/>
-          <a:stretch>
-            <a:fillRect/>
-          </a:stretch>
-        </p:blipFill>
-        <p:spPr>
-          <a:xfrm>
-            <a:off x="7374788" y="1572768"/>
-            <a:ext cx="4208678" cy="3945636"/>
-          </a:xfrm>
-          <a:prstGeom prst="rect">
-            <a:avLst/>
-          </a:prstGeom>
-        </p:spPr>
-      </p:pic>
-      <p:sp>
-        <p:nvSpPr>
-          <p:cNvPr id="31" name="Text 24"/>
-          <p:cNvSpPr/>
-          <p:nvPr/>
-        </p:nvSpPr>
-        <p:spPr>
-          <a:xfrm>
-            <a:off x="7333488" y="5536692"/>
-            <a:ext cx="4291279" cy="347472"/>
-          </a:xfrm>
-          <a:prstGeom prst="rect">
-            <a:avLst/>
-          </a:prstGeom>
-          <a:noFill/>
-          <a:ln/>
-        </p:spPr>
-        <p:txBody>
-          <a:bodyPr wrap="square" lIns="0" tIns="0" rIns="0" bIns="0" rtlCol="0" anchor="t"/>
-          <a:lstStyle/>
-          <a:p>
-            <a:pPr algn="ctr" indent="0" marL="0">
-              <a:buNone/>
-            </a:pPr>
-            <a:r>
-              <a:rPr lang="en-US" sz="1100" i="1" dirty="0">
-                <a:solidFill>
-                  <a:srgbClr val="657384"/>
-                </a:solidFill>
-                <a:latin typeface="PT Sans" pitchFamily="34" charset="0"/>
-                <a:ea typeface="PT Sans" pitchFamily="34" charset="-122"/>
-                <a:cs typeface="PT Sans" pitchFamily="34" charset="-120"/>
-              </a:rPr>
-              <a:t>Карточка студии: КДЦ «Арун», оф. 610 · контакты и карта</a:t>
-            </a:r>
-            <a:endParaRPr lang="en-US" sz="1100" dirty="0"/>
           </a:p>
         </p:txBody>
       </p:sp>

--- a/Презентация_ВКР_АРМ_салона.pptx
+++ b/Презентация_ВКР_АРМ_салона.pptx
@@ -1,31 +1,31 @@
 
 <file path=ppt/presentation.xml><?xml version="1.0" encoding="utf-8"?>
-<p:presentation xmlns:a="http://schemas.openxmlformats.org/drawingml/2006/main" xmlns:r="http://schemas.openxmlformats.org/officeDocument/2006/relationships" xmlns:p="http://schemas.openxmlformats.org/presentationml/2006/main" saveSubsetFonts="1" autoCompressPictures="0">
+<p:presentation xmlns:a="http://schemas.openxmlformats.org/drawingml/2006/main" xmlns:r="http://schemas.openxmlformats.org/officeDocument/2006/relationships" xmlns:p="http://schemas.openxmlformats.org/presentationml/2006/main" autoCompressPictures="0">
   <p:sldMasterIdLst>
     <p:sldMasterId id="2147483648" r:id="rId1"/>
   </p:sldMasterIdLst>
+  <p:notesMasterIdLst>
+    <p:notesMasterId r:id="rId4"/>
+  </p:notesMasterIdLst>
   <p:sldIdLst>
-    <p:sldId id="256" r:id="rId2"/>
-    <p:sldId id="257" r:id="rId3"/>
-    <p:sldId id="258" r:id="rId4"/>
-    <p:sldId id="259" r:id="rId5"/>
-    <p:sldId id="270" r:id="rId21"/>
-    <p:sldId id="260" r:id="rId6"/>
-    <p:sldId id="261" r:id="rId7"/>
-    <p:sldId id="262" r:id="rId8"/>
-    <p:sldId id="263" r:id="rId9"/>
-    <p:sldId id="264" r:id="rId10"/>
-    <p:sldId id="265" r:id="rId11"/>
-    <p:sldId id="266" r:id="rId12"/>
-    <p:sldId id="267" r:id="rId13"/>
-    <p:sldId id="268" r:id="rId14"/>
-    <p:sldId id="269" r:id="rId15"/>
+    <p:sldId id="256" r:id="rId3"/>
+    <p:sldId id="257" r:id="rId5"/>
+    <p:sldId id="258" r:id="rId6"/>
+    <p:sldId id="259" r:id="rId7"/>
+    <p:sldId id="270" r:id="rId8"/>
+    <p:sldId id="260" r:id="rId9"/>
+    <p:sldId id="261" r:id="rId10"/>
+    <p:sldId id="262" r:id="rId11"/>
+    <p:sldId id="263" r:id="rId12"/>
+    <p:sldId id="264" r:id="rId13"/>
+    <p:sldId id="265" r:id="rId14"/>
+    <p:sldId id="266" r:id="rId15"/>
+    <p:sldId id="267" r:id="rId16"/>
+    <p:sldId id="268" r:id="rId17"/>
+    <p:sldId id="269" r:id="rId18"/>
   </p:sldIdLst>
-  <p:notesMasterIdLst>
-    <p:notesMasterId r:id="rId16"/>
-  </p:notesMasterIdLst>
-  <p:sldSz cx="12191695" cy="6858000"/>
-  <p:notesSz cx="6858000" cy="12191695"/>
+  <p:sldSz cx="12191365" cy="6858000"/>
+  <p:notesSz cx="6858000" cy="12191365"/>
   <p:defaultTextStyle>
     <a:lvl1pPr marL="0" algn="l" defTabSz="914400" rtl="0" eaLnBrk="1" latinLnBrk="0" hangingPunct="1">
       <a:defRPr sz="1800" kern="1200">
@@ -203,7 +203,6 @@
           <a:p>
             <a:fld id="{5282F153-3F37-0F45-9E97-73ACFA13230C}" type="datetimeFigureOut">
               <a:rPr lang="en-US"/>
-              <a:t>7/23/19</a:t>
             </a:fld>
             <a:endParaRPr lang="en-US"/>
           </a:p>
@@ -270,6 +269,7 @@
               <a:rPr lang="en-US"/>
               <a:t>Click to edit Master text styles</a:t>
             </a:r>
+            <a:endParaRPr lang="en-US"/>
           </a:p>
           <a:p>
             <a:pPr lvl="1"/>
@@ -277,6 +277,7 @@
               <a:rPr lang="en-US"/>
               <a:t>Second level</a:t>
             </a:r>
+            <a:endParaRPr lang="en-US"/>
           </a:p>
           <a:p>
             <a:pPr lvl="2"/>
@@ -284,6 +285,7 @@
               <a:rPr lang="en-US"/>
               <a:t>Third level</a:t>
             </a:r>
+            <a:endParaRPr lang="en-US"/>
           </a:p>
           <a:p>
             <a:pPr lvl="3"/>
@@ -291,6 +293,7 @@
               <a:rPr lang="en-US"/>
               <a:t>Fourth level</a:t>
             </a:r>
+            <a:endParaRPr lang="en-US"/>
           </a:p>
           <a:p>
             <a:pPr lvl="4"/>
@@ -298,6 +301,7 @@
               <a:rPr lang="en-US"/>
               <a:t>Fifth level</a:t>
             </a:r>
+            <a:endParaRPr lang="en-US"/>
           </a:p>
         </p:txBody>
       </p:sp>
@@ -361,18 +365,12 @@
           <a:p>
             <a:fld id="{CE5E9CC1-C706-0F49-92D6-E571CC5EEA8F}" type="slidenum">
               <a:rPr lang="en-US"/>
-              <a:t>‹#›</a:t>
             </a:fld>
             <a:endParaRPr lang="en-US"/>
           </a:p>
         </p:txBody>
       </p:sp>
     </p:spTree>
-    <p:extLst>
-      <p:ext uri="{BB962C8B-B14F-4D97-AF65-F5344CB8AC3E}">
-        <p14:creationId xmlns:p14="http://schemas.microsoft.com/office/powerpoint/2010/main" val="1024086991"/>
-      </p:ext>
-    </p:extLst>
   </p:cSld>
   <p:clrMap bg1="lt1" tx1="dk1" bg2="lt2" tx2="dk2" accent1="accent1" accent2="accent2" accent3="accent3" accent4="accent4" accent5="accent5" accent6="accent6" hlink="hlink" folHlink="folHlink"/>
   <p:notesStyle>
@@ -514,10 +512,6 @@
           <a:bodyPr/>
           <a:lstStyle/>
           <a:p>
-            <a:r>
-              <a:rPr lang="en-US" dirty="0"/>
-              <a:t/>
-            </a:r>
             <a:endParaRPr lang="en-US" dirty="0"/>
           </a:p>
         </p:txBody>
@@ -539,18 +533,12 @@
           <a:p>
             <a:fld id="{F7021451-1387-4CA6-816F-3879F97B5CBC}" type="slidenum">
               <a:rPr lang="en-US"/>
-              <a:t>1</a:t>
             </a:fld>
             <a:endParaRPr lang="en-US"/>
           </a:p>
         </p:txBody>
       </p:sp>
     </p:spTree>
-    <p:extLst>
-      <p:ext uri="{BB962C8B-B14F-4D97-AF65-F5344CB8AC3E}">
-        <p14:creationId xmlns:p14="http://schemas.microsoft.com/office/powerpoint/2010/main" val="1024086991"/>
-      </p:ext>
-    </p:extLst>
   </p:cSld>
   <p:clrMapOvr>
     <a:masterClrMapping/>
@@ -602,10 +590,6 @@
           <a:bodyPr/>
           <a:lstStyle/>
           <a:p>
-            <a:r>
-              <a:rPr lang="en-US" dirty="0"/>
-              <a:t/>
-            </a:r>
             <a:endParaRPr lang="en-US" dirty="0"/>
           </a:p>
         </p:txBody>
@@ -627,18 +611,12 @@
           <a:p>
             <a:fld id="{F7021451-1387-4CA6-816F-3879F97B5CBC}" type="slidenum">
               <a:rPr lang="en-US"/>
-              <a:t>10</a:t>
             </a:fld>
             <a:endParaRPr lang="en-US"/>
           </a:p>
         </p:txBody>
       </p:sp>
     </p:spTree>
-    <p:extLst>
-      <p:ext uri="{BB962C8B-B14F-4D97-AF65-F5344CB8AC3E}">
-        <p14:creationId xmlns:p14="http://schemas.microsoft.com/office/powerpoint/2010/main" val="1024086991"/>
-      </p:ext>
-    </p:extLst>
   </p:cSld>
   <p:clrMapOvr>
     <a:masterClrMapping/>
@@ -690,10 +668,6 @@
           <a:bodyPr/>
           <a:lstStyle/>
           <a:p>
-            <a:r>
-              <a:rPr lang="en-US" dirty="0"/>
-              <a:t/>
-            </a:r>
             <a:endParaRPr lang="en-US" dirty="0"/>
           </a:p>
         </p:txBody>
@@ -715,18 +689,12 @@
           <a:p>
             <a:fld id="{F7021451-1387-4CA6-816F-3879F97B5CBC}" type="slidenum">
               <a:rPr lang="en-US"/>
-              <a:t>11</a:t>
             </a:fld>
             <a:endParaRPr lang="en-US"/>
           </a:p>
         </p:txBody>
       </p:sp>
     </p:spTree>
-    <p:extLst>
-      <p:ext uri="{BB962C8B-B14F-4D97-AF65-F5344CB8AC3E}">
-        <p14:creationId xmlns:p14="http://schemas.microsoft.com/office/powerpoint/2010/main" val="1024086991"/>
-      </p:ext>
-    </p:extLst>
   </p:cSld>
   <p:clrMapOvr>
     <a:masterClrMapping/>
@@ -778,10 +746,6 @@
           <a:bodyPr/>
           <a:lstStyle/>
           <a:p>
-            <a:r>
-              <a:rPr lang="en-US" dirty="0"/>
-              <a:t/>
-            </a:r>
             <a:endParaRPr lang="en-US" dirty="0"/>
           </a:p>
         </p:txBody>
@@ -803,18 +767,12 @@
           <a:p>
             <a:fld id="{F7021451-1387-4CA6-816F-3879F97B5CBC}" type="slidenum">
               <a:rPr lang="en-US"/>
-              <a:t>12</a:t>
             </a:fld>
             <a:endParaRPr lang="en-US"/>
           </a:p>
         </p:txBody>
       </p:sp>
     </p:spTree>
-    <p:extLst>
-      <p:ext uri="{BB962C8B-B14F-4D97-AF65-F5344CB8AC3E}">
-        <p14:creationId xmlns:p14="http://schemas.microsoft.com/office/powerpoint/2010/main" val="1024086991"/>
-      </p:ext>
-    </p:extLst>
   </p:cSld>
   <p:clrMapOvr>
     <a:masterClrMapping/>
@@ -866,10 +824,6 @@
           <a:bodyPr/>
           <a:lstStyle/>
           <a:p>
-            <a:r>
-              <a:rPr lang="en-US" dirty="0"/>
-              <a:t/>
-            </a:r>
             <a:endParaRPr lang="en-US" dirty="0"/>
           </a:p>
         </p:txBody>
@@ -891,18 +845,12 @@
           <a:p>
             <a:fld id="{F7021451-1387-4CA6-816F-3879F97B5CBC}" type="slidenum">
               <a:rPr lang="en-US"/>
-              <a:t>13</a:t>
             </a:fld>
             <a:endParaRPr lang="en-US"/>
           </a:p>
         </p:txBody>
       </p:sp>
     </p:spTree>
-    <p:extLst>
-      <p:ext uri="{BB962C8B-B14F-4D97-AF65-F5344CB8AC3E}">
-        <p14:creationId xmlns:p14="http://schemas.microsoft.com/office/powerpoint/2010/main" val="1024086991"/>
-      </p:ext>
-    </p:extLst>
   </p:cSld>
   <p:clrMapOvr>
     <a:masterClrMapping/>
@@ -954,10 +902,6 @@
           <a:bodyPr/>
           <a:lstStyle/>
           <a:p>
-            <a:r>
-              <a:rPr lang="en-US" dirty="0"/>
-              <a:t/>
-            </a:r>
             <a:endParaRPr lang="en-US" dirty="0"/>
           </a:p>
         </p:txBody>
@@ -979,18 +923,12 @@
           <a:p>
             <a:fld id="{F7021451-1387-4CA6-816F-3879F97B5CBC}" type="slidenum">
               <a:rPr lang="en-US"/>
-              <a:t>14</a:t>
             </a:fld>
             <a:endParaRPr lang="en-US"/>
           </a:p>
         </p:txBody>
       </p:sp>
     </p:spTree>
-    <p:extLst>
-      <p:ext uri="{BB962C8B-B14F-4D97-AF65-F5344CB8AC3E}">
-        <p14:creationId xmlns:p14="http://schemas.microsoft.com/office/powerpoint/2010/main" val="1024086991"/>
-      </p:ext>
-    </p:extLst>
   </p:cSld>
   <p:clrMapOvr>
     <a:masterClrMapping/>
@@ -1042,10 +980,6 @@
           <a:bodyPr/>
           <a:lstStyle/>
           <a:p>
-            <a:r>
-              <a:rPr lang="en-US" dirty="0"/>
-              <a:t/>
-            </a:r>
             <a:endParaRPr lang="en-US" dirty="0"/>
           </a:p>
         </p:txBody>
@@ -1067,18 +1001,12 @@
           <a:p>
             <a:fld id="{F7021451-1387-4CA6-816F-3879F97B5CBC}" type="slidenum">
               <a:rPr lang="en-US"/>
-              <a:t>2</a:t>
             </a:fld>
             <a:endParaRPr lang="en-US"/>
           </a:p>
         </p:txBody>
       </p:sp>
     </p:spTree>
-    <p:extLst>
-      <p:ext uri="{BB962C8B-B14F-4D97-AF65-F5344CB8AC3E}">
-        <p14:creationId xmlns:p14="http://schemas.microsoft.com/office/powerpoint/2010/main" val="1024086991"/>
-      </p:ext>
-    </p:extLst>
   </p:cSld>
   <p:clrMapOvr>
     <a:masterClrMapping/>
@@ -1130,10 +1058,6 @@
           <a:bodyPr/>
           <a:lstStyle/>
           <a:p>
-            <a:r>
-              <a:rPr lang="en-US" dirty="0"/>
-              <a:t/>
-            </a:r>
             <a:endParaRPr lang="en-US" dirty="0"/>
           </a:p>
         </p:txBody>
@@ -1155,18 +1079,12 @@
           <a:p>
             <a:fld id="{F7021451-1387-4CA6-816F-3879F97B5CBC}" type="slidenum">
               <a:rPr lang="en-US"/>
-              <a:t>3</a:t>
             </a:fld>
             <a:endParaRPr lang="en-US"/>
           </a:p>
         </p:txBody>
       </p:sp>
     </p:spTree>
-    <p:extLst>
-      <p:ext uri="{BB962C8B-B14F-4D97-AF65-F5344CB8AC3E}">
-        <p14:creationId xmlns:p14="http://schemas.microsoft.com/office/powerpoint/2010/main" val="1024086991"/>
-      </p:ext>
-    </p:extLst>
   </p:cSld>
   <p:clrMapOvr>
     <a:masterClrMapping/>
@@ -1218,10 +1136,6 @@
           <a:bodyPr/>
           <a:lstStyle/>
           <a:p>
-            <a:r>
-              <a:rPr lang="en-US" dirty="0"/>
-              <a:t/>
-            </a:r>
             <a:endParaRPr lang="en-US" dirty="0"/>
           </a:p>
         </p:txBody>
@@ -1243,18 +1157,12 @@
           <a:p>
             <a:fld id="{F7021451-1387-4CA6-816F-3879F97B5CBC}" type="slidenum">
               <a:rPr lang="en-US"/>
-              <a:t>4</a:t>
             </a:fld>
             <a:endParaRPr lang="en-US"/>
           </a:p>
         </p:txBody>
       </p:sp>
     </p:spTree>
-    <p:extLst>
-      <p:ext uri="{BB962C8B-B14F-4D97-AF65-F5344CB8AC3E}">
-        <p14:creationId xmlns:p14="http://schemas.microsoft.com/office/powerpoint/2010/main" val="1024086991"/>
-      </p:ext>
-    </p:extLst>
   </p:cSld>
   <p:clrMapOvr>
     <a:masterClrMapping/>
@@ -1306,10 +1214,6 @@
           <a:bodyPr/>
           <a:lstStyle/>
           <a:p>
-            <a:r>
-              <a:rPr lang="en-US" dirty="0"/>
-              <a:t/>
-            </a:r>
             <a:endParaRPr lang="en-US" dirty="0"/>
           </a:p>
         </p:txBody>
@@ -1331,18 +1235,12 @@
           <a:p>
             <a:fld id="{F7021451-1387-4CA6-816F-3879F97B5CBC}" type="slidenum">
               <a:rPr lang="en-US"/>
-              <a:t>5</a:t>
             </a:fld>
             <a:endParaRPr lang="en-US"/>
           </a:p>
         </p:txBody>
       </p:sp>
     </p:spTree>
-    <p:extLst>
-      <p:ext uri="{BB962C8B-B14F-4D97-AF65-F5344CB8AC3E}">
-        <p14:creationId xmlns:p14="http://schemas.microsoft.com/office/powerpoint/2010/main" val="1024086991"/>
-      </p:ext>
-    </p:extLst>
   </p:cSld>
   <p:clrMapOvr>
     <a:masterClrMapping/>
@@ -1394,10 +1292,6 @@
           <a:bodyPr/>
           <a:lstStyle/>
           <a:p>
-            <a:r>
-              <a:rPr lang="en-US" dirty="0"/>
-              <a:t/>
-            </a:r>
             <a:endParaRPr lang="en-US" dirty="0"/>
           </a:p>
         </p:txBody>
@@ -1419,18 +1313,12 @@
           <a:p>
             <a:fld id="{F7021451-1387-4CA6-816F-3879F97B5CBC}" type="slidenum">
               <a:rPr lang="en-US"/>
-              <a:t>6</a:t>
             </a:fld>
             <a:endParaRPr lang="en-US"/>
           </a:p>
         </p:txBody>
       </p:sp>
     </p:spTree>
-    <p:extLst>
-      <p:ext uri="{BB962C8B-B14F-4D97-AF65-F5344CB8AC3E}">
-        <p14:creationId xmlns:p14="http://schemas.microsoft.com/office/powerpoint/2010/main" val="1024086991"/>
-      </p:ext>
-    </p:extLst>
   </p:cSld>
   <p:clrMapOvr>
     <a:masterClrMapping/>
@@ -1482,10 +1370,6 @@
           <a:bodyPr/>
           <a:lstStyle/>
           <a:p>
-            <a:r>
-              <a:rPr lang="en-US" dirty="0"/>
-              <a:t/>
-            </a:r>
             <a:endParaRPr lang="en-US" dirty="0"/>
           </a:p>
         </p:txBody>
@@ -1507,18 +1391,12 @@
           <a:p>
             <a:fld id="{F7021451-1387-4CA6-816F-3879F97B5CBC}" type="slidenum">
               <a:rPr lang="en-US"/>
-              <a:t>7</a:t>
             </a:fld>
             <a:endParaRPr lang="en-US"/>
           </a:p>
         </p:txBody>
       </p:sp>
     </p:spTree>
-    <p:extLst>
-      <p:ext uri="{BB962C8B-B14F-4D97-AF65-F5344CB8AC3E}">
-        <p14:creationId xmlns:p14="http://schemas.microsoft.com/office/powerpoint/2010/main" val="1024086991"/>
-      </p:ext>
-    </p:extLst>
   </p:cSld>
   <p:clrMapOvr>
     <a:masterClrMapping/>
@@ -1570,10 +1448,6 @@
           <a:bodyPr/>
           <a:lstStyle/>
           <a:p>
-            <a:r>
-              <a:rPr lang="en-US" dirty="0"/>
-              <a:t/>
-            </a:r>
             <a:endParaRPr lang="en-US" dirty="0"/>
           </a:p>
         </p:txBody>
@@ -1595,18 +1469,12 @@
           <a:p>
             <a:fld id="{F7021451-1387-4CA6-816F-3879F97B5CBC}" type="slidenum">
               <a:rPr lang="en-US"/>
-              <a:t>8</a:t>
             </a:fld>
             <a:endParaRPr lang="en-US"/>
           </a:p>
         </p:txBody>
       </p:sp>
     </p:spTree>
-    <p:extLst>
-      <p:ext uri="{BB962C8B-B14F-4D97-AF65-F5344CB8AC3E}">
-        <p14:creationId xmlns:p14="http://schemas.microsoft.com/office/powerpoint/2010/main" val="1024086991"/>
-      </p:ext>
-    </p:extLst>
   </p:cSld>
   <p:clrMapOvr>
     <a:masterClrMapping/>
@@ -1658,10 +1526,6 @@
           <a:bodyPr/>
           <a:lstStyle/>
           <a:p>
-            <a:r>
-              <a:rPr lang="en-US" dirty="0"/>
-              <a:t/>
-            </a:r>
             <a:endParaRPr lang="en-US" dirty="0"/>
           </a:p>
         </p:txBody>
@@ -1683,18 +1547,12 @@
           <a:p>
             <a:fld id="{F7021451-1387-4CA6-816F-3879F97B5CBC}" type="slidenum">
               <a:rPr lang="en-US"/>
-              <a:t>9</a:t>
             </a:fld>
             <a:endParaRPr lang="en-US"/>
           </a:p>
         </p:txBody>
       </p:sp>
     </p:spTree>
-    <p:extLst>
-      <p:ext uri="{BB962C8B-B14F-4D97-AF65-F5344CB8AC3E}">
-        <p14:creationId xmlns:p14="http://schemas.microsoft.com/office/powerpoint/2010/main" val="1024086991"/>
-      </p:ext>
-    </p:extLst>
   </p:cSld>
   <p:clrMapOvr>
     <a:masterClrMapping/>
@@ -1735,6 +1593,11 @@
 <file path=ppt/slideMasters/slideMaster1.xml><?xml version="1.0" encoding="utf-8"?>
 <p:sldMaster xmlns:a="http://schemas.openxmlformats.org/drawingml/2006/main" xmlns:r="http://schemas.openxmlformats.org/officeDocument/2006/relationships" xmlns:p="http://schemas.openxmlformats.org/presentationml/2006/main">
   <p:cSld>
+    <p:bg>
+      <p:bgRef idx="1001">
+        <a:schemeClr val="bg1"/>
+      </p:bgRef>
+    </p:bg>
     <p:spTree>
       <p:nvGrpSpPr>
         <p:cNvPr id="1" name=""/>
@@ -1778,7 +1641,7 @@
         <a:spcBef>
           <a:spcPct val="20000"/>
         </a:spcBef>
-        <a:buFont typeface="Arial" pitchFamily="34" charset="0"/>
+        <a:buFont typeface="Arial" panose="020B0704020202020204" pitchFamily="34" charset="0"/>
         <a:buChar char="•"/>
         <a:defRPr sz="3200" kern="1200">
           <a:solidFill>
@@ -1793,7 +1656,7 @@
         <a:spcBef>
           <a:spcPct val="20000"/>
         </a:spcBef>
-        <a:buFont typeface="Arial" pitchFamily="34" charset="0"/>
+        <a:buFont typeface="Arial" panose="020B0704020202020204" pitchFamily="34" charset="0"/>
         <a:buChar char="–"/>
         <a:defRPr sz="2800" kern="1200">
           <a:solidFill>
@@ -1808,7 +1671,7 @@
         <a:spcBef>
           <a:spcPct val="20000"/>
         </a:spcBef>
-        <a:buFont typeface="Arial" pitchFamily="34" charset="0"/>
+        <a:buFont typeface="Arial" panose="020B0704020202020204" pitchFamily="34" charset="0"/>
         <a:buChar char="•"/>
         <a:defRPr sz="2400" kern="1200">
           <a:solidFill>
@@ -1823,7 +1686,7 @@
         <a:spcBef>
           <a:spcPct val="20000"/>
         </a:spcBef>
-        <a:buFont typeface="Arial" pitchFamily="34" charset="0"/>
+        <a:buFont typeface="Arial" panose="020B0704020202020204" pitchFamily="34" charset="0"/>
         <a:buChar char="–"/>
         <a:defRPr sz="2000" kern="1200">
           <a:solidFill>
@@ -1838,7 +1701,7 @@
         <a:spcBef>
           <a:spcPct val="20000"/>
         </a:spcBef>
-        <a:buFont typeface="Arial" pitchFamily="34" charset="0"/>
+        <a:buFont typeface="Arial" panose="020B0704020202020204" pitchFamily="34" charset="0"/>
         <a:buChar char="»"/>
         <a:defRPr sz="2000" kern="1200">
           <a:solidFill>
@@ -1853,7 +1716,7 @@
         <a:spcBef>
           <a:spcPct val="20000"/>
         </a:spcBef>
-        <a:buFont typeface="Arial" pitchFamily="34" charset="0"/>
+        <a:buFont typeface="Arial" panose="020B0704020202020204" pitchFamily="34" charset="0"/>
         <a:buChar char="•"/>
         <a:defRPr sz="2000" kern="1200">
           <a:solidFill>
@@ -1868,7 +1731,7 @@
         <a:spcBef>
           <a:spcPct val="20000"/>
         </a:spcBef>
-        <a:buFont typeface="Arial" pitchFamily="34" charset="0"/>
+        <a:buFont typeface="Arial" panose="020B0704020202020204" pitchFamily="34" charset="0"/>
         <a:buChar char="•"/>
         <a:defRPr sz="2000" kern="1200">
           <a:solidFill>
@@ -1883,7 +1746,7 @@
         <a:spcBef>
           <a:spcPct val="20000"/>
         </a:spcBef>
-        <a:buFont typeface="Arial" pitchFamily="34" charset="0"/>
+        <a:buFont typeface="Arial" panose="020B0704020202020204" pitchFamily="34" charset="0"/>
         <a:buChar char="•"/>
         <a:defRPr sz="2000" kern="1200">
           <a:solidFill>
@@ -1898,7 +1761,7 @@
         <a:spcBef>
           <a:spcPct val="20000"/>
         </a:spcBef>
-        <a:buFont typeface="Arial" pitchFamily="34" charset="0"/>
+        <a:buFont typeface="Arial" panose="020B0704020202020204" pitchFamily="34" charset="0"/>
         <a:buChar char="•"/>
         <a:defRPr sz="2000" kern="1200">
           <a:solidFill>
@@ -2011,12 +1874,13 @@
 
 <file path=ppt/slides/slide1.xml><?xml version="1.0" encoding="utf-8"?>
 <p:sld xmlns:a="http://schemas.openxmlformats.org/drawingml/2006/main" xmlns:r="http://schemas.openxmlformats.org/officeDocument/2006/relationships" xmlns:p="http://schemas.openxmlformats.org/presentationml/2006/main">
-  <p:cSld name="Slide 1">
+  <p:cSld>
     <p:bg>
       <p:bgPr>
         <a:solidFill>
           <a:srgbClr val="16243B"/>
         </a:solidFill>
+        <a:effectLst/>
       </p:bgPr>
     </p:bg>
     <p:spTree>
@@ -2074,13 +1938,12 @@
             <a:avLst/>
           </a:prstGeom>
           <a:noFill/>
-          <a:ln/>
         </p:spPr>
         <p:txBody>
           <a:bodyPr wrap="square" lIns="0" tIns="0" rIns="0" bIns="0" rtlCol="0" anchor="ctr"/>
           <a:lstStyle/>
           <a:p>
-            <a:pPr algn="ctr" indent="0" marL="0">
+            <a:pPr marL="0" indent="0" algn="ctr">
               <a:buNone/>
             </a:pPr>
             <a:r>
@@ -2088,9 +1951,9 @@
                 <a:solidFill>
                   <a:srgbClr val="C6D6EC"/>
                 </a:solidFill>
-                <a:latin typeface="PT Sans" pitchFamily="34" charset="0"/>
-                <a:ea typeface="PT Sans" pitchFamily="34" charset="-122"/>
-                <a:cs typeface="PT Sans" pitchFamily="34" charset="-120"/>
+                <a:latin typeface="PT Sans" panose="020B0503020203020204" pitchFamily="34" charset="0"/>
+                <a:ea typeface="PT Sans" panose="020B0503020203020204" pitchFamily="34" charset="-122"/>
+                <a:cs typeface="PT Sans" panose="020B0503020203020204" pitchFamily="34" charset="-120"/>
               </a:rPr>
               <a:t>ВСГУТУ · Факультет компьютерных наук и технологий</a:t>
             </a:r>
@@ -2113,13 +1976,12 @@
             <a:avLst/>
           </a:prstGeom>
           <a:noFill/>
-          <a:ln/>
         </p:spPr>
         <p:txBody>
           <a:bodyPr wrap="square" lIns="0" tIns="0" rIns="0" bIns="0" rtlCol="0" anchor="ctr"/>
           <a:lstStyle/>
           <a:p>
-            <a:pPr algn="ctr" indent="0" marL="0">
+            <a:pPr marL="0" indent="0" algn="ctr">
               <a:buNone/>
             </a:pPr>
             <a:r>
@@ -2127,9 +1989,9 @@
                 <a:solidFill>
                   <a:srgbClr val="92A4C0"/>
                 </a:solidFill>
-                <a:latin typeface="PT Sans" pitchFamily="34" charset="0"/>
-                <a:ea typeface="PT Sans" pitchFamily="34" charset="-122"/>
-                <a:cs typeface="PT Sans" pitchFamily="34" charset="-120"/>
+                <a:latin typeface="PT Sans" panose="020B0503020203020204" pitchFamily="34" charset="0"/>
+                <a:ea typeface="PT Sans" panose="020B0503020203020204" pitchFamily="34" charset="-122"/>
+                <a:cs typeface="PT Sans" panose="020B0503020203020204" pitchFamily="34" charset="-120"/>
               </a:rPr>
               <a:t>Кафедра прикладной информатики, статистики и анализа данных</a:t>
             </a:r>
@@ -2152,23 +2014,22 @@
             <a:avLst/>
           </a:prstGeom>
           <a:noFill/>
-          <a:ln/>
         </p:spPr>
         <p:txBody>
           <a:bodyPr wrap="square" lIns="0" tIns="0" rIns="0" bIns="0" rtlCol="0" anchor="ctr"/>
           <a:lstStyle/>
           <a:p>
-            <a:pPr algn="ctr" indent="0" marL="0">
-              <a:buNone/>
-            </a:pPr>
-            <a:r>
-              <a:rPr lang="en-US" sz="1300" b="1" spc="400" kern="0" dirty="0">
+            <a:pPr marL="0" indent="0" algn="ctr">
+              <a:buNone/>
+            </a:pPr>
+            <a:r>
+              <a:rPr lang="en-US" sz="1300" b="1" kern="0" spc="400" dirty="0">
                 <a:solidFill>
                   <a:srgbClr val="B08D3E"/>
                 </a:solidFill>
-                <a:latin typeface="PT Sans" pitchFamily="34" charset="0"/>
-                <a:ea typeface="PT Sans" pitchFamily="34" charset="-122"/>
-                <a:cs typeface="PT Sans" pitchFamily="34" charset="-120"/>
+                <a:latin typeface="PT Sans" panose="020B0503020203020204" pitchFamily="34" charset="0"/>
+                <a:ea typeface="PT Sans" panose="020B0503020203020204" pitchFamily="34" charset="-122"/>
+                <a:cs typeface="PT Sans" panose="020B0503020203020204" pitchFamily="34" charset="-120"/>
               </a:rPr>
               <a:t>ВЫПУСКНАЯ КВАЛИФИКАЦИОННАЯ РАБОТА</a:t>
             </a:r>
@@ -2191,13 +2052,12 @@
             <a:avLst/>
           </a:prstGeom>
           <a:noFill/>
-          <a:ln/>
         </p:spPr>
         <p:txBody>
           <a:bodyPr wrap="square" lIns="0" tIns="0" rIns="0" bIns="0" rtlCol="0" anchor="ctr"/>
           <a:lstStyle/>
           <a:p>
-            <a:pPr algn="ctr" indent="0" marL="0">
+            <a:pPr marL="0" indent="0" algn="ctr">
               <a:lnSpc>
                 <a:spcPct val="118000"/>
               </a:lnSpc>
@@ -2208,16 +2068,16 @@
                 <a:solidFill>
                   <a:srgbClr val="FFFFFF"/>
                 </a:solidFill>
-                <a:latin typeface="PT Serif" pitchFamily="34" charset="0"/>
-                <a:ea typeface="PT Serif" pitchFamily="34" charset="-122"/>
-                <a:cs typeface="PT Serif" pitchFamily="34" charset="-120"/>
+                <a:latin typeface="PT Serif" panose="020A0603040505020204" pitchFamily="34" charset="0"/>
+                <a:ea typeface="PT Serif" panose="020A0603040505020204" pitchFamily="34" charset="-122"/>
+                <a:cs typeface="PT Serif" panose="020A0603040505020204" pitchFamily="34" charset="-120"/>
               </a:rPr>
               <a:t>Проектирование автоматизированного рабочего места</a:t>
             </a:r>
             <a:endParaRPr lang="en-US" sz="3300" dirty="0"/>
           </a:p>
           <a:p>
-            <a:pPr algn="ctr" indent="0" marL="0">
+            <a:pPr marL="0" indent="0" algn="ctr">
               <a:lnSpc>
                 <a:spcPct val="118000"/>
               </a:lnSpc>
@@ -2228,9 +2088,9 @@
                 <a:solidFill>
                   <a:srgbClr val="FFFFFF"/>
                 </a:solidFill>
-                <a:latin typeface="PT Serif" pitchFamily="34" charset="0"/>
-                <a:ea typeface="PT Serif" pitchFamily="34" charset="-122"/>
-                <a:cs typeface="PT Serif" pitchFamily="34" charset="-120"/>
+                <a:latin typeface="PT Serif" panose="020A0603040505020204" pitchFamily="34" charset="0"/>
+                <a:ea typeface="PT Serif" panose="020A0603040505020204" pitchFamily="34" charset="-122"/>
+                <a:cs typeface="PT Serif" panose="020A0603040505020204" pitchFamily="34" charset="-120"/>
               </a:rPr>
               <a:t>менеджера салона красоты</a:t>
             </a:r>
@@ -2253,13 +2113,12 @@
             <a:avLst/>
           </a:prstGeom>
           <a:noFill/>
-          <a:ln/>
         </p:spPr>
         <p:txBody>
           <a:bodyPr wrap="square" lIns="0" tIns="0" rIns="0" bIns="0" rtlCol="0" anchor="ctr"/>
           <a:lstStyle/>
           <a:p>
-            <a:pPr algn="ctr" indent="0" marL="0">
+            <a:pPr marL="0" indent="0" algn="ctr">
               <a:buNone/>
             </a:pPr>
             <a:r>
@@ -2267,9 +2126,9 @@
                 <a:solidFill>
                   <a:srgbClr val="C6D6EC"/>
                 </a:solidFill>
-                <a:latin typeface="PT Serif" pitchFamily="34" charset="0"/>
-                <a:ea typeface="PT Serif" pitchFamily="34" charset="-122"/>
-                <a:cs typeface="PT Serif" pitchFamily="34" charset="-120"/>
+                <a:latin typeface="PT Serif" panose="020A0603040505020204" pitchFamily="34" charset="0"/>
+                <a:ea typeface="PT Serif" panose="020A0603040505020204" pitchFamily="34" charset="-122"/>
+                <a:cs typeface="PT Serif" panose="020A0603040505020204" pitchFamily="34" charset="-120"/>
               </a:rPr>
               <a:t>(на примере Школы перманентного макияжа «Ли Белекмы»)</a:t>
             </a:r>
@@ -2294,7 +2153,6 @@
           <a:solidFill>
             <a:srgbClr val="B08D3E"/>
           </a:solidFill>
-          <a:ln/>
         </p:spPr>
         <p:txBody>
           <a:bodyPr/>
@@ -2316,13 +2174,12 @@
             <a:avLst/>
           </a:prstGeom>
           <a:noFill/>
-          <a:ln/>
         </p:spPr>
         <p:txBody>
           <a:bodyPr wrap="square" lIns="0" tIns="0" rIns="0" bIns="0" rtlCol="0" anchor="ctr"/>
           <a:lstStyle/>
           <a:p>
-            <a:pPr algn="ctr" indent="0" marL="0">
+            <a:pPr marL="0" indent="0" algn="ctr">
               <a:buNone/>
             </a:pPr>
             <a:r>
@@ -2330,23 +2187,20 @@
                 <a:solidFill>
                   <a:srgbClr val="92A4C0"/>
                 </a:solidFill>
-                <a:latin typeface="PT Sans" pitchFamily="34" charset="0"/>
-                <a:ea typeface="PT Sans" pitchFamily="34" charset="-122"/>
-                <a:cs typeface="PT Sans" pitchFamily="34" charset="-120"/>
+                <a:latin typeface="PT Sans" panose="020B0503020203020204" pitchFamily="34" charset="0"/>
+                <a:ea typeface="PT Sans" panose="020B0503020203020204" pitchFamily="34" charset="-122"/>
+                <a:cs typeface="PT Sans" panose="020B0503020203020204" pitchFamily="34" charset="-120"/>
               </a:rPr>
               <a:t>Выполнил(а):  </a:t>
             </a:r>
-            <a:pPr algn="ctr" indent="0" marL="0">
-              <a:buNone/>
-            </a:pPr>
             <a:r>
               <a:rPr lang="en-US" sz="1500" b="1" dirty="0">
                 <a:solidFill>
                   <a:srgbClr val="FFFFFF"/>
                 </a:solidFill>
-                <a:latin typeface="PT Sans" pitchFamily="34" charset="0"/>
-                <a:ea typeface="PT Sans" pitchFamily="34" charset="-122"/>
-                <a:cs typeface="PT Sans" pitchFamily="34" charset="-120"/>
+                <a:latin typeface="PT Sans" panose="020B0503020203020204" pitchFamily="34" charset="0"/>
+                <a:ea typeface="PT Sans" panose="020B0503020203020204" pitchFamily="34" charset="-122"/>
+                <a:cs typeface="PT Sans" panose="020B0503020203020204" pitchFamily="34" charset="-120"/>
               </a:rPr>
               <a:t>[ФИО автора]</a:t>
             </a:r>
@@ -2369,13 +2223,12 @@
             <a:avLst/>
           </a:prstGeom>
           <a:noFill/>
-          <a:ln/>
         </p:spPr>
         <p:txBody>
           <a:bodyPr wrap="square" lIns="0" tIns="0" rIns="0" bIns="0" rtlCol="0" anchor="ctr"/>
           <a:lstStyle/>
           <a:p>
-            <a:pPr algn="ctr" indent="0" marL="0">
+            <a:pPr marL="0" indent="0" algn="ctr">
               <a:buNone/>
             </a:pPr>
             <a:r>
@@ -2383,23 +2236,20 @@
                 <a:solidFill>
                   <a:srgbClr val="92A4C0"/>
                 </a:solidFill>
-                <a:latin typeface="PT Sans" pitchFamily="34" charset="0"/>
-                <a:ea typeface="PT Sans" pitchFamily="34" charset="-122"/>
-                <a:cs typeface="PT Sans" pitchFamily="34" charset="-120"/>
+                <a:latin typeface="PT Sans" panose="020B0503020203020204" pitchFamily="34" charset="0"/>
+                <a:ea typeface="PT Sans" panose="020B0503020203020204" pitchFamily="34" charset="-122"/>
+                <a:cs typeface="PT Sans" panose="020B0503020203020204" pitchFamily="34" charset="-120"/>
               </a:rPr>
               <a:t>Руководитель:  </a:t>
             </a:r>
-            <a:pPr algn="ctr" indent="0" marL="0">
-              <a:buNone/>
-            </a:pPr>
             <a:r>
               <a:rPr lang="en-US" sz="1500" b="1" dirty="0">
                 <a:solidFill>
                   <a:srgbClr val="FFFFFF"/>
                 </a:solidFill>
-                <a:latin typeface="PT Sans" pitchFamily="34" charset="0"/>
-                <a:ea typeface="PT Sans" pitchFamily="34" charset="-122"/>
-                <a:cs typeface="PT Sans" pitchFamily="34" charset="-120"/>
+                <a:latin typeface="PT Sans" panose="020B0503020203020204" pitchFamily="34" charset="0"/>
+                <a:ea typeface="PT Sans" panose="020B0503020203020204" pitchFamily="34" charset="-122"/>
+                <a:cs typeface="PT Sans" panose="020B0503020203020204" pitchFamily="34" charset="-120"/>
               </a:rPr>
               <a:t>[ФИО руководителя]</a:t>
             </a:r>
@@ -2422,13 +2272,12 @@
             <a:avLst/>
           </a:prstGeom>
           <a:noFill/>
-          <a:ln/>
         </p:spPr>
         <p:txBody>
           <a:bodyPr wrap="square" lIns="0" tIns="0" rIns="0" bIns="0" rtlCol="0" anchor="ctr"/>
           <a:lstStyle/>
           <a:p>
-            <a:pPr algn="ctr" indent="0" marL="0">
+            <a:pPr marL="0" indent="0" algn="ctr">
               <a:buNone/>
             </a:pPr>
             <a:r>
@@ -2436,9 +2285,9 @@
                 <a:solidFill>
                   <a:srgbClr val="92A4C0"/>
                 </a:solidFill>
-                <a:latin typeface="PT Sans" pitchFamily="34" charset="0"/>
-                <a:ea typeface="PT Sans" pitchFamily="34" charset="-122"/>
-                <a:cs typeface="PT Sans" pitchFamily="34" charset="-120"/>
+                <a:latin typeface="PT Sans" panose="020B0503020203020204" pitchFamily="34" charset="0"/>
+                <a:ea typeface="PT Sans" panose="020B0503020203020204" pitchFamily="34" charset="-122"/>
+                <a:cs typeface="PT Sans" panose="020B0503020203020204" pitchFamily="34" charset="-120"/>
               </a:rPr>
               <a:t>Направление 09.03.03 «Прикладная информатика»</a:t>
             </a:r>
@@ -2461,13 +2310,12 @@
             <a:avLst/>
           </a:prstGeom>
           <a:noFill/>
-          <a:ln/>
         </p:spPr>
         <p:txBody>
           <a:bodyPr wrap="square" lIns="0" tIns="0" rIns="0" bIns="0" rtlCol="0" anchor="ctr"/>
           <a:lstStyle/>
           <a:p>
-            <a:pPr algn="ctr" indent="0" marL="0">
+            <a:pPr marL="0" indent="0" algn="ctr">
               <a:buNone/>
             </a:pPr>
             <a:r>
@@ -2475,9 +2323,9 @@
                 <a:solidFill>
                   <a:srgbClr val="C6D6EC"/>
                 </a:solidFill>
-                <a:latin typeface="PT Serif" pitchFamily="34" charset="0"/>
-                <a:ea typeface="PT Serif" pitchFamily="34" charset="-122"/>
-                <a:cs typeface="PT Serif" pitchFamily="34" charset="-120"/>
+                <a:latin typeface="PT Serif" panose="020A0603040505020204" pitchFamily="34" charset="0"/>
+                <a:ea typeface="PT Serif" panose="020A0603040505020204" pitchFamily="34" charset="-122"/>
+                <a:cs typeface="PT Serif" panose="020A0603040505020204" pitchFamily="34" charset="-120"/>
               </a:rPr>
               <a:t>Улан-Удэ · 2026</a:t>
             </a:r>
@@ -2495,12 +2343,13 @@
 
 <file path=ppt/slides/slide10.xml><?xml version="1.0" encoding="utf-8"?>
 <p:sld xmlns:a="http://schemas.openxmlformats.org/drawingml/2006/main" xmlns:r="http://schemas.openxmlformats.org/officeDocument/2006/relationships" xmlns:p="http://schemas.openxmlformats.org/presentationml/2006/main">
-  <p:cSld name="Slide 9">
+  <p:cSld>
     <p:bg>
       <p:bgPr>
         <a:solidFill>
           <a:srgbClr val="FFFFFF"/>
         </a:solidFill>
+        <a:effectLst/>
       </p:bgPr>
     </p:bg>
     <p:spTree>
@@ -2534,7 +2383,6 @@
           <a:solidFill>
             <a:srgbClr val="B08D3E"/>
           </a:solidFill>
-          <a:ln/>
         </p:spPr>
         <p:txBody>
           <a:bodyPr/>
@@ -2556,23 +2404,22 @@
             <a:avLst/>
           </a:prstGeom>
           <a:noFill/>
-          <a:ln/>
         </p:spPr>
         <p:txBody>
           <a:bodyPr wrap="square" lIns="0" tIns="0" rIns="0" bIns="0" rtlCol="0" anchor="ctr"/>
           <a:lstStyle/>
           <a:p>
-            <a:pPr indent="0" marL="0">
-              <a:buNone/>
-            </a:pPr>
-            <a:r>
-              <a:rPr lang="en-US" sz="1250" b="1" spc="300" kern="0" dirty="0">
+            <a:pPr marL="0" indent="0">
+              <a:buNone/>
+            </a:pPr>
+            <a:r>
+              <a:rPr lang="en-US" sz="1250" b="1" kern="0" spc="300" dirty="0">
                 <a:solidFill>
                   <a:srgbClr val="B08D3E"/>
                 </a:solidFill>
-                <a:latin typeface="PT Sans" pitchFamily="34" charset="0"/>
-                <a:ea typeface="PT Sans" pitchFamily="34" charset="-122"/>
-                <a:cs typeface="PT Sans" pitchFamily="34" charset="-120"/>
+                <a:latin typeface="PT Sans" panose="020B0503020203020204" pitchFamily="34" charset="0"/>
+                <a:ea typeface="PT Sans" panose="020B0503020203020204" pitchFamily="34" charset="-122"/>
+                <a:cs typeface="PT Sans" panose="020B0503020203020204" pitchFamily="34" charset="-120"/>
               </a:rPr>
               <a:t>ПРОЕКТИРОВАНИЕ · ЛОГИКА</a:t>
             </a:r>
@@ -2595,13 +2442,12 @@
             <a:avLst/>
           </a:prstGeom>
           <a:noFill/>
-          <a:ln/>
         </p:spPr>
         <p:txBody>
           <a:bodyPr wrap="square" lIns="0" tIns="0" rIns="0" bIns="0" rtlCol="0" anchor="ctr"/>
           <a:lstStyle/>
           <a:p>
-            <a:pPr indent="0" marL="0">
+            <a:pPr marL="0" indent="0">
               <a:buNone/>
             </a:pPr>
             <a:r>
@@ -2609,9 +2455,9 @@
                 <a:solidFill>
                   <a:srgbClr val="1E3A5F"/>
                 </a:solidFill>
-                <a:latin typeface="PT Serif" pitchFamily="34" charset="0"/>
-                <a:ea typeface="PT Serif" pitchFamily="34" charset="-122"/>
-                <a:cs typeface="PT Serif" pitchFamily="34" charset="-120"/>
+                <a:latin typeface="PT Serif" panose="020A0603040505020204" pitchFamily="34" charset="0"/>
+                <a:ea typeface="PT Serif" panose="020A0603040505020204" pitchFamily="34" charset="-122"/>
+                <a:cs typeface="PT Serif" panose="020A0603040505020204" pitchFamily="34" charset="-120"/>
               </a:rPr>
               <a:t>Логика обработки и роли</a:t>
             </a:r>
@@ -2643,7 +2489,7 @@
             <a:prstDash val="solid"/>
           </a:ln>
           <a:effectLst>
-            <a:outerShdw sx="100000" sy="100000" kx="0" ky="0" algn="bl" rotWithShape="0" blurRad="101600" dist="38100" dir="5400000">
+            <a:outerShdw blurRad="101600" dist="38100" dir="5400000" algn="bl" rotWithShape="0">
               <a:srgbClr val="8499B5">
                 <a:alpha val="22000"/>
               </a:srgbClr>
@@ -2657,7 +2503,7 @@
       </p:sp>
       <p:pic>
         <p:nvPicPr>
-          <p:cNvPr id="6" name="Image 0" descr="/Users/m/Documents/VKR_Stats/build/img_final/image13.png">    </p:cNvPr>
+          <p:cNvPr id="6" name="Image 0" descr="/Users/m/Documents/VKR_Stats/build/img_final/image13.png"/>
           <p:cNvPicPr>
             <a:picLocks noChangeAspect="1"/>
           </p:cNvPicPr>
@@ -2694,13 +2540,12 @@
             <a:avLst/>
           </a:prstGeom>
           <a:noFill/>
-          <a:ln/>
         </p:spPr>
         <p:txBody>
           <a:bodyPr wrap="square" lIns="0" tIns="0" rIns="0" bIns="0" rtlCol="0" anchor="t"/>
           <a:lstStyle/>
           <a:p>
-            <a:pPr algn="ctr" indent="0" marL="0">
+            <a:pPr marL="0" indent="0" algn="ctr">
               <a:buNone/>
             </a:pPr>
             <a:r>
@@ -2708,9 +2553,9 @@
                 <a:solidFill>
                   <a:srgbClr val="657384"/>
                 </a:solidFill>
-                <a:latin typeface="PT Sans" pitchFamily="34" charset="0"/>
-                <a:ea typeface="PT Sans" pitchFamily="34" charset="-122"/>
-                <a:cs typeface="PT Sans" pitchFamily="34" charset="-120"/>
+                <a:latin typeface="PT Sans" panose="020B0503020203020204" pitchFamily="34" charset="0"/>
+                <a:ea typeface="PT Sans" panose="020B0503020203020204" pitchFamily="34" charset="-122"/>
+                <a:cs typeface="PT Sans" panose="020B0503020203020204" pitchFamily="34" charset="-120"/>
               </a:rPr>
               <a:t>EPC: обработка заявки клиента</a:t>
             </a:r>
@@ -2742,7 +2587,7 @@
             <a:prstDash val="solid"/>
           </a:ln>
           <a:effectLst>
-            <a:outerShdw sx="100000" sy="100000" kx="0" ky="0" algn="bl" rotWithShape="0" blurRad="101600" dist="38100" dir="5400000">
+            <a:outerShdw blurRad="101600" dist="38100" dir="5400000" algn="bl" rotWithShape="0">
               <a:srgbClr val="8499B5">
                 <a:alpha val="22000"/>
               </a:srgbClr>
@@ -2756,7 +2601,7 @@
       </p:sp>
       <p:pic>
         <p:nvPicPr>
-          <p:cNvPr id="9" name="Image 1" descr="/Users/m/Documents/VKR_Stats/build/img_final/image14.png">    </p:cNvPr>
+          <p:cNvPr id="9" name="Image 1" descr="/Users/m/Documents/VKR_Stats/build/img_final/image14.png"/>
           <p:cNvPicPr>
             <a:picLocks noChangeAspect="1"/>
           </p:cNvPicPr>
@@ -2793,13 +2638,12 @@
             <a:avLst/>
           </a:prstGeom>
           <a:noFill/>
-          <a:ln/>
         </p:spPr>
         <p:txBody>
           <a:bodyPr wrap="square" lIns="0" tIns="0" rIns="0" bIns="0" rtlCol="0" anchor="t"/>
           <a:lstStyle/>
           <a:p>
-            <a:pPr algn="ctr" indent="0" marL="0">
+            <a:pPr marL="0" indent="0" algn="ctr">
               <a:buNone/>
             </a:pPr>
             <a:r>
@@ -2807,9 +2651,9 @@
                 <a:solidFill>
                   <a:srgbClr val="657384"/>
                 </a:solidFill>
-                <a:latin typeface="PT Sans" pitchFamily="34" charset="0"/>
-                <a:ea typeface="PT Sans" pitchFamily="34" charset="-122"/>
-                <a:cs typeface="PT Sans" pitchFamily="34" charset="-120"/>
+                <a:latin typeface="PT Sans" panose="020B0503020203020204" pitchFamily="34" charset="0"/>
+                <a:ea typeface="PT Sans" panose="020B0503020203020204" pitchFamily="34" charset="-122"/>
+                <a:cs typeface="PT Sans" panose="020B0503020203020204" pitchFamily="34" charset="-120"/>
               </a:rPr>
               <a:t>UML use-case: роли пользователей</a:t>
             </a:r>
@@ -2841,7 +2685,7 @@
             <a:prstDash val="solid"/>
           </a:ln>
           <a:effectLst>
-            <a:outerShdw sx="100000" sy="100000" kx="0" ky="0" algn="bl" rotWithShape="0" blurRad="101600" dist="38100" dir="5400000">
+            <a:outerShdw blurRad="101600" dist="38100" dir="5400000" algn="bl" rotWithShape="0">
               <a:srgbClr val="8499B5">
                 <a:alpha val="22000"/>
               </a:srgbClr>
@@ -2870,7 +2714,6 @@
           <a:solidFill>
             <a:srgbClr val="1E3A5F"/>
           </a:solidFill>
-          <a:ln/>
         </p:spPr>
         <p:txBody>
           <a:bodyPr/>
@@ -2894,7 +2737,6 @@
           <a:solidFill>
             <a:srgbClr val="1E3A5F"/>
           </a:solidFill>
-          <a:ln/>
         </p:spPr>
         <p:txBody>
           <a:bodyPr/>
@@ -2903,7 +2745,7 @@
       </p:sp>
       <p:pic>
         <p:nvPicPr>
-          <p:cNvPr id="14" name="Image 2" descr="preencoded.png">    </p:cNvPr>
+          <p:cNvPr id="14" name="Image 2" descr="preencoded.png"/>
           <p:cNvPicPr>
             <a:picLocks noChangeAspect="1"/>
           </p:cNvPicPr>
@@ -2940,13 +2782,12 @@
             <a:avLst/>
           </a:prstGeom>
           <a:noFill/>
-          <a:ln/>
         </p:spPr>
         <p:txBody>
           <a:bodyPr wrap="square" lIns="0" tIns="0" rIns="0" bIns="0" rtlCol="0" anchor="ctr"/>
           <a:lstStyle/>
           <a:p>
-            <a:pPr algn="ctr" indent="0" marL="0">
+            <a:pPr marL="0" indent="0" algn="ctr">
               <a:buNone/>
             </a:pPr>
             <a:r>
@@ -2954,9 +2795,9 @@
                 <a:solidFill>
                   <a:srgbClr val="1E3A5F"/>
                 </a:solidFill>
-                <a:latin typeface="PT Sans" pitchFamily="34" charset="0"/>
-                <a:ea typeface="PT Sans" pitchFamily="34" charset="-122"/>
-                <a:cs typeface="PT Sans" pitchFamily="34" charset="-120"/>
+                <a:latin typeface="PT Sans" panose="020B0503020203020204" pitchFamily="34" charset="0"/>
+                <a:ea typeface="PT Sans" panose="020B0503020203020204" pitchFamily="34" charset="-122"/>
+                <a:cs typeface="PT Sans" panose="020B0503020203020204" pitchFamily="34" charset="-120"/>
               </a:rPr>
               <a:t>Менеджер</a:t>
             </a:r>
@@ -2979,13 +2820,12 @@
             <a:avLst/>
           </a:prstGeom>
           <a:noFill/>
-          <a:ln/>
         </p:spPr>
         <p:txBody>
           <a:bodyPr wrap="square" lIns="0" tIns="0" rIns="0" bIns="0" rtlCol="0" anchor="t"/>
           <a:lstStyle/>
           <a:p>
-            <a:pPr algn="ctr" indent="0" marL="0">
+            <a:pPr marL="0" indent="0" algn="ctr">
               <a:buNone/>
             </a:pPr>
             <a:r>
@@ -2993,9 +2833,9 @@
                 <a:solidFill>
                   <a:srgbClr val="657384"/>
                 </a:solidFill>
-                <a:latin typeface="PT Sans" pitchFamily="34" charset="0"/>
-                <a:ea typeface="PT Sans" pitchFamily="34" charset="-122"/>
-                <a:cs typeface="PT Sans" pitchFamily="34" charset="-120"/>
+                <a:latin typeface="PT Sans" panose="020B0503020203020204" pitchFamily="34" charset="0"/>
+                <a:ea typeface="PT Sans" panose="020B0503020203020204" pitchFamily="34" charset="-122"/>
+                <a:cs typeface="PT Sans" panose="020B0503020203020204" pitchFamily="34" charset="-120"/>
               </a:rPr>
               <a:t>запись, контроль, отчёты</a:t>
             </a:r>
@@ -3027,7 +2867,7 @@
             <a:prstDash val="solid"/>
           </a:ln>
           <a:effectLst>
-            <a:outerShdw sx="100000" sy="100000" kx="0" ky="0" algn="bl" rotWithShape="0" blurRad="101600" dist="38100" dir="5400000">
+            <a:outerShdw blurRad="101600" dist="38100" dir="5400000" algn="bl" rotWithShape="0">
               <a:srgbClr val="8499B5">
                 <a:alpha val="22000"/>
               </a:srgbClr>
@@ -3056,7 +2896,6 @@
           <a:solidFill>
             <a:srgbClr val="1E3A5F"/>
           </a:solidFill>
-          <a:ln/>
         </p:spPr>
         <p:txBody>
           <a:bodyPr/>
@@ -3080,7 +2919,6 @@
           <a:solidFill>
             <a:srgbClr val="1E3A5F"/>
           </a:solidFill>
-          <a:ln/>
         </p:spPr>
         <p:txBody>
           <a:bodyPr/>
@@ -3089,7 +2927,7 @@
       </p:sp>
       <p:pic>
         <p:nvPicPr>
-          <p:cNvPr id="20" name="Image 3" descr="preencoded.png">    </p:cNvPr>
+          <p:cNvPr id="20" name="Image 3" descr="preencoded.png"/>
           <p:cNvPicPr>
             <a:picLocks noChangeAspect="1"/>
           </p:cNvPicPr>
@@ -3126,13 +2964,12 @@
             <a:avLst/>
           </a:prstGeom>
           <a:noFill/>
-          <a:ln/>
         </p:spPr>
         <p:txBody>
           <a:bodyPr wrap="square" lIns="0" tIns="0" rIns="0" bIns="0" rtlCol="0" anchor="ctr"/>
           <a:lstStyle/>
           <a:p>
-            <a:pPr algn="ctr" indent="0" marL="0">
+            <a:pPr marL="0" indent="0" algn="ctr">
               <a:buNone/>
             </a:pPr>
             <a:r>
@@ -3140,9 +2977,9 @@
                 <a:solidFill>
                   <a:srgbClr val="1E3A5F"/>
                 </a:solidFill>
-                <a:latin typeface="PT Sans" pitchFamily="34" charset="0"/>
-                <a:ea typeface="PT Sans" pitchFamily="34" charset="-122"/>
-                <a:cs typeface="PT Sans" pitchFamily="34" charset="-120"/>
+                <a:latin typeface="PT Sans" panose="020B0503020203020204" pitchFamily="34" charset="0"/>
+                <a:ea typeface="PT Sans" panose="020B0503020203020204" pitchFamily="34" charset="-122"/>
+                <a:cs typeface="PT Sans" panose="020B0503020203020204" pitchFamily="34" charset="-120"/>
               </a:rPr>
               <a:t>Мастер</a:t>
             </a:r>
@@ -3165,13 +3002,12 @@
             <a:avLst/>
           </a:prstGeom>
           <a:noFill/>
-          <a:ln/>
         </p:spPr>
         <p:txBody>
           <a:bodyPr wrap="square" lIns="0" tIns="0" rIns="0" bIns="0" rtlCol="0" anchor="t"/>
           <a:lstStyle/>
           <a:p>
-            <a:pPr algn="ctr" indent="0" marL="0">
+            <a:pPr marL="0" indent="0" algn="ctr">
               <a:buNone/>
             </a:pPr>
             <a:r>
@@ -3179,9 +3015,9 @@
                 <a:solidFill>
                   <a:srgbClr val="657384"/>
                 </a:solidFill>
-                <a:latin typeface="PT Sans" pitchFamily="34" charset="0"/>
-                <a:ea typeface="PT Sans" pitchFamily="34" charset="-122"/>
-                <a:cs typeface="PT Sans" pitchFamily="34" charset="-120"/>
+                <a:latin typeface="PT Sans" panose="020B0503020203020204" pitchFamily="34" charset="0"/>
+                <a:ea typeface="PT Sans" panose="020B0503020203020204" pitchFamily="34" charset="-122"/>
+                <a:cs typeface="PT Sans" panose="020B0503020203020204" pitchFamily="34" charset="-120"/>
               </a:rPr>
               <a:t>свой график, статусы</a:t>
             </a:r>
@@ -3213,7 +3049,7 @@
             <a:prstDash val="solid"/>
           </a:ln>
           <a:effectLst>
-            <a:outerShdw sx="100000" sy="100000" kx="0" ky="0" algn="bl" rotWithShape="0" blurRad="101600" dist="38100" dir="5400000">
+            <a:outerShdw blurRad="101600" dist="38100" dir="5400000" algn="bl" rotWithShape="0">
               <a:srgbClr val="8499B5">
                 <a:alpha val="22000"/>
               </a:srgbClr>
@@ -3242,7 +3078,6 @@
           <a:solidFill>
             <a:srgbClr val="1E3A5F"/>
           </a:solidFill>
-          <a:ln/>
         </p:spPr>
         <p:txBody>
           <a:bodyPr/>
@@ -3266,7 +3101,6 @@
           <a:solidFill>
             <a:srgbClr val="1E3A5F"/>
           </a:solidFill>
-          <a:ln/>
         </p:spPr>
         <p:txBody>
           <a:bodyPr/>
@@ -3275,7 +3109,7 @@
       </p:sp>
       <p:pic>
         <p:nvPicPr>
-          <p:cNvPr id="26" name="Image 4" descr="preencoded.png">    </p:cNvPr>
+          <p:cNvPr id="26" name="Image 4" descr="preencoded.png"/>
           <p:cNvPicPr>
             <a:picLocks noChangeAspect="1"/>
           </p:cNvPicPr>
@@ -3312,13 +3146,12 @@
             <a:avLst/>
           </a:prstGeom>
           <a:noFill/>
-          <a:ln/>
         </p:spPr>
         <p:txBody>
           <a:bodyPr wrap="square" lIns="0" tIns="0" rIns="0" bIns="0" rtlCol="0" anchor="ctr"/>
           <a:lstStyle/>
           <a:p>
-            <a:pPr algn="ctr" indent="0" marL="0">
+            <a:pPr marL="0" indent="0" algn="ctr">
               <a:buNone/>
             </a:pPr>
             <a:r>
@@ -3326,9 +3159,9 @@
                 <a:solidFill>
                   <a:srgbClr val="1E3A5F"/>
                 </a:solidFill>
-                <a:latin typeface="PT Sans" pitchFamily="34" charset="0"/>
-                <a:ea typeface="PT Sans" pitchFamily="34" charset="-122"/>
-                <a:cs typeface="PT Sans" pitchFamily="34" charset="-120"/>
+                <a:latin typeface="PT Sans" panose="020B0503020203020204" pitchFamily="34" charset="0"/>
+                <a:ea typeface="PT Sans" panose="020B0503020203020204" pitchFamily="34" charset="-122"/>
+                <a:cs typeface="PT Sans" panose="020B0503020203020204" pitchFamily="34" charset="-120"/>
               </a:rPr>
               <a:t>Руководитель</a:t>
             </a:r>
@@ -3351,13 +3184,12 @@
             <a:avLst/>
           </a:prstGeom>
           <a:noFill/>
-          <a:ln/>
         </p:spPr>
         <p:txBody>
           <a:bodyPr wrap="square" lIns="0" tIns="0" rIns="0" bIns="0" rtlCol="0" anchor="t"/>
           <a:lstStyle/>
           <a:p>
-            <a:pPr algn="ctr" indent="0" marL="0">
+            <a:pPr marL="0" indent="0" algn="ctr">
               <a:buNone/>
             </a:pPr>
             <a:r>
@@ -3365,9 +3197,9 @@
                 <a:solidFill>
                   <a:srgbClr val="657384"/>
                 </a:solidFill>
-                <a:latin typeface="PT Sans" pitchFamily="34" charset="0"/>
-                <a:ea typeface="PT Sans" pitchFamily="34" charset="-122"/>
-                <a:cs typeface="PT Sans" pitchFamily="34" charset="-120"/>
+                <a:latin typeface="PT Sans" panose="020B0503020203020204" pitchFamily="34" charset="0"/>
+                <a:ea typeface="PT Sans" panose="020B0503020203020204" pitchFamily="34" charset="-122"/>
+                <a:cs typeface="PT Sans" panose="020B0503020203020204" pitchFamily="34" charset="-120"/>
               </a:rPr>
               <a:t>сводки и показатели</a:t>
             </a:r>
@@ -3417,13 +3249,12 @@
             <a:avLst/>
           </a:prstGeom>
           <a:noFill/>
-          <a:ln/>
         </p:spPr>
         <p:txBody>
           <a:bodyPr wrap="square" lIns="0" tIns="0" rIns="0" bIns="0" rtlCol="0" anchor="ctr"/>
           <a:lstStyle/>
           <a:p>
-            <a:pPr indent="0" marL="0">
+            <a:pPr marL="0" indent="0">
               <a:buNone/>
             </a:pPr>
             <a:r>
@@ -3431,9 +3262,9 @@
                 <a:solidFill>
                   <a:srgbClr val="657384"/>
                 </a:solidFill>
-                <a:latin typeface="PT Sans" pitchFamily="34" charset="0"/>
-                <a:ea typeface="PT Sans" pitchFamily="34" charset="-122"/>
-                <a:cs typeface="PT Sans" pitchFamily="34" charset="-120"/>
+                <a:latin typeface="PT Sans" panose="020B0503020203020204" pitchFamily="34" charset="0"/>
+                <a:ea typeface="PT Sans" panose="020B0503020203020204" pitchFamily="34" charset="-122"/>
+                <a:cs typeface="PT Sans" panose="020B0503020203020204" pitchFamily="34" charset="-120"/>
               </a:rPr>
               <a:t>АРМ менеджера салона красоты  ·  ВСГУТУ  ·  Улан-Удэ, 2026</a:t>
             </a:r>
@@ -3456,13 +3287,12 @@
             <a:avLst/>
           </a:prstGeom>
           <a:noFill/>
-          <a:ln/>
         </p:spPr>
         <p:txBody>
           <a:bodyPr wrap="square" lIns="0" tIns="0" rIns="0" bIns="0" rtlCol="0" anchor="ctr"/>
           <a:lstStyle/>
           <a:p>
-            <a:pPr algn="r" indent="0" marL="0">
+            <a:pPr marL="0" indent="0" algn="r">
               <a:buNone/>
             </a:pPr>
             <a:r>
@@ -3470,9 +3300,9 @@
                 <a:solidFill>
                   <a:srgbClr val="657384"/>
                 </a:solidFill>
-                <a:latin typeface="PT Sans" pitchFamily="34" charset="0"/>
-                <a:ea typeface="PT Sans" pitchFamily="34" charset="-122"/>
-                <a:cs typeface="PT Sans" pitchFamily="34" charset="-120"/>
+                <a:latin typeface="PT Sans" panose="020B0503020203020204" pitchFamily="34" charset="0"/>
+                <a:ea typeface="PT Sans" panose="020B0503020203020204" pitchFamily="34" charset="-122"/>
+                <a:cs typeface="PT Sans" panose="020B0503020203020204" pitchFamily="34" charset="-120"/>
               </a:rPr>
               <a:t>10 / 15</a:t>
             </a:r>
@@ -3490,12 +3320,13 @@
 
 <file path=ppt/slides/slide11.xml><?xml version="1.0" encoding="utf-8"?>
 <p:sld xmlns:a="http://schemas.openxmlformats.org/drawingml/2006/main" xmlns:r="http://schemas.openxmlformats.org/officeDocument/2006/relationships" xmlns:p="http://schemas.openxmlformats.org/presentationml/2006/main">
-  <p:cSld name="Slide 10">
+  <p:cSld>
     <p:bg>
       <p:bgPr>
         <a:solidFill>
           <a:srgbClr val="FFFFFF"/>
         </a:solidFill>
+        <a:effectLst/>
       </p:bgPr>
     </p:bg>
     <p:spTree>
@@ -3529,7 +3360,6 @@
           <a:solidFill>
             <a:srgbClr val="B08D3E"/>
           </a:solidFill>
-          <a:ln/>
         </p:spPr>
         <p:txBody>
           <a:bodyPr/>
@@ -3551,23 +3381,22 @@
             <a:avLst/>
           </a:prstGeom>
           <a:noFill/>
-          <a:ln/>
         </p:spPr>
         <p:txBody>
           <a:bodyPr wrap="square" lIns="0" tIns="0" rIns="0" bIns="0" rtlCol="0" anchor="ctr"/>
           <a:lstStyle/>
           <a:p>
-            <a:pPr indent="0" marL="0">
-              <a:buNone/>
-            </a:pPr>
-            <a:r>
-              <a:rPr lang="en-US" sz="1250" b="1" spc="300" kern="0" dirty="0">
+            <a:pPr marL="0" indent="0">
+              <a:buNone/>
+            </a:pPr>
+            <a:r>
+              <a:rPr lang="en-US" sz="1250" b="1" kern="0" spc="300" dirty="0">
                 <a:solidFill>
                   <a:srgbClr val="B08D3E"/>
                 </a:solidFill>
-                <a:latin typeface="PT Sans" pitchFamily="34" charset="0"/>
-                <a:ea typeface="PT Sans" pitchFamily="34" charset="-122"/>
-                <a:cs typeface="PT Sans" pitchFamily="34" charset="-120"/>
+                <a:latin typeface="PT Sans" panose="020B0503020203020204" pitchFamily="34" charset="0"/>
+                <a:ea typeface="PT Sans" panose="020B0503020203020204" pitchFamily="34" charset="-122"/>
+                <a:cs typeface="PT Sans" panose="020B0503020203020204" pitchFamily="34" charset="-120"/>
               </a:rPr>
               <a:t>РЕШЕНИЕ</a:t>
             </a:r>
@@ -3590,13 +3419,12 @@
             <a:avLst/>
           </a:prstGeom>
           <a:noFill/>
-          <a:ln/>
         </p:spPr>
         <p:txBody>
           <a:bodyPr wrap="square" lIns="0" tIns="0" rIns="0" bIns="0" rtlCol="0" anchor="ctr"/>
           <a:lstStyle/>
           <a:p>
-            <a:pPr indent="0" marL="0">
+            <a:pPr marL="0" indent="0">
               <a:buNone/>
             </a:pPr>
             <a:r>
@@ -3604,9 +3432,9 @@
                 <a:solidFill>
                   <a:srgbClr val="1E3A5F"/>
                 </a:solidFill>
-                <a:latin typeface="PT Serif" pitchFamily="34" charset="0"/>
-                <a:ea typeface="PT Serif" pitchFamily="34" charset="-122"/>
-                <a:cs typeface="PT Serif" pitchFamily="34" charset="-120"/>
+                <a:latin typeface="PT Serif" panose="020A0603040505020204" pitchFamily="34" charset="0"/>
+                <a:ea typeface="PT Serif" panose="020A0603040505020204" pitchFamily="34" charset="-122"/>
+                <a:cs typeface="PT Serif" panose="020A0603040505020204" pitchFamily="34" charset="-120"/>
               </a:rPr>
               <a:t>АРМ на Excel: минимальная достаточность</a:t>
             </a:r>
@@ -3638,7 +3466,7 @@
             <a:prstDash val="solid"/>
           </a:ln>
           <a:effectLst>
-            <a:outerShdw sx="100000" sy="100000" kx="0" ky="0" algn="bl" rotWithShape="0" blurRad="101600" dist="38100" dir="5400000">
+            <a:outerShdw blurRad="101600" dist="38100" dir="5400000" algn="bl" rotWithShape="0">
               <a:srgbClr val="8499B5">
                 <a:alpha val="22000"/>
               </a:srgbClr>
@@ -3652,7 +3480,7 @@
       </p:sp>
       <p:pic>
         <p:nvPicPr>
-          <p:cNvPr id="6" name="Image 0" descr="/Users/m/Documents/VKR_Stats/build/img_final/image15.png">    </p:cNvPr>
+          <p:cNvPr id="6" name="Image 0" descr="/Users/m/Documents/VKR_Stats/build/img_final/image15.png"/>
           <p:cNvPicPr>
             <a:picLocks noChangeAspect="1"/>
           </p:cNvPicPr>
@@ -3689,13 +3517,12 @@
             <a:avLst/>
           </a:prstGeom>
           <a:noFill/>
-          <a:ln/>
         </p:spPr>
         <p:txBody>
           <a:bodyPr wrap="square" lIns="0" tIns="0" rIns="0" bIns="0" rtlCol="0" anchor="t"/>
           <a:lstStyle/>
           <a:p>
-            <a:pPr algn="ctr" indent="0" marL="0">
+            <a:pPr marL="0" indent="0" algn="ctr">
               <a:buNone/>
             </a:pPr>
             <a:r>
@@ -3703,9 +3530,9 @@
                 <a:solidFill>
                   <a:srgbClr val="657384"/>
                 </a:solidFill>
-                <a:latin typeface="PT Sans" pitchFamily="34" charset="0"/>
-                <a:ea typeface="PT Sans" pitchFamily="34" charset="-122"/>
-                <a:cs typeface="PT Sans" pitchFamily="34" charset="-120"/>
+                <a:latin typeface="PT Sans" panose="020B0503020203020204" pitchFamily="34" charset="0"/>
+                <a:ea typeface="PT Sans" panose="020B0503020203020204" pitchFamily="34" charset="-122"/>
+                <a:cs typeface="PT Sans" panose="020B0503020203020204" pitchFamily="34" charset="-120"/>
               </a:rPr>
               <a:t>Главный экран — навигация по листам и сводка дня</a:t>
             </a:r>
@@ -3737,7 +3564,7 @@
             <a:prstDash val="solid"/>
           </a:ln>
           <a:effectLst>
-            <a:outerShdw sx="100000" sy="100000" kx="0" ky="0" algn="bl" rotWithShape="0" blurRad="101600" dist="38100" dir="5400000">
+            <a:outerShdw blurRad="101600" dist="38100" dir="5400000" algn="bl" rotWithShape="0">
               <a:srgbClr val="8499B5">
                 <a:alpha val="22000"/>
               </a:srgbClr>
@@ -3766,7 +3593,6 @@
           <a:solidFill>
             <a:srgbClr val="1E3A5F"/>
           </a:solidFill>
-          <a:ln/>
         </p:spPr>
         <p:txBody>
           <a:bodyPr/>
@@ -3788,13 +3614,12 @@
             <a:avLst/>
           </a:prstGeom>
           <a:noFill/>
-          <a:ln/>
         </p:spPr>
         <p:txBody>
           <a:bodyPr wrap="square" lIns="0" tIns="0" rIns="0" bIns="0" rtlCol="0" anchor="ctr"/>
           <a:lstStyle/>
           <a:p>
-            <a:pPr indent="0" marL="0">
+            <a:pPr marL="0" indent="0">
               <a:buNone/>
             </a:pPr>
             <a:r>
@@ -3802,9 +3627,9 @@
                 <a:solidFill>
                   <a:srgbClr val="1E3A5F"/>
                 </a:solidFill>
-                <a:latin typeface="PT Serif" pitchFamily="34" charset="0"/>
-                <a:ea typeface="PT Serif" pitchFamily="34" charset="-122"/>
-                <a:cs typeface="PT Serif" pitchFamily="34" charset="-120"/>
+                <a:latin typeface="PT Serif" panose="020A0603040505020204" pitchFamily="34" charset="0"/>
+                <a:ea typeface="PT Serif" panose="020A0603040505020204" pitchFamily="34" charset="-122"/>
+                <a:cs typeface="PT Serif" panose="020A0603040505020204" pitchFamily="34" charset="-120"/>
               </a:rPr>
               <a:t>Состав</a:t>
             </a:r>
@@ -3827,13 +3652,12 @@
             <a:avLst/>
           </a:prstGeom>
           <a:noFill/>
-          <a:ln/>
         </p:spPr>
         <p:txBody>
           <a:bodyPr wrap="square" lIns="0" tIns="0" rIns="0" bIns="0" rtlCol="0" anchor="ctr"/>
           <a:lstStyle/>
           <a:p>
-            <a:pPr indent="0" marL="0">
+            <a:pPr marL="0" indent="0">
               <a:buNone/>
             </a:pPr>
             <a:r>
@@ -3841,9 +3665,9 @@
                 <a:solidFill>
                   <a:srgbClr val="657384"/>
                 </a:solidFill>
-                <a:latin typeface="PT Sans" pitchFamily="34" charset="0"/>
-                <a:ea typeface="PT Sans" pitchFamily="34" charset="-122"/>
-                <a:cs typeface="PT Sans" pitchFamily="34" charset="-120"/>
+                <a:latin typeface="PT Sans" panose="020B0503020203020204" pitchFamily="34" charset="0"/>
+                <a:ea typeface="PT Sans" panose="020B0503020203020204" pitchFamily="34" charset="-122"/>
+                <a:cs typeface="PT Sans" panose="020B0503020203020204" pitchFamily="34" charset="-120"/>
               </a:rPr>
               <a:t>главный экран + 8 рабочих листов</a:t>
             </a:r>
@@ -3897,13 +3721,12 @@
             <a:avLst/>
           </a:prstGeom>
           <a:noFill/>
-          <a:ln/>
         </p:spPr>
         <p:txBody>
           <a:bodyPr wrap="square" lIns="25400" tIns="25400" rIns="25400" bIns="25400" rtlCol="0" anchor="ctr"/>
           <a:lstStyle/>
           <a:p>
-            <a:pPr algn="ctr" indent="0" marL="0">
+            <a:pPr marL="0" indent="0" algn="ctr">
               <a:buNone/>
             </a:pPr>
             <a:r>
@@ -3911,9 +3734,9 @@
                 <a:solidFill>
                   <a:srgbClr val="B08D3E"/>
                 </a:solidFill>
-                <a:latin typeface="PT Sans" pitchFamily="34" charset="0"/>
-                <a:ea typeface="PT Sans" pitchFamily="34" charset="-122"/>
-                <a:cs typeface="PT Sans" pitchFamily="34" charset="-120"/>
+                <a:latin typeface="PT Sans" panose="020B0503020203020204" pitchFamily="34" charset="0"/>
+                <a:ea typeface="PT Sans" panose="020B0503020203020204" pitchFamily="34" charset="-122"/>
+                <a:cs typeface="PT Sans" panose="020B0503020203020204" pitchFamily="34" charset="-120"/>
               </a:rPr>
               <a:t>Главный экран</a:t>
             </a:r>
@@ -3967,13 +3790,12 @@
             <a:avLst/>
           </a:prstGeom>
           <a:noFill/>
-          <a:ln/>
         </p:spPr>
         <p:txBody>
           <a:bodyPr wrap="square" lIns="25400" tIns="25400" rIns="25400" bIns="25400" rtlCol="0" anchor="ctr"/>
           <a:lstStyle/>
           <a:p>
-            <a:pPr algn="ctr" indent="0" marL="0">
+            <a:pPr marL="0" indent="0" algn="ctr">
               <a:buNone/>
             </a:pPr>
             <a:r>
@@ -3981,9 +3803,9 @@
                 <a:solidFill>
                   <a:srgbClr val="1E3A5F"/>
                 </a:solidFill>
-                <a:latin typeface="PT Sans" pitchFamily="34" charset="0"/>
-                <a:ea typeface="PT Sans" pitchFamily="34" charset="-122"/>
-                <a:cs typeface="PT Sans" pitchFamily="34" charset="-120"/>
+                <a:latin typeface="PT Sans" panose="020B0503020203020204" pitchFamily="34" charset="0"/>
+                <a:ea typeface="PT Sans" panose="020B0503020203020204" pitchFamily="34" charset="-122"/>
+                <a:cs typeface="PT Sans" panose="020B0503020203020204" pitchFamily="34" charset="-120"/>
               </a:rPr>
               <a:t>Записи</a:t>
             </a:r>
@@ -4037,13 +3859,12 @@
             <a:avLst/>
           </a:prstGeom>
           <a:noFill/>
-          <a:ln/>
         </p:spPr>
         <p:txBody>
           <a:bodyPr wrap="square" lIns="25400" tIns="25400" rIns="25400" bIns="25400" rtlCol="0" anchor="ctr"/>
           <a:lstStyle/>
           <a:p>
-            <a:pPr algn="ctr" indent="0" marL="0">
+            <a:pPr marL="0" indent="0" algn="ctr">
               <a:buNone/>
             </a:pPr>
             <a:r>
@@ -4051,9 +3872,9 @@
                 <a:solidFill>
                   <a:srgbClr val="1E3A5F"/>
                 </a:solidFill>
-                <a:latin typeface="PT Sans" pitchFamily="34" charset="0"/>
-                <a:ea typeface="PT Sans" pitchFamily="34" charset="-122"/>
-                <a:cs typeface="PT Sans" pitchFamily="34" charset="-120"/>
+                <a:latin typeface="PT Sans" panose="020B0503020203020204" pitchFamily="34" charset="0"/>
+                <a:ea typeface="PT Sans" panose="020B0503020203020204" pitchFamily="34" charset="-122"/>
+                <a:cs typeface="PT Sans" panose="020B0503020203020204" pitchFamily="34" charset="-120"/>
               </a:rPr>
               <a:t>Мастера</a:t>
             </a:r>
@@ -4107,13 +3928,12 @@
             <a:avLst/>
           </a:prstGeom>
           <a:noFill/>
-          <a:ln/>
         </p:spPr>
         <p:txBody>
           <a:bodyPr wrap="square" lIns="25400" tIns="25400" rIns="25400" bIns="25400" rtlCol="0" anchor="ctr"/>
           <a:lstStyle/>
           <a:p>
-            <a:pPr algn="ctr" indent="0" marL="0">
+            <a:pPr marL="0" indent="0" algn="ctr">
               <a:buNone/>
             </a:pPr>
             <a:r>
@@ -4121,9 +3941,9 @@
                 <a:solidFill>
                   <a:srgbClr val="1E3A5F"/>
                 </a:solidFill>
-                <a:latin typeface="PT Sans" pitchFamily="34" charset="0"/>
-                <a:ea typeface="PT Sans" pitchFamily="34" charset="-122"/>
-                <a:cs typeface="PT Sans" pitchFamily="34" charset="-120"/>
+                <a:latin typeface="PT Sans" panose="020B0503020203020204" pitchFamily="34" charset="0"/>
+                <a:ea typeface="PT Sans" panose="020B0503020203020204" pitchFamily="34" charset="-122"/>
+                <a:cs typeface="PT Sans" panose="020B0503020203020204" pitchFamily="34" charset="-120"/>
               </a:rPr>
               <a:t>График</a:t>
             </a:r>
@@ -4177,13 +3997,12 @@
             <a:avLst/>
           </a:prstGeom>
           <a:noFill/>
-          <a:ln/>
         </p:spPr>
         <p:txBody>
           <a:bodyPr wrap="square" lIns="25400" tIns="25400" rIns="25400" bIns="25400" rtlCol="0" anchor="ctr"/>
           <a:lstStyle/>
           <a:p>
-            <a:pPr algn="ctr" indent="0" marL="0">
+            <a:pPr marL="0" indent="0" algn="ctr">
               <a:buNone/>
             </a:pPr>
             <a:r>
@@ -4191,9 +4010,9 @@
                 <a:solidFill>
                   <a:srgbClr val="1E3A5F"/>
                 </a:solidFill>
-                <a:latin typeface="PT Sans" pitchFamily="34" charset="0"/>
-                <a:ea typeface="PT Sans" pitchFamily="34" charset="-122"/>
-                <a:cs typeface="PT Sans" pitchFamily="34" charset="-120"/>
+                <a:latin typeface="PT Sans" panose="020B0503020203020204" pitchFamily="34" charset="0"/>
+                <a:ea typeface="PT Sans" panose="020B0503020203020204" pitchFamily="34" charset="-122"/>
+                <a:cs typeface="PT Sans" panose="020B0503020203020204" pitchFamily="34" charset="-120"/>
               </a:rPr>
               <a:t>Расходники</a:t>
             </a:r>
@@ -4247,13 +4066,12 @@
             <a:avLst/>
           </a:prstGeom>
           <a:noFill/>
-          <a:ln/>
         </p:spPr>
         <p:txBody>
           <a:bodyPr wrap="square" lIns="25400" tIns="25400" rIns="25400" bIns="25400" rtlCol="0" anchor="ctr"/>
           <a:lstStyle/>
           <a:p>
-            <a:pPr algn="ctr" indent="0" marL="0">
+            <a:pPr marL="0" indent="0" algn="ctr">
               <a:buNone/>
             </a:pPr>
             <a:r>
@@ -4261,9 +4079,9 @@
                 <a:solidFill>
                   <a:srgbClr val="1E3A5F"/>
                 </a:solidFill>
-                <a:latin typeface="PT Sans" pitchFamily="34" charset="0"/>
-                <a:ea typeface="PT Sans" pitchFamily="34" charset="-122"/>
-                <a:cs typeface="PT Sans" pitchFamily="34" charset="-120"/>
+                <a:latin typeface="PT Sans" panose="020B0503020203020204" pitchFamily="34" charset="0"/>
+                <a:ea typeface="PT Sans" panose="020B0503020203020204" pitchFamily="34" charset="-122"/>
+                <a:cs typeface="PT Sans" panose="020B0503020203020204" pitchFamily="34" charset="-120"/>
               </a:rPr>
               <a:t>Заказы</a:t>
             </a:r>
@@ -4317,13 +4135,12 @@
             <a:avLst/>
           </a:prstGeom>
           <a:noFill/>
-          <a:ln/>
         </p:spPr>
         <p:txBody>
           <a:bodyPr wrap="square" lIns="25400" tIns="25400" rIns="25400" bIns="25400" rtlCol="0" anchor="ctr"/>
           <a:lstStyle/>
           <a:p>
-            <a:pPr algn="ctr" indent="0" marL="0">
+            <a:pPr marL="0" indent="0" algn="ctr">
               <a:buNone/>
             </a:pPr>
             <a:r>
@@ -4331,9 +4148,9 @@
                 <a:solidFill>
                   <a:srgbClr val="1E3A5F"/>
                 </a:solidFill>
-                <a:latin typeface="PT Sans" pitchFamily="34" charset="0"/>
-                <a:ea typeface="PT Sans" pitchFamily="34" charset="-122"/>
-                <a:cs typeface="PT Sans" pitchFamily="34" charset="-120"/>
+                <a:latin typeface="PT Sans" panose="020B0503020203020204" pitchFamily="34" charset="0"/>
+                <a:ea typeface="PT Sans" panose="020B0503020203020204" pitchFamily="34" charset="-122"/>
+                <a:cs typeface="PT Sans" panose="020B0503020203020204" pitchFamily="34" charset="-120"/>
               </a:rPr>
               <a:t>Обучение</a:t>
             </a:r>
@@ -4387,13 +4204,12 @@
             <a:avLst/>
           </a:prstGeom>
           <a:noFill/>
-          <a:ln/>
         </p:spPr>
         <p:txBody>
           <a:bodyPr wrap="square" lIns="25400" tIns="25400" rIns="25400" bIns="25400" rtlCol="0" anchor="ctr"/>
           <a:lstStyle/>
           <a:p>
-            <a:pPr algn="ctr" indent="0" marL="0">
+            <a:pPr marL="0" indent="0" algn="ctr">
               <a:buNone/>
             </a:pPr>
             <a:r>
@@ -4401,9 +4217,9 @@
                 <a:solidFill>
                   <a:srgbClr val="1E3A5F"/>
                 </a:solidFill>
-                <a:latin typeface="PT Sans" pitchFamily="34" charset="0"/>
-                <a:ea typeface="PT Sans" pitchFamily="34" charset="-122"/>
-                <a:cs typeface="PT Sans" pitchFamily="34" charset="-120"/>
+                <a:latin typeface="PT Sans" panose="020B0503020203020204" pitchFamily="34" charset="0"/>
+                <a:ea typeface="PT Sans" panose="020B0503020203020204" pitchFamily="34" charset="-122"/>
+                <a:cs typeface="PT Sans" panose="020B0503020203020204" pitchFamily="34" charset="-120"/>
               </a:rPr>
               <a:t>Отчёты</a:t>
             </a:r>
@@ -4457,13 +4273,12 @@
             <a:avLst/>
           </a:prstGeom>
           <a:noFill/>
-          <a:ln/>
         </p:spPr>
         <p:txBody>
           <a:bodyPr wrap="square" lIns="25400" tIns="25400" rIns="25400" bIns="25400" rtlCol="0" anchor="ctr"/>
           <a:lstStyle/>
           <a:p>
-            <a:pPr algn="ctr" indent="0" marL="0">
+            <a:pPr marL="0" indent="0" algn="ctr">
               <a:buNone/>
             </a:pPr>
             <a:r>
@@ -4471,9 +4286,9 @@
                 <a:solidFill>
                   <a:srgbClr val="1E3A5F"/>
                 </a:solidFill>
-                <a:latin typeface="PT Sans" pitchFamily="34" charset="0"/>
-                <a:ea typeface="PT Sans" pitchFamily="34" charset="-122"/>
-                <a:cs typeface="PT Sans" pitchFamily="34" charset="-120"/>
+                <a:latin typeface="PT Sans" panose="020B0503020203020204" pitchFamily="34" charset="0"/>
+                <a:ea typeface="PT Sans" panose="020B0503020203020204" pitchFamily="34" charset="-122"/>
+                <a:cs typeface="PT Sans" panose="020B0503020203020204" pitchFamily="34" charset="-120"/>
               </a:rPr>
               <a:t>Справочники</a:t>
             </a:r>
@@ -4505,7 +4320,7 @@
             <a:prstDash val="solid"/>
           </a:ln>
           <a:effectLst>
-            <a:outerShdw sx="100000" sy="100000" kx="0" ky="0" algn="bl" rotWithShape="0" blurRad="101600" dist="38100" dir="5400000">
+            <a:outerShdw blurRad="101600" dist="38100" dir="5400000" algn="bl" rotWithShape="0">
               <a:srgbClr val="8499B5">
                 <a:alpha val="22000"/>
               </a:srgbClr>
@@ -4534,7 +4349,6 @@
           <a:solidFill>
             <a:srgbClr val="33598A"/>
           </a:solidFill>
-          <a:ln/>
         </p:spPr>
         <p:txBody>
           <a:bodyPr/>
@@ -4556,13 +4370,12 @@
             <a:avLst/>
           </a:prstGeom>
           <a:noFill/>
-          <a:ln/>
         </p:spPr>
         <p:txBody>
           <a:bodyPr wrap="square" lIns="0" tIns="0" rIns="0" bIns="0" rtlCol="0" anchor="ctr"/>
           <a:lstStyle/>
           <a:p>
-            <a:pPr indent="0" marL="0">
+            <a:pPr marL="0" indent="0">
               <a:buNone/>
             </a:pPr>
             <a:r>
@@ -4570,9 +4383,9 @@
                 <a:solidFill>
                   <a:srgbClr val="1E3A5F"/>
                 </a:solidFill>
-                <a:latin typeface="PT Serif" pitchFamily="34" charset="0"/>
-                <a:ea typeface="PT Serif" pitchFamily="34" charset="-122"/>
-                <a:cs typeface="PT Serif" pitchFamily="34" charset="-120"/>
+                <a:latin typeface="PT Serif" panose="020A0603040505020204" pitchFamily="34" charset="0"/>
+                <a:ea typeface="PT Serif" panose="020A0603040505020204" pitchFamily="34" charset="-122"/>
+                <a:cs typeface="PT Serif" panose="020A0603040505020204" pitchFamily="34" charset="-120"/>
               </a:rPr>
               <a:t>Технологии</a:t>
             </a:r>
@@ -4595,7 +4408,6 @@
             <a:avLst/>
           </a:prstGeom>
           <a:noFill/>
-          <a:ln/>
         </p:spPr>
         <p:txBody>
           <a:bodyPr wrap="square" lIns="0" tIns="0" rIns="0" bIns="0" rtlCol="0" anchor="t"/>
@@ -4613,9 +4425,9 @@
                 <a:solidFill>
                   <a:srgbClr val="23303F"/>
                 </a:solidFill>
-                <a:latin typeface="PT Sans" pitchFamily="34" charset="0"/>
-                <a:ea typeface="PT Sans" pitchFamily="34" charset="-122"/>
-                <a:cs typeface="PT Sans" pitchFamily="34" charset="-120"/>
+                <a:latin typeface="PT Sans" panose="020B0503020203020204" pitchFamily="34" charset="0"/>
+                <a:ea typeface="PT Sans" panose="020B0503020203020204" pitchFamily="34" charset="-122"/>
+                <a:cs typeface="PT Sans" panose="020B0503020203020204" pitchFamily="34" charset="-120"/>
               </a:rPr>
               <a:t>Формулы: СЧЁТЕСЛИ, СУММЕСЛИ, ВПР, ИНДЕКС/ПОИСКПОЗ</a:t>
             </a:r>
@@ -4634,9 +4446,9 @@
                 <a:solidFill>
                   <a:srgbClr val="23303F"/>
                 </a:solidFill>
-                <a:latin typeface="PT Sans" pitchFamily="34" charset="0"/>
-                <a:ea typeface="PT Sans" pitchFamily="34" charset="-122"/>
-                <a:cs typeface="PT Sans" pitchFamily="34" charset="-120"/>
+                <a:latin typeface="PT Sans" panose="020B0503020203020204" pitchFamily="34" charset="0"/>
+                <a:ea typeface="PT Sans" panose="020B0503020203020204" pitchFamily="34" charset="-122"/>
+                <a:cs typeface="PT Sans" panose="020B0503020203020204" pitchFamily="34" charset="-120"/>
               </a:rPr>
               <a:t>«Проверка данных» + условное форматирование</a:t>
             </a:r>
@@ -4652,9 +4464,9 @@
                 <a:solidFill>
                   <a:srgbClr val="23303F"/>
                 </a:solidFill>
-                <a:latin typeface="PT Sans" pitchFamily="34" charset="0"/>
-                <a:ea typeface="PT Sans" pitchFamily="34" charset="-122"/>
-                <a:cs typeface="PT Sans" pitchFamily="34" charset="-120"/>
+                <a:latin typeface="PT Sans" panose="020B0503020203020204" pitchFamily="34" charset="0"/>
+                <a:ea typeface="PT Sans" panose="020B0503020203020204" pitchFamily="34" charset="-122"/>
+                <a:cs typeface="PT Sans" panose="020B0503020203020204" pitchFamily="34" charset="-120"/>
               </a:rPr>
               <a:t>Без VBA · Excel 2016+, LibreOffice, Google Sheets</a:t>
             </a:r>
@@ -4686,7 +4498,7 @@
             <a:prstDash val="solid"/>
           </a:ln>
           <a:effectLst>
-            <a:outerShdw sx="100000" sy="100000" kx="0" ky="0" algn="bl" rotWithShape="0" blurRad="101600" dist="38100" dir="5400000">
+            <a:outerShdw blurRad="101600" dist="38100" dir="5400000" algn="bl" rotWithShape="0">
               <a:srgbClr val="8499B5">
                 <a:alpha val="22000"/>
               </a:srgbClr>
@@ -4715,7 +4527,6 @@
           <a:solidFill>
             <a:srgbClr val="B08D3E"/>
           </a:solidFill>
-          <a:ln/>
         </p:spPr>
         <p:txBody>
           <a:bodyPr/>
@@ -4739,7 +4550,6 @@
           <a:solidFill>
             <a:srgbClr val="B08D3E"/>
           </a:solidFill>
-          <a:ln/>
         </p:spPr>
         <p:txBody>
           <a:bodyPr/>
@@ -4748,7 +4558,7 @@
       </p:sp>
       <p:pic>
         <p:nvPicPr>
-          <p:cNvPr id="37" name="Image 1" descr="preencoded.png">    </p:cNvPr>
+          <p:cNvPr id="37" name="Image 1" descr="preencoded.png"/>
           <p:cNvPicPr>
             <a:picLocks noChangeAspect="1"/>
           </p:cNvPicPr>
@@ -4785,13 +4595,12 @@
             <a:avLst/>
           </a:prstGeom>
           <a:noFill/>
-          <a:ln/>
         </p:spPr>
         <p:txBody>
           <a:bodyPr wrap="square" lIns="0" tIns="0" rIns="0" bIns="0" rtlCol="0" anchor="ctr"/>
           <a:lstStyle/>
           <a:p>
-            <a:pPr indent="0" marL="0">
+            <a:pPr marL="0" indent="0">
               <a:buNone/>
             </a:pPr>
             <a:r>
@@ -4799,9 +4608,9 @@
                 <a:solidFill>
                   <a:srgbClr val="B08D3E"/>
                 </a:solidFill>
-                <a:latin typeface="PT Serif" pitchFamily="34" charset="0"/>
-                <a:ea typeface="PT Serif" pitchFamily="34" charset="-122"/>
-                <a:cs typeface="PT Serif" pitchFamily="34" charset="-120"/>
+                <a:latin typeface="PT Serif" panose="020A0603040505020204" pitchFamily="34" charset="0"/>
+                <a:ea typeface="PT Serif" panose="020A0603040505020204" pitchFamily="34" charset="-122"/>
+                <a:cs typeface="PT Serif" panose="020A0603040505020204" pitchFamily="34" charset="-120"/>
               </a:rPr>
               <a:t>Минимальная достаточность</a:t>
             </a:r>
@@ -4824,7 +4633,6 @@
             <a:avLst/>
           </a:prstGeom>
           <a:noFill/>
-          <a:ln/>
         </p:spPr>
         <p:txBody>
           <a:bodyPr wrap="square" lIns="0" tIns="0" rIns="0" bIns="0" rtlCol="0" anchor="t"/>
@@ -4842,9 +4650,9 @@
                 <a:solidFill>
                   <a:srgbClr val="23303F"/>
                 </a:solidFill>
-                <a:latin typeface="PT Sans" pitchFamily="34" charset="0"/>
-                <a:ea typeface="PT Sans" pitchFamily="34" charset="-122"/>
-                <a:cs typeface="PT Sans" pitchFamily="34" charset="-120"/>
+                <a:latin typeface="PT Sans" panose="020B0503020203020204" pitchFamily="34" charset="0"/>
+                <a:ea typeface="PT Sans" panose="020B0503020203020204" pitchFamily="34" charset="-122"/>
+                <a:cs typeface="PT Sans" panose="020B0503020203020204" pitchFamily="34" charset="-120"/>
               </a:rPr>
               <a:t>0 ₽ лицензий</a:t>
             </a:r>
@@ -4863,9 +4671,9 @@
                 <a:solidFill>
                   <a:srgbClr val="23303F"/>
                 </a:solidFill>
-                <a:latin typeface="PT Sans" pitchFamily="34" charset="0"/>
-                <a:ea typeface="PT Sans" pitchFamily="34" charset="-122"/>
-                <a:cs typeface="PT Sans" pitchFamily="34" charset="-120"/>
+                <a:latin typeface="PT Sans" panose="020B0503020203020204" pitchFamily="34" charset="0"/>
+                <a:ea typeface="PT Sans" panose="020B0503020203020204" pitchFamily="34" charset="-122"/>
+                <a:cs typeface="PT Sans" panose="020B0503020203020204" pitchFamily="34" charset="-120"/>
               </a:rPr>
               <a:t>внедрение за дни</a:t>
             </a:r>
@@ -4884,9 +4692,9 @@
                 <a:solidFill>
                   <a:srgbClr val="23303F"/>
                 </a:solidFill>
-                <a:latin typeface="PT Sans" pitchFamily="34" charset="0"/>
-                <a:ea typeface="PT Sans" pitchFamily="34" charset="-122"/>
-                <a:cs typeface="PT Sans" pitchFamily="34" charset="-120"/>
+                <a:latin typeface="PT Sans" panose="020B0503020203020204" pitchFamily="34" charset="0"/>
+                <a:ea typeface="PT Sans" panose="020B0503020203020204" pitchFamily="34" charset="-122"/>
+                <a:cs typeface="PT Sans" panose="020B0503020203020204" pitchFamily="34" charset="-120"/>
               </a:rPr>
               <a:t>окупаемость ≈ 3 мес</a:t>
             </a:r>
@@ -4902,9 +4710,9 @@
                 <a:solidFill>
                   <a:srgbClr val="23303F"/>
                 </a:solidFill>
-                <a:latin typeface="PT Sans" pitchFamily="34" charset="0"/>
-                <a:ea typeface="PT Sans" pitchFamily="34" charset="-122"/>
-                <a:cs typeface="PT Sans" pitchFamily="34" charset="-120"/>
+                <a:latin typeface="PT Sans" panose="020B0503020203020204" pitchFamily="34" charset="0"/>
+                <a:ea typeface="PT Sans" panose="020B0503020203020204" pitchFamily="34" charset="-122"/>
+                <a:cs typeface="PT Sans" panose="020B0503020203020204" pitchFamily="34" charset="-120"/>
               </a:rPr>
               <a:t>переносимо в облачную CRM при росте</a:t>
             </a:r>
@@ -4954,13 +4762,12 @@
             <a:avLst/>
           </a:prstGeom>
           <a:noFill/>
-          <a:ln/>
         </p:spPr>
         <p:txBody>
           <a:bodyPr wrap="square" lIns="0" tIns="0" rIns="0" bIns="0" rtlCol="0" anchor="ctr"/>
           <a:lstStyle/>
           <a:p>
-            <a:pPr indent="0" marL="0">
+            <a:pPr marL="0" indent="0">
               <a:buNone/>
             </a:pPr>
             <a:r>
@@ -4968,9 +4775,9 @@
                 <a:solidFill>
                   <a:srgbClr val="657384"/>
                 </a:solidFill>
-                <a:latin typeface="PT Sans" pitchFamily="34" charset="0"/>
-                <a:ea typeface="PT Sans" pitchFamily="34" charset="-122"/>
-                <a:cs typeface="PT Sans" pitchFamily="34" charset="-120"/>
+                <a:latin typeface="PT Sans" panose="020B0503020203020204" pitchFamily="34" charset="0"/>
+                <a:ea typeface="PT Sans" panose="020B0503020203020204" pitchFamily="34" charset="-122"/>
+                <a:cs typeface="PT Sans" panose="020B0503020203020204" pitchFamily="34" charset="-120"/>
               </a:rPr>
               <a:t>АРМ менеджера салона красоты  ·  ВСГУТУ  ·  Улан-Удэ, 2026</a:t>
             </a:r>
@@ -4993,13 +4800,12 @@
             <a:avLst/>
           </a:prstGeom>
           <a:noFill/>
-          <a:ln/>
         </p:spPr>
         <p:txBody>
           <a:bodyPr wrap="square" lIns="0" tIns="0" rIns="0" bIns="0" rtlCol="0" anchor="ctr"/>
           <a:lstStyle/>
           <a:p>
-            <a:pPr algn="r" indent="0" marL="0">
+            <a:pPr marL="0" indent="0" algn="r">
               <a:buNone/>
             </a:pPr>
             <a:r>
@@ -5007,9 +4813,9 @@
                 <a:solidFill>
                   <a:srgbClr val="657384"/>
                 </a:solidFill>
-                <a:latin typeface="PT Sans" pitchFamily="34" charset="0"/>
-                <a:ea typeface="PT Sans" pitchFamily="34" charset="-122"/>
-                <a:cs typeface="PT Sans" pitchFamily="34" charset="-120"/>
+                <a:latin typeface="PT Sans" panose="020B0503020203020204" pitchFamily="34" charset="0"/>
+                <a:ea typeface="PT Sans" panose="020B0503020203020204" pitchFamily="34" charset="-122"/>
+                <a:cs typeface="PT Sans" panose="020B0503020203020204" pitchFamily="34" charset="-120"/>
               </a:rPr>
               <a:t>11 / 15</a:t>
             </a:r>
@@ -5027,12 +4833,13 @@
 
 <file path=ppt/slides/slide12.xml><?xml version="1.0" encoding="utf-8"?>
 <p:sld xmlns:a="http://schemas.openxmlformats.org/drawingml/2006/main" xmlns:r="http://schemas.openxmlformats.org/officeDocument/2006/relationships" xmlns:p="http://schemas.openxmlformats.org/presentationml/2006/main">
-  <p:cSld name="Slide 11">
+  <p:cSld>
     <p:bg>
       <p:bgPr>
         <a:solidFill>
           <a:srgbClr val="FFFFFF"/>
         </a:solidFill>
+        <a:effectLst/>
       </p:bgPr>
     </p:bg>
     <p:spTree>
@@ -5066,7 +4873,6 @@
           <a:solidFill>
             <a:srgbClr val="B08D3E"/>
           </a:solidFill>
-          <a:ln/>
         </p:spPr>
         <p:txBody>
           <a:bodyPr/>
@@ -5088,23 +4894,22 @@
             <a:avLst/>
           </a:prstGeom>
           <a:noFill/>
-          <a:ln/>
         </p:spPr>
         <p:txBody>
           <a:bodyPr wrap="square" lIns="0" tIns="0" rIns="0" bIns="0" rtlCol="0" anchor="ctr"/>
           <a:lstStyle/>
           <a:p>
-            <a:pPr indent="0" marL="0">
-              <a:buNone/>
-            </a:pPr>
-            <a:r>
-              <a:rPr lang="en-US" sz="1250" b="1" spc="300" kern="0" dirty="0">
+            <a:pPr marL="0" indent="0">
+              <a:buNone/>
+            </a:pPr>
+            <a:r>
+              <a:rPr lang="en-US" sz="1250" b="1" kern="0" spc="300" dirty="0">
                 <a:solidFill>
                   <a:srgbClr val="B08D3E"/>
                 </a:solidFill>
-                <a:latin typeface="PT Sans" pitchFamily="34" charset="0"/>
-                <a:ea typeface="PT Sans" pitchFamily="34" charset="-122"/>
-                <a:cs typeface="PT Sans" pitchFamily="34" charset="-120"/>
+                <a:latin typeface="PT Sans" panose="020B0503020203020204" pitchFamily="34" charset="0"/>
+                <a:ea typeface="PT Sans" panose="020B0503020203020204" pitchFamily="34" charset="-122"/>
+                <a:cs typeface="PT Sans" panose="020B0503020203020204" pitchFamily="34" charset="-120"/>
               </a:rPr>
               <a:t>ПРОТОТИП</a:t>
             </a:r>
@@ -5127,13 +4932,12 @@
             <a:avLst/>
           </a:prstGeom>
           <a:noFill/>
-          <a:ln/>
         </p:spPr>
         <p:txBody>
           <a:bodyPr wrap="square" lIns="0" tIns="0" rIns="0" bIns="0" rtlCol="0" anchor="ctr"/>
           <a:lstStyle/>
           <a:p>
-            <a:pPr indent="0" marL="0">
+            <a:pPr marL="0" indent="0">
               <a:buNone/>
             </a:pPr>
             <a:r>
@@ -5141,9 +4945,9 @@
                 <a:solidFill>
                   <a:srgbClr val="1E3A5F"/>
                 </a:solidFill>
-                <a:latin typeface="PT Serif" pitchFamily="34" charset="0"/>
-                <a:ea typeface="PT Serif" pitchFamily="34" charset="-122"/>
-                <a:cs typeface="PT Serif" pitchFamily="34" charset="-120"/>
+                <a:latin typeface="PT Serif" panose="020A0603040505020204" pitchFamily="34" charset="0"/>
+                <a:ea typeface="PT Serif" panose="020A0603040505020204" pitchFamily="34" charset="-122"/>
+                <a:cs typeface="PT Serif" panose="020A0603040505020204" pitchFamily="34" charset="-120"/>
               </a:rPr>
               <a:t>Экранные формы</a:t>
             </a:r>
@@ -5175,7 +4979,7 @@
             <a:prstDash val="solid"/>
           </a:ln>
           <a:effectLst>
-            <a:outerShdw sx="100000" sy="100000" kx="0" ky="0" algn="bl" rotWithShape="0" blurRad="101600" dist="38100" dir="5400000">
+            <a:outerShdw blurRad="101600" dist="38100" dir="5400000" algn="bl" rotWithShape="0">
               <a:srgbClr val="8499B5">
                 <a:alpha val="22000"/>
               </a:srgbClr>
@@ -5189,7 +4993,7 @@
       </p:sp>
       <p:pic>
         <p:nvPicPr>
-          <p:cNvPr id="6" name="Image 0" descr="/Users/m/Documents/VKR_Stats/build/img_final/image15.png">    </p:cNvPr>
+          <p:cNvPr id="6" name="Image 0" descr="/Users/m/Documents/VKR_Stats/build/img_final/image15.png"/>
           <p:cNvPicPr>
             <a:picLocks noChangeAspect="1"/>
           </p:cNvPicPr>
@@ -5226,13 +5030,12 @@
             <a:avLst/>
           </a:prstGeom>
           <a:noFill/>
-          <a:ln/>
         </p:spPr>
         <p:txBody>
           <a:bodyPr wrap="square" lIns="0" tIns="0" rIns="0" bIns="0" rtlCol="0" anchor="ctr"/>
           <a:lstStyle/>
           <a:p>
-            <a:pPr algn="ctr" indent="0" marL="0">
+            <a:pPr marL="0" indent="0" algn="ctr">
               <a:buNone/>
             </a:pPr>
             <a:r>
@@ -5240,9 +5043,9 @@
                 <a:solidFill>
                   <a:srgbClr val="1E3A5F"/>
                 </a:solidFill>
-                <a:latin typeface="PT Sans" pitchFamily="34" charset="0"/>
-                <a:ea typeface="PT Sans" pitchFamily="34" charset="-122"/>
-                <a:cs typeface="PT Sans" pitchFamily="34" charset="-120"/>
+                <a:latin typeface="PT Sans" panose="020B0503020203020204" pitchFamily="34" charset="0"/>
+                <a:ea typeface="PT Sans" panose="020B0503020203020204" pitchFamily="34" charset="-122"/>
+                <a:cs typeface="PT Sans" panose="020B0503020203020204" pitchFamily="34" charset="-120"/>
               </a:rPr>
               <a:t>Главный экран</a:t>
             </a:r>
@@ -5274,7 +5077,7 @@
             <a:prstDash val="solid"/>
           </a:ln>
           <a:effectLst>
-            <a:outerShdw sx="100000" sy="100000" kx="0" ky="0" algn="bl" rotWithShape="0" blurRad="101600" dist="38100" dir="5400000">
+            <a:outerShdw blurRad="101600" dist="38100" dir="5400000" algn="bl" rotWithShape="0">
               <a:srgbClr val="8499B5">
                 <a:alpha val="22000"/>
               </a:srgbClr>
@@ -5288,7 +5091,7 @@
       </p:sp>
       <p:pic>
         <p:nvPicPr>
-          <p:cNvPr id="9" name="Image 1" descr="/Users/m/Documents/VKR_Stats/build/img_final/image19.png">    </p:cNvPr>
+          <p:cNvPr id="9" name="Image 1" descr="/Users/m/Documents/VKR_Stats/build/img_final/image19.png"/>
           <p:cNvPicPr>
             <a:picLocks noChangeAspect="1"/>
           </p:cNvPicPr>
@@ -5325,13 +5128,12 @@
             <a:avLst/>
           </a:prstGeom>
           <a:noFill/>
-          <a:ln/>
         </p:spPr>
         <p:txBody>
           <a:bodyPr wrap="square" lIns="0" tIns="0" rIns="0" bIns="0" rtlCol="0" anchor="ctr"/>
           <a:lstStyle/>
           <a:p>
-            <a:pPr algn="ctr" indent="0" marL="0">
+            <a:pPr marL="0" indent="0" algn="ctr">
               <a:buNone/>
             </a:pPr>
             <a:r>
@@ -5339,9 +5141,9 @@
                 <a:solidFill>
                   <a:srgbClr val="1E3A5F"/>
                 </a:solidFill>
-                <a:latin typeface="PT Sans" pitchFamily="34" charset="0"/>
-                <a:ea typeface="PT Sans" pitchFamily="34" charset="-122"/>
-                <a:cs typeface="PT Sans" pitchFamily="34" charset="-120"/>
+                <a:latin typeface="PT Sans" panose="020B0503020203020204" pitchFamily="34" charset="0"/>
+                <a:ea typeface="PT Sans" panose="020B0503020203020204" pitchFamily="34" charset="-122"/>
+                <a:cs typeface="PT Sans" panose="020B0503020203020204" pitchFamily="34" charset="-120"/>
               </a:rPr>
               <a:t>Расходники</a:t>
             </a:r>
@@ -5373,7 +5175,7 @@
             <a:prstDash val="solid"/>
           </a:ln>
           <a:effectLst>
-            <a:outerShdw sx="100000" sy="100000" kx="0" ky="0" algn="bl" rotWithShape="0" blurRad="101600" dist="38100" dir="5400000">
+            <a:outerShdw blurRad="101600" dist="38100" dir="5400000" algn="bl" rotWithShape="0">
               <a:srgbClr val="8499B5">
                 <a:alpha val="22000"/>
               </a:srgbClr>
@@ -5387,7 +5189,7 @@
       </p:sp>
       <p:pic>
         <p:nvPicPr>
-          <p:cNvPr id="12" name="Image 2" descr="/Users/m/Documents/VKR_Stats/build/img_final/image16.png">    </p:cNvPr>
+          <p:cNvPr id="12" name="Image 2" descr="/Users/m/Documents/VKR_Stats/build/img_final/image16.png"/>
           <p:cNvPicPr>
             <a:picLocks noChangeAspect="1"/>
           </p:cNvPicPr>
@@ -5424,13 +5226,12 @@
             <a:avLst/>
           </a:prstGeom>
           <a:noFill/>
-          <a:ln/>
         </p:spPr>
         <p:txBody>
           <a:bodyPr wrap="square" lIns="0" tIns="0" rIns="0" bIns="0" rtlCol="0" anchor="ctr"/>
           <a:lstStyle/>
           <a:p>
-            <a:pPr algn="ctr" indent="0" marL="0">
+            <a:pPr marL="0" indent="0" algn="ctr">
               <a:buNone/>
             </a:pPr>
             <a:r>
@@ -5438,9 +5239,9 @@
                 <a:solidFill>
                   <a:srgbClr val="1E3A5F"/>
                 </a:solidFill>
-                <a:latin typeface="PT Sans" pitchFamily="34" charset="0"/>
-                <a:ea typeface="PT Sans" pitchFamily="34" charset="-122"/>
-                <a:cs typeface="PT Sans" pitchFamily="34" charset="-120"/>
+                <a:latin typeface="PT Sans" panose="020B0503020203020204" pitchFamily="34" charset="0"/>
+                <a:ea typeface="PT Sans" panose="020B0503020203020204" pitchFamily="34" charset="-122"/>
+                <a:cs typeface="PT Sans" panose="020B0503020203020204" pitchFamily="34" charset="-120"/>
               </a:rPr>
               <a:t>Записи клиентов</a:t>
             </a:r>
@@ -5472,7 +5273,7 @@
             <a:prstDash val="solid"/>
           </a:ln>
           <a:effectLst>
-            <a:outerShdw sx="100000" sy="100000" kx="0" ky="0" algn="bl" rotWithShape="0" blurRad="101600" dist="38100" dir="5400000">
+            <a:outerShdw blurRad="101600" dist="38100" dir="5400000" algn="bl" rotWithShape="0">
               <a:srgbClr val="8499B5">
                 <a:alpha val="22000"/>
               </a:srgbClr>
@@ -5486,7 +5287,7 @@
       </p:sp>
       <p:pic>
         <p:nvPicPr>
-          <p:cNvPr id="15" name="Image 3" descr="/Users/m/Documents/VKR_Stats/build/img_final/image22.png">    </p:cNvPr>
+          <p:cNvPr id="15" name="Image 3" descr="/Users/m/Documents/VKR_Stats/build/img_final/image22.png"/>
           <p:cNvPicPr>
             <a:picLocks noChangeAspect="1"/>
           </p:cNvPicPr>
@@ -5523,13 +5324,12 @@
             <a:avLst/>
           </a:prstGeom>
           <a:noFill/>
-          <a:ln/>
         </p:spPr>
         <p:txBody>
           <a:bodyPr wrap="square" lIns="0" tIns="0" rIns="0" bIns="0" rtlCol="0" anchor="ctr"/>
           <a:lstStyle/>
           <a:p>
-            <a:pPr algn="ctr" indent="0" marL="0">
+            <a:pPr marL="0" indent="0" algn="ctr">
               <a:buNone/>
             </a:pPr>
             <a:r>
@@ -5537,9 +5337,9 @@
                 <a:solidFill>
                   <a:srgbClr val="1E3A5F"/>
                 </a:solidFill>
-                <a:latin typeface="PT Sans" pitchFamily="34" charset="0"/>
-                <a:ea typeface="PT Sans" pitchFamily="34" charset="-122"/>
-                <a:cs typeface="PT Sans" pitchFamily="34" charset="-120"/>
+                <a:latin typeface="PT Sans" panose="020B0503020203020204" pitchFamily="34" charset="0"/>
+                <a:ea typeface="PT Sans" panose="020B0503020203020204" pitchFamily="34" charset="-122"/>
+                <a:cs typeface="PT Sans" panose="020B0503020203020204" pitchFamily="34" charset="-120"/>
               </a:rPr>
               <a:t>Отчёты</a:t>
             </a:r>
@@ -5571,7 +5371,7 @@
             <a:prstDash val="solid"/>
           </a:ln>
           <a:effectLst>
-            <a:outerShdw sx="100000" sy="100000" kx="0" ky="0" algn="bl" rotWithShape="0" blurRad="101600" dist="38100" dir="5400000">
+            <a:outerShdw blurRad="101600" dist="38100" dir="5400000" algn="bl" rotWithShape="0">
               <a:srgbClr val="8499B5">
                 <a:alpha val="22000"/>
               </a:srgbClr>
@@ -5600,7 +5400,6 @@
           <a:solidFill>
             <a:srgbClr val="33598A"/>
           </a:solidFill>
-          <a:ln/>
         </p:spPr>
         <p:txBody>
           <a:bodyPr/>
@@ -5622,13 +5421,12 @@
             <a:avLst/>
           </a:prstGeom>
           <a:noFill/>
-          <a:ln/>
         </p:spPr>
         <p:txBody>
           <a:bodyPr wrap="square" lIns="0" tIns="0" rIns="0" bIns="0" rtlCol="0" anchor="ctr"/>
           <a:lstStyle/>
           <a:p>
-            <a:pPr indent="0" marL="0">
+            <a:pPr marL="0" indent="0">
               <a:buNone/>
             </a:pPr>
             <a:r>
@@ -5636,23 +5434,20 @@
                 <a:solidFill>
                   <a:srgbClr val="1E3A5F"/>
                 </a:solidFill>
-                <a:latin typeface="PT Sans" pitchFamily="34" charset="0"/>
-                <a:ea typeface="PT Sans" pitchFamily="34" charset="-122"/>
-                <a:cs typeface="PT Sans" pitchFamily="34" charset="-120"/>
+                <a:latin typeface="PT Sans" panose="020B0503020203020204" pitchFamily="34" charset="0"/>
+                <a:ea typeface="PT Sans" panose="020B0503020203020204" pitchFamily="34" charset="-122"/>
+                <a:cs typeface="PT Sans" panose="020B0503020203020204" pitchFamily="34" charset="-120"/>
               </a:rPr>
               <a:t>Ещё 5 листов:  </a:t>
             </a:r>
-            <a:pPr indent="0" marL="0">
-              <a:buNone/>
-            </a:pPr>
             <a:r>
               <a:rPr lang="en-US" sz="1300" dirty="0">
                 <a:solidFill>
                   <a:srgbClr val="23303F"/>
                 </a:solidFill>
-                <a:latin typeface="PT Sans" pitchFamily="34" charset="0"/>
-                <a:ea typeface="PT Sans" pitchFamily="34" charset="-122"/>
-                <a:cs typeface="PT Sans" pitchFamily="34" charset="-120"/>
+                <a:latin typeface="PT Sans" panose="020B0503020203020204" pitchFamily="34" charset="0"/>
+                <a:ea typeface="PT Sans" panose="020B0503020203020204" pitchFamily="34" charset="-122"/>
+                <a:cs typeface="PT Sans" panose="020B0503020203020204" pitchFamily="34" charset="-120"/>
               </a:rPr>
               <a:t>Мастера · График · Заказы · Обучение · Справочники — на единых справочниках и формулах</a:t>
             </a:r>
@@ -5702,13 +5497,12 @@
             <a:avLst/>
           </a:prstGeom>
           <a:noFill/>
-          <a:ln/>
         </p:spPr>
         <p:txBody>
           <a:bodyPr wrap="square" lIns="0" tIns="0" rIns="0" bIns="0" rtlCol="0" anchor="ctr"/>
           <a:lstStyle/>
           <a:p>
-            <a:pPr indent="0" marL="0">
+            <a:pPr marL="0" indent="0">
               <a:buNone/>
             </a:pPr>
             <a:r>
@@ -5716,9 +5510,9 @@
                 <a:solidFill>
                   <a:srgbClr val="657384"/>
                 </a:solidFill>
-                <a:latin typeface="PT Sans" pitchFamily="34" charset="0"/>
-                <a:ea typeface="PT Sans" pitchFamily="34" charset="-122"/>
-                <a:cs typeface="PT Sans" pitchFamily="34" charset="-120"/>
+                <a:latin typeface="PT Sans" panose="020B0503020203020204" pitchFamily="34" charset="0"/>
+                <a:ea typeface="PT Sans" panose="020B0503020203020204" pitchFamily="34" charset="-122"/>
+                <a:cs typeface="PT Sans" panose="020B0503020203020204" pitchFamily="34" charset="-120"/>
               </a:rPr>
               <a:t>АРМ менеджера салона красоты  ·  ВСГУТУ  ·  Улан-Удэ, 2026</a:t>
             </a:r>
@@ -5741,13 +5535,12 @@
             <a:avLst/>
           </a:prstGeom>
           <a:noFill/>
-          <a:ln/>
         </p:spPr>
         <p:txBody>
           <a:bodyPr wrap="square" lIns="0" tIns="0" rIns="0" bIns="0" rtlCol="0" anchor="ctr"/>
           <a:lstStyle/>
           <a:p>
-            <a:pPr algn="r" indent="0" marL="0">
+            <a:pPr marL="0" indent="0" algn="r">
               <a:buNone/>
             </a:pPr>
             <a:r>
@@ -5755,9 +5548,9 @@
                 <a:solidFill>
                   <a:srgbClr val="657384"/>
                 </a:solidFill>
-                <a:latin typeface="PT Sans" pitchFamily="34" charset="0"/>
-                <a:ea typeface="PT Sans" pitchFamily="34" charset="-122"/>
-                <a:cs typeface="PT Sans" pitchFamily="34" charset="-120"/>
+                <a:latin typeface="PT Sans" panose="020B0503020203020204" pitchFamily="34" charset="0"/>
+                <a:ea typeface="PT Sans" panose="020B0503020203020204" pitchFamily="34" charset="-122"/>
+                <a:cs typeface="PT Sans" panose="020B0503020203020204" pitchFamily="34" charset="-120"/>
               </a:rPr>
               <a:t>12 / 15</a:t>
             </a:r>
@@ -5775,12 +5568,13 @@
 
 <file path=ppt/slides/slide13.xml><?xml version="1.0" encoding="utf-8"?>
 <p:sld xmlns:a="http://schemas.openxmlformats.org/drawingml/2006/main" xmlns:r="http://schemas.openxmlformats.org/officeDocument/2006/relationships" xmlns:p="http://schemas.openxmlformats.org/presentationml/2006/main">
-  <p:cSld name="Slide 12">
+  <p:cSld>
     <p:bg>
       <p:bgPr>
         <a:solidFill>
           <a:srgbClr val="FFFFFF"/>
         </a:solidFill>
+        <a:effectLst/>
       </p:bgPr>
     </p:bg>
     <p:spTree>
@@ -5814,7 +5608,6 @@
           <a:solidFill>
             <a:srgbClr val="B08D3E"/>
           </a:solidFill>
-          <a:ln/>
         </p:spPr>
         <p:txBody>
           <a:bodyPr/>
@@ -5836,23 +5629,22 @@
             <a:avLst/>
           </a:prstGeom>
           <a:noFill/>
-          <a:ln/>
         </p:spPr>
         <p:txBody>
           <a:bodyPr wrap="square" lIns="0" tIns="0" rIns="0" bIns="0" rtlCol="0" anchor="ctr"/>
           <a:lstStyle/>
           <a:p>
-            <a:pPr indent="0" marL="0">
-              <a:buNone/>
-            </a:pPr>
-            <a:r>
-              <a:rPr lang="en-US" sz="1250" b="1" spc="300" kern="0" dirty="0">
+            <a:pPr marL="0" indent="0">
+              <a:buNone/>
+            </a:pPr>
+            <a:r>
+              <a:rPr lang="en-US" sz="1250" b="1" kern="0" spc="300" dirty="0">
                 <a:solidFill>
                   <a:srgbClr val="B08D3E"/>
                 </a:solidFill>
-                <a:latin typeface="PT Sans" pitchFamily="34" charset="0"/>
-                <a:ea typeface="PT Sans" pitchFamily="34" charset="-122"/>
-                <a:cs typeface="PT Sans" pitchFamily="34" charset="-120"/>
+                <a:latin typeface="PT Sans" panose="020B0503020203020204" pitchFamily="34" charset="0"/>
+                <a:ea typeface="PT Sans" panose="020B0503020203020204" pitchFamily="34" charset="-122"/>
+                <a:cs typeface="PT Sans" panose="020B0503020203020204" pitchFamily="34" charset="-120"/>
               </a:rPr>
               <a:t>ОЦЕНКА</a:t>
             </a:r>
@@ -5875,13 +5667,12 @@
             <a:avLst/>
           </a:prstGeom>
           <a:noFill/>
-          <a:ln/>
         </p:spPr>
         <p:txBody>
           <a:bodyPr wrap="square" lIns="0" tIns="0" rIns="0" bIns="0" rtlCol="0" anchor="ctr"/>
           <a:lstStyle/>
           <a:p>
-            <a:pPr indent="0" marL="0">
+            <a:pPr marL="0" indent="0">
               <a:buNone/>
             </a:pPr>
             <a:r>
@@ -5889,9 +5680,9 @@
                 <a:solidFill>
                   <a:srgbClr val="1E3A5F"/>
                 </a:solidFill>
-                <a:latin typeface="PT Serif" pitchFamily="34" charset="0"/>
-                <a:ea typeface="PT Serif" pitchFamily="34" charset="-122"/>
-                <a:cs typeface="PT Serif" pitchFamily="34" charset="-120"/>
+                <a:latin typeface="PT Serif" panose="020A0603040505020204" pitchFamily="34" charset="0"/>
+                <a:ea typeface="PT Serif" panose="020A0603040505020204" pitchFamily="34" charset="-122"/>
+                <a:cs typeface="PT Serif" panose="020A0603040505020204" pitchFamily="34" charset="-120"/>
               </a:rPr>
               <a:t>Риски и экономический эффект</a:t>
             </a:r>
@@ -5923,7 +5714,7 @@
             <a:prstDash val="solid"/>
           </a:ln>
           <a:effectLst>
-            <a:outerShdw sx="100000" sy="100000" kx="0" ky="0" algn="bl" rotWithShape="0" blurRad="101600" dist="38100" dir="5400000">
+            <a:outerShdw blurRad="101600" dist="38100" dir="5400000" algn="bl" rotWithShape="0">
               <a:srgbClr val="8499B5">
                 <a:alpha val="22000"/>
               </a:srgbClr>
@@ -5952,7 +5743,6 @@
           <a:solidFill>
             <a:srgbClr val="33598A"/>
           </a:solidFill>
-          <a:ln/>
         </p:spPr>
         <p:txBody>
           <a:bodyPr/>
@@ -5976,7 +5766,6 @@
           <a:solidFill>
             <a:srgbClr val="1E3A5F"/>
           </a:solidFill>
-          <a:ln/>
         </p:spPr>
         <p:txBody>
           <a:bodyPr/>
@@ -5985,7 +5774,7 @@
       </p:sp>
       <p:pic>
         <p:nvPicPr>
-          <p:cNvPr id="8" name="Image 0" descr="preencoded.png">    </p:cNvPr>
+          <p:cNvPr id="8" name="Image 0" descr="preencoded.png"/>
           <p:cNvPicPr>
             <a:picLocks noChangeAspect="1"/>
           </p:cNvPicPr>
@@ -6022,13 +5811,12 @@
             <a:avLst/>
           </a:prstGeom>
           <a:noFill/>
-          <a:ln/>
         </p:spPr>
         <p:txBody>
           <a:bodyPr wrap="square" lIns="0" tIns="0" rIns="0" bIns="0" rtlCol="0" anchor="ctr"/>
           <a:lstStyle/>
           <a:p>
-            <a:pPr indent="0" marL="0">
+            <a:pPr marL="0" indent="0">
               <a:buNone/>
             </a:pPr>
             <a:r>
@@ -6036,9 +5824,9 @@
                 <a:solidFill>
                   <a:srgbClr val="1E3A5F"/>
                 </a:solidFill>
-                <a:latin typeface="PT Serif" pitchFamily="34" charset="0"/>
-                <a:ea typeface="PT Serif" pitchFamily="34" charset="-122"/>
-                <a:cs typeface="PT Serif" pitchFamily="34" charset="-120"/>
+                <a:latin typeface="PT Serif" panose="020A0603040505020204" pitchFamily="34" charset="0"/>
+                <a:ea typeface="PT Serif" panose="020A0603040505020204" pitchFamily="34" charset="-122"/>
+                <a:cs typeface="PT Serif" panose="020A0603040505020204" pitchFamily="34" charset="-120"/>
               </a:rPr>
               <a:t>Управление рисками</a:t>
             </a:r>
@@ -6061,7 +5849,6 @@
             <a:avLst/>
           </a:prstGeom>
           <a:noFill/>
-          <a:ln/>
         </p:spPr>
         <p:txBody>
           <a:bodyPr wrap="square" lIns="0" tIns="0" rIns="0" bIns="0" rtlCol="0" anchor="t"/>
@@ -6079,9 +5866,9 @@
                 <a:solidFill>
                   <a:srgbClr val="23303F"/>
                 </a:solidFill>
-                <a:latin typeface="PT Sans" pitchFamily="34" charset="0"/>
-                <a:ea typeface="PT Sans" pitchFamily="34" charset="-122"/>
-                <a:cs typeface="PT Sans" pitchFamily="34" charset="-120"/>
+                <a:latin typeface="PT Sans" panose="020B0503020203020204" pitchFamily="34" charset="0"/>
+                <a:ea typeface="PT Sans" panose="020B0503020203020204" pitchFamily="34" charset="-122"/>
+                <a:cs typeface="PT Sans" panose="020B0503020203020204" pitchFamily="34" charset="-120"/>
               </a:rPr>
               <a:t>Оценка: вероятность × влияние, матрица 3×3 (PMBoK)</a:t>
             </a:r>
@@ -6100,9 +5887,9 @@
                 <a:solidFill>
                   <a:srgbClr val="23303F"/>
                 </a:solidFill>
-                <a:latin typeface="PT Sans" pitchFamily="34" charset="0"/>
-                <a:ea typeface="PT Sans" pitchFamily="34" charset="-122"/>
-                <a:cs typeface="PT Sans" pitchFamily="34" charset="-120"/>
+                <a:latin typeface="PT Sans" panose="020B0503020203020204" pitchFamily="34" charset="0"/>
+                <a:ea typeface="PT Sans" panose="020B0503020203020204" pitchFamily="34" charset="-122"/>
+                <a:cs typeface="PT Sans" panose="020B0503020203020204" pitchFamily="34" charset="-120"/>
               </a:rPr>
               <a:t>5 категорий источников риска</a:t>
             </a:r>
@@ -6118,9 +5905,9 @@
                 <a:solidFill>
                   <a:srgbClr val="23303F"/>
                 </a:solidFill>
-                <a:latin typeface="PT Sans" pitchFamily="34" charset="0"/>
-                <a:ea typeface="PT Sans" pitchFamily="34" charset="-122"/>
-                <a:cs typeface="PT Sans" pitchFamily="34" charset="-120"/>
+                <a:latin typeface="PT Sans" panose="020B0503020203020204" pitchFamily="34" charset="0"/>
+                <a:ea typeface="PT Sans" panose="020B0503020203020204" pitchFamily="34" charset="-122"/>
+                <a:cs typeface="PT Sans" panose="020B0503020203020204" pitchFamily="34" charset="-120"/>
               </a:rPr>
               <a:t>Защита персональных данных по 152-ФЗ</a:t>
             </a:r>
@@ -6143,13 +5930,12 @@
             <a:avLst/>
           </a:prstGeom>
           <a:noFill/>
-          <a:ln/>
         </p:spPr>
         <p:txBody>
           <a:bodyPr wrap="square" lIns="0" tIns="0" rIns="0" bIns="0" rtlCol="0" anchor="ctr"/>
           <a:lstStyle/>
           <a:p>
-            <a:pPr indent="0" marL="0">
+            <a:pPr marL="0" indent="0">
               <a:buNone/>
             </a:pPr>
             <a:r>
@@ -6157,9 +5943,9 @@
                 <a:solidFill>
                   <a:srgbClr val="657384"/>
                 </a:solidFill>
-                <a:latin typeface="PT Sans" pitchFamily="34" charset="0"/>
-                <a:ea typeface="PT Sans" pitchFamily="34" charset="-122"/>
-                <a:cs typeface="PT Sans" pitchFamily="34" charset="-120"/>
+                <a:latin typeface="PT Sans" panose="020B0503020203020204" pitchFamily="34" charset="0"/>
+                <a:ea typeface="PT Sans" panose="020B0503020203020204" pitchFamily="34" charset="-122"/>
+                <a:cs typeface="PT Sans" panose="020B0503020203020204" pitchFamily="34" charset="-120"/>
               </a:rPr>
               <a:t>4 стратегии реагирования</a:t>
             </a:r>
@@ -6213,13 +5999,12 @@
             <a:avLst/>
           </a:prstGeom>
           <a:noFill/>
-          <a:ln/>
         </p:spPr>
         <p:txBody>
           <a:bodyPr wrap="square" lIns="25400" tIns="25400" rIns="25400" bIns="25400" rtlCol="0" anchor="ctr"/>
           <a:lstStyle/>
           <a:p>
-            <a:pPr algn="ctr" indent="0" marL="0">
+            <a:pPr marL="0" indent="0" algn="ctr">
               <a:buNone/>
             </a:pPr>
             <a:r>
@@ -6227,9 +6012,9 @@
                 <a:solidFill>
                   <a:srgbClr val="1E3A5F"/>
                 </a:solidFill>
-                <a:latin typeface="PT Sans" pitchFamily="34" charset="0"/>
-                <a:ea typeface="PT Sans" pitchFamily="34" charset="-122"/>
-                <a:cs typeface="PT Sans" pitchFamily="34" charset="-120"/>
+                <a:latin typeface="PT Sans" panose="020B0503020203020204" pitchFamily="34" charset="0"/>
+                <a:ea typeface="PT Sans" panose="020B0503020203020204" pitchFamily="34" charset="-122"/>
+                <a:cs typeface="PT Sans" panose="020B0503020203020204" pitchFamily="34" charset="-120"/>
               </a:rPr>
               <a:t>Избегание</a:t>
             </a:r>
@@ -6283,13 +6068,12 @@
             <a:avLst/>
           </a:prstGeom>
           <a:noFill/>
-          <a:ln/>
         </p:spPr>
         <p:txBody>
           <a:bodyPr wrap="square" lIns="25400" tIns="25400" rIns="25400" bIns="25400" rtlCol="0" anchor="ctr"/>
           <a:lstStyle/>
           <a:p>
-            <a:pPr algn="ctr" indent="0" marL="0">
+            <a:pPr marL="0" indent="0" algn="ctr">
               <a:buNone/>
             </a:pPr>
             <a:r>
@@ -6297,9 +6081,9 @@
                 <a:solidFill>
                   <a:srgbClr val="1E3A5F"/>
                 </a:solidFill>
-                <a:latin typeface="PT Sans" pitchFamily="34" charset="0"/>
-                <a:ea typeface="PT Sans" pitchFamily="34" charset="-122"/>
-                <a:cs typeface="PT Sans" pitchFamily="34" charset="-120"/>
+                <a:latin typeface="PT Sans" panose="020B0503020203020204" pitchFamily="34" charset="0"/>
+                <a:ea typeface="PT Sans" panose="020B0503020203020204" pitchFamily="34" charset="-122"/>
+                <a:cs typeface="PT Sans" panose="020B0503020203020204" pitchFamily="34" charset="-120"/>
               </a:rPr>
               <a:t>Снижение</a:t>
             </a:r>
@@ -6353,13 +6137,12 @@
             <a:avLst/>
           </a:prstGeom>
           <a:noFill/>
-          <a:ln/>
         </p:spPr>
         <p:txBody>
           <a:bodyPr wrap="square" lIns="25400" tIns="25400" rIns="25400" bIns="25400" rtlCol="0" anchor="ctr"/>
           <a:lstStyle/>
           <a:p>
-            <a:pPr algn="ctr" indent="0" marL="0">
+            <a:pPr marL="0" indent="0" algn="ctr">
               <a:buNone/>
             </a:pPr>
             <a:r>
@@ -6367,9 +6150,9 @@
                 <a:solidFill>
                   <a:srgbClr val="1E3A5F"/>
                 </a:solidFill>
-                <a:latin typeface="PT Sans" pitchFamily="34" charset="0"/>
-                <a:ea typeface="PT Sans" pitchFamily="34" charset="-122"/>
-                <a:cs typeface="PT Sans" pitchFamily="34" charset="-120"/>
+                <a:latin typeface="PT Sans" panose="020B0503020203020204" pitchFamily="34" charset="0"/>
+                <a:ea typeface="PT Sans" panose="020B0503020203020204" pitchFamily="34" charset="-122"/>
+                <a:cs typeface="PT Sans" panose="020B0503020203020204" pitchFamily="34" charset="-120"/>
               </a:rPr>
               <a:t>Передача</a:t>
             </a:r>
@@ -6423,13 +6206,12 @@
             <a:avLst/>
           </a:prstGeom>
           <a:noFill/>
-          <a:ln/>
         </p:spPr>
         <p:txBody>
           <a:bodyPr wrap="square" lIns="25400" tIns="25400" rIns="25400" bIns="25400" rtlCol="0" anchor="ctr"/>
           <a:lstStyle/>
           <a:p>
-            <a:pPr algn="ctr" indent="0" marL="0">
+            <a:pPr marL="0" indent="0" algn="ctr">
               <a:buNone/>
             </a:pPr>
             <a:r>
@@ -6437,9 +6219,9 @@
                 <a:solidFill>
                   <a:srgbClr val="1E3A5F"/>
                 </a:solidFill>
-                <a:latin typeface="PT Sans" pitchFamily="34" charset="0"/>
-                <a:ea typeface="PT Sans" pitchFamily="34" charset="-122"/>
-                <a:cs typeface="PT Sans" pitchFamily="34" charset="-120"/>
+                <a:latin typeface="PT Sans" panose="020B0503020203020204" pitchFamily="34" charset="0"/>
+                <a:ea typeface="PT Sans" panose="020B0503020203020204" pitchFamily="34" charset="-122"/>
+                <a:cs typeface="PT Sans" panose="020B0503020203020204" pitchFamily="34" charset="-120"/>
               </a:rPr>
               <a:t>Принятие</a:t>
             </a:r>
@@ -6462,13 +6244,12 @@
             <a:avLst/>
           </a:prstGeom>
           <a:noFill/>
-          <a:ln/>
         </p:spPr>
         <p:txBody>
           <a:bodyPr wrap="square" lIns="0" tIns="0" rIns="0" bIns="0" rtlCol="0" anchor="t"/>
           <a:lstStyle/>
           <a:p>
-            <a:pPr indent="0" marL="0">
+            <a:pPr marL="0" indent="0">
               <a:buNone/>
             </a:pPr>
             <a:r>
@@ -6476,9 +6257,9 @@
                 <a:solidFill>
                   <a:srgbClr val="33598A"/>
                 </a:solidFill>
-                <a:latin typeface="PT Sans" pitchFamily="34" charset="0"/>
-                <a:ea typeface="PT Sans" pitchFamily="34" charset="-122"/>
-                <a:cs typeface="PT Sans" pitchFamily="34" charset="-120"/>
+                <a:latin typeface="PT Sans" panose="020B0503020203020204" pitchFamily="34" charset="0"/>
+                <a:ea typeface="PT Sans" panose="020B0503020203020204" pitchFamily="34" charset="-122"/>
+                <a:cs typeface="PT Sans" panose="020B0503020203020204" pitchFamily="34" charset="-120"/>
               </a:rPr>
               <a:t>Риски управляемы и не требуют дополнительных вложений</a:t>
             </a:r>
@@ -6510,7 +6291,7 @@
             <a:prstDash val="solid"/>
           </a:ln>
           <a:effectLst>
-            <a:outerShdw sx="100000" sy="100000" kx="0" ky="0" algn="bl" rotWithShape="0" blurRad="101600" dist="38100" dir="5400000">
+            <a:outerShdw blurRad="101600" dist="38100" dir="5400000" algn="bl" rotWithShape="0">
               <a:srgbClr val="8499B5">
                 <a:alpha val="22000"/>
               </a:srgbClr>
@@ -6539,7 +6320,6 @@
           <a:solidFill>
             <a:srgbClr val="33598A"/>
           </a:solidFill>
-          <a:ln/>
         </p:spPr>
         <p:txBody>
           <a:bodyPr/>
@@ -6563,7 +6343,6 @@
           <a:solidFill>
             <a:srgbClr val="33598A"/>
           </a:solidFill>
-          <a:ln/>
         </p:spPr>
         <p:txBody>
           <a:bodyPr/>
@@ -6572,7 +6351,7 @@
       </p:sp>
       <p:pic>
         <p:nvPicPr>
-          <p:cNvPr id="24" name="Image 1" descr="preencoded.png">    </p:cNvPr>
+          <p:cNvPr id="24" name="Image 1" descr="preencoded.png"/>
           <p:cNvPicPr>
             <a:picLocks noChangeAspect="1"/>
           </p:cNvPicPr>
@@ -6609,13 +6388,12 @@
             <a:avLst/>
           </a:prstGeom>
           <a:noFill/>
-          <a:ln/>
         </p:spPr>
         <p:txBody>
           <a:bodyPr wrap="square" lIns="0" tIns="0" rIns="0" bIns="0" rtlCol="0" anchor="ctr"/>
           <a:lstStyle/>
           <a:p>
-            <a:pPr indent="0" marL="0">
+            <a:pPr marL="0" indent="0">
               <a:buNone/>
             </a:pPr>
             <a:r>
@@ -6623,9 +6401,9 @@
                 <a:solidFill>
                   <a:srgbClr val="657384"/>
                 </a:solidFill>
-                <a:latin typeface="PT Sans" pitchFamily="34" charset="0"/>
-                <a:ea typeface="PT Sans" pitchFamily="34" charset="-122"/>
-                <a:cs typeface="PT Sans" pitchFamily="34" charset="-120"/>
+                <a:latin typeface="PT Sans" panose="020B0503020203020204" pitchFamily="34" charset="0"/>
+                <a:ea typeface="PT Sans" panose="020B0503020203020204" pitchFamily="34" charset="-122"/>
+                <a:cs typeface="PT Sans" panose="020B0503020203020204" pitchFamily="34" charset="-120"/>
               </a:rPr>
               <a:t>Затраты на разработку</a:t>
             </a:r>
@@ -6648,13 +6426,12 @@
             <a:avLst/>
           </a:prstGeom>
           <a:noFill/>
-          <a:ln/>
         </p:spPr>
         <p:txBody>
           <a:bodyPr wrap="square" lIns="0" tIns="0" rIns="0" bIns="0" rtlCol="0" anchor="ctr"/>
           <a:lstStyle/>
           <a:p>
-            <a:pPr algn="ctr" indent="0" marL="0">
+            <a:pPr marL="0" indent="0" algn="ctr">
               <a:buNone/>
             </a:pPr>
             <a:r>
@@ -6662,9 +6439,9 @@
                 <a:solidFill>
                   <a:srgbClr val="33598A"/>
                 </a:solidFill>
-                <a:latin typeface="PT Serif" pitchFamily="34" charset="0"/>
-                <a:ea typeface="PT Serif" pitchFamily="34" charset="-122"/>
-                <a:cs typeface="PT Serif" pitchFamily="34" charset="-120"/>
+                <a:latin typeface="PT Serif" panose="020A0603040505020204" pitchFamily="34" charset="0"/>
+                <a:ea typeface="PT Serif" panose="020A0603040505020204" pitchFamily="34" charset="-122"/>
+                <a:cs typeface="PT Serif" panose="020A0603040505020204" pitchFamily="34" charset="-120"/>
               </a:rPr>
               <a:t>24 000 ₽</a:t>
             </a:r>
@@ -6687,13 +6464,12 @@
             <a:avLst/>
           </a:prstGeom>
           <a:noFill/>
-          <a:ln/>
         </p:spPr>
         <p:txBody>
           <a:bodyPr wrap="square" lIns="0" tIns="0" rIns="0" bIns="0" rtlCol="0" anchor="t"/>
           <a:lstStyle/>
           <a:p>
-            <a:pPr algn="ctr" indent="0" marL="0">
+            <a:pPr marL="0" indent="0" algn="ctr">
               <a:buNone/>
             </a:pPr>
             <a:r>
@@ -6701,9 +6477,9 @@
                 <a:solidFill>
                   <a:srgbClr val="23303F"/>
                 </a:solidFill>
-                <a:latin typeface="PT Sans" pitchFamily="34" charset="0"/>
-                <a:ea typeface="PT Sans" pitchFamily="34" charset="-122"/>
-                <a:cs typeface="PT Sans" pitchFamily="34" charset="-120"/>
+                <a:latin typeface="PT Sans" panose="020B0503020203020204" pitchFamily="34" charset="0"/>
+                <a:ea typeface="PT Sans" panose="020B0503020203020204" pitchFamily="34" charset="-122"/>
+                <a:cs typeface="PT Sans" panose="020B0503020203020204" pitchFamily="34" charset="-120"/>
               </a:rPr>
               <a:t>80 ч × 300 ₽</a:t>
             </a:r>
@@ -6735,7 +6511,7 @@
             <a:prstDash val="solid"/>
           </a:ln>
           <a:effectLst>
-            <a:outerShdw sx="100000" sy="100000" kx="0" ky="0" algn="bl" rotWithShape="0" blurRad="101600" dist="38100" dir="5400000">
+            <a:outerShdw blurRad="101600" dist="38100" dir="5400000" algn="bl" rotWithShape="0">
               <a:srgbClr val="8499B5">
                 <a:alpha val="22000"/>
               </a:srgbClr>
@@ -6764,7 +6540,6 @@
           <a:solidFill>
             <a:srgbClr val="33598A"/>
           </a:solidFill>
-          <a:ln/>
         </p:spPr>
         <p:txBody>
           <a:bodyPr/>
@@ -6788,7 +6563,6 @@
           <a:solidFill>
             <a:srgbClr val="33598A"/>
           </a:solidFill>
-          <a:ln/>
         </p:spPr>
         <p:txBody>
           <a:bodyPr/>
@@ -6797,7 +6571,7 @@
       </p:sp>
       <p:pic>
         <p:nvPicPr>
-          <p:cNvPr id="31" name="Image 2" descr="preencoded.png">    </p:cNvPr>
+          <p:cNvPr id="31" name="Image 2" descr="preencoded.png"/>
           <p:cNvPicPr>
             <a:picLocks noChangeAspect="1"/>
           </p:cNvPicPr>
@@ -6834,13 +6608,12 @@
             <a:avLst/>
           </a:prstGeom>
           <a:noFill/>
-          <a:ln/>
         </p:spPr>
         <p:txBody>
           <a:bodyPr wrap="square" lIns="0" tIns="0" rIns="0" bIns="0" rtlCol="0" anchor="ctr"/>
           <a:lstStyle/>
           <a:p>
-            <a:pPr indent="0" marL="0">
+            <a:pPr marL="0" indent="0">
               <a:buNone/>
             </a:pPr>
             <a:r>
@@ -6848,9 +6621,9 @@
                 <a:solidFill>
                   <a:srgbClr val="657384"/>
                 </a:solidFill>
-                <a:latin typeface="PT Sans" pitchFamily="34" charset="0"/>
-                <a:ea typeface="PT Sans" pitchFamily="34" charset="-122"/>
-                <a:cs typeface="PT Sans" pitchFamily="34" charset="-120"/>
+                <a:latin typeface="PT Sans" panose="020B0503020203020204" pitchFamily="34" charset="0"/>
+                <a:ea typeface="PT Sans" panose="020B0503020203020204" pitchFamily="34" charset="-122"/>
+                <a:cs typeface="PT Sans" panose="020B0503020203020204" pitchFamily="34" charset="-120"/>
               </a:rPr>
               <a:t>Экономия времени</a:t>
             </a:r>
@@ -6873,13 +6646,12 @@
             <a:avLst/>
           </a:prstGeom>
           <a:noFill/>
-          <a:ln/>
         </p:spPr>
         <p:txBody>
           <a:bodyPr wrap="square" lIns="0" tIns="0" rIns="0" bIns="0" rtlCol="0" anchor="ctr"/>
           <a:lstStyle/>
           <a:p>
-            <a:pPr algn="ctr" indent="0" marL="0">
+            <a:pPr marL="0" indent="0" algn="ctr">
               <a:buNone/>
             </a:pPr>
             <a:r>
@@ -6887,9 +6659,9 @@
                 <a:solidFill>
                   <a:srgbClr val="33598A"/>
                 </a:solidFill>
-                <a:latin typeface="PT Serif" pitchFamily="34" charset="0"/>
-                <a:ea typeface="PT Serif" pitchFamily="34" charset="-122"/>
-                <a:cs typeface="PT Serif" pitchFamily="34" charset="-120"/>
+                <a:latin typeface="PT Serif" panose="020A0603040505020204" pitchFamily="34" charset="0"/>
+                <a:ea typeface="PT Serif" panose="020A0603040505020204" pitchFamily="34" charset="-122"/>
+                <a:cs typeface="PT Serif" panose="020A0603040505020204" pitchFamily="34" charset="-120"/>
               </a:rPr>
               <a:t>27 ч / мес</a:t>
             </a:r>
@@ -6912,13 +6684,12 @@
             <a:avLst/>
           </a:prstGeom>
           <a:noFill/>
-          <a:ln/>
         </p:spPr>
         <p:txBody>
           <a:bodyPr wrap="square" lIns="0" tIns="0" rIns="0" bIns="0" rtlCol="0" anchor="t"/>
           <a:lstStyle/>
           <a:p>
-            <a:pPr algn="ctr" indent="0" marL="0">
+            <a:pPr marL="0" indent="0" algn="ctr">
               <a:buNone/>
             </a:pPr>
             <a:r>
@@ -6926,9 +6697,9 @@
                 <a:solidFill>
                   <a:srgbClr val="23303F"/>
                 </a:solidFill>
-                <a:latin typeface="PT Sans" pitchFamily="34" charset="0"/>
-                <a:ea typeface="PT Sans" pitchFamily="34" charset="-122"/>
-                <a:cs typeface="PT Sans" pitchFamily="34" charset="-120"/>
+                <a:latin typeface="PT Sans" panose="020B0503020203020204" pitchFamily="34" charset="0"/>
+                <a:ea typeface="PT Sans" panose="020B0503020203020204" pitchFamily="34" charset="-122"/>
+                <a:cs typeface="PT Sans" panose="020B0503020203020204" pitchFamily="34" charset="-120"/>
               </a:rPr>
               <a:t>≈ 8 100 ₽/мес · ≈ 97 200 ₽/год</a:t>
             </a:r>
@@ -6960,7 +6731,7 @@
             <a:prstDash val="solid"/>
           </a:ln>
           <a:effectLst>
-            <a:outerShdw sx="100000" sy="100000" kx="0" ky="0" algn="bl" rotWithShape="0" blurRad="101600" dist="38100" dir="5400000">
+            <a:outerShdw blurRad="101600" dist="38100" dir="5400000" algn="bl" rotWithShape="0">
               <a:srgbClr val="8499B5">
                 <a:alpha val="22000"/>
               </a:srgbClr>
@@ -6989,7 +6760,6 @@
           <a:solidFill>
             <a:srgbClr val="B08D3E"/>
           </a:solidFill>
-          <a:ln/>
         </p:spPr>
         <p:txBody>
           <a:bodyPr/>
@@ -7013,7 +6783,6 @@
           <a:solidFill>
             <a:srgbClr val="B08D3E"/>
           </a:solidFill>
-          <a:ln/>
         </p:spPr>
         <p:txBody>
           <a:bodyPr/>
@@ -7022,7 +6791,7 @@
       </p:sp>
       <p:pic>
         <p:nvPicPr>
-          <p:cNvPr id="38" name="Image 3" descr="preencoded.png">    </p:cNvPr>
+          <p:cNvPr id="38" name="Image 3" descr="preencoded.png"/>
           <p:cNvPicPr>
             <a:picLocks noChangeAspect="1"/>
           </p:cNvPicPr>
@@ -7059,13 +6828,12 @@
             <a:avLst/>
           </a:prstGeom>
           <a:noFill/>
-          <a:ln/>
         </p:spPr>
         <p:txBody>
           <a:bodyPr wrap="square" lIns="0" tIns="0" rIns="0" bIns="0" rtlCol="0" anchor="ctr"/>
           <a:lstStyle/>
           <a:p>
-            <a:pPr indent="0" marL="0">
+            <a:pPr marL="0" indent="0">
               <a:buNone/>
             </a:pPr>
             <a:r>
@@ -7073,9 +6841,9 @@
                 <a:solidFill>
                   <a:srgbClr val="657384"/>
                 </a:solidFill>
-                <a:latin typeface="PT Sans" pitchFamily="34" charset="0"/>
-                <a:ea typeface="PT Sans" pitchFamily="34" charset="-122"/>
-                <a:cs typeface="PT Sans" pitchFamily="34" charset="-120"/>
+                <a:latin typeface="PT Sans" panose="020B0503020203020204" pitchFamily="34" charset="0"/>
+                <a:ea typeface="PT Sans" panose="020B0503020203020204" pitchFamily="34" charset="-122"/>
+                <a:cs typeface="PT Sans" panose="020B0503020203020204" pitchFamily="34" charset="-120"/>
               </a:rPr>
               <a:t>Окупаемость</a:t>
             </a:r>
@@ -7098,13 +6866,12 @@
             <a:avLst/>
           </a:prstGeom>
           <a:noFill/>
-          <a:ln/>
         </p:spPr>
         <p:txBody>
           <a:bodyPr wrap="square" lIns="0" tIns="0" rIns="0" bIns="0" rtlCol="0" anchor="ctr"/>
           <a:lstStyle/>
           <a:p>
-            <a:pPr algn="ctr" indent="0" marL="0">
+            <a:pPr marL="0" indent="0" algn="ctr">
               <a:buNone/>
             </a:pPr>
             <a:r>
@@ -7112,9 +6879,9 @@
                 <a:solidFill>
                   <a:srgbClr val="B08D3E"/>
                 </a:solidFill>
-                <a:latin typeface="PT Serif" pitchFamily="34" charset="0"/>
-                <a:ea typeface="PT Serif" pitchFamily="34" charset="-122"/>
-                <a:cs typeface="PT Serif" pitchFamily="34" charset="-120"/>
+                <a:latin typeface="PT Serif" panose="020A0603040505020204" pitchFamily="34" charset="0"/>
+                <a:ea typeface="PT Serif" panose="020A0603040505020204" pitchFamily="34" charset="-122"/>
+                <a:cs typeface="PT Serif" panose="020A0603040505020204" pitchFamily="34" charset="-120"/>
               </a:rPr>
               <a:t>≈ 3 месяца</a:t>
             </a:r>
@@ -7137,13 +6904,12 @@
             <a:avLst/>
           </a:prstGeom>
           <a:noFill/>
-          <a:ln/>
         </p:spPr>
         <p:txBody>
           <a:bodyPr wrap="square" lIns="0" tIns="0" rIns="0" bIns="0" rtlCol="0" anchor="t"/>
           <a:lstStyle/>
           <a:p>
-            <a:pPr algn="ctr" indent="0" marL="0">
+            <a:pPr marL="0" indent="0" algn="ctr">
               <a:buNone/>
             </a:pPr>
             <a:r>
@@ -7151,9 +6917,9 @@
                 <a:solidFill>
                   <a:srgbClr val="23303F"/>
                 </a:solidFill>
-                <a:latin typeface="PT Sans" pitchFamily="34" charset="0"/>
-                <a:ea typeface="PT Sans" pitchFamily="34" charset="-122"/>
-                <a:cs typeface="PT Sans" pitchFamily="34" charset="-120"/>
+                <a:latin typeface="PT Sans" panose="020B0503020203020204" pitchFamily="34" charset="0"/>
+                <a:ea typeface="PT Sans" panose="020B0503020203020204" pitchFamily="34" charset="-122"/>
+                <a:cs typeface="PT Sans" panose="020B0503020203020204" pitchFamily="34" charset="-120"/>
               </a:rPr>
               <a:t>проект окупается за один квартал</a:t>
             </a:r>
@@ -7203,13 +6969,12 @@
             <a:avLst/>
           </a:prstGeom>
           <a:noFill/>
-          <a:ln/>
         </p:spPr>
         <p:txBody>
           <a:bodyPr wrap="square" lIns="0" tIns="0" rIns="0" bIns="0" rtlCol="0" anchor="ctr"/>
           <a:lstStyle/>
           <a:p>
-            <a:pPr indent="0" marL="0">
+            <a:pPr marL="0" indent="0">
               <a:buNone/>
             </a:pPr>
             <a:r>
@@ -7217,9 +6982,9 @@
                 <a:solidFill>
                   <a:srgbClr val="657384"/>
                 </a:solidFill>
-                <a:latin typeface="PT Sans" pitchFamily="34" charset="0"/>
-                <a:ea typeface="PT Sans" pitchFamily="34" charset="-122"/>
-                <a:cs typeface="PT Sans" pitchFamily="34" charset="-120"/>
+                <a:latin typeface="PT Sans" panose="020B0503020203020204" pitchFamily="34" charset="0"/>
+                <a:ea typeface="PT Sans" panose="020B0503020203020204" pitchFamily="34" charset="-122"/>
+                <a:cs typeface="PT Sans" panose="020B0503020203020204" pitchFamily="34" charset="-120"/>
               </a:rPr>
               <a:t>АРМ менеджера салона красоты  ·  ВСГУТУ  ·  Улан-Удэ, 2026</a:t>
             </a:r>
@@ -7242,13 +7007,12 @@
             <a:avLst/>
           </a:prstGeom>
           <a:noFill/>
-          <a:ln/>
         </p:spPr>
         <p:txBody>
           <a:bodyPr wrap="square" lIns="0" tIns="0" rIns="0" bIns="0" rtlCol="0" anchor="ctr"/>
           <a:lstStyle/>
           <a:p>
-            <a:pPr algn="r" indent="0" marL="0">
+            <a:pPr marL="0" indent="0" algn="r">
               <a:buNone/>
             </a:pPr>
             <a:r>
@@ -7256,9 +7020,9 @@
                 <a:solidFill>
                   <a:srgbClr val="657384"/>
                 </a:solidFill>
-                <a:latin typeface="PT Sans" pitchFamily="34" charset="0"/>
-                <a:ea typeface="PT Sans" pitchFamily="34" charset="-122"/>
-                <a:cs typeface="PT Sans" pitchFamily="34" charset="-120"/>
+                <a:latin typeface="PT Sans" panose="020B0503020203020204" pitchFamily="34" charset="0"/>
+                <a:ea typeface="PT Sans" panose="020B0503020203020204" pitchFamily="34" charset="-122"/>
+                <a:cs typeface="PT Sans" panose="020B0503020203020204" pitchFamily="34" charset="-120"/>
               </a:rPr>
               <a:t>13 / 15</a:t>
             </a:r>
@@ -7276,12 +7040,13 @@
 
 <file path=ppt/slides/slide14.xml><?xml version="1.0" encoding="utf-8"?>
 <p:sld xmlns:a="http://schemas.openxmlformats.org/drawingml/2006/main" xmlns:r="http://schemas.openxmlformats.org/officeDocument/2006/relationships" xmlns:p="http://schemas.openxmlformats.org/presentationml/2006/main">
-  <p:cSld name="Slide 13">
+  <p:cSld>
     <p:bg>
       <p:bgPr>
         <a:solidFill>
           <a:srgbClr val="FFFFFF"/>
         </a:solidFill>
+        <a:effectLst/>
       </p:bgPr>
     </p:bg>
     <p:spTree>
@@ -7315,7 +7080,6 @@
           <a:solidFill>
             <a:srgbClr val="B08D3E"/>
           </a:solidFill>
-          <a:ln/>
         </p:spPr>
         <p:txBody>
           <a:bodyPr/>
@@ -7337,23 +7101,22 @@
             <a:avLst/>
           </a:prstGeom>
           <a:noFill/>
-          <a:ln/>
         </p:spPr>
         <p:txBody>
           <a:bodyPr wrap="square" lIns="0" tIns="0" rIns="0" bIns="0" rtlCol="0" anchor="ctr"/>
           <a:lstStyle/>
           <a:p>
-            <a:pPr indent="0" marL="0">
-              <a:buNone/>
-            </a:pPr>
-            <a:r>
-              <a:rPr lang="en-US" sz="1250" b="1" spc="300" kern="0" dirty="0">
+            <a:pPr marL="0" indent="0">
+              <a:buNone/>
+            </a:pPr>
+            <a:r>
+              <a:rPr lang="en-US" sz="1250" b="1" kern="0" spc="300" dirty="0">
                 <a:solidFill>
                   <a:srgbClr val="B08D3E"/>
                 </a:solidFill>
-                <a:latin typeface="PT Sans" pitchFamily="34" charset="0"/>
-                <a:ea typeface="PT Sans" pitchFamily="34" charset="-122"/>
-                <a:cs typeface="PT Sans" pitchFamily="34" charset="-120"/>
+                <a:latin typeface="PT Sans" panose="020B0503020203020204" pitchFamily="34" charset="0"/>
+                <a:ea typeface="PT Sans" panose="020B0503020203020204" pitchFamily="34" charset="-122"/>
+                <a:cs typeface="PT Sans" panose="020B0503020203020204" pitchFamily="34" charset="-120"/>
               </a:rPr>
               <a:t>ЗАКЛЮЧЕНИЕ</a:t>
             </a:r>
@@ -7376,13 +7139,12 @@
             <a:avLst/>
           </a:prstGeom>
           <a:noFill/>
-          <a:ln/>
         </p:spPr>
         <p:txBody>
           <a:bodyPr wrap="square" lIns="0" tIns="0" rIns="0" bIns="0" rtlCol="0" anchor="ctr"/>
           <a:lstStyle/>
           <a:p>
-            <a:pPr indent="0" marL="0">
+            <a:pPr marL="0" indent="0">
               <a:buNone/>
             </a:pPr>
             <a:r>
@@ -7390,9 +7152,9 @@
                 <a:solidFill>
                   <a:srgbClr val="1E3A5F"/>
                 </a:solidFill>
-                <a:latin typeface="PT Serif" pitchFamily="34" charset="0"/>
-                <a:ea typeface="PT Serif" pitchFamily="34" charset="-122"/>
-                <a:cs typeface="PT Serif" pitchFamily="34" charset="-120"/>
+                <a:latin typeface="PT Serif" panose="020A0603040505020204" pitchFamily="34" charset="0"/>
+                <a:ea typeface="PT Serif" panose="020A0603040505020204" pitchFamily="34" charset="-122"/>
+                <a:cs typeface="PT Serif" panose="020A0603040505020204" pitchFamily="34" charset="-120"/>
               </a:rPr>
               <a:t>Итоги и развитие</a:t>
             </a:r>
@@ -7424,7 +7186,7 @@
             <a:prstDash val="solid"/>
           </a:ln>
           <a:effectLst>
-            <a:outerShdw sx="100000" sy="100000" kx="0" ky="0" algn="bl" rotWithShape="0" blurRad="101600" dist="38100" dir="5400000">
+            <a:outerShdw blurRad="101600" dist="38100" dir="5400000" algn="bl" rotWithShape="0">
               <a:srgbClr val="8499B5">
                 <a:alpha val="22000"/>
               </a:srgbClr>
@@ -7453,7 +7215,6 @@
           <a:solidFill>
             <a:srgbClr val="2E7D5B"/>
           </a:solidFill>
-          <a:ln/>
         </p:spPr>
         <p:txBody>
           <a:bodyPr/>
@@ -7477,7 +7238,6 @@
           <a:solidFill>
             <a:srgbClr val="2E7D5B"/>
           </a:solidFill>
-          <a:ln/>
         </p:spPr>
         <p:txBody>
           <a:bodyPr/>
@@ -7486,7 +7246,7 @@
       </p:sp>
       <p:pic>
         <p:nvPicPr>
-          <p:cNvPr id="8" name="Image 0" descr="preencoded.png">    </p:cNvPr>
+          <p:cNvPr id="8" name="Image 0" descr="preencoded.png"/>
           <p:cNvPicPr>
             <a:picLocks noChangeAspect="1"/>
           </p:cNvPicPr>
@@ -7523,13 +7283,12 @@
             <a:avLst/>
           </a:prstGeom>
           <a:noFill/>
-          <a:ln/>
         </p:spPr>
         <p:txBody>
           <a:bodyPr wrap="square" lIns="0" tIns="0" rIns="0" bIns="0" rtlCol="0" anchor="ctr"/>
           <a:lstStyle/>
           <a:p>
-            <a:pPr indent="0" marL="0">
+            <a:pPr marL="0" indent="0">
               <a:buNone/>
             </a:pPr>
             <a:r>
@@ -7537,23 +7296,20 @@
                 <a:solidFill>
                   <a:srgbClr val="2E7D5B"/>
                 </a:solidFill>
-                <a:latin typeface="PT Serif" pitchFamily="34" charset="0"/>
-                <a:ea typeface="PT Serif" pitchFamily="34" charset="-122"/>
-                <a:cs typeface="PT Serif" pitchFamily="34" charset="-120"/>
+                <a:latin typeface="PT Serif" panose="020A0603040505020204" pitchFamily="34" charset="0"/>
+                <a:ea typeface="PT Serif" panose="020A0603040505020204" pitchFamily="34" charset="-122"/>
+                <a:cs typeface="PT Serif" panose="020A0603040505020204" pitchFamily="34" charset="-120"/>
               </a:rPr>
               <a:t>Цель достигнута.  </a:t>
             </a:r>
-            <a:pPr indent="0" marL="0">
-              <a:buNone/>
-            </a:pPr>
             <a:r>
               <a:rPr lang="en-US" sz="1600" dirty="0">
                 <a:solidFill>
                   <a:srgbClr val="23303F"/>
                 </a:solidFill>
-                <a:latin typeface="PT Sans" pitchFamily="34" charset="0"/>
-                <a:ea typeface="PT Sans" pitchFamily="34" charset="-122"/>
-                <a:cs typeface="PT Sans" pitchFamily="34" charset="-120"/>
+                <a:latin typeface="PT Sans" panose="020B0503020203020204" pitchFamily="34" charset="0"/>
+                <a:ea typeface="PT Sans" panose="020B0503020203020204" pitchFamily="34" charset="-122"/>
+                <a:cs typeface="PT Sans" panose="020B0503020203020204" pitchFamily="34" charset="-120"/>
               </a:rPr>
               <a:t>Спроектирован АРМ менеджера салона: модели процессов, структура данных, формы и работающий Excel-прототип.</a:t>
             </a:r>
@@ -7585,7 +7341,7 @@
             <a:prstDash val="solid"/>
           </a:ln>
           <a:effectLst>
-            <a:outerShdw sx="100000" sy="100000" kx="0" ky="0" algn="bl" rotWithShape="0" blurRad="101600" dist="38100" dir="5400000">
+            <a:outerShdw blurRad="101600" dist="38100" dir="5400000" algn="bl" rotWithShape="0">
               <a:srgbClr val="8499B5">
                 <a:alpha val="22000"/>
               </a:srgbClr>
@@ -7614,7 +7370,6 @@
           <a:solidFill>
             <a:srgbClr val="1E3A5F"/>
           </a:solidFill>
-          <a:ln/>
         </p:spPr>
         <p:txBody>
           <a:bodyPr/>
@@ -7636,13 +7391,12 @@
             <a:avLst/>
           </a:prstGeom>
           <a:noFill/>
-          <a:ln/>
         </p:spPr>
         <p:txBody>
           <a:bodyPr wrap="square" lIns="0" tIns="0" rIns="0" bIns="0" rtlCol="0" anchor="ctr"/>
           <a:lstStyle/>
           <a:p>
-            <a:pPr indent="0" marL="0">
+            <a:pPr marL="0" indent="0">
               <a:buNone/>
             </a:pPr>
             <a:r>
@@ -7650,23 +7404,20 @@
                 <a:solidFill>
                   <a:srgbClr val="1E3A5F"/>
                 </a:solidFill>
-                <a:latin typeface="PT Serif" pitchFamily="34" charset="0"/>
-                <a:ea typeface="PT Serif" pitchFamily="34" charset="-122"/>
-                <a:cs typeface="PT Serif" pitchFamily="34" charset="-120"/>
+                <a:latin typeface="PT Serif" panose="020A0603040505020204" pitchFamily="34" charset="0"/>
+                <a:ea typeface="PT Serif" panose="020A0603040505020204" pitchFamily="34" charset="-122"/>
+                <a:cs typeface="PT Serif" panose="020A0603040505020204" pitchFamily="34" charset="-120"/>
               </a:rPr>
               <a:t>Вывод.  </a:t>
             </a:r>
-            <a:pPr indent="0" marL="0">
-              <a:buNone/>
-            </a:pPr>
             <a:r>
               <a:rPr lang="en-US" sz="1600" dirty="0">
                 <a:solidFill>
                   <a:srgbClr val="23303F"/>
                 </a:solidFill>
-                <a:latin typeface="PT Sans" pitchFamily="34" charset="0"/>
-                <a:ea typeface="PT Sans" pitchFamily="34" charset="-122"/>
-                <a:cs typeface="PT Sans" pitchFamily="34" charset="-120"/>
+                <a:latin typeface="PT Sans" panose="020B0503020203020204" pitchFamily="34" charset="0"/>
+                <a:ea typeface="PT Sans" panose="020B0503020203020204" pitchFamily="34" charset="-122"/>
+                <a:cs typeface="PT Sans" panose="020B0503020203020204" pitchFamily="34" charset="-120"/>
               </a:rPr>
               <a:t>Автоматизация рабочего места в малом салоне достижима без дорогой CRM — на доступных инструментах и с окупаемостью около трёх месяцев.</a:t>
             </a:r>
@@ -7689,23 +7440,22 @@
             <a:avLst/>
           </a:prstGeom>
           <a:noFill/>
-          <a:ln/>
         </p:spPr>
         <p:txBody>
           <a:bodyPr wrap="square" lIns="0" tIns="0" rIns="0" bIns="0" rtlCol="0" anchor="ctr"/>
           <a:lstStyle/>
           <a:p>
-            <a:pPr indent="0" marL="0">
-              <a:buNone/>
-            </a:pPr>
-            <a:r>
-              <a:rPr lang="en-US" sz="1250" b="1" spc="300" kern="0" dirty="0">
+            <a:pPr marL="0" indent="0">
+              <a:buNone/>
+            </a:pPr>
+            <a:r>
+              <a:rPr lang="en-US" sz="1250" b="1" kern="0" spc="300" dirty="0">
                 <a:solidFill>
                   <a:srgbClr val="B08D3E"/>
                 </a:solidFill>
-                <a:latin typeface="PT Sans" pitchFamily="34" charset="0"/>
-                <a:ea typeface="PT Sans" pitchFamily="34" charset="-122"/>
-                <a:cs typeface="PT Sans" pitchFamily="34" charset="-120"/>
+                <a:latin typeface="PT Sans" panose="020B0503020203020204" pitchFamily="34" charset="0"/>
+                <a:ea typeface="PT Sans" panose="020B0503020203020204" pitchFamily="34" charset="-122"/>
+                <a:cs typeface="PT Sans" panose="020B0503020203020204" pitchFamily="34" charset="-120"/>
               </a:rPr>
               <a:t>НАПРАВЛЕНИЯ РАЗВИТИЯ</a:t>
             </a:r>
@@ -7737,7 +7487,7 @@
             <a:prstDash val="solid"/>
           </a:ln>
           <a:effectLst>
-            <a:outerShdw sx="100000" sy="100000" kx="0" ky="0" algn="bl" rotWithShape="0" blurRad="101600" dist="38100" dir="5400000">
+            <a:outerShdw blurRad="101600" dist="38100" dir="5400000" algn="bl" rotWithShape="0">
               <a:srgbClr val="8499B5">
                 <a:alpha val="22000"/>
               </a:srgbClr>
@@ -7766,7 +7516,6 @@
           <a:solidFill>
             <a:srgbClr val="33598A"/>
           </a:solidFill>
-          <a:ln/>
         </p:spPr>
         <p:txBody>
           <a:bodyPr/>
@@ -7790,7 +7539,6 @@
           <a:solidFill>
             <a:srgbClr val="1E3A5F"/>
           </a:solidFill>
-          <a:ln/>
         </p:spPr>
         <p:txBody>
           <a:bodyPr/>
@@ -7799,7 +7547,7 @@
       </p:sp>
       <p:pic>
         <p:nvPicPr>
-          <p:cNvPr id="17" name="Image 1" descr="preencoded.png">    </p:cNvPr>
+          <p:cNvPr id="17" name="Image 1" descr="preencoded.png"/>
           <p:cNvPicPr>
             <a:picLocks noChangeAspect="1"/>
           </p:cNvPicPr>
@@ -7836,13 +7584,12 @@
             <a:avLst/>
           </a:prstGeom>
           <a:noFill/>
-          <a:ln/>
         </p:spPr>
         <p:txBody>
           <a:bodyPr wrap="square" lIns="0" tIns="0" rIns="0" bIns="0" rtlCol="0" anchor="t"/>
           <a:lstStyle/>
           <a:p>
-            <a:pPr algn="ctr" indent="0" marL="0">
+            <a:pPr marL="0" indent="0" algn="ctr">
               <a:buNone/>
             </a:pPr>
             <a:r>
@@ -7850,9 +7597,9 @@
                 <a:solidFill>
                   <a:srgbClr val="1E3A5F"/>
                 </a:solidFill>
-                <a:latin typeface="PT Sans" pitchFamily="34" charset="0"/>
-                <a:ea typeface="PT Sans" pitchFamily="34" charset="-122"/>
-                <a:cs typeface="PT Sans" pitchFamily="34" charset="-120"/>
+                <a:latin typeface="PT Sans" panose="020B0503020203020204" pitchFamily="34" charset="0"/>
+                <a:ea typeface="PT Sans" panose="020B0503020203020204" pitchFamily="34" charset="-122"/>
+                <a:cs typeface="PT Sans" panose="020B0503020203020204" pitchFamily="34" charset="-120"/>
               </a:rPr>
               <a:t>Формы ввода данных</a:t>
             </a:r>
@@ -7884,7 +7631,7 @@
             <a:prstDash val="solid"/>
           </a:ln>
           <a:effectLst>
-            <a:outerShdw sx="100000" sy="100000" kx="0" ky="0" algn="bl" rotWithShape="0" blurRad="101600" dist="38100" dir="5400000">
+            <a:outerShdw blurRad="101600" dist="38100" dir="5400000" algn="bl" rotWithShape="0">
               <a:srgbClr val="8499B5">
                 <a:alpha val="22000"/>
               </a:srgbClr>
@@ -7913,7 +7660,6 @@
           <a:solidFill>
             <a:srgbClr val="33598A"/>
           </a:solidFill>
-          <a:ln/>
         </p:spPr>
         <p:txBody>
           <a:bodyPr/>
@@ -7937,7 +7683,6 @@
           <a:solidFill>
             <a:srgbClr val="1E3A5F"/>
           </a:solidFill>
-          <a:ln/>
         </p:spPr>
         <p:txBody>
           <a:bodyPr/>
@@ -7946,7 +7691,7 @@
       </p:sp>
       <p:pic>
         <p:nvPicPr>
-          <p:cNvPr id="22" name="Image 2" descr="preencoded.png">    </p:cNvPr>
+          <p:cNvPr id="22" name="Image 2" descr="preencoded.png"/>
           <p:cNvPicPr>
             <a:picLocks noChangeAspect="1"/>
           </p:cNvPicPr>
@@ -7983,13 +7728,12 @@
             <a:avLst/>
           </a:prstGeom>
           <a:noFill/>
-          <a:ln/>
         </p:spPr>
         <p:txBody>
           <a:bodyPr wrap="square" lIns="0" tIns="0" rIns="0" bIns="0" rtlCol="0" anchor="t"/>
           <a:lstStyle/>
           <a:p>
-            <a:pPr algn="ctr" indent="0" marL="0">
+            <a:pPr marL="0" indent="0" algn="ctr">
               <a:buNone/>
             </a:pPr>
             <a:r>
@@ -7997,9 +7741,9 @@
                 <a:solidFill>
                   <a:srgbClr val="1E3A5F"/>
                 </a:solidFill>
-                <a:latin typeface="PT Sans" pitchFamily="34" charset="0"/>
-                <a:ea typeface="PT Sans" pitchFamily="34" charset="-122"/>
-                <a:cs typeface="PT Sans" pitchFamily="34" charset="-120"/>
+                <a:latin typeface="PT Sans" panose="020B0503020203020204" pitchFamily="34" charset="0"/>
+                <a:ea typeface="PT Sans" panose="020B0503020203020204" pitchFamily="34" charset="-122"/>
+                <a:cs typeface="PT Sans" panose="020B0503020203020204" pitchFamily="34" charset="-120"/>
               </a:rPr>
               <a:t>Автоуведомления клиентам</a:t>
             </a:r>
@@ -8031,7 +7775,7 @@
             <a:prstDash val="solid"/>
           </a:ln>
           <a:effectLst>
-            <a:outerShdw sx="100000" sy="100000" kx="0" ky="0" algn="bl" rotWithShape="0" blurRad="101600" dist="38100" dir="5400000">
+            <a:outerShdw blurRad="101600" dist="38100" dir="5400000" algn="bl" rotWithShape="0">
               <a:srgbClr val="8499B5">
                 <a:alpha val="22000"/>
               </a:srgbClr>
@@ -8060,7 +7804,6 @@
           <a:solidFill>
             <a:srgbClr val="33598A"/>
           </a:solidFill>
-          <a:ln/>
         </p:spPr>
         <p:txBody>
           <a:bodyPr/>
@@ -8084,7 +7827,6 @@
           <a:solidFill>
             <a:srgbClr val="1E3A5F"/>
           </a:solidFill>
-          <a:ln/>
         </p:spPr>
         <p:txBody>
           <a:bodyPr/>
@@ -8093,7 +7835,7 @@
       </p:sp>
       <p:pic>
         <p:nvPicPr>
-          <p:cNvPr id="27" name="Image 3" descr="preencoded.png">    </p:cNvPr>
+          <p:cNvPr id="27" name="Image 3" descr="preencoded.png"/>
           <p:cNvPicPr>
             <a:picLocks noChangeAspect="1"/>
           </p:cNvPicPr>
@@ -8130,13 +7872,12 @@
             <a:avLst/>
           </a:prstGeom>
           <a:noFill/>
-          <a:ln/>
         </p:spPr>
         <p:txBody>
           <a:bodyPr wrap="square" lIns="0" tIns="0" rIns="0" bIns="0" rtlCol="0" anchor="t"/>
           <a:lstStyle/>
           <a:p>
-            <a:pPr algn="ctr" indent="0" marL="0">
+            <a:pPr marL="0" indent="0" algn="ctr">
               <a:buNone/>
             </a:pPr>
             <a:r>
@@ -8144,9 +7885,9 @@
                 <a:solidFill>
                   <a:srgbClr val="1E3A5F"/>
                 </a:solidFill>
-                <a:latin typeface="PT Sans" pitchFamily="34" charset="0"/>
-                <a:ea typeface="PT Sans" pitchFamily="34" charset="-122"/>
-                <a:cs typeface="PT Sans" pitchFamily="34" charset="-120"/>
+                <a:latin typeface="PT Sans" panose="020B0503020203020204" pitchFamily="34" charset="0"/>
+                <a:ea typeface="PT Sans" panose="020B0503020203020204" pitchFamily="34" charset="-122"/>
+                <a:cs typeface="PT Sans" panose="020B0503020203020204" pitchFamily="34" charset="-120"/>
               </a:rPr>
               <a:t>Перенос в облако / CRM</a:t>
             </a:r>
@@ -8178,7 +7919,7 @@
             <a:prstDash val="solid"/>
           </a:ln>
           <a:effectLst>
-            <a:outerShdw sx="100000" sy="100000" kx="0" ky="0" algn="bl" rotWithShape="0" blurRad="101600" dist="38100" dir="5400000">
+            <a:outerShdw blurRad="101600" dist="38100" dir="5400000" algn="bl" rotWithShape="0">
               <a:srgbClr val="8499B5">
                 <a:alpha val="22000"/>
               </a:srgbClr>
@@ -8207,7 +7948,6 @@
           <a:solidFill>
             <a:srgbClr val="33598A"/>
           </a:solidFill>
-          <a:ln/>
         </p:spPr>
         <p:txBody>
           <a:bodyPr/>
@@ -8231,7 +7971,6 @@
           <a:solidFill>
             <a:srgbClr val="1E3A5F"/>
           </a:solidFill>
-          <a:ln/>
         </p:spPr>
         <p:txBody>
           <a:bodyPr/>
@@ -8240,7 +7979,7 @@
       </p:sp>
       <p:pic>
         <p:nvPicPr>
-          <p:cNvPr id="32" name="Image 4" descr="preencoded.png">    </p:cNvPr>
+          <p:cNvPr id="32" name="Image 4" descr="preencoded.png"/>
           <p:cNvPicPr>
             <a:picLocks noChangeAspect="1"/>
           </p:cNvPicPr>
@@ -8277,13 +8016,12 @@
             <a:avLst/>
           </a:prstGeom>
           <a:noFill/>
-          <a:ln/>
         </p:spPr>
         <p:txBody>
           <a:bodyPr wrap="square" lIns="0" tIns="0" rIns="0" bIns="0" rtlCol="0" anchor="t"/>
           <a:lstStyle/>
           <a:p>
-            <a:pPr algn="ctr" indent="0" marL="0">
+            <a:pPr marL="0" indent="0" algn="ctr">
               <a:buNone/>
             </a:pPr>
             <a:r>
@@ -8291,9 +8029,9 @@
                 <a:solidFill>
                   <a:srgbClr val="1E3A5F"/>
                 </a:solidFill>
-                <a:latin typeface="PT Sans" pitchFamily="34" charset="0"/>
-                <a:ea typeface="PT Sans" pitchFamily="34" charset="-122"/>
-                <a:cs typeface="PT Sans" pitchFamily="34" charset="-120"/>
+                <a:latin typeface="PT Sans" panose="020B0503020203020204" pitchFamily="34" charset="0"/>
+                <a:ea typeface="PT Sans" panose="020B0503020203020204" pitchFamily="34" charset="-122"/>
+                <a:cs typeface="PT Sans" panose="020B0503020203020204" pitchFamily="34" charset="-120"/>
               </a:rPr>
               <a:t>Онлайн-запись</a:t>
             </a:r>
@@ -8343,13 +8081,12 @@
             <a:avLst/>
           </a:prstGeom>
           <a:noFill/>
-          <a:ln/>
         </p:spPr>
         <p:txBody>
           <a:bodyPr wrap="square" lIns="0" tIns="0" rIns="0" bIns="0" rtlCol="0" anchor="ctr"/>
           <a:lstStyle/>
           <a:p>
-            <a:pPr indent="0" marL="0">
+            <a:pPr marL="0" indent="0">
               <a:buNone/>
             </a:pPr>
             <a:r>
@@ -8357,9 +8094,9 @@
                 <a:solidFill>
                   <a:srgbClr val="657384"/>
                 </a:solidFill>
-                <a:latin typeface="PT Sans" pitchFamily="34" charset="0"/>
-                <a:ea typeface="PT Sans" pitchFamily="34" charset="-122"/>
-                <a:cs typeface="PT Sans" pitchFamily="34" charset="-120"/>
+                <a:latin typeface="PT Sans" panose="020B0503020203020204" pitchFamily="34" charset="0"/>
+                <a:ea typeface="PT Sans" panose="020B0503020203020204" pitchFamily="34" charset="-122"/>
+                <a:cs typeface="PT Sans" panose="020B0503020203020204" pitchFamily="34" charset="-120"/>
               </a:rPr>
               <a:t>АРМ менеджера салона красоты  ·  ВСГУТУ  ·  Улан-Удэ, 2026</a:t>
             </a:r>
@@ -8382,13 +8119,12 @@
             <a:avLst/>
           </a:prstGeom>
           <a:noFill/>
-          <a:ln/>
         </p:spPr>
         <p:txBody>
           <a:bodyPr wrap="square" lIns="0" tIns="0" rIns="0" bIns="0" rtlCol="0" anchor="ctr"/>
           <a:lstStyle/>
           <a:p>
-            <a:pPr algn="r" indent="0" marL="0">
+            <a:pPr marL="0" indent="0" algn="r">
               <a:buNone/>
             </a:pPr>
             <a:r>
@@ -8396,9 +8132,9 @@
                 <a:solidFill>
                   <a:srgbClr val="657384"/>
                 </a:solidFill>
-                <a:latin typeface="PT Sans" pitchFamily="34" charset="0"/>
-                <a:ea typeface="PT Sans" pitchFamily="34" charset="-122"/>
-                <a:cs typeface="PT Sans" pitchFamily="34" charset="-120"/>
+                <a:latin typeface="PT Sans" panose="020B0503020203020204" pitchFamily="34" charset="0"/>
+                <a:ea typeface="PT Sans" panose="020B0503020203020204" pitchFamily="34" charset="-122"/>
+                <a:cs typeface="PT Sans" panose="020B0503020203020204" pitchFamily="34" charset="-120"/>
               </a:rPr>
               <a:t>14 / 15</a:t>
             </a:r>
@@ -8416,12 +8152,13 @@
 
 <file path=ppt/slides/slide15.xml><?xml version="1.0" encoding="utf-8"?>
 <p:sld xmlns:a="http://schemas.openxmlformats.org/drawingml/2006/main" xmlns:r="http://schemas.openxmlformats.org/officeDocument/2006/relationships" xmlns:p="http://schemas.openxmlformats.org/presentationml/2006/main">
-  <p:cSld name="Slide 14">
+  <p:cSld>
     <p:bg>
       <p:bgPr>
         <a:solidFill>
           <a:srgbClr val="16243B"/>
         </a:solidFill>
+        <a:effectLst/>
       </p:bgPr>
     </p:bg>
     <p:spTree>
@@ -8481,7 +8218,6 @@
           <a:solidFill>
             <a:srgbClr val="B08D3E"/>
           </a:solidFill>
-          <a:ln/>
         </p:spPr>
         <p:txBody>
           <a:bodyPr/>
@@ -8490,7 +8226,7 @@
       </p:sp>
       <p:pic>
         <p:nvPicPr>
-          <p:cNvPr id="4" name="Image 0" descr="preencoded.png">    </p:cNvPr>
+          <p:cNvPr id="4" name="Image 0" descr="preencoded.png"/>
           <p:cNvPicPr>
             <a:picLocks noChangeAspect="1"/>
           </p:cNvPicPr>
@@ -8527,13 +8263,12 @@
             <a:avLst/>
           </a:prstGeom>
           <a:noFill/>
-          <a:ln/>
         </p:spPr>
         <p:txBody>
           <a:bodyPr wrap="square" lIns="0" tIns="0" rIns="0" bIns="0" rtlCol="0" anchor="ctr"/>
           <a:lstStyle/>
           <a:p>
-            <a:pPr algn="ctr" indent="0" marL="0">
+            <a:pPr marL="0" indent="0" algn="ctr">
               <a:buNone/>
             </a:pPr>
             <a:r>
@@ -8541,9 +8276,9 @@
                 <a:solidFill>
                   <a:srgbClr val="FFFFFF"/>
                 </a:solidFill>
-                <a:latin typeface="PT Serif" pitchFamily="34" charset="0"/>
-                <a:ea typeface="PT Serif" pitchFamily="34" charset="-122"/>
-                <a:cs typeface="PT Serif" pitchFamily="34" charset="-120"/>
+                <a:latin typeface="PT Serif" panose="020A0603040505020204" pitchFamily="34" charset="0"/>
+                <a:ea typeface="PT Serif" panose="020A0603040505020204" pitchFamily="34" charset="-122"/>
+                <a:cs typeface="PT Serif" panose="020A0603040505020204" pitchFamily="34" charset="-120"/>
               </a:rPr>
               <a:t>Спасибо за внимание!</a:t>
             </a:r>
@@ -8568,7 +8303,6 @@
           <a:solidFill>
             <a:srgbClr val="B08D3E"/>
           </a:solidFill>
-          <a:ln/>
         </p:spPr>
         <p:txBody>
           <a:bodyPr/>
@@ -8590,13 +8324,12 @@
             <a:avLst/>
           </a:prstGeom>
           <a:noFill/>
-          <a:ln/>
         </p:spPr>
         <p:txBody>
           <a:bodyPr wrap="square" lIns="0" tIns="0" rIns="0" bIns="0" rtlCol="0" anchor="ctr"/>
           <a:lstStyle/>
           <a:p>
-            <a:pPr algn="ctr" indent="0" marL="0">
+            <a:pPr marL="0" indent="0" algn="ctr">
               <a:buNone/>
             </a:pPr>
             <a:r>
@@ -8604,9 +8337,9 @@
                 <a:solidFill>
                   <a:srgbClr val="C6D6EC"/>
                 </a:solidFill>
-                <a:latin typeface="PT Sans" pitchFamily="34" charset="0"/>
-                <a:ea typeface="PT Sans" pitchFamily="34" charset="-122"/>
-                <a:cs typeface="PT Sans" pitchFamily="34" charset="-120"/>
+                <a:latin typeface="PT Sans" panose="020B0503020203020204" pitchFamily="34" charset="0"/>
+                <a:ea typeface="PT Sans" panose="020B0503020203020204" pitchFamily="34" charset="-122"/>
+                <a:cs typeface="PT Sans" panose="020B0503020203020204" pitchFamily="34" charset="-120"/>
               </a:rPr>
               <a:t>Готов(а) ответить на вопросы комиссии</a:t>
             </a:r>
@@ -8629,13 +8362,12 @@
             <a:avLst/>
           </a:prstGeom>
           <a:noFill/>
-          <a:ln/>
         </p:spPr>
         <p:txBody>
           <a:bodyPr wrap="square" lIns="0" tIns="0" rIns="0" bIns="0" rtlCol="0" anchor="ctr"/>
           <a:lstStyle/>
           <a:p>
-            <a:pPr algn="ctr" indent="0" marL="0">
+            <a:pPr marL="0" indent="0" algn="ctr">
               <a:buNone/>
             </a:pPr>
             <a:r>
@@ -8643,9 +8375,9 @@
                 <a:solidFill>
                   <a:srgbClr val="92A4C0"/>
                 </a:solidFill>
-                <a:latin typeface="PT Sans" pitchFamily="34" charset="0"/>
-                <a:ea typeface="PT Sans" pitchFamily="34" charset="-122"/>
-                <a:cs typeface="PT Sans" pitchFamily="34" charset="-120"/>
+                <a:latin typeface="PT Sans" panose="020B0503020203020204" pitchFamily="34" charset="0"/>
+                <a:ea typeface="PT Sans" panose="020B0503020203020204" pitchFamily="34" charset="-122"/>
+                <a:cs typeface="PT Sans" panose="020B0503020203020204" pitchFamily="34" charset="-120"/>
               </a:rPr>
               <a:t>Проектирование АРМ менеджера салона красоты · ВСГУТУ · Улан-Удэ, 2026</a:t>
             </a:r>
@@ -8663,12 +8395,13 @@
 
 <file path=ppt/slides/slide2.xml><?xml version="1.0" encoding="utf-8"?>
 <p:sld xmlns:a="http://schemas.openxmlformats.org/drawingml/2006/main" xmlns:r="http://schemas.openxmlformats.org/officeDocument/2006/relationships" xmlns:p="http://schemas.openxmlformats.org/presentationml/2006/main">
-  <p:cSld name="Slide 2">
+  <p:cSld>
     <p:bg>
       <p:bgPr>
         <a:solidFill>
           <a:srgbClr val="FFFFFF"/>
         </a:solidFill>
+        <a:effectLst/>
       </p:bgPr>
     </p:bg>
     <p:spTree>
@@ -8702,7 +8435,6 @@
           <a:solidFill>
             <a:srgbClr val="B08D3E"/>
           </a:solidFill>
-          <a:ln/>
         </p:spPr>
         <p:txBody>
           <a:bodyPr/>
@@ -8724,23 +8456,22 @@
             <a:avLst/>
           </a:prstGeom>
           <a:noFill/>
-          <a:ln/>
         </p:spPr>
         <p:txBody>
           <a:bodyPr wrap="square" lIns="0" tIns="0" rIns="0" bIns="0" rtlCol="0" anchor="ctr"/>
           <a:lstStyle/>
           <a:p>
-            <a:pPr indent="0" marL="0">
-              <a:buNone/>
-            </a:pPr>
-            <a:r>
-              <a:rPr lang="en-US" sz="1250" b="1" spc="300" kern="0" dirty="0">
+            <a:pPr marL="0" indent="0">
+              <a:buNone/>
+            </a:pPr>
+            <a:r>
+              <a:rPr lang="en-US" sz="1250" b="1" kern="0" spc="300" dirty="0">
                 <a:solidFill>
                   <a:srgbClr val="B08D3E"/>
                 </a:solidFill>
-                <a:latin typeface="PT Sans" pitchFamily="34" charset="0"/>
-                <a:ea typeface="PT Sans" pitchFamily="34" charset="-122"/>
-                <a:cs typeface="PT Sans" pitchFamily="34" charset="-120"/>
+                <a:latin typeface="PT Sans" panose="020B0503020203020204" pitchFamily="34" charset="0"/>
+                <a:ea typeface="PT Sans" panose="020B0503020203020204" pitchFamily="34" charset="-122"/>
+                <a:cs typeface="PT Sans" panose="020B0503020203020204" pitchFamily="34" charset="-120"/>
               </a:rPr>
               <a:t>АКТУАЛЬНОСТЬ</a:t>
             </a:r>
@@ -8763,13 +8494,12 @@
             <a:avLst/>
           </a:prstGeom>
           <a:noFill/>
-          <a:ln/>
         </p:spPr>
         <p:txBody>
           <a:bodyPr wrap="square" lIns="0" tIns="0" rIns="0" bIns="0" rtlCol="0" anchor="ctr"/>
           <a:lstStyle/>
           <a:p>
-            <a:pPr indent="0" marL="0">
+            <a:pPr marL="0" indent="0">
               <a:buNone/>
             </a:pPr>
             <a:r>
@@ -8777,9 +8507,9 @@
                 <a:solidFill>
                   <a:srgbClr val="1E3A5F"/>
                 </a:solidFill>
-                <a:latin typeface="PT Serif" pitchFamily="34" charset="0"/>
-                <a:ea typeface="PT Serif" pitchFamily="34" charset="-122"/>
-                <a:cs typeface="PT Serif" pitchFamily="34" charset="-120"/>
+                <a:latin typeface="PT Serif" panose="020A0603040505020204" pitchFamily="34" charset="0"/>
+                <a:ea typeface="PT Serif" panose="020A0603040505020204" pitchFamily="34" charset="-122"/>
+                <a:cs typeface="PT Serif" panose="020A0603040505020204" pitchFamily="34" charset="-120"/>
               </a:rPr>
               <a:t>Зачем малому салону собственный АРМ</a:t>
             </a:r>
@@ -8811,7 +8541,7 @@
             <a:prstDash val="solid"/>
           </a:ln>
           <a:effectLst>
-            <a:outerShdw sx="100000" sy="100000" kx="0" ky="0" algn="bl" rotWithShape="0" blurRad="101600" dist="38100" dir="5400000">
+            <a:outerShdw blurRad="101600" dist="38100" dir="5400000" algn="bl" rotWithShape="0">
               <a:srgbClr val="8499B5">
                 <a:alpha val="22000"/>
               </a:srgbClr>
@@ -8840,7 +8570,6 @@
           <a:solidFill>
             <a:srgbClr val="33598A"/>
           </a:solidFill>
-          <a:ln/>
         </p:spPr>
         <p:txBody>
           <a:bodyPr/>
@@ -8864,7 +8593,6 @@
           <a:solidFill>
             <a:srgbClr val="1E3A5F"/>
           </a:solidFill>
-          <a:ln/>
         </p:spPr>
         <p:txBody>
           <a:bodyPr/>
@@ -8873,7 +8601,7 @@
       </p:sp>
       <p:pic>
         <p:nvPicPr>
-          <p:cNvPr id="8" name="Image 0" descr="preencoded.png">    </p:cNvPr>
+          <p:cNvPr id="8" name="Image 0" descr="preencoded.png"/>
           <p:cNvPicPr>
             <a:picLocks noChangeAspect="1"/>
           </p:cNvPicPr>
@@ -8910,13 +8638,12 @@
             <a:avLst/>
           </a:prstGeom>
           <a:noFill/>
-          <a:ln/>
         </p:spPr>
         <p:txBody>
           <a:bodyPr wrap="square" lIns="0" tIns="0" rIns="0" bIns="0" rtlCol="0" anchor="ctr"/>
           <a:lstStyle/>
           <a:p>
-            <a:pPr indent="0" marL="0">
+            <a:pPr marL="0" indent="0">
               <a:buNone/>
             </a:pPr>
             <a:r>
@@ -8924,9 +8651,9 @@
                 <a:solidFill>
                   <a:srgbClr val="1E3A5F"/>
                 </a:solidFill>
-                <a:latin typeface="PT Sans" pitchFamily="34" charset="0"/>
-                <a:ea typeface="PT Sans" pitchFamily="34" charset="-122"/>
-                <a:cs typeface="PT Sans" pitchFamily="34" charset="-120"/>
+                <a:latin typeface="PT Sans" panose="020B0503020203020204" pitchFamily="34" charset="0"/>
+                <a:ea typeface="PT Sans" panose="020B0503020203020204" pitchFamily="34" charset="-122"/>
+                <a:cs typeface="PT Sans" panose="020B0503020203020204" pitchFamily="34" charset="-120"/>
               </a:rPr>
               <a:t>Учёт «вручную»</a:t>
             </a:r>
@@ -8949,13 +8676,12 @@
             <a:avLst/>
           </a:prstGeom>
           <a:noFill/>
-          <a:ln/>
         </p:spPr>
         <p:txBody>
           <a:bodyPr wrap="square" lIns="0" tIns="0" rIns="0" bIns="0" rtlCol="0" anchor="t"/>
           <a:lstStyle/>
           <a:p>
-            <a:pPr indent="0" marL="0">
+            <a:pPr marL="0" indent="0">
               <a:buNone/>
             </a:pPr>
             <a:r>
@@ -8963,9 +8689,9 @@
                 <a:solidFill>
                   <a:srgbClr val="657384"/>
                 </a:solidFill>
-                <a:latin typeface="PT Sans" pitchFamily="34" charset="0"/>
-                <a:ea typeface="PT Sans" pitchFamily="34" charset="-122"/>
-                <a:cs typeface="PT Sans" pitchFamily="34" charset="-120"/>
+                <a:latin typeface="PT Sans" panose="020B0503020203020204" pitchFamily="34" charset="0"/>
+                <a:ea typeface="PT Sans" panose="020B0503020203020204" pitchFamily="34" charset="-122"/>
+                <a:cs typeface="PT Sans" panose="020B0503020203020204" pitchFamily="34" charset="-120"/>
               </a:rPr>
               <a:t>записи в мессенджерах, на бумаге и в разрозненных таблицах</a:t>
             </a:r>
@@ -8997,7 +8723,7 @@
             <a:prstDash val="solid"/>
           </a:ln>
           <a:effectLst>
-            <a:outerShdw sx="100000" sy="100000" kx="0" ky="0" algn="bl" rotWithShape="0" blurRad="101600" dist="38100" dir="5400000">
+            <a:outerShdw blurRad="101600" dist="38100" dir="5400000" algn="bl" rotWithShape="0">
               <a:srgbClr val="8499B5">
                 <a:alpha val="22000"/>
               </a:srgbClr>
@@ -9026,7 +8752,6 @@
           <a:solidFill>
             <a:srgbClr val="33598A"/>
           </a:solidFill>
-          <a:ln/>
         </p:spPr>
         <p:txBody>
           <a:bodyPr/>
@@ -9050,7 +8775,6 @@
           <a:solidFill>
             <a:srgbClr val="1E3A5F"/>
           </a:solidFill>
-          <a:ln/>
         </p:spPr>
         <p:txBody>
           <a:bodyPr/>
@@ -9059,7 +8783,7 @@
       </p:sp>
       <p:pic>
         <p:nvPicPr>
-          <p:cNvPr id="14" name="Image 1" descr="preencoded.png">    </p:cNvPr>
+          <p:cNvPr id="14" name="Image 1" descr="preencoded.png"/>
           <p:cNvPicPr>
             <a:picLocks noChangeAspect="1"/>
           </p:cNvPicPr>
@@ -9096,13 +8820,12 @@
             <a:avLst/>
           </a:prstGeom>
           <a:noFill/>
-          <a:ln/>
         </p:spPr>
         <p:txBody>
           <a:bodyPr wrap="square" lIns="0" tIns="0" rIns="0" bIns="0" rtlCol="0" anchor="ctr"/>
           <a:lstStyle/>
           <a:p>
-            <a:pPr indent="0" marL="0">
+            <a:pPr marL="0" indent="0">
               <a:buNone/>
             </a:pPr>
             <a:r>
@@ -9110,9 +8833,9 @@
                 <a:solidFill>
                   <a:srgbClr val="1E3A5F"/>
                 </a:solidFill>
-                <a:latin typeface="PT Sans" pitchFamily="34" charset="0"/>
-                <a:ea typeface="PT Sans" pitchFamily="34" charset="-122"/>
-                <a:cs typeface="PT Sans" pitchFamily="34" charset="-120"/>
+                <a:latin typeface="PT Sans" panose="020B0503020203020204" pitchFamily="34" charset="0"/>
+                <a:ea typeface="PT Sans" panose="020B0503020203020204" pitchFamily="34" charset="-122"/>
+                <a:cs typeface="PT Sans" panose="020B0503020203020204" pitchFamily="34" charset="-120"/>
               </a:rPr>
               <a:t>Двойные записи и потери</a:t>
             </a:r>
@@ -9135,13 +8858,12 @@
             <a:avLst/>
           </a:prstGeom>
           <a:noFill/>
-          <a:ln/>
         </p:spPr>
         <p:txBody>
           <a:bodyPr wrap="square" lIns="0" tIns="0" rIns="0" bIns="0" rtlCol="0" anchor="t"/>
           <a:lstStyle/>
           <a:p>
-            <a:pPr indent="0" marL="0">
+            <a:pPr marL="0" indent="0">
               <a:buNone/>
             </a:pPr>
             <a:r>
@@ -9149,9 +8871,9 @@
                 <a:solidFill>
                   <a:srgbClr val="657384"/>
                 </a:solidFill>
-                <a:latin typeface="PT Sans" pitchFamily="34" charset="0"/>
-                <a:ea typeface="PT Sans" pitchFamily="34" charset="-122"/>
-                <a:cs typeface="PT Sans" pitchFamily="34" charset="-120"/>
+                <a:latin typeface="PT Sans" panose="020B0503020203020204" pitchFamily="34" charset="0"/>
+                <a:ea typeface="PT Sans" panose="020B0503020203020204" pitchFamily="34" charset="-122"/>
+                <a:cs typeface="PT Sans" panose="020B0503020203020204" pitchFamily="34" charset="-120"/>
               </a:rPr>
               <a:t>нет единой картины дня — клиенты и заявки теряются</a:t>
             </a:r>
@@ -9183,7 +8905,7 @@
             <a:prstDash val="solid"/>
           </a:ln>
           <a:effectLst>
-            <a:outerShdw sx="100000" sy="100000" kx="0" ky="0" algn="bl" rotWithShape="0" blurRad="101600" dist="38100" dir="5400000">
+            <a:outerShdw blurRad="101600" dist="38100" dir="5400000" algn="bl" rotWithShape="0">
               <a:srgbClr val="8499B5">
                 <a:alpha val="22000"/>
               </a:srgbClr>
@@ -9212,7 +8934,6 @@
           <a:solidFill>
             <a:srgbClr val="33598A"/>
           </a:solidFill>
-          <a:ln/>
         </p:spPr>
         <p:txBody>
           <a:bodyPr/>
@@ -9236,7 +8957,6 @@
           <a:solidFill>
             <a:srgbClr val="1E3A5F"/>
           </a:solidFill>
-          <a:ln/>
         </p:spPr>
         <p:txBody>
           <a:bodyPr/>
@@ -9245,7 +8965,7 @@
       </p:sp>
       <p:pic>
         <p:nvPicPr>
-          <p:cNvPr id="20" name="Image 2" descr="preencoded.png">    </p:cNvPr>
+          <p:cNvPr id="20" name="Image 2" descr="preencoded.png"/>
           <p:cNvPicPr>
             <a:picLocks noChangeAspect="1"/>
           </p:cNvPicPr>
@@ -9282,13 +9002,12 @@
             <a:avLst/>
           </a:prstGeom>
           <a:noFill/>
-          <a:ln/>
         </p:spPr>
         <p:txBody>
           <a:bodyPr wrap="square" lIns="0" tIns="0" rIns="0" bIns="0" rtlCol="0" anchor="ctr"/>
           <a:lstStyle/>
           <a:p>
-            <a:pPr indent="0" marL="0">
+            <a:pPr marL="0" indent="0">
               <a:buNone/>
             </a:pPr>
             <a:r>
@@ -9296,9 +9015,9 @@
                 <a:solidFill>
                   <a:srgbClr val="1E3A5F"/>
                 </a:solidFill>
-                <a:latin typeface="PT Sans" pitchFamily="34" charset="0"/>
-                <a:ea typeface="PT Sans" pitchFamily="34" charset="-122"/>
-                <a:cs typeface="PT Sans" pitchFamily="34" charset="-120"/>
+                <a:latin typeface="PT Sans" panose="020B0503020203020204" pitchFamily="34" charset="0"/>
+                <a:ea typeface="PT Sans" panose="020B0503020203020204" pitchFamily="34" charset="-122"/>
+                <a:cs typeface="PT Sans" panose="020B0503020203020204" pitchFamily="34" charset="-120"/>
               </a:rPr>
               <a:t>Несогласованность каналов</a:t>
             </a:r>
@@ -9321,13 +9040,12 @@
             <a:avLst/>
           </a:prstGeom>
           <a:noFill/>
-          <a:ln/>
         </p:spPr>
         <p:txBody>
           <a:bodyPr wrap="square" lIns="0" tIns="0" rIns="0" bIns="0" rtlCol="0" anchor="t"/>
           <a:lstStyle/>
           <a:p>
-            <a:pPr indent="0" marL="0">
+            <a:pPr marL="0" indent="0">
               <a:buNone/>
             </a:pPr>
             <a:r>
@@ -9335,11 +9053,11 @@
                 <a:solidFill>
                   <a:srgbClr val="657384"/>
                 </a:solidFill>
-                <a:latin typeface="PT Sans" pitchFamily="34" charset="0"/>
-                <a:ea typeface="PT Sans" pitchFamily="34" charset="-122"/>
-                <a:cs typeface="PT Sans" pitchFamily="34" charset="-120"/>
-              </a:rPr>
-              <a:t>WhatsApp, Telegram, бумага и таблица не согласованы</a:t>
+                <a:latin typeface="PT Sans" panose="020B0503020203020204" pitchFamily="34" charset="0"/>
+                <a:ea typeface="PT Sans" panose="020B0503020203020204" pitchFamily="34" charset="-122"/>
+                <a:cs typeface="PT Sans" panose="020B0503020203020204" pitchFamily="34" charset="-120"/>
+              </a:rPr>
+              <a:t>ВКонтакте, MAX, бумага и таблица не согласованы</a:t>
             </a:r>
             <a:endParaRPr lang="en-US" sz="1350" dirty="0"/>
           </a:p>
@@ -9369,7 +9087,7 @@
             <a:prstDash val="solid"/>
           </a:ln>
           <a:effectLst>
-            <a:outerShdw sx="100000" sy="100000" kx="0" ky="0" algn="bl" rotWithShape="0" blurRad="101600" dist="38100" dir="5400000">
+            <a:outerShdw blurRad="101600" dist="38100" dir="5400000" algn="bl" rotWithShape="0">
               <a:srgbClr val="8499B5">
                 <a:alpha val="22000"/>
               </a:srgbClr>
@@ -9398,7 +9116,6 @@
           <a:solidFill>
             <a:srgbClr val="33598A"/>
           </a:solidFill>
-          <a:ln/>
         </p:spPr>
         <p:txBody>
           <a:bodyPr/>
@@ -9422,7 +9139,6 @@
           <a:solidFill>
             <a:srgbClr val="1E3A5F"/>
           </a:solidFill>
-          <a:ln/>
         </p:spPr>
         <p:txBody>
           <a:bodyPr/>
@@ -9431,7 +9147,7 @@
       </p:sp>
       <p:pic>
         <p:nvPicPr>
-          <p:cNvPr id="26" name="Image 3" descr="preencoded.png">    </p:cNvPr>
+          <p:cNvPr id="26" name="Image 3" descr="preencoded.png"/>
           <p:cNvPicPr>
             <a:picLocks noChangeAspect="1"/>
           </p:cNvPicPr>
@@ -9468,13 +9184,12 @@
             <a:avLst/>
           </a:prstGeom>
           <a:noFill/>
-          <a:ln/>
         </p:spPr>
         <p:txBody>
           <a:bodyPr wrap="square" lIns="0" tIns="0" rIns="0" bIns="0" rtlCol="0" anchor="ctr"/>
           <a:lstStyle/>
           <a:p>
-            <a:pPr indent="0" marL="0">
+            <a:pPr marL="0" indent="0">
               <a:buNone/>
             </a:pPr>
             <a:r>
@@ -9482,9 +9197,9 @@
                 <a:solidFill>
                   <a:srgbClr val="1E3A5F"/>
                 </a:solidFill>
-                <a:latin typeface="PT Sans" pitchFamily="34" charset="0"/>
-                <a:ea typeface="PT Sans" pitchFamily="34" charset="-122"/>
-                <a:cs typeface="PT Sans" pitchFamily="34" charset="-120"/>
+                <a:latin typeface="PT Sans" panose="020B0503020203020204" pitchFamily="34" charset="0"/>
+                <a:ea typeface="PT Sans" panose="020B0503020203020204" pitchFamily="34" charset="-122"/>
+                <a:cs typeface="PT Sans" panose="020B0503020203020204" pitchFamily="34" charset="-120"/>
               </a:rPr>
               <a:t>Дорогая CRM избыточна</a:t>
             </a:r>
@@ -9507,13 +9222,12 @@
             <a:avLst/>
           </a:prstGeom>
           <a:noFill/>
-          <a:ln/>
         </p:spPr>
         <p:txBody>
           <a:bodyPr wrap="square" lIns="0" tIns="0" rIns="0" bIns="0" rtlCol="0" anchor="t"/>
           <a:lstStyle/>
           <a:p>
-            <a:pPr indent="0" marL="0">
+            <a:pPr marL="0" indent="0">
               <a:buNone/>
             </a:pPr>
             <a:r>
@@ -9521,9 +9235,9 @@
                 <a:solidFill>
                   <a:srgbClr val="657384"/>
                 </a:solidFill>
-                <a:latin typeface="PT Sans" pitchFamily="34" charset="0"/>
-                <a:ea typeface="PT Sans" pitchFamily="34" charset="-122"/>
-                <a:cs typeface="PT Sans" pitchFamily="34" charset="-120"/>
+                <a:latin typeface="PT Sans" panose="020B0503020203020204" pitchFamily="34" charset="0"/>
+                <a:ea typeface="PT Sans" panose="020B0503020203020204" pitchFamily="34" charset="-122"/>
+                <a:cs typeface="PT Sans" panose="020B0503020203020204" pitchFamily="34" charset="-120"/>
               </a:rPr>
               <a:t>для салона на 3 мастера полноценная CRM не окупается</a:t>
             </a:r>
@@ -9555,7 +9269,7 @@
             <a:prstDash val="solid"/>
           </a:ln>
           <a:effectLst>
-            <a:outerShdw sx="100000" sy="100000" kx="0" ky="0" algn="bl" rotWithShape="0" blurRad="101600" dist="38100" dir="5400000">
+            <a:outerShdw blurRad="101600" dist="38100" dir="5400000" algn="bl" rotWithShape="0">
               <a:srgbClr val="8499B5">
                 <a:alpha val="22000"/>
               </a:srgbClr>
@@ -9584,7 +9298,6 @@
           <a:solidFill>
             <a:srgbClr val="B08D3E"/>
           </a:solidFill>
-          <a:ln/>
         </p:spPr>
         <p:txBody>
           <a:bodyPr/>
@@ -9606,13 +9319,12 @@
             <a:avLst/>
           </a:prstGeom>
           <a:noFill/>
-          <a:ln/>
         </p:spPr>
         <p:txBody>
           <a:bodyPr wrap="square" lIns="0" tIns="0" rIns="0" bIns="0" rtlCol="0" anchor="ctr"/>
           <a:lstStyle/>
           <a:p>
-            <a:pPr algn="ctr" indent="0" marL="0">
+            <a:pPr marL="0" indent="0" algn="ctr">
               <a:buNone/>
             </a:pPr>
             <a:r>
@@ -9620,9 +9332,9 @@
                 <a:solidFill>
                   <a:srgbClr val="B08D3E"/>
                 </a:solidFill>
-                <a:latin typeface="PT Serif" pitchFamily="34" charset="0"/>
-                <a:ea typeface="PT Serif" pitchFamily="34" charset="-122"/>
-                <a:cs typeface="PT Serif" pitchFamily="34" charset="-120"/>
+                <a:latin typeface="PT Serif" panose="020A0603040505020204" pitchFamily="34" charset="0"/>
+                <a:ea typeface="PT Serif" panose="020A0603040505020204" pitchFamily="34" charset="-122"/>
+                <a:cs typeface="PT Serif" panose="020A0603040505020204" pitchFamily="34" charset="-120"/>
               </a:rPr>
               <a:t>&gt;50%</a:t>
             </a:r>
@@ -9645,13 +9357,12 @@
             <a:avLst/>
           </a:prstGeom>
           <a:noFill/>
-          <a:ln/>
         </p:spPr>
         <p:txBody>
           <a:bodyPr wrap="square" lIns="0" tIns="0" rIns="0" bIns="0" rtlCol="0" anchor="t"/>
           <a:lstStyle/>
           <a:p>
-            <a:pPr algn="ctr" indent="0" marL="0">
+            <a:pPr marL="0" indent="0" algn="ctr">
               <a:buNone/>
             </a:pPr>
             <a:r>
@@ -9659,9 +9370,9 @@
                 <a:solidFill>
                   <a:srgbClr val="23303F"/>
                 </a:solidFill>
-                <a:latin typeface="PT Sans" pitchFamily="34" charset="0"/>
-                <a:ea typeface="PT Sans" pitchFamily="34" charset="-122"/>
-                <a:cs typeface="PT Sans" pitchFamily="34" charset="-120"/>
+                <a:latin typeface="PT Sans" panose="020B0503020203020204" pitchFamily="34" charset="0"/>
+                <a:ea typeface="PT Sans" panose="020B0503020203020204" pitchFamily="34" charset="-122"/>
+                <a:cs typeface="PT Sans" panose="020B0503020203020204" pitchFamily="34" charset="-120"/>
               </a:rPr>
               <a:t>ошибок — из-за несогласованности каналов записи</a:t>
             </a:r>
@@ -9693,7 +9404,7 @@
             <a:prstDash val="solid"/>
           </a:ln>
           <a:effectLst>
-            <a:outerShdw sx="100000" sy="100000" kx="0" ky="0" algn="bl" rotWithShape="0" blurRad="101600" dist="38100" dir="5400000">
+            <a:outerShdw blurRad="101600" dist="38100" dir="5400000" algn="bl" rotWithShape="0">
               <a:srgbClr val="8499B5">
                 <a:alpha val="22000"/>
               </a:srgbClr>
@@ -9707,7 +9418,7 @@
       </p:sp>
       <p:pic>
         <p:nvPicPr>
-          <p:cNvPr id="34" name="Image 4" descr="/Users/m/Documents/VKR_Stats/build/img_final/image5.jpeg">    </p:cNvPr>
+          <p:cNvPr id="34" name="Image 4" descr="/Users/m/Documents/VKR_Stats/build/img_final/image5.jpeg"/>
           <p:cNvPicPr>
             <a:picLocks noChangeAspect="1"/>
           </p:cNvPicPr>
@@ -9737,20 +9448,19 @@
         </p:nvSpPr>
         <p:spPr>
           <a:xfrm>
-            <a:off x="7562088" y="5536692"/>
+            <a:off x="7562088" y="5563997"/>
             <a:ext cx="4062679" cy="365760"/>
           </a:xfrm>
           <a:prstGeom prst="rect">
             <a:avLst/>
           </a:prstGeom>
           <a:noFill/>
-          <a:ln/>
         </p:spPr>
         <p:txBody>
           <a:bodyPr wrap="square" lIns="0" tIns="0" rIns="0" bIns="0" rtlCol="0" anchor="t"/>
           <a:lstStyle/>
           <a:p>
-            <a:pPr algn="ctr" indent="0" marL="0">
+            <a:pPr marL="0" indent="0" algn="ctr">
               <a:buNone/>
             </a:pPr>
             <a:r>
@@ -9758,11 +9468,11 @@
                 <a:solidFill>
                   <a:srgbClr val="657384"/>
                 </a:solidFill>
-                <a:latin typeface="PT Sans" pitchFamily="34" charset="0"/>
-                <a:ea typeface="PT Sans" pitchFamily="34" charset="-122"/>
-                <a:cs typeface="PT Sans" pitchFamily="34" charset="-120"/>
-              </a:rPr>
-              <a:t>Реальный салон: 2 кабинета, мастера, поток клиентов</a:t>
+                <a:latin typeface="PT Sans" panose="020B0503020203020204" pitchFamily="34" charset="0"/>
+                <a:ea typeface="PT Sans" panose="020B0503020203020204" pitchFamily="34" charset="-122"/>
+                <a:cs typeface="PT Sans" panose="020B0503020203020204" pitchFamily="34" charset="-120"/>
+              </a:rPr>
+              <a:t>Реальный салон</a:t>
             </a:r>
             <a:endParaRPr lang="en-US" sz="1100" dirty="0"/>
           </a:p>
@@ -9810,13 +9520,12 @@
             <a:avLst/>
           </a:prstGeom>
           <a:noFill/>
-          <a:ln/>
         </p:spPr>
         <p:txBody>
           <a:bodyPr wrap="square" lIns="0" tIns="0" rIns="0" bIns="0" rtlCol="0" anchor="ctr"/>
           <a:lstStyle/>
           <a:p>
-            <a:pPr indent="0" marL="0">
+            <a:pPr marL="0" indent="0">
               <a:buNone/>
             </a:pPr>
             <a:r>
@@ -9824,9 +9533,9 @@
                 <a:solidFill>
                   <a:srgbClr val="657384"/>
                 </a:solidFill>
-                <a:latin typeface="PT Sans" pitchFamily="34" charset="0"/>
-                <a:ea typeface="PT Sans" pitchFamily="34" charset="-122"/>
-                <a:cs typeface="PT Sans" pitchFamily="34" charset="-120"/>
+                <a:latin typeface="PT Sans" panose="020B0503020203020204" pitchFamily="34" charset="0"/>
+                <a:ea typeface="PT Sans" panose="020B0503020203020204" pitchFamily="34" charset="-122"/>
+                <a:cs typeface="PT Sans" panose="020B0503020203020204" pitchFamily="34" charset="-120"/>
               </a:rPr>
               <a:t>АРМ менеджера салона красоты  ·  ВСГУТУ  ·  Улан-Удэ, 2026</a:t>
             </a:r>
@@ -9849,13 +9558,12 @@
             <a:avLst/>
           </a:prstGeom>
           <a:noFill/>
-          <a:ln/>
         </p:spPr>
         <p:txBody>
           <a:bodyPr wrap="square" lIns="0" tIns="0" rIns="0" bIns="0" rtlCol="0" anchor="ctr"/>
           <a:lstStyle/>
           <a:p>
-            <a:pPr algn="r" indent="0" marL="0">
+            <a:pPr marL="0" indent="0" algn="r">
               <a:buNone/>
             </a:pPr>
             <a:r>
@@ -9863,9 +9571,9 @@
                 <a:solidFill>
                   <a:srgbClr val="657384"/>
                 </a:solidFill>
-                <a:latin typeface="PT Sans" pitchFamily="34" charset="0"/>
-                <a:ea typeface="PT Sans" pitchFamily="34" charset="-122"/>
-                <a:cs typeface="PT Sans" pitchFamily="34" charset="-120"/>
+                <a:latin typeface="PT Sans" panose="020B0503020203020204" pitchFamily="34" charset="0"/>
+                <a:ea typeface="PT Sans" panose="020B0503020203020204" pitchFamily="34" charset="-122"/>
+                <a:cs typeface="PT Sans" panose="020B0503020203020204" pitchFamily="34" charset="-120"/>
               </a:rPr>
               <a:t>02 / 15</a:t>
             </a:r>
@@ -9883,12 +9591,13 @@
 
 <file path=ppt/slides/slide3.xml><?xml version="1.0" encoding="utf-8"?>
 <p:sld xmlns:a="http://schemas.openxmlformats.org/drawingml/2006/main" xmlns:r="http://schemas.openxmlformats.org/officeDocument/2006/relationships" xmlns:p="http://schemas.openxmlformats.org/presentationml/2006/main">
-  <p:cSld name="Slide 3">
+  <p:cSld>
     <p:bg>
       <p:bgPr>
         <a:solidFill>
           <a:srgbClr val="FFFFFF"/>
         </a:solidFill>
+        <a:effectLst/>
       </p:bgPr>
     </p:bg>
     <p:spTree>
@@ -9922,7 +9631,6 @@
           <a:solidFill>
             <a:srgbClr val="B08D3E"/>
           </a:solidFill>
-          <a:ln/>
         </p:spPr>
         <p:txBody>
           <a:bodyPr/>
@@ -9944,23 +9652,22 @@
             <a:avLst/>
           </a:prstGeom>
           <a:noFill/>
-          <a:ln/>
         </p:spPr>
         <p:txBody>
           <a:bodyPr wrap="square" lIns="0" tIns="0" rIns="0" bIns="0" rtlCol="0" anchor="ctr"/>
           <a:lstStyle/>
           <a:p>
-            <a:pPr indent="0" marL="0">
-              <a:buNone/>
-            </a:pPr>
-            <a:r>
-              <a:rPr lang="en-US" sz="1250" b="1" spc="300" kern="0" dirty="0">
+            <a:pPr marL="0" indent="0">
+              <a:buNone/>
+            </a:pPr>
+            <a:r>
+              <a:rPr lang="en-US" sz="1250" b="1" kern="0" spc="300" dirty="0">
                 <a:solidFill>
                   <a:srgbClr val="B08D3E"/>
                 </a:solidFill>
-                <a:latin typeface="PT Sans" pitchFamily="34" charset="0"/>
-                <a:ea typeface="PT Sans" pitchFamily="34" charset="-122"/>
-                <a:cs typeface="PT Sans" pitchFamily="34" charset="-120"/>
+                <a:latin typeface="PT Sans" panose="020B0503020203020204" pitchFamily="34" charset="0"/>
+                <a:ea typeface="PT Sans" panose="020B0503020203020204" pitchFamily="34" charset="-122"/>
+                <a:cs typeface="PT Sans" panose="020B0503020203020204" pitchFamily="34" charset="-120"/>
               </a:rPr>
               <a:t>ЦЕЛЬ И ЗАДАЧИ</a:t>
             </a:r>
@@ -9983,13 +9690,12 @@
             <a:avLst/>
           </a:prstGeom>
           <a:noFill/>
-          <a:ln/>
         </p:spPr>
         <p:txBody>
           <a:bodyPr wrap="square" lIns="0" tIns="0" rIns="0" bIns="0" rtlCol="0" anchor="ctr"/>
           <a:lstStyle/>
           <a:p>
-            <a:pPr indent="0" marL="0">
+            <a:pPr marL="0" indent="0">
               <a:buNone/>
             </a:pPr>
             <a:r>
@@ -9997,9 +9703,9 @@
                 <a:solidFill>
                   <a:srgbClr val="1E3A5F"/>
                 </a:solidFill>
-                <a:latin typeface="PT Serif" pitchFamily="34" charset="0"/>
-                <a:ea typeface="PT Serif" pitchFamily="34" charset="-122"/>
-                <a:cs typeface="PT Serif" pitchFamily="34" charset="-120"/>
+                <a:latin typeface="PT Serif" panose="020A0603040505020204" pitchFamily="34" charset="0"/>
+                <a:ea typeface="PT Serif" panose="020A0603040505020204" pitchFamily="34" charset="-122"/>
+                <a:cs typeface="PT Serif" panose="020A0603040505020204" pitchFamily="34" charset="-120"/>
               </a:rPr>
               <a:t>Что нужно спроектировать</a:t>
             </a:r>
@@ -10031,7 +9737,7 @@
             <a:prstDash val="solid"/>
           </a:ln>
           <a:effectLst>
-            <a:outerShdw sx="100000" sy="100000" kx="0" ky="0" algn="bl" rotWithShape="0" blurRad="101600" dist="38100" dir="5400000">
+            <a:outerShdw blurRad="101600" dist="38100" dir="5400000" algn="bl" rotWithShape="0">
               <a:srgbClr val="8499B5">
                 <a:alpha val="22000"/>
               </a:srgbClr>
@@ -10060,7 +9766,6 @@
           <a:solidFill>
             <a:srgbClr val="B08D3E"/>
           </a:solidFill>
-          <a:ln/>
         </p:spPr>
         <p:txBody>
           <a:bodyPr/>
@@ -10082,13 +9787,12 @@
             <a:avLst/>
           </a:prstGeom>
           <a:noFill/>
-          <a:ln/>
         </p:spPr>
         <p:txBody>
           <a:bodyPr wrap="square" lIns="0" tIns="0" rIns="0" bIns="0" rtlCol="0" anchor="ctr"/>
           <a:lstStyle/>
           <a:p>
-            <a:pPr indent="0" marL="0">
+            <a:pPr marL="0" indent="0">
               <a:buNone/>
             </a:pPr>
             <a:r>
@@ -10096,804 +9800,24 @@
                 <a:solidFill>
                   <a:srgbClr val="B08D3E"/>
                 </a:solidFill>
-                <a:latin typeface="PT Serif" pitchFamily="34" charset="0"/>
-                <a:ea typeface="PT Serif" pitchFamily="34" charset="-122"/>
-                <a:cs typeface="PT Serif" pitchFamily="34" charset="-120"/>
+                <a:latin typeface="PT Serif" panose="020A0603040505020204" pitchFamily="34" charset="0"/>
+                <a:ea typeface="PT Serif" panose="020A0603040505020204" pitchFamily="34" charset="-122"/>
+                <a:cs typeface="PT Serif" panose="020A0603040505020204" pitchFamily="34" charset="-120"/>
               </a:rPr>
               <a:t>Цель.  </a:t>
             </a:r>
-            <a:pPr indent="0" marL="0">
-              <a:buNone/>
-            </a:pPr>
             <a:r>
               <a:rPr lang="en-US" sz="1700" dirty="0">
                 <a:solidFill>
                   <a:srgbClr val="23303F"/>
                 </a:solidFill>
-                <a:latin typeface="PT Sans" pitchFamily="34" charset="0"/>
-                <a:ea typeface="PT Sans" pitchFamily="34" charset="-122"/>
-                <a:cs typeface="PT Sans" pitchFamily="34" charset="-120"/>
+                <a:latin typeface="PT Sans" panose="020B0503020203020204" pitchFamily="34" charset="0"/>
+                <a:ea typeface="PT Sans" panose="020B0503020203020204" pitchFamily="34" charset="-122"/>
+                <a:cs typeface="PT Sans" panose="020B0503020203020204" pitchFamily="34" charset="-120"/>
               </a:rPr>
               <a:t>Спроектировать АРМ менеджера салона на базе Excel — учёт клиентов, график мастеров, расходные материалы, заказы, обучение и оперативную отчётность.</a:t>
             </a:r>
             <a:endParaRPr lang="en-US" sz="1700" dirty="0"/>
-          </a:p>
-        </p:txBody>
-      </p:sp>
-      <p:sp>
-        <p:nvSpPr>
-          <p:cNvPr id="8" name="Shape 6"/>
-          <p:cNvSpPr/>
-          <p:nvPr/>
-        </p:nvSpPr>
-        <p:spPr>
-          <a:xfrm>
-            <a:off x="566928" y="2697480"/>
-            <a:ext cx="3503066" cy="3520440"/>
-          </a:xfrm>
-          <a:prstGeom prst="rect">
-            <a:avLst/>
-          </a:prstGeom>
-          <a:solidFill>
-            <a:srgbClr val="FFFFFF"/>
-          </a:solidFill>
-          <a:ln w="12700">
-            <a:solidFill>
-              <a:srgbClr val="D5DEE9"/>
-            </a:solidFill>
-            <a:prstDash val="solid"/>
-          </a:ln>
-          <a:effectLst>
-            <a:outerShdw sx="100000" sy="100000" kx="0" ky="0" algn="bl" rotWithShape="0" blurRad="101600" dist="38100" dir="5400000">
-              <a:srgbClr val="8499B5">
-                <a:alpha val="22000"/>
-              </a:srgbClr>
-            </a:outerShdw>
-          </a:effectLst>
-        </p:spPr>
-        <p:txBody>
-          <a:bodyPr/>
-          <a:p/>
-        </p:txBody>
-      </p:sp>
-      <p:sp>
-        <p:nvSpPr>
-          <p:cNvPr id="9" name="Shape 7"/>
-          <p:cNvSpPr/>
-          <p:nvPr/>
-        </p:nvSpPr>
-        <p:spPr>
-          <a:xfrm>
-            <a:off x="566928" y="2697480"/>
-            <a:ext cx="82296" cy="3520440"/>
-          </a:xfrm>
-          <a:prstGeom prst="rect">
-            <a:avLst/>
-          </a:prstGeom>
-          <a:solidFill>
-            <a:srgbClr val="1E3A5F"/>
-          </a:solidFill>
-          <a:ln/>
-        </p:spPr>
-        <p:txBody>
-          <a:bodyPr/>
-          <a:p/>
-        </p:txBody>
-      </p:sp>
-      <p:sp>
-        <p:nvSpPr>
-          <p:cNvPr id="10" name="Shape 8"/>
-          <p:cNvSpPr/>
-          <p:nvPr/>
-        </p:nvSpPr>
-        <p:spPr>
-          <a:xfrm>
-            <a:off x="841248" y="2990088"/>
-            <a:ext cx="603504" cy="603504"/>
-          </a:xfrm>
-          <a:prstGeom prst="ellipse">
-            <a:avLst/>
-          </a:prstGeom>
-          <a:solidFill>
-            <a:srgbClr val="1E3A5F"/>
-          </a:solidFill>
-          <a:ln/>
-        </p:spPr>
-        <p:txBody>
-          <a:bodyPr/>
-          <a:p/>
-        </p:txBody>
-      </p:sp>
-      <p:pic>
-        <p:nvPicPr>
-          <p:cNvPr id="11" name="Image 0" descr="preencoded.png">    </p:cNvPr>
-          <p:cNvPicPr>
-            <a:picLocks noChangeAspect="1"/>
-          </p:cNvPicPr>
-          <p:nvPr/>
-        </p:nvPicPr>
-        <p:blipFill>
-          <a:blip r:embed="rId1"/>
-          <a:stretch>
-            <a:fillRect/>
-          </a:stretch>
-        </p:blipFill>
-        <p:spPr>
-          <a:xfrm>
-            <a:off x="1004194" y="3153034"/>
-            <a:ext cx="277612" cy="277612"/>
-          </a:xfrm>
-          <a:prstGeom prst="rect">
-            <a:avLst/>
-          </a:prstGeom>
-        </p:spPr>
-      </p:pic>
-      <p:sp>
-        <p:nvSpPr>
-          <p:cNvPr id="12" name="Text 9"/>
-          <p:cNvSpPr/>
-          <p:nvPr/>
-        </p:nvSpPr>
-        <p:spPr>
-          <a:xfrm>
-            <a:off x="1572768" y="2990088"/>
-            <a:ext cx="2314346" cy="603504"/>
-          </a:xfrm>
-          <a:prstGeom prst="rect">
-            <a:avLst/>
-          </a:prstGeom>
-          <a:noFill/>
-          <a:ln/>
-        </p:spPr>
-        <p:txBody>
-          <a:bodyPr wrap="square" lIns="0" tIns="0" rIns="0" bIns="0" rtlCol="0" anchor="ctr"/>
-          <a:lstStyle/>
-          <a:p>
-            <a:pPr indent="0" marL="0">
-              <a:buNone/>
-            </a:pPr>
-            <a:r>
-              <a:rPr lang="en-US" sz="1900" b="1" dirty="0">
-                <a:solidFill>
-                  <a:srgbClr val="1E3A5F"/>
-                </a:solidFill>
-                <a:latin typeface="PT Serif" pitchFamily="34" charset="0"/>
-                <a:ea typeface="PT Serif" pitchFamily="34" charset="-122"/>
-                <a:cs typeface="PT Serif" pitchFamily="34" charset="-120"/>
-              </a:rPr>
-              <a:t>Анализ</a:t>
-            </a:r>
-            <a:endParaRPr lang="en-US" sz="1900" dirty="0"/>
-          </a:p>
-        </p:txBody>
-      </p:sp>
-      <p:sp>
-        <p:nvSpPr>
-          <p:cNvPr id="13" name="Shape 10"/>
-          <p:cNvSpPr/>
-          <p:nvPr/>
-        </p:nvSpPr>
-        <p:spPr>
-          <a:xfrm>
-            <a:off x="841248" y="3776472"/>
-            <a:ext cx="2954426" cy="0"/>
-          </a:xfrm>
-          <a:prstGeom prst="line">
-            <a:avLst/>
-          </a:prstGeom>
-          <a:noFill/>
-          <a:ln w="12700">
-            <a:solidFill>
-              <a:srgbClr val="D5DEE9"/>
-            </a:solidFill>
-            <a:prstDash val="solid"/>
-          </a:ln>
-        </p:spPr>
-        <p:txBody>
-          <a:bodyPr/>
-          <a:p/>
-        </p:txBody>
-      </p:sp>
-      <p:sp>
-        <p:nvSpPr>
-          <p:cNvPr id="14" name="Text 11"/>
-          <p:cNvSpPr/>
-          <p:nvPr/>
-        </p:nvSpPr>
-        <p:spPr>
-          <a:xfrm>
-            <a:off x="859536" y="3977640"/>
-            <a:ext cx="2954426" cy="2103120"/>
-          </a:xfrm>
-          <a:prstGeom prst="rect">
-            <a:avLst/>
-          </a:prstGeom>
-          <a:noFill/>
-          <a:ln/>
-        </p:spPr>
-        <p:txBody>
-          <a:bodyPr wrap="square" lIns="0" tIns="0" rIns="0" bIns="0" rtlCol="0" anchor="t"/>
-          <a:lstStyle/>
-          <a:p>
-            <a:pPr marL="203200" indent="-203200">
-              <a:spcAft>
-                <a:spcPts val="1300"/>
-              </a:spcAft>
-              <a:buSzPct val="100000"/>
-              <a:buChar char="•"/>
-            </a:pPr>
-            <a:r>
-              <a:rPr lang="en-US" sz="1550" dirty="0">
-                <a:solidFill>
-                  <a:srgbClr val="23303F"/>
-                </a:solidFill>
-                <a:latin typeface="PT Sans" pitchFamily="34" charset="0"/>
-                <a:ea typeface="PT Sans" pitchFamily="34" charset="-122"/>
-                <a:cs typeface="PT Sans" pitchFamily="34" charset="-120"/>
-              </a:rPr>
-              <a:t>Теория АРМ и автоматизации</a:t>
-            </a:r>
-            <a:endParaRPr lang="en-US" sz="1550" dirty="0"/>
-          </a:p>
-          <a:p>
-            <a:pPr marL="203200" indent="-203200">
-              <a:spcAft>
-                <a:spcPts val="1300"/>
-              </a:spcAft>
-              <a:buSzPct val="100000"/>
-              <a:buChar char="•"/>
-            </a:pPr>
-            <a:r>
-              <a:rPr lang="en-US" sz="1550" dirty="0">
-                <a:solidFill>
-                  <a:srgbClr val="23303F"/>
-                </a:solidFill>
-                <a:latin typeface="PT Sans" pitchFamily="34" charset="0"/>
-                <a:ea typeface="PT Sans" pitchFamily="34" charset="-122"/>
-                <a:cs typeface="PT Sans" pitchFamily="34" charset="-120"/>
-              </a:rPr>
-              <a:t>Описание салона и процессов</a:t>
-            </a:r>
-            <a:endParaRPr lang="en-US" sz="1550" dirty="0"/>
-          </a:p>
-          <a:p>
-            <a:pPr marL="203200" indent="-203200">
-              <a:spcAft>
-                <a:spcPts val="1300"/>
-              </a:spcAft>
-              <a:buSzPct val="100000"/>
-              <a:buChar char="•"/>
-            </a:pPr>
-            <a:r>
-              <a:rPr lang="en-US" sz="1550" dirty="0">
-                <a:solidFill>
-                  <a:srgbClr val="23303F"/>
-                </a:solidFill>
-                <a:latin typeface="PT Sans" pitchFamily="34" charset="0"/>
-                <a:ea typeface="PT Sans" pitchFamily="34" charset="-122"/>
-                <a:cs typeface="PT Sans" pitchFamily="34" charset="-120"/>
-              </a:rPr>
-              <a:t>Анализ функционала менеджера</a:t>
-            </a:r>
-            <a:endParaRPr lang="en-US" sz="1550" dirty="0"/>
-          </a:p>
-        </p:txBody>
-      </p:sp>
-      <p:sp>
-        <p:nvSpPr>
-          <p:cNvPr id="15" name="Shape 12"/>
-          <p:cNvSpPr/>
-          <p:nvPr/>
-        </p:nvSpPr>
-        <p:spPr>
-          <a:xfrm>
-            <a:off x="4344314" y="2697480"/>
-            <a:ext cx="3503066" cy="3520440"/>
-          </a:xfrm>
-          <a:prstGeom prst="rect">
-            <a:avLst/>
-          </a:prstGeom>
-          <a:solidFill>
-            <a:srgbClr val="FFFFFF"/>
-          </a:solidFill>
-          <a:ln w="12700">
-            <a:solidFill>
-              <a:srgbClr val="D5DEE9"/>
-            </a:solidFill>
-            <a:prstDash val="solid"/>
-          </a:ln>
-          <a:effectLst>
-            <a:outerShdw sx="100000" sy="100000" kx="0" ky="0" algn="bl" rotWithShape="0" blurRad="101600" dist="38100" dir="5400000">
-              <a:srgbClr val="8499B5">
-                <a:alpha val="22000"/>
-              </a:srgbClr>
-            </a:outerShdw>
-          </a:effectLst>
-        </p:spPr>
-        <p:txBody>
-          <a:bodyPr/>
-          <a:p/>
-        </p:txBody>
-      </p:sp>
-      <p:sp>
-        <p:nvSpPr>
-          <p:cNvPr id="16" name="Shape 13"/>
-          <p:cNvSpPr/>
-          <p:nvPr/>
-        </p:nvSpPr>
-        <p:spPr>
-          <a:xfrm>
-            <a:off x="4344314" y="2697480"/>
-            <a:ext cx="82296" cy="3520440"/>
-          </a:xfrm>
-          <a:prstGeom prst="rect">
-            <a:avLst/>
-          </a:prstGeom>
-          <a:solidFill>
-            <a:srgbClr val="1E3A5F"/>
-          </a:solidFill>
-          <a:ln/>
-        </p:spPr>
-        <p:txBody>
-          <a:bodyPr/>
-          <a:p/>
-        </p:txBody>
-      </p:sp>
-      <p:sp>
-        <p:nvSpPr>
-          <p:cNvPr id="17" name="Shape 14"/>
-          <p:cNvSpPr/>
-          <p:nvPr/>
-        </p:nvSpPr>
-        <p:spPr>
-          <a:xfrm>
-            <a:off x="4618634" y="2990088"/>
-            <a:ext cx="603504" cy="603504"/>
-          </a:xfrm>
-          <a:prstGeom prst="ellipse">
-            <a:avLst/>
-          </a:prstGeom>
-          <a:solidFill>
-            <a:srgbClr val="1E3A5F"/>
-          </a:solidFill>
-          <a:ln/>
-        </p:spPr>
-        <p:txBody>
-          <a:bodyPr/>
-          <a:p/>
-        </p:txBody>
-      </p:sp>
-      <p:pic>
-        <p:nvPicPr>
-          <p:cNvPr id="18" name="Image 1" descr="preencoded.png">    </p:cNvPr>
-          <p:cNvPicPr>
-            <a:picLocks noChangeAspect="1"/>
-          </p:cNvPicPr>
-          <p:nvPr/>
-        </p:nvPicPr>
-        <p:blipFill>
-          <a:blip r:embed="rId2"/>
-          <a:stretch>
-            <a:fillRect/>
-          </a:stretch>
-        </p:blipFill>
-        <p:spPr>
-          <a:xfrm>
-            <a:off x="4781580" y="3153034"/>
-            <a:ext cx="277612" cy="277612"/>
-          </a:xfrm>
-          <a:prstGeom prst="rect">
-            <a:avLst/>
-          </a:prstGeom>
-        </p:spPr>
-      </p:pic>
-      <p:sp>
-        <p:nvSpPr>
-          <p:cNvPr id="19" name="Text 15"/>
-          <p:cNvSpPr/>
-          <p:nvPr/>
-        </p:nvSpPr>
-        <p:spPr>
-          <a:xfrm>
-            <a:off x="5350154" y="2990088"/>
-            <a:ext cx="2314346" cy="603504"/>
-          </a:xfrm>
-          <a:prstGeom prst="rect">
-            <a:avLst/>
-          </a:prstGeom>
-          <a:noFill/>
-          <a:ln/>
-        </p:spPr>
-        <p:txBody>
-          <a:bodyPr wrap="square" lIns="0" tIns="0" rIns="0" bIns="0" rtlCol="0" anchor="ctr"/>
-          <a:lstStyle/>
-          <a:p>
-            <a:pPr indent="0" marL="0">
-              <a:buNone/>
-            </a:pPr>
-            <a:r>
-              <a:rPr lang="en-US" sz="1900" b="1" dirty="0">
-                <a:solidFill>
-                  <a:srgbClr val="1E3A5F"/>
-                </a:solidFill>
-                <a:latin typeface="PT Serif" pitchFamily="34" charset="0"/>
-                <a:ea typeface="PT Serif" pitchFamily="34" charset="-122"/>
-                <a:cs typeface="PT Serif" pitchFamily="34" charset="-120"/>
-              </a:rPr>
-              <a:t>Проектирование</a:t>
-            </a:r>
-            <a:endParaRPr lang="en-US" sz="1900" dirty="0"/>
-          </a:p>
-        </p:txBody>
-      </p:sp>
-      <p:sp>
-        <p:nvSpPr>
-          <p:cNvPr id="20" name="Shape 16"/>
-          <p:cNvSpPr/>
-          <p:nvPr/>
-        </p:nvSpPr>
-        <p:spPr>
-          <a:xfrm>
-            <a:off x="4618634" y="3776472"/>
-            <a:ext cx="2954426" cy="0"/>
-          </a:xfrm>
-          <a:prstGeom prst="line">
-            <a:avLst/>
-          </a:prstGeom>
-          <a:noFill/>
-          <a:ln w="12700">
-            <a:solidFill>
-              <a:srgbClr val="D5DEE9"/>
-            </a:solidFill>
-            <a:prstDash val="solid"/>
-          </a:ln>
-        </p:spPr>
-        <p:txBody>
-          <a:bodyPr/>
-          <a:p/>
-        </p:txBody>
-      </p:sp>
-      <p:sp>
-        <p:nvSpPr>
-          <p:cNvPr id="21" name="Text 17"/>
-          <p:cNvSpPr/>
-          <p:nvPr/>
-        </p:nvSpPr>
-        <p:spPr>
-          <a:xfrm>
-            <a:off x="4636922" y="3977640"/>
-            <a:ext cx="2954426" cy="2103120"/>
-          </a:xfrm>
-          <a:prstGeom prst="rect">
-            <a:avLst/>
-          </a:prstGeom>
-          <a:noFill/>
-          <a:ln/>
-        </p:spPr>
-        <p:txBody>
-          <a:bodyPr wrap="square" lIns="0" tIns="0" rIns="0" bIns="0" rtlCol="0" anchor="t"/>
-          <a:lstStyle/>
-          <a:p>
-            <a:pPr marL="203200" indent="-203200">
-              <a:spcAft>
-                <a:spcPts val="1300"/>
-              </a:spcAft>
-              <a:buSzPct val="100000"/>
-              <a:buChar char="•"/>
-            </a:pPr>
-            <a:r>
-              <a:rPr lang="en-US" sz="1550" dirty="0">
-                <a:solidFill>
-                  <a:srgbClr val="23303F"/>
-                </a:solidFill>
-                <a:latin typeface="PT Sans" pitchFamily="34" charset="0"/>
-                <a:ea typeface="PT Sans" pitchFamily="34" charset="-122"/>
-                <a:cs typeface="PT Sans" pitchFamily="34" charset="-120"/>
-              </a:rPr>
-              <a:t>Модели процессов AS‑IS / TO‑BE</a:t>
-            </a:r>
-            <a:endParaRPr lang="en-US" sz="1550" dirty="0"/>
-          </a:p>
-          <a:p>
-            <a:pPr marL="203200" indent="-203200">
-              <a:spcAft>
-                <a:spcPts val="1300"/>
-              </a:spcAft>
-              <a:buSzPct val="100000"/>
-              <a:buChar char="•"/>
-            </a:pPr>
-            <a:r>
-              <a:rPr lang="en-US" sz="1550" dirty="0">
-                <a:solidFill>
-                  <a:srgbClr val="23303F"/>
-                </a:solidFill>
-                <a:latin typeface="PT Sans" pitchFamily="34" charset="0"/>
-                <a:ea typeface="PT Sans" pitchFamily="34" charset="-122"/>
-                <a:cs typeface="PT Sans" pitchFamily="34" charset="-120"/>
-              </a:rPr>
-              <a:t>Требования к АРМ</a:t>
-            </a:r>
-            <a:endParaRPr lang="en-US" sz="1550" dirty="0"/>
-          </a:p>
-          <a:p>
-            <a:pPr marL="203200" indent="-203200">
-              <a:spcAft>
-                <a:spcPts val="1300"/>
-              </a:spcAft>
-              <a:buSzPct val="100000"/>
-              <a:buChar char="•"/>
-            </a:pPr>
-            <a:r>
-              <a:rPr lang="en-US" sz="1550" dirty="0">
-                <a:solidFill>
-                  <a:srgbClr val="23303F"/>
-                </a:solidFill>
-                <a:latin typeface="PT Sans" pitchFamily="34" charset="0"/>
-                <a:ea typeface="PT Sans" pitchFamily="34" charset="-122"/>
-                <a:cs typeface="PT Sans" pitchFamily="34" charset="-120"/>
-              </a:rPr>
-              <a:t>Структура данных (ER) и формы</a:t>
-            </a:r>
-            <a:endParaRPr lang="en-US" sz="1550" dirty="0"/>
-          </a:p>
-        </p:txBody>
-      </p:sp>
-      <p:sp>
-        <p:nvSpPr>
-          <p:cNvPr id="22" name="Shape 18"/>
-          <p:cNvSpPr/>
-          <p:nvPr/>
-        </p:nvSpPr>
-        <p:spPr>
-          <a:xfrm>
-            <a:off x="8121701" y="2697480"/>
-            <a:ext cx="3503066" cy="3520440"/>
-          </a:xfrm>
-          <a:prstGeom prst="rect">
-            <a:avLst/>
-          </a:prstGeom>
-          <a:solidFill>
-            <a:srgbClr val="FFFFFF"/>
-          </a:solidFill>
-          <a:ln w="12700">
-            <a:solidFill>
-              <a:srgbClr val="D5DEE9"/>
-            </a:solidFill>
-            <a:prstDash val="solid"/>
-          </a:ln>
-          <a:effectLst>
-            <a:outerShdw sx="100000" sy="100000" kx="0" ky="0" algn="bl" rotWithShape="0" blurRad="101600" dist="38100" dir="5400000">
-              <a:srgbClr val="8499B5">
-                <a:alpha val="22000"/>
-              </a:srgbClr>
-            </a:outerShdw>
-          </a:effectLst>
-        </p:spPr>
-        <p:txBody>
-          <a:bodyPr/>
-          <a:p/>
-        </p:txBody>
-      </p:sp>
-      <p:sp>
-        <p:nvSpPr>
-          <p:cNvPr id="23" name="Shape 19"/>
-          <p:cNvSpPr/>
-          <p:nvPr/>
-        </p:nvSpPr>
-        <p:spPr>
-          <a:xfrm>
-            <a:off x="8121701" y="2697480"/>
-            <a:ext cx="82296" cy="3520440"/>
-          </a:xfrm>
-          <a:prstGeom prst="rect">
-            <a:avLst/>
-          </a:prstGeom>
-          <a:solidFill>
-            <a:srgbClr val="1E3A5F"/>
-          </a:solidFill>
-          <a:ln/>
-        </p:spPr>
-        <p:txBody>
-          <a:bodyPr/>
-          <a:p/>
-        </p:txBody>
-      </p:sp>
-      <p:sp>
-        <p:nvSpPr>
-          <p:cNvPr id="24" name="Shape 20"/>
-          <p:cNvSpPr/>
-          <p:nvPr/>
-        </p:nvSpPr>
-        <p:spPr>
-          <a:xfrm>
-            <a:off x="8396021" y="2990088"/>
-            <a:ext cx="603504" cy="603504"/>
-          </a:xfrm>
-          <a:prstGeom prst="ellipse">
-            <a:avLst/>
-          </a:prstGeom>
-          <a:solidFill>
-            <a:srgbClr val="1E3A5F"/>
-          </a:solidFill>
-          <a:ln/>
-        </p:spPr>
-        <p:txBody>
-          <a:bodyPr/>
-          <a:p/>
-        </p:txBody>
-      </p:sp>
-      <p:pic>
-        <p:nvPicPr>
-          <p:cNvPr id="25" name="Image 2" descr="preencoded.png">    </p:cNvPr>
-          <p:cNvPicPr>
-            <a:picLocks noChangeAspect="1"/>
-          </p:cNvPicPr>
-          <p:nvPr/>
-        </p:nvPicPr>
-        <p:blipFill>
-          <a:blip r:embed="rId3"/>
-          <a:stretch>
-            <a:fillRect/>
-          </a:stretch>
-        </p:blipFill>
-        <p:spPr>
-          <a:xfrm>
-            <a:off x="8558967" y="3153034"/>
-            <a:ext cx="277612" cy="277612"/>
-          </a:xfrm>
-          <a:prstGeom prst="rect">
-            <a:avLst/>
-          </a:prstGeom>
-        </p:spPr>
-      </p:pic>
-      <p:sp>
-        <p:nvSpPr>
-          <p:cNvPr id="26" name="Text 21"/>
-          <p:cNvSpPr/>
-          <p:nvPr/>
-        </p:nvSpPr>
-        <p:spPr>
-          <a:xfrm>
-            <a:off x="9127541" y="2990088"/>
-            <a:ext cx="2314346" cy="603504"/>
-          </a:xfrm>
-          <a:prstGeom prst="rect">
-            <a:avLst/>
-          </a:prstGeom>
-          <a:noFill/>
-          <a:ln/>
-        </p:spPr>
-        <p:txBody>
-          <a:bodyPr wrap="square" lIns="0" tIns="0" rIns="0" bIns="0" rtlCol="0" anchor="ctr"/>
-          <a:lstStyle/>
-          <a:p>
-            <a:pPr indent="0" marL="0">
-              <a:buNone/>
-            </a:pPr>
-            <a:r>
-              <a:rPr lang="en-US" sz="1900" b="1" dirty="0">
-                <a:solidFill>
-                  <a:srgbClr val="1E3A5F"/>
-                </a:solidFill>
-                <a:latin typeface="PT Serif" pitchFamily="34" charset="0"/>
-                <a:ea typeface="PT Serif" pitchFamily="34" charset="-122"/>
-                <a:cs typeface="PT Serif" pitchFamily="34" charset="-120"/>
-              </a:rPr>
-              <a:t>Оценка и внедрение</a:t>
-            </a:r>
-            <a:endParaRPr lang="en-US" sz="1900" dirty="0"/>
-          </a:p>
-        </p:txBody>
-      </p:sp>
-      <p:sp>
-        <p:nvSpPr>
-          <p:cNvPr id="27" name="Shape 22"/>
-          <p:cNvSpPr/>
-          <p:nvPr/>
-        </p:nvSpPr>
-        <p:spPr>
-          <a:xfrm>
-            <a:off x="8396021" y="3776472"/>
-            <a:ext cx="2954426" cy="0"/>
-          </a:xfrm>
-          <a:prstGeom prst="line">
-            <a:avLst/>
-          </a:prstGeom>
-          <a:noFill/>
-          <a:ln w="12700">
-            <a:solidFill>
-              <a:srgbClr val="D5DEE9"/>
-            </a:solidFill>
-            <a:prstDash val="solid"/>
-          </a:ln>
-        </p:spPr>
-        <p:txBody>
-          <a:bodyPr/>
-          <a:p/>
-        </p:txBody>
-      </p:sp>
-      <p:sp>
-        <p:nvSpPr>
-          <p:cNvPr id="28" name="Text 23"/>
-          <p:cNvSpPr/>
-          <p:nvPr/>
-        </p:nvSpPr>
-        <p:spPr>
-          <a:xfrm>
-            <a:off x="8414309" y="3977640"/>
-            <a:ext cx="2954426" cy="2103120"/>
-          </a:xfrm>
-          <a:prstGeom prst="rect">
-            <a:avLst/>
-          </a:prstGeom>
-          <a:noFill/>
-          <a:ln/>
-        </p:spPr>
-        <p:txBody>
-          <a:bodyPr wrap="square" lIns="0" tIns="0" rIns="0" bIns="0" rtlCol="0" anchor="t"/>
-          <a:lstStyle/>
-          <a:p>
-            <a:pPr marL="203200" indent="-203200">
-              <a:spcAft>
-                <a:spcPts val="1300"/>
-              </a:spcAft>
-              <a:buSzPct val="100000"/>
-              <a:buChar char="•"/>
-            </a:pPr>
-            <a:r>
-              <a:rPr lang="en-US" sz="1550" dirty="0">
-                <a:solidFill>
-                  <a:srgbClr val="23303F"/>
-                </a:solidFill>
-                <a:latin typeface="PT Sans" pitchFamily="34" charset="0"/>
-                <a:ea typeface="PT Sans" pitchFamily="34" charset="-122"/>
-                <a:cs typeface="PT Sans" pitchFamily="34" charset="-120"/>
-              </a:rPr>
-              <a:t>Анализ рисков (PMBoK)</a:t>
-            </a:r>
-            <a:endParaRPr lang="en-US" sz="1550" dirty="0"/>
-          </a:p>
-          <a:p>
-            <a:pPr marL="203200" indent="-203200">
-              <a:spcAft>
-                <a:spcPts val="1300"/>
-              </a:spcAft>
-              <a:buSzPct val="100000"/>
-              <a:buChar char="•"/>
-            </a:pPr>
-            <a:r>
-              <a:rPr lang="en-US" sz="1550" dirty="0">
-                <a:solidFill>
-                  <a:srgbClr val="23303F"/>
-                </a:solidFill>
-                <a:latin typeface="PT Sans" pitchFamily="34" charset="0"/>
-                <a:ea typeface="PT Sans" pitchFamily="34" charset="-122"/>
-                <a:cs typeface="PT Sans" pitchFamily="34" charset="-120"/>
-              </a:rPr>
-              <a:t>Расчёт экономического эффекта</a:t>
-            </a:r>
-            <a:endParaRPr lang="en-US" sz="1550" dirty="0"/>
-          </a:p>
-          <a:p>
-            <a:pPr marL="203200" indent="-203200">
-              <a:spcAft>
-                <a:spcPts val="1300"/>
-              </a:spcAft>
-              <a:buSzPct val="100000"/>
-              <a:buChar char="•"/>
-            </a:pPr>
-            <a:r>
-              <a:rPr lang="en-US" sz="1550" dirty="0">
-                <a:solidFill>
-                  <a:srgbClr val="23303F"/>
-                </a:solidFill>
-                <a:latin typeface="PT Sans" pitchFamily="34" charset="0"/>
-                <a:ea typeface="PT Sans" pitchFamily="34" charset="-122"/>
-                <a:cs typeface="PT Sans" pitchFamily="34" charset="-120"/>
-              </a:rPr>
-              <a:t>План внедрения (12 недель)</a:t>
-            </a:r>
-            <a:endParaRPr lang="en-US" sz="1550" dirty="0"/>
           </a:p>
         </p:txBody>
       </p:sp>
@@ -10939,13 +9863,12 @@
             <a:avLst/>
           </a:prstGeom>
           <a:noFill/>
-          <a:ln/>
         </p:spPr>
         <p:txBody>
           <a:bodyPr wrap="square" lIns="0" tIns="0" rIns="0" bIns="0" rtlCol="0" anchor="ctr"/>
           <a:lstStyle/>
           <a:p>
-            <a:pPr indent="0" marL="0">
+            <a:pPr marL="0" indent="0">
               <a:buNone/>
             </a:pPr>
             <a:r>
@@ -10953,9 +9876,9 @@
                 <a:solidFill>
                   <a:srgbClr val="657384"/>
                 </a:solidFill>
-                <a:latin typeface="PT Sans" pitchFamily="34" charset="0"/>
-                <a:ea typeface="PT Sans" pitchFamily="34" charset="-122"/>
-                <a:cs typeface="PT Sans" pitchFamily="34" charset="-120"/>
+                <a:latin typeface="PT Sans" panose="020B0503020203020204" pitchFamily="34" charset="0"/>
+                <a:ea typeface="PT Sans" panose="020B0503020203020204" pitchFamily="34" charset="-122"/>
+                <a:cs typeface="PT Sans" panose="020B0503020203020204" pitchFamily="34" charset="-120"/>
               </a:rPr>
               <a:t>АРМ менеджера салона красоты  ·  ВСГУТУ  ·  Улан-Удэ, 2026</a:t>
             </a:r>
@@ -10978,13 +9901,12 @@
             <a:avLst/>
           </a:prstGeom>
           <a:noFill/>
-          <a:ln/>
         </p:spPr>
         <p:txBody>
           <a:bodyPr wrap="square" lIns="0" tIns="0" rIns="0" bIns="0" rtlCol="0" anchor="ctr"/>
           <a:lstStyle/>
           <a:p>
-            <a:pPr algn="r" indent="0" marL="0">
+            <a:pPr marL="0" indent="0" algn="r">
               <a:buNone/>
             </a:pPr>
             <a:r>
@@ -10992,13 +9914,261 @@
                 <a:solidFill>
                   <a:srgbClr val="657384"/>
                 </a:solidFill>
-                <a:latin typeface="PT Sans" pitchFamily="34" charset="0"/>
-                <a:ea typeface="PT Sans" pitchFamily="34" charset="-122"/>
-                <a:cs typeface="PT Sans" pitchFamily="34" charset="-120"/>
+                <a:latin typeface="PT Sans" panose="020B0503020203020204" pitchFamily="34" charset="0"/>
+                <a:ea typeface="PT Sans" panose="020B0503020203020204" pitchFamily="34" charset="-122"/>
+                <a:cs typeface="PT Sans" panose="020B0503020203020204" pitchFamily="34" charset="-120"/>
               </a:rPr>
               <a:t>03 / 15</a:t>
             </a:r>
             <a:endParaRPr lang="en-US" sz="950" dirty="0"/>
+          </a:p>
+        </p:txBody>
+      </p:sp>
+      <p:sp>
+        <p:nvSpPr>
+          <p:cNvPr id="40" name="Задачи заголовок"/>
+          <p:cNvSpPr/>
+          <p:nvPr/>
+        </p:nvSpPr>
+        <p:spPr>
+          <a:xfrm>
+            <a:off x="566928" y="2750000"/>
+            <a:ext cx="11058144" cy="520700"/>
+          </a:xfrm>
+          <a:prstGeom prst="rect">
+            <a:avLst/>
+          </a:prstGeom>
+          <a:noFill/>
+        </p:spPr>
+        <p:txBody>
+          <a:bodyPr wrap="square" lIns="0" tIns="0" rIns="0" bIns="0" rtlCol="0" anchor="ctr"/>
+          <a:lstStyle/>
+          <a:p>
+            <a:pPr marL="0" indent="0">
+              <a:buNone/>
+            </a:pPr>
+            <a:r>
+              <a:rPr lang="ru-RU" sz="1900" b="1" dirty="0">
+                <a:solidFill>
+                  <a:srgbClr val="1E3A5F"/>
+                </a:solidFill>
+                <a:latin typeface="PT Serif" panose="020A0603040505020204" pitchFamily="34" charset="0"/>
+                <a:ea typeface="PT Serif" panose="020A0603040505020204" pitchFamily="34" charset="-122"/>
+                <a:cs typeface="PT Serif" panose="020A0603040505020204" pitchFamily="34" charset="-120"/>
+              </a:rPr>
+              <a:t>Задачи</a:t>
+            </a:r>
+            <a:endParaRPr lang="ru-RU" sz="1900" b="1" dirty="0"/>
+          </a:p>
+        </p:txBody>
+      </p:sp>
+      <p:sp>
+        <p:nvSpPr>
+          <p:cNvPr id="41" name="Задачи список"/>
+          <p:cNvSpPr/>
+          <p:nvPr/>
+        </p:nvSpPr>
+        <p:spPr>
+          <a:xfrm>
+            <a:off x="566928" y="3320000"/>
+            <a:ext cx="11058144" cy="3000000"/>
+          </a:xfrm>
+          <a:prstGeom prst="rect">
+            <a:avLst/>
+          </a:prstGeom>
+          <a:noFill/>
+        </p:spPr>
+        <p:txBody>
+          <a:bodyPr wrap="square" lIns="0" tIns="0" rIns="0" bIns="0" rtlCol="0" anchor="t"/>
+          <a:lstStyle/>
+          <a:p>
+            <a:pPr marL="342900" indent="-342900">
+              <a:spcAft>
+                <a:spcPts val="700"/>
+              </a:spcAft>
+              <a:buFont typeface="PT Sans" pitchFamily="34" charset="0"/>
+              <a:buAutoNum type="arabicPeriod"/>
+            </a:pPr>
+            <a:r>
+              <a:rPr lang="ru-RU" sz="1600" dirty="0">
+                <a:solidFill>
+                  <a:srgbClr val="23303F"/>
+                </a:solidFill>
+                <a:latin typeface="PT Sans" panose="020B0503020203020204" pitchFamily="34" charset="0"/>
+                <a:ea typeface="PT Sans" panose="020B0503020203020204" pitchFamily="34" charset="-122"/>
+                <a:cs typeface="PT Sans" panose="020B0503020203020204" pitchFamily="34" charset="-120"/>
+              </a:rPr>
+              <a:t>Изучить теорию АРМ и обосновать выбор инструментов</a:t>
+            </a:r>
+            <a:endParaRPr lang="ru-RU" sz="1600" dirty="0"/>
+          </a:p>
+          <a:p>
+            <a:pPr marL="342900" indent="-342900">
+              <a:spcAft>
+                <a:spcPts val="700"/>
+              </a:spcAft>
+              <a:buFont typeface="PT Sans" pitchFamily="34" charset="0"/>
+              <a:buAutoNum type="arabicPeriod"/>
+            </a:pPr>
+            <a:r>
+              <a:rPr lang="ru-RU" sz="1600" dirty="0">
+                <a:solidFill>
+                  <a:srgbClr val="23303F"/>
+                </a:solidFill>
+                <a:latin typeface="PT Sans" panose="020B0503020203020204" pitchFamily="34" charset="0"/>
+                <a:ea typeface="PT Sans" panose="020B0503020203020204" pitchFamily="34" charset="-122"/>
+                <a:cs typeface="PT Sans" panose="020B0503020203020204" pitchFamily="34" charset="-120"/>
+              </a:rPr>
+              <a:t>Описать салон как объект автоматизации</a:t>
+            </a:r>
+            <a:endParaRPr lang="ru-RU" sz="1600" dirty="0"/>
+          </a:p>
+          <a:p>
+            <a:pPr marL="342900" indent="-342900">
+              <a:spcAft>
+                <a:spcPts val="700"/>
+              </a:spcAft>
+              <a:buFont typeface="PT Sans" pitchFamily="34" charset="0"/>
+              <a:buAutoNum type="arabicPeriod"/>
+            </a:pPr>
+            <a:r>
+              <a:rPr lang="ru-RU" sz="1600" dirty="0">
+                <a:solidFill>
+                  <a:srgbClr val="23303F"/>
+                </a:solidFill>
+                <a:latin typeface="PT Sans" panose="020B0503020203020204" pitchFamily="34" charset="0"/>
+                <a:ea typeface="PT Sans" panose="020B0503020203020204" pitchFamily="34" charset="-122"/>
+                <a:cs typeface="PT Sans" panose="020B0503020203020204" pitchFamily="34" charset="-120"/>
+              </a:rPr>
+              <a:t>Разобрать функционал менеджера и виды его работ</a:t>
+            </a:r>
+            <a:endParaRPr lang="ru-RU" sz="1600" dirty="0"/>
+          </a:p>
+          <a:p>
+            <a:pPr marL="342900" indent="-342900">
+              <a:spcAft>
+                <a:spcPts val="700"/>
+              </a:spcAft>
+              <a:buFont typeface="PT Sans" pitchFamily="34" charset="0"/>
+              <a:buAutoNum type="arabicPeriod"/>
+            </a:pPr>
+            <a:r>
+              <a:rPr lang="ru-RU" sz="1600" dirty="0">
+                <a:solidFill>
+                  <a:srgbClr val="23303F"/>
+                </a:solidFill>
+                <a:latin typeface="PT Sans" panose="020B0503020203020204" pitchFamily="34" charset="0"/>
+                <a:ea typeface="PT Sans" panose="020B0503020203020204" pitchFamily="34" charset="-122"/>
+                <a:cs typeface="PT Sans" panose="020B0503020203020204" pitchFamily="34" charset="-120"/>
+              </a:rPr>
+              <a:t>Построить модели бизнес-процессов AS-IS и TO-BE (BPMN, EPC, UML)</a:t>
+            </a:r>
+            <a:endParaRPr lang="ru-RU" sz="1600" dirty="0"/>
+          </a:p>
+          <a:p>
+            <a:pPr marL="342900" indent="-342900">
+              <a:spcAft>
+                <a:spcPts val="700"/>
+              </a:spcAft>
+              <a:buFont typeface="PT Sans" pitchFamily="34" charset="0"/>
+              <a:buAutoNum type="arabicPeriod"/>
+            </a:pPr>
+            <a:r>
+              <a:rPr lang="ru-RU" sz="1600" dirty="0">
+                <a:solidFill>
+                  <a:srgbClr val="23303F"/>
+                </a:solidFill>
+                <a:latin typeface="PT Sans" panose="020B0503020203020204" pitchFamily="34" charset="0"/>
+                <a:ea typeface="PT Sans" panose="020B0503020203020204" pitchFamily="34" charset="-122"/>
+                <a:cs typeface="PT Sans" panose="020B0503020203020204" pitchFamily="34" charset="-120"/>
+              </a:rPr>
+              <a:t>Выписать функциональные, информационные и интерфейсные требования к АРМ</a:t>
+            </a:r>
+            <a:endParaRPr lang="ru-RU" sz="1600" dirty="0"/>
+          </a:p>
+          <a:p>
+            <a:pPr marL="342900" indent="-342900">
+              <a:spcAft>
+                <a:spcPts val="700"/>
+              </a:spcAft>
+              <a:buFont typeface="PT Sans" pitchFamily="34" charset="0"/>
+              <a:buAutoNum type="arabicPeriod"/>
+            </a:pPr>
+            <a:r>
+              <a:rPr lang="ru-RU" sz="1600" dirty="0">
+                <a:solidFill>
+                  <a:srgbClr val="23303F"/>
+                </a:solidFill>
+                <a:latin typeface="PT Sans" panose="020B0503020203020204" pitchFamily="34" charset="0"/>
+                <a:ea typeface="PT Sans" panose="020B0503020203020204" pitchFamily="34" charset="-122"/>
+                <a:cs typeface="PT Sans" panose="020B0503020203020204" pitchFamily="34" charset="-120"/>
+              </a:rPr>
+              <a:t>Спроектировать структуру данных и экранные формы Excel-прототипа</a:t>
+            </a:r>
+            <a:endParaRPr lang="ru-RU" sz="1600" dirty="0"/>
+          </a:p>
+          <a:p>
+            <a:pPr marL="342900" indent="-342900">
+              <a:spcAft>
+                <a:spcPts val="700"/>
+              </a:spcAft>
+              <a:buFont typeface="PT Sans" pitchFamily="34" charset="0"/>
+              <a:buAutoNum type="arabicPeriod"/>
+            </a:pPr>
+            <a:r>
+              <a:rPr lang="ru-RU" sz="1600" dirty="0">
+                <a:solidFill>
+                  <a:srgbClr val="23303F"/>
+                </a:solidFill>
+                <a:latin typeface="PT Sans" panose="020B0503020203020204" pitchFamily="34" charset="0"/>
+                <a:ea typeface="PT Sans" panose="020B0503020203020204" pitchFamily="34" charset="-122"/>
+                <a:cs typeface="PT Sans" panose="020B0503020203020204" pitchFamily="34" charset="-120"/>
+              </a:rPr>
+              <a:t>Оценить риски IT-проекта</a:t>
+            </a:r>
+            <a:endParaRPr lang="ru-RU" sz="1600" dirty="0"/>
+          </a:p>
+          <a:p>
+            <a:pPr marL="342900" indent="-342900">
+              <a:spcAft>
+                <a:spcPts val="700"/>
+              </a:spcAft>
+              <a:buFont typeface="PT Sans" pitchFamily="34" charset="0"/>
+              <a:buAutoNum type="arabicPeriod"/>
+            </a:pPr>
+            <a:r>
+              <a:rPr lang="ru-RU" sz="1600" dirty="0">
+                <a:solidFill>
+                  <a:srgbClr val="23303F"/>
+                </a:solidFill>
+                <a:latin typeface="PT Sans" panose="020B0503020203020204" pitchFamily="34" charset="0"/>
+                <a:ea typeface="PT Sans" panose="020B0503020203020204" pitchFamily="34" charset="-122"/>
+                <a:cs typeface="PT Sans" panose="020B0503020203020204" pitchFamily="34" charset="-120"/>
+              </a:rPr>
+              <a:t>Рассчитать затраты и экономический эффект</a:t>
+            </a:r>
+            <a:endParaRPr lang="ru-RU" sz="1600" dirty="0"/>
+          </a:p>
+          <a:p>
+            <a:pPr marL="342900" indent="-342900">
+              <a:spcAft>
+                <a:spcPts val="700"/>
+              </a:spcAft>
+              <a:buFont typeface="PT Sans" pitchFamily="34" charset="0"/>
+              <a:buAutoNum type="arabicPeriod"/>
+            </a:pPr>
+            <a:r>
+              <a:rPr lang="ru-RU" sz="1600" dirty="0">
+                <a:solidFill>
+                  <a:srgbClr val="23303F"/>
+                </a:solidFill>
+                <a:latin typeface="PT Sans" panose="020B0503020203020204" pitchFamily="34" charset="0"/>
+                <a:ea typeface="PT Sans" panose="020B0503020203020204" pitchFamily="34" charset="-122"/>
+                <a:cs typeface="PT Sans" panose="020B0503020203020204" pitchFamily="34" charset="-120"/>
+              </a:rPr>
+              <a:t>Описать план внедрения и направления развития</a:t>
+            </a:r>
+            <a:endParaRPr lang="ru-RU" sz="1600" dirty="0"/>
           </a:p>
         </p:txBody>
       </p:sp>
@@ -11012,12 +10182,13 @@
 
 <file path=ppt/slides/slide4.xml><?xml version="1.0" encoding="utf-8"?>
 <p:sld xmlns:a="http://schemas.openxmlformats.org/drawingml/2006/main" xmlns:r="http://schemas.openxmlformats.org/officeDocument/2006/relationships" xmlns:p="http://schemas.openxmlformats.org/presentationml/2006/main">
-  <p:cSld name="Slide 4">
+  <p:cSld>
     <p:bg>
       <p:bgPr>
         <a:solidFill>
           <a:srgbClr val="FFFFFF"/>
         </a:solidFill>
+        <a:effectLst/>
       </p:bgPr>
     </p:bg>
     <p:spTree>
@@ -11051,7 +10222,6 @@
           <a:solidFill>
             <a:srgbClr val="B08D3E"/>
           </a:solidFill>
-          <a:ln/>
         </p:spPr>
         <p:txBody>
           <a:bodyPr/>
@@ -11073,23 +10243,22 @@
             <a:avLst/>
           </a:prstGeom>
           <a:noFill/>
-          <a:ln/>
         </p:spPr>
         <p:txBody>
           <a:bodyPr wrap="square" lIns="0" tIns="0" rIns="0" bIns="0" rtlCol="0" anchor="ctr"/>
           <a:lstStyle/>
           <a:p>
-            <a:pPr indent="0" marL="0">
-              <a:buNone/>
-            </a:pPr>
-            <a:r>
-              <a:rPr lang="en-US" sz="1250" b="1" spc="300" kern="0" dirty="0">
+            <a:pPr marL="0" indent="0">
+              <a:buNone/>
+            </a:pPr>
+            <a:r>
+              <a:rPr lang="en-US" sz="1250" b="1" kern="0" spc="300" dirty="0">
                 <a:solidFill>
                   <a:srgbClr val="B08D3E"/>
                 </a:solidFill>
-                <a:latin typeface="PT Sans" pitchFamily="34" charset="0"/>
-                <a:ea typeface="PT Sans" pitchFamily="34" charset="-122"/>
-                <a:cs typeface="PT Sans" pitchFamily="34" charset="-120"/>
+                <a:latin typeface="PT Sans" panose="020B0503020203020204" pitchFamily="34" charset="0"/>
+                <a:ea typeface="PT Sans" panose="020B0503020203020204" pitchFamily="34" charset="-122"/>
+                <a:cs typeface="PT Sans" panose="020B0503020203020204" pitchFamily="34" charset="-120"/>
               </a:rPr>
               <a:t>ОБЪЕКТ</a:t>
             </a:r>
@@ -11112,13 +10281,12 @@
             <a:avLst/>
           </a:prstGeom>
           <a:noFill/>
-          <a:ln/>
         </p:spPr>
         <p:txBody>
           <a:bodyPr wrap="square" lIns="0" tIns="0" rIns="0" bIns="0" rtlCol="0" anchor="ctr"/>
           <a:lstStyle/>
           <a:p>
-            <a:pPr indent="0" marL="0">
+            <a:pPr marL="0" indent="0">
               <a:buNone/>
             </a:pPr>
             <a:r>
@@ -11126,9 +10294,9 @@
                 <a:solidFill>
                   <a:srgbClr val="1E3A5F"/>
                 </a:solidFill>
-                <a:latin typeface="PT Serif" pitchFamily="34" charset="0"/>
-                <a:ea typeface="PT Serif" pitchFamily="34" charset="-122"/>
-                <a:cs typeface="PT Serif" pitchFamily="34" charset="-120"/>
+                <a:latin typeface="PT Serif" panose="020A0603040505020204" pitchFamily="34" charset="0"/>
+                <a:ea typeface="PT Serif" panose="020A0603040505020204" pitchFamily="34" charset="-122"/>
+                <a:cs typeface="PT Serif" panose="020A0603040505020204" pitchFamily="34" charset="-120"/>
               </a:rPr>
               <a:t>Характеристика салона</a:t>
             </a:r>
@@ -11160,7 +10328,7 @@
             <a:prstDash val="solid"/>
           </a:ln>
           <a:effectLst>
-            <a:outerShdw sx="100000" sy="100000" kx="0" ky="0" algn="bl" rotWithShape="0" blurRad="101600" dist="38100" dir="5400000">
+            <a:outerShdw blurRad="101600" dist="38100" dir="5400000" algn="bl" rotWithShape="0">
               <a:srgbClr val="8499B5">
                 <a:alpha val="22000"/>
               </a:srgbClr>
@@ -11189,7 +10357,6 @@
           <a:solidFill>
             <a:srgbClr val="33598A"/>
           </a:solidFill>
-          <a:ln/>
         </p:spPr>
         <p:txBody>
           <a:bodyPr/>
@@ -11213,7 +10380,6 @@
           <a:solidFill>
             <a:srgbClr val="1E3A5F"/>
           </a:solidFill>
-          <a:ln/>
         </p:spPr>
         <p:txBody>
           <a:bodyPr/>
@@ -11222,7 +10388,7 @@
       </p:sp>
       <p:pic>
         <p:nvPicPr>
-          <p:cNvPr id="8" name="Image 0" descr="preencoded.png">    </p:cNvPr>
+          <p:cNvPr id="8" name="Image 0" descr="preencoded.png"/>
           <p:cNvPicPr>
             <a:picLocks noChangeAspect="1"/>
           </p:cNvPicPr>
@@ -11259,13 +10425,12 @@
             <a:avLst/>
           </a:prstGeom>
           <a:noFill/>
-          <a:ln/>
         </p:spPr>
         <p:txBody>
           <a:bodyPr wrap="square" lIns="0" tIns="0" rIns="0" bIns="0" rtlCol="0" anchor="ctr"/>
           <a:lstStyle/>
           <a:p>
-            <a:pPr indent="0" marL="0">
+            <a:pPr marL="0" indent="0">
               <a:buNone/>
             </a:pPr>
             <a:r>
@@ -11273,9 +10438,9 @@
                 <a:solidFill>
                   <a:srgbClr val="1E3A5F"/>
                 </a:solidFill>
-                <a:latin typeface="PT Sans" pitchFamily="34" charset="0"/>
-                <a:ea typeface="PT Sans" pitchFamily="34" charset="-122"/>
-                <a:cs typeface="PT Sans" pitchFamily="34" charset="-120"/>
+                <a:latin typeface="PT Sans" panose="020B0503020203020204" pitchFamily="34" charset="0"/>
+                <a:ea typeface="PT Sans" panose="020B0503020203020204" pitchFamily="34" charset="-122"/>
+                <a:cs typeface="PT Sans" panose="020B0503020203020204" pitchFamily="34" charset="-120"/>
               </a:rPr>
               <a:t>Студия перманентного макияжа</a:t>
             </a:r>
@@ -11298,13 +10463,12 @@
             <a:avLst/>
           </a:prstGeom>
           <a:noFill/>
-          <a:ln/>
         </p:spPr>
         <p:txBody>
           <a:bodyPr wrap="square" lIns="0" tIns="0" rIns="0" bIns="0" rtlCol="0" anchor="t"/>
           <a:lstStyle/>
           <a:p>
-            <a:pPr indent="0" marL="0">
+            <a:pPr marL="0" indent="0">
               <a:buNone/>
             </a:pPr>
             <a:r>
@@ -11312,9 +10476,9 @@
                 <a:solidFill>
                   <a:srgbClr val="657384"/>
                 </a:solidFill>
-                <a:latin typeface="PT Sans" pitchFamily="34" charset="0"/>
-                <a:ea typeface="PT Sans" pitchFamily="34" charset="-122"/>
-                <a:cs typeface="PT Sans" pitchFamily="34" charset="-120"/>
+                <a:latin typeface="PT Sans" panose="020B0503020203020204" pitchFamily="34" charset="0"/>
+                <a:ea typeface="PT Sans" panose="020B0503020203020204" pitchFamily="34" charset="-122"/>
+                <a:cs typeface="PT Sans" panose="020B0503020203020204" pitchFamily="34" charset="-120"/>
               </a:rPr>
               <a:t>«Ли Белекмы», Улан-Удэ · рейтинг 5,0</a:t>
             </a:r>
@@ -11346,7 +10510,7 @@
             <a:prstDash val="solid"/>
           </a:ln>
           <a:effectLst>
-            <a:outerShdw sx="100000" sy="100000" kx="0" ky="0" algn="bl" rotWithShape="0" blurRad="101600" dist="38100" dir="5400000">
+            <a:outerShdw blurRad="101600" dist="38100" dir="5400000" algn="bl" rotWithShape="0">
               <a:srgbClr val="8499B5">
                 <a:alpha val="22000"/>
               </a:srgbClr>
@@ -11375,7 +10539,6 @@
           <a:solidFill>
             <a:srgbClr val="33598A"/>
           </a:solidFill>
-          <a:ln/>
         </p:spPr>
         <p:txBody>
           <a:bodyPr/>
@@ -11399,7 +10562,6 @@
           <a:solidFill>
             <a:srgbClr val="1E3A5F"/>
           </a:solidFill>
-          <a:ln/>
         </p:spPr>
         <p:txBody>
           <a:bodyPr/>
@@ -11408,7 +10570,7 @@
       </p:sp>
       <p:pic>
         <p:nvPicPr>
-          <p:cNvPr id="14" name="Image 1" descr="preencoded.png">    </p:cNvPr>
+          <p:cNvPr id="14" name="Image 1" descr="preencoded.png"/>
           <p:cNvPicPr>
             <a:picLocks noChangeAspect="1"/>
           </p:cNvPicPr>
@@ -11445,13 +10607,12 @@
             <a:avLst/>
           </a:prstGeom>
           <a:noFill/>
-          <a:ln/>
         </p:spPr>
         <p:txBody>
           <a:bodyPr wrap="square" lIns="0" tIns="0" rIns="0" bIns="0" rtlCol="0" anchor="ctr"/>
           <a:lstStyle/>
           <a:p>
-            <a:pPr indent="0" marL="0">
+            <a:pPr marL="0" indent="0">
               <a:buNone/>
             </a:pPr>
             <a:r>
@@ -11459,9 +10620,9 @@
                 <a:solidFill>
                   <a:srgbClr val="1E3A5F"/>
                 </a:solidFill>
-                <a:latin typeface="PT Sans" pitchFamily="34" charset="0"/>
-                <a:ea typeface="PT Sans" pitchFamily="34" charset="-122"/>
-                <a:cs typeface="PT Sans" pitchFamily="34" charset="-120"/>
+                <a:latin typeface="PT Sans" panose="020B0503020203020204" pitchFamily="34" charset="0"/>
+                <a:ea typeface="PT Sans" panose="020B0503020203020204" pitchFamily="34" charset="-122"/>
+                <a:cs typeface="PT Sans" panose="020B0503020203020204" pitchFamily="34" charset="-120"/>
               </a:rPr>
               <a:t>Услуги и обучение</a:t>
             </a:r>
@@ -11484,13 +10645,12 @@
             <a:avLst/>
           </a:prstGeom>
           <a:noFill/>
-          <a:ln/>
         </p:spPr>
         <p:txBody>
           <a:bodyPr wrap="square" lIns="0" tIns="0" rIns="0" bIns="0" rtlCol="0" anchor="t"/>
           <a:lstStyle/>
           <a:p>
-            <a:pPr indent="0" marL="0">
+            <a:pPr marL="0" indent="0">
               <a:buNone/>
             </a:pPr>
             <a:r>
@@ -11498,9 +10658,9 @@
                 <a:solidFill>
                   <a:srgbClr val="657384"/>
                 </a:solidFill>
-                <a:latin typeface="PT Sans" pitchFamily="34" charset="0"/>
-                <a:ea typeface="PT Sans" pitchFamily="34" charset="-122"/>
-                <a:cs typeface="PT Sans" pitchFamily="34" charset="-120"/>
+                <a:latin typeface="PT Sans" panose="020B0503020203020204" pitchFamily="34" charset="0"/>
+                <a:ea typeface="PT Sans" panose="020B0503020203020204" pitchFamily="34" charset="-122"/>
+                <a:cs typeface="PT Sans" panose="020B0503020203020204" pitchFamily="34" charset="-120"/>
               </a:rPr>
               <a:t>брови, губы, межресничное пространство + обучающие курсы</a:t>
             </a:r>
@@ -11532,7 +10692,7 @@
             <a:prstDash val="solid"/>
           </a:ln>
           <a:effectLst>
-            <a:outerShdw sx="100000" sy="100000" kx="0" ky="0" algn="bl" rotWithShape="0" blurRad="101600" dist="38100" dir="5400000">
+            <a:outerShdw blurRad="101600" dist="38100" dir="5400000" algn="bl" rotWithShape="0">
               <a:srgbClr val="8499B5">
                 <a:alpha val="22000"/>
               </a:srgbClr>
@@ -11561,7 +10721,6 @@
           <a:solidFill>
             <a:srgbClr val="33598A"/>
           </a:solidFill>
-          <a:ln/>
         </p:spPr>
         <p:txBody>
           <a:bodyPr/>
@@ -11585,7 +10744,6 @@
           <a:solidFill>
             <a:srgbClr val="1E3A5F"/>
           </a:solidFill>
-          <a:ln/>
         </p:spPr>
         <p:txBody>
           <a:bodyPr/>
@@ -11594,7 +10752,7 @@
       </p:sp>
       <p:pic>
         <p:nvPicPr>
-          <p:cNvPr id="20" name="Image 2" descr="preencoded.png">    </p:cNvPr>
+          <p:cNvPr id="20" name="Image 2" descr="preencoded.png"/>
           <p:cNvPicPr>
             <a:picLocks noChangeAspect="1"/>
           </p:cNvPicPr>
@@ -11631,13 +10789,12 @@
             <a:avLst/>
           </a:prstGeom>
           <a:noFill/>
-          <a:ln/>
         </p:spPr>
         <p:txBody>
           <a:bodyPr wrap="square" lIns="0" tIns="0" rIns="0" bIns="0" rtlCol="0" anchor="ctr"/>
           <a:lstStyle/>
           <a:p>
-            <a:pPr indent="0" marL="0">
+            <a:pPr marL="0" indent="0">
               <a:buNone/>
             </a:pPr>
             <a:r>
@@ -11645,9 +10802,9 @@
                 <a:solidFill>
                   <a:srgbClr val="1E3A5F"/>
                 </a:solidFill>
-                <a:latin typeface="PT Sans" pitchFamily="34" charset="0"/>
-                <a:ea typeface="PT Sans" pitchFamily="34" charset="-122"/>
-                <a:cs typeface="PT Sans" pitchFamily="34" charset="-120"/>
+                <a:latin typeface="PT Sans" panose="020B0503020203020204" pitchFamily="34" charset="0"/>
+                <a:ea typeface="PT Sans" panose="020B0503020203020204" pitchFamily="34" charset="-122"/>
+                <a:cs typeface="PT Sans" panose="020B0503020203020204" pitchFamily="34" charset="-120"/>
               </a:rPr>
               <a:t>Масштаб</a:t>
             </a:r>
@@ -11670,13 +10827,12 @@
             <a:avLst/>
           </a:prstGeom>
           <a:noFill/>
-          <a:ln/>
         </p:spPr>
         <p:txBody>
           <a:bodyPr wrap="square" lIns="0" tIns="0" rIns="0" bIns="0" rtlCol="0" anchor="t"/>
           <a:lstStyle/>
           <a:p>
-            <a:pPr indent="0" marL="0">
+            <a:pPr marL="0" indent="0">
               <a:buNone/>
             </a:pPr>
             <a:r>
@@ -11684,9 +10840,9 @@
                 <a:solidFill>
                   <a:srgbClr val="657384"/>
                 </a:solidFill>
-                <a:latin typeface="PT Sans" pitchFamily="34" charset="0"/>
-                <a:ea typeface="PT Sans" pitchFamily="34" charset="-122"/>
-                <a:cs typeface="PT Sans" pitchFamily="34" charset="-120"/>
+                <a:latin typeface="PT Sans" panose="020B0503020203020204" pitchFamily="34" charset="0"/>
+                <a:ea typeface="PT Sans" panose="020B0503020203020204" pitchFamily="34" charset="-122"/>
+                <a:cs typeface="PT Sans" panose="020B0503020203020204" pitchFamily="34" charset="-120"/>
               </a:rPr>
               <a:t>руководитель + ~3 мастера, 2 кабинета, 3 позиции расходных материалов</a:t>
             </a:r>
@@ -11718,7 +10874,7 @@
             <a:prstDash val="solid"/>
           </a:ln>
           <a:effectLst>
-            <a:outerShdw sx="100000" sy="100000" kx="0" ky="0" algn="bl" rotWithShape="0" blurRad="101600" dist="38100" dir="5400000">
+            <a:outerShdw blurRad="101600" dist="38100" dir="5400000" algn="bl" rotWithShape="0">
               <a:srgbClr val="8499B5">
                 <a:alpha val="22000"/>
               </a:srgbClr>
@@ -11747,7 +10903,6 @@
           <a:solidFill>
             <a:srgbClr val="A8503F"/>
           </a:solidFill>
-          <a:ln/>
         </p:spPr>
         <p:txBody>
           <a:bodyPr/>
@@ -11771,7 +10926,6 @@
           <a:solidFill>
             <a:srgbClr val="A8503F"/>
           </a:solidFill>
-          <a:ln/>
         </p:spPr>
         <p:txBody>
           <a:bodyPr/>
@@ -11780,7 +10934,7 @@
       </p:sp>
       <p:pic>
         <p:nvPicPr>
-          <p:cNvPr id="26" name="Image 3" descr="preencoded.png">    </p:cNvPr>
+          <p:cNvPr id="26" name="Image 3" descr="preencoded.png"/>
           <p:cNvPicPr>
             <a:picLocks noChangeAspect="1"/>
           </p:cNvPicPr>
@@ -11817,13 +10971,12 @@
             <a:avLst/>
           </a:prstGeom>
           <a:noFill/>
-          <a:ln/>
         </p:spPr>
         <p:txBody>
           <a:bodyPr wrap="square" lIns="0" tIns="0" rIns="0" bIns="0" rtlCol="0" anchor="ctr"/>
           <a:lstStyle/>
           <a:p>
-            <a:pPr indent="0" marL="0">
+            <a:pPr marL="0" indent="0">
               <a:buNone/>
             </a:pPr>
             <a:r>
@@ -11831,9 +10984,9 @@
                 <a:solidFill>
                   <a:srgbClr val="1E3A5F"/>
                 </a:solidFill>
-                <a:latin typeface="PT Sans" pitchFamily="34" charset="0"/>
-                <a:ea typeface="PT Sans" pitchFamily="34" charset="-122"/>
-                <a:cs typeface="PT Sans" pitchFamily="34" charset="-120"/>
+                <a:latin typeface="PT Sans" panose="020B0503020203020204" pitchFamily="34" charset="0"/>
+                <a:ea typeface="PT Sans" panose="020B0503020203020204" pitchFamily="34" charset="-122"/>
+                <a:cs typeface="PT Sans" panose="020B0503020203020204" pitchFamily="34" charset="-120"/>
               </a:rPr>
               <a:t>Проблема</a:t>
             </a:r>
@@ -11856,13 +11009,12 @@
             <a:avLst/>
           </a:prstGeom>
           <a:noFill/>
-          <a:ln/>
         </p:spPr>
         <p:txBody>
           <a:bodyPr wrap="square" lIns="0" tIns="0" rIns="0" bIns="0" rtlCol="0" anchor="t"/>
           <a:lstStyle/>
           <a:p>
-            <a:pPr indent="0" marL="0">
+            <a:pPr marL="0" indent="0">
               <a:buNone/>
             </a:pPr>
             <a:r>
@@ -11870,11 +11022,11 @@
                 <a:solidFill>
                   <a:srgbClr val="657384"/>
                 </a:solidFill>
-                <a:latin typeface="PT Sans" pitchFamily="34" charset="0"/>
-                <a:ea typeface="PT Sans" pitchFamily="34" charset="-122"/>
-                <a:cs typeface="PT Sans" pitchFamily="34" charset="-120"/>
-              </a:rPr>
-              <a:t>данные разрознены: WhatsApp · Telegram · бумага · таблица</a:t>
+                <a:latin typeface="PT Sans" panose="020B0503020203020204" pitchFamily="34" charset="0"/>
+                <a:ea typeface="PT Sans" panose="020B0503020203020204" pitchFamily="34" charset="-122"/>
+                <a:cs typeface="PT Sans" panose="020B0503020203020204" pitchFamily="34" charset="-120"/>
+              </a:rPr>
+              <a:t>данные разрознены: ВКонтакте · MAX · бумага · таблица</a:t>
             </a:r>
             <a:endParaRPr lang="en-US" sz="1350" dirty="0"/>
           </a:p>
@@ -11922,13 +11074,12 @@
             <a:avLst/>
           </a:prstGeom>
           <a:noFill/>
-          <a:ln/>
         </p:spPr>
         <p:txBody>
           <a:bodyPr wrap="square" lIns="0" tIns="0" rIns="0" bIns="0" rtlCol="0" anchor="ctr"/>
           <a:lstStyle/>
           <a:p>
-            <a:pPr indent="0" marL="0">
+            <a:pPr marL="0" indent="0">
               <a:buNone/>
             </a:pPr>
             <a:r>
@@ -11936,9 +11087,9 @@
                 <a:solidFill>
                   <a:srgbClr val="657384"/>
                 </a:solidFill>
-                <a:latin typeface="PT Sans" pitchFamily="34" charset="0"/>
-                <a:ea typeface="PT Sans" pitchFamily="34" charset="-122"/>
-                <a:cs typeface="PT Sans" pitchFamily="34" charset="-120"/>
+                <a:latin typeface="PT Sans" panose="020B0503020203020204" pitchFamily="34" charset="0"/>
+                <a:ea typeface="PT Sans" panose="020B0503020203020204" pitchFamily="34" charset="-122"/>
+                <a:cs typeface="PT Sans" panose="020B0503020203020204" pitchFamily="34" charset="-120"/>
               </a:rPr>
               <a:t>АРМ менеджера салона красоты  ·  ВСГУТУ  ·  Улан-Удэ, 2026</a:t>
             </a:r>
@@ -11961,13 +11112,12 @@
             <a:avLst/>
           </a:prstGeom>
           <a:noFill/>
-          <a:ln/>
         </p:spPr>
         <p:txBody>
           <a:bodyPr wrap="square" lIns="0" tIns="0" rIns="0" bIns="0" rtlCol="0" anchor="ctr"/>
           <a:lstStyle/>
           <a:p>
-            <a:pPr algn="r" indent="0" marL="0">
+            <a:pPr marL="0" indent="0" algn="r">
               <a:buNone/>
             </a:pPr>
             <a:r>
@@ -11975,9 +11125,9 @@
                 <a:solidFill>
                   <a:srgbClr val="657384"/>
                 </a:solidFill>
-                <a:latin typeface="PT Sans" pitchFamily="34" charset="0"/>
-                <a:ea typeface="PT Sans" pitchFamily="34" charset="-122"/>
-                <a:cs typeface="PT Sans" pitchFamily="34" charset="-120"/>
+                <a:latin typeface="PT Sans" panose="020B0503020203020204" pitchFamily="34" charset="0"/>
+                <a:ea typeface="PT Sans" panose="020B0503020203020204" pitchFamily="34" charset="-122"/>
+                <a:cs typeface="PT Sans" panose="020B0503020203020204" pitchFamily="34" charset="-120"/>
               </a:rPr>
               <a:t>04 / 15</a:t>
             </a:r>
@@ -11994,7 +11144,7 @@
 </file>
 
 <file path=ppt/slides/slide5.xml><?xml version="1.0" encoding="utf-8"?>
-<p:sld xmlns:a="http://schemas.openxmlformats.org/drawingml/2006/main" xmlns:p="http://schemas.openxmlformats.org/presentationml/2006/main" xmlns:r="http://schemas.openxmlformats.org/officeDocument/2006/relationships">
+<p:sld xmlns:a="http://schemas.openxmlformats.org/drawingml/2006/main" xmlns:r="http://schemas.openxmlformats.org/officeDocument/2006/relationships" xmlns:p="http://schemas.openxmlformats.org/presentationml/2006/main">
   <p:cSld>
     <p:spTree>
       <p:nvGrpSpPr>
@@ -12020,7 +11170,6 @@
           <a:solidFill>
             <a:srgbClr val="B08D3E"/>
           </a:solidFill>
-          <a:ln/>
         </p:spPr>
         <p:txBody>
           <a:bodyPr/>
@@ -12042,23 +11191,22 @@
             <a:avLst/>
           </a:prstGeom>
           <a:noFill/>
-          <a:ln/>
         </p:spPr>
         <p:txBody>
           <a:bodyPr wrap="square" lIns="0" tIns="0" rIns="0" bIns="0" rtlCol="0" anchor="ctr"/>
           <a:lstStyle/>
           <a:p>
-            <a:pPr indent="0" marL="0">
-              <a:buNone/>
-            </a:pPr>
-            <a:r>
-              <a:rPr lang="en-US" sz="1250" b="1" spc="300" kern="0" dirty="0">
+            <a:pPr marL="0" indent="0">
+              <a:buNone/>
+            </a:pPr>
+            <a:r>
+              <a:rPr lang="en-US" sz="1250" b="1" kern="0" spc="300" dirty="0">
                 <a:solidFill>
                   <a:srgbClr val="B08D3E"/>
                 </a:solidFill>
-                <a:latin typeface="PT Sans" pitchFamily="34" charset="0"/>
-                <a:ea typeface="PT Sans" pitchFamily="34" charset="-122"/>
-                <a:cs typeface="PT Sans" pitchFamily="34" charset="-120"/>
+                <a:latin typeface="PT Sans" panose="020B0503020203020204" pitchFamily="34" charset="0"/>
+                <a:ea typeface="PT Sans" panose="020B0503020203020204" pitchFamily="34" charset="-122"/>
+                <a:cs typeface="PT Sans" panose="020B0503020203020204" pitchFamily="34" charset="-120"/>
               </a:rPr>
               <a:t>ОБЪЕКТ</a:t>
             </a:r>
@@ -12081,13 +11229,12 @@
             <a:avLst/>
           </a:prstGeom>
           <a:noFill/>
-          <a:ln/>
         </p:spPr>
         <p:txBody>
           <a:bodyPr wrap="square" lIns="0" tIns="0" rIns="0" bIns="0" rtlCol="0" anchor="ctr"/>
           <a:lstStyle/>
           <a:p>
-            <a:pPr indent="0" marL="0">
+            <a:pPr marL="0" indent="0">
               <a:buNone/>
             </a:pPr>
             <a:r>
@@ -12095,9 +11242,9 @@
                 <a:solidFill>
                   <a:srgbClr val="1E3A5F"/>
                 </a:solidFill>
-                <a:latin typeface="PT Serif" pitchFamily="34" charset="0"/>
-                <a:ea typeface="PT Serif" pitchFamily="34" charset="-122"/>
-                <a:cs typeface="PT Serif" pitchFamily="34" charset="-120"/>
+                <a:latin typeface="PT Serif" panose="020A0603040505020204" pitchFamily="34" charset="0"/>
+                <a:ea typeface="PT Serif" panose="020A0603040505020204" pitchFamily="34" charset="-122"/>
+                <a:cs typeface="PT Serif" panose="020A0603040505020204" pitchFamily="34" charset="-120"/>
               </a:rPr>
               <a:t>Карточка студии «Ли Белекмы» · КДЦ «Арун», оф. 610</a:t>
             </a:r>
@@ -12129,7 +11276,7 @@
             <a:prstDash val="solid"/>
           </a:ln>
           <a:effectLst>
-            <a:outerShdw sx="100000" sy="100000" kx="0" ky="0" algn="bl" rotWithShape="0" blurRad="101600" dist="38100" dir="5400000">
+            <a:outerShdw blurRad="101600" dist="38100" dir="5400000" algn="bl" rotWithShape="0">
               <a:srgbClr val="8499B5">
                 <a:alpha val="22000"/>
               </a:srgbClr>
@@ -12143,14 +11290,14 @@
       </p:sp>
       <p:pic>
         <p:nvPicPr>
-          <p:cNvPr id="30" name="Image 4" descr="/Users/m/Documents/VKR_Stats/build/img_final/image4.png">    </p:cNvPr>
+          <p:cNvPr id="30" name="Image 4" descr="/Users/m/Documents/VKR_Stats/build/img_final/image4.png"/>
           <p:cNvPicPr>
             <a:picLocks noChangeAspect="1"/>
           </p:cNvPicPr>
           <p:nvPr/>
         </p:nvPicPr>
         <p:blipFill>
-          <a:blip r:embed="rId6"/>
+          <a:blip r:embed="rId1"/>
           <a:srcRect b="35000"/>
           <a:stretch>
             <a:fillRect/>
@@ -12208,13 +11355,12 @@
             <a:avLst/>
           </a:prstGeom>
           <a:noFill/>
-          <a:ln/>
         </p:spPr>
         <p:txBody>
           <a:bodyPr wrap="square" lIns="0" tIns="0" rIns="0" bIns="0" rtlCol="0" anchor="ctr"/>
           <a:lstStyle/>
           <a:p>
-            <a:pPr indent="0" marL="0">
+            <a:pPr marL="0" indent="0">
               <a:buNone/>
             </a:pPr>
             <a:r>
@@ -12222,9 +11368,9 @@
                 <a:solidFill>
                   <a:srgbClr val="657384"/>
                 </a:solidFill>
-                <a:latin typeface="PT Sans" pitchFamily="34" charset="0"/>
-                <a:ea typeface="PT Sans" pitchFamily="34" charset="-122"/>
-                <a:cs typeface="PT Sans" pitchFamily="34" charset="-120"/>
+                <a:latin typeface="PT Sans" panose="020B0503020203020204" pitchFamily="34" charset="0"/>
+                <a:ea typeface="PT Sans" panose="020B0503020203020204" pitchFamily="34" charset="-122"/>
+                <a:cs typeface="PT Sans" panose="020B0503020203020204" pitchFamily="34" charset="-120"/>
               </a:rPr>
               <a:t>АРМ менеджера салона красоты  ·  ВСГУТУ  ·  Улан-Удэ, 2026</a:t>
             </a:r>
@@ -12247,13 +11393,12 @@
             <a:avLst/>
           </a:prstGeom>
           <a:noFill/>
-          <a:ln/>
         </p:spPr>
         <p:txBody>
           <a:bodyPr wrap="square" lIns="0" tIns="0" rIns="0" bIns="0" rtlCol="0" anchor="ctr"/>
           <a:lstStyle/>
           <a:p>
-            <a:pPr algn="r" indent="0" marL="0">
+            <a:pPr marL="0" indent="0" algn="r">
               <a:buNone/>
             </a:pPr>
             <a:r>
@@ -12261,9 +11406,9 @@
                 <a:solidFill>
                   <a:srgbClr val="657384"/>
                 </a:solidFill>
-                <a:latin typeface="PT Sans" pitchFamily="34" charset="0"/>
-                <a:ea typeface="PT Sans" pitchFamily="34" charset="-122"/>
-                <a:cs typeface="PT Sans" pitchFamily="34" charset="-120"/>
+                <a:latin typeface="PT Sans" panose="020B0503020203020204" pitchFamily="34" charset="0"/>
+                <a:ea typeface="PT Sans" panose="020B0503020203020204" pitchFamily="34" charset="-122"/>
+                <a:cs typeface="PT Sans" panose="020B0503020203020204" pitchFamily="34" charset="-120"/>
               </a:rPr>
               <a:t>05 / 15</a:t>
             </a:r>
@@ -12281,12 +11426,13 @@
 
 <file path=ppt/slides/slide6.xml><?xml version="1.0" encoding="utf-8"?>
 <p:sld xmlns:a="http://schemas.openxmlformats.org/drawingml/2006/main" xmlns:r="http://schemas.openxmlformats.org/officeDocument/2006/relationships" xmlns:p="http://schemas.openxmlformats.org/presentationml/2006/main">
-  <p:cSld name="Slide 5">
+  <p:cSld>
     <p:bg>
       <p:bgPr>
         <a:solidFill>
           <a:srgbClr val="FFFFFF"/>
         </a:solidFill>
+        <a:effectLst/>
       </p:bgPr>
     </p:bg>
     <p:spTree>
@@ -12320,7 +11466,6 @@
           <a:solidFill>
             <a:srgbClr val="B08D3E"/>
           </a:solidFill>
-          <a:ln/>
         </p:spPr>
         <p:txBody>
           <a:bodyPr/>
@@ -12342,23 +11487,22 @@
             <a:avLst/>
           </a:prstGeom>
           <a:noFill/>
-          <a:ln/>
         </p:spPr>
         <p:txBody>
           <a:bodyPr wrap="square" lIns="0" tIns="0" rIns="0" bIns="0" rtlCol="0" anchor="ctr"/>
           <a:lstStyle/>
           <a:p>
-            <a:pPr indent="0" marL="0">
-              <a:buNone/>
-            </a:pPr>
-            <a:r>
-              <a:rPr lang="en-US" sz="1250" b="1" spc="300" kern="0" dirty="0">
+            <a:pPr marL="0" indent="0">
+              <a:buNone/>
+            </a:pPr>
+            <a:r>
+              <a:rPr lang="en-US" sz="1250" b="1" kern="0" spc="300" dirty="0">
                 <a:solidFill>
                   <a:srgbClr val="B08D3E"/>
                 </a:solidFill>
-                <a:latin typeface="PT Sans" pitchFamily="34" charset="0"/>
-                <a:ea typeface="PT Sans" pitchFamily="34" charset="-122"/>
-                <a:cs typeface="PT Sans" pitchFamily="34" charset="-120"/>
+                <a:latin typeface="PT Sans" panose="020B0503020203020204" pitchFamily="34" charset="0"/>
+                <a:ea typeface="PT Sans" panose="020B0503020203020204" pitchFamily="34" charset="-122"/>
+                <a:cs typeface="PT Sans" panose="020B0503020203020204" pitchFamily="34" charset="-120"/>
               </a:rPr>
               <a:t>ФУНКЦИОНАЛ</a:t>
             </a:r>
@@ -12381,13 +11525,12 @@
             <a:avLst/>
           </a:prstGeom>
           <a:noFill/>
-          <a:ln/>
         </p:spPr>
         <p:txBody>
           <a:bodyPr wrap="square" lIns="0" tIns="0" rIns="0" bIns="0" rtlCol="0" anchor="ctr"/>
           <a:lstStyle/>
           <a:p>
-            <a:pPr indent="0" marL="0">
+            <a:pPr marL="0" indent="0">
               <a:buNone/>
             </a:pPr>
             <a:r>
@@ -12395,9 +11538,9 @@
                 <a:solidFill>
                   <a:srgbClr val="1E3A5F"/>
                 </a:solidFill>
-                <a:latin typeface="PT Serif" pitchFamily="34" charset="0"/>
-                <a:ea typeface="PT Serif" pitchFamily="34" charset="-122"/>
-                <a:cs typeface="PT Serif" pitchFamily="34" charset="-120"/>
+                <a:latin typeface="PT Serif" panose="020A0603040505020204" pitchFamily="34" charset="0"/>
+                <a:ea typeface="PT Serif" panose="020A0603040505020204" pitchFamily="34" charset="-122"/>
+                <a:cs typeface="PT Serif" panose="020A0603040505020204" pitchFamily="34" charset="-120"/>
               </a:rPr>
               <a:t>Что делает менеджер салона</a:t>
             </a:r>
@@ -12429,7 +11572,7 @@
             <a:prstDash val="solid"/>
           </a:ln>
           <a:effectLst>
-            <a:outerShdw sx="100000" sy="100000" kx="0" ky="0" algn="bl" rotWithShape="0" blurRad="101600" dist="38100" dir="5400000">
+            <a:outerShdw blurRad="101600" dist="38100" dir="5400000" algn="bl" rotWithShape="0">
               <a:srgbClr val="8499B5">
                 <a:alpha val="22000"/>
               </a:srgbClr>
@@ -12458,7 +11601,6 @@
           <a:solidFill>
             <a:srgbClr val="1E3A5F"/>
           </a:solidFill>
-          <a:ln/>
         </p:spPr>
         <p:txBody>
           <a:bodyPr/>
@@ -12482,7 +11624,6 @@
           <a:solidFill>
             <a:srgbClr val="1E3A5F"/>
           </a:solidFill>
-          <a:ln/>
         </p:spPr>
         <p:txBody>
           <a:bodyPr/>
@@ -12491,7 +11632,7 @@
       </p:sp>
       <p:pic>
         <p:nvPicPr>
-          <p:cNvPr id="8" name="Image 0" descr="preencoded.png">    </p:cNvPr>
+          <p:cNvPr id="8" name="Image 0" descr="preencoded.png"/>
           <p:cNvPicPr>
             <a:picLocks noChangeAspect="1"/>
           </p:cNvPicPr>
@@ -12528,13 +11669,12 @@
             <a:avLst/>
           </a:prstGeom>
           <a:noFill/>
-          <a:ln/>
         </p:spPr>
         <p:txBody>
           <a:bodyPr wrap="square" lIns="0" tIns="0" rIns="0" bIns="0" rtlCol="0" anchor="ctr"/>
           <a:lstStyle/>
           <a:p>
-            <a:pPr indent="0" marL="0">
+            <a:pPr marL="0" indent="0">
               <a:buNone/>
             </a:pPr>
             <a:r>
@@ -12542,9 +11682,9 @@
                 <a:solidFill>
                   <a:srgbClr val="1E3A5F"/>
                 </a:solidFill>
-                <a:latin typeface="PT Serif" pitchFamily="34" charset="0"/>
-                <a:ea typeface="PT Serif" pitchFamily="34" charset="-122"/>
-                <a:cs typeface="PT Serif" pitchFamily="34" charset="-120"/>
+                <a:latin typeface="PT Serif" panose="020A0603040505020204" pitchFamily="34" charset="0"/>
+                <a:ea typeface="PT Serif" panose="020A0603040505020204" pitchFamily="34" charset="-122"/>
+                <a:cs typeface="PT Serif" panose="020A0603040505020204" pitchFamily="34" charset="-120"/>
               </a:rPr>
               <a:t>Клиентский контур</a:t>
             </a:r>
@@ -12567,13 +11707,12 @@
             <a:avLst/>
           </a:prstGeom>
           <a:noFill/>
-          <a:ln/>
         </p:spPr>
         <p:txBody>
           <a:bodyPr wrap="square" lIns="0" tIns="0" rIns="0" bIns="0" rtlCol="0" anchor="t"/>
           <a:lstStyle/>
           <a:p>
-            <a:pPr indent="0" marL="0">
+            <a:pPr marL="0" indent="0">
               <a:buNone/>
             </a:pPr>
             <a:r>
@@ -12581,9 +11720,9 @@
                 <a:solidFill>
                   <a:srgbClr val="23303F"/>
                 </a:solidFill>
-                <a:latin typeface="PT Sans" pitchFamily="34" charset="0"/>
-                <a:ea typeface="PT Sans" pitchFamily="34" charset="-122"/>
-                <a:cs typeface="PT Sans" pitchFamily="34" charset="-120"/>
+                <a:latin typeface="PT Sans" panose="020B0503020203020204" pitchFamily="34" charset="0"/>
+                <a:ea typeface="PT Sans" panose="020B0503020203020204" pitchFamily="34" charset="-122"/>
+                <a:cs typeface="PT Sans" panose="020B0503020203020204" pitchFamily="34" charset="-120"/>
               </a:rPr>
               <a:t>запись клиентов, история визитов, напоминания</a:t>
             </a:r>
@@ -12615,7 +11754,7 @@
             <a:prstDash val="solid"/>
           </a:ln>
           <a:effectLst>
-            <a:outerShdw sx="100000" sy="100000" kx="0" ky="0" algn="bl" rotWithShape="0" blurRad="101600" dist="38100" dir="5400000">
+            <a:outerShdw blurRad="101600" dist="38100" dir="5400000" algn="bl" rotWithShape="0">
               <a:srgbClr val="8499B5">
                 <a:alpha val="22000"/>
               </a:srgbClr>
@@ -12644,7 +11783,6 @@
           <a:solidFill>
             <a:srgbClr val="1E3A5F"/>
           </a:solidFill>
-          <a:ln/>
         </p:spPr>
         <p:txBody>
           <a:bodyPr/>
@@ -12668,7 +11806,6 @@
           <a:solidFill>
             <a:srgbClr val="1E3A5F"/>
           </a:solidFill>
-          <a:ln/>
         </p:spPr>
         <p:txBody>
           <a:bodyPr/>
@@ -12677,7 +11814,7 @@
       </p:sp>
       <p:pic>
         <p:nvPicPr>
-          <p:cNvPr id="14" name="Image 1" descr="preencoded.png">    </p:cNvPr>
+          <p:cNvPr id="14" name="Image 1" descr="preencoded.png"/>
           <p:cNvPicPr>
             <a:picLocks noChangeAspect="1"/>
           </p:cNvPicPr>
@@ -12714,13 +11851,12 @@
             <a:avLst/>
           </a:prstGeom>
           <a:noFill/>
-          <a:ln/>
         </p:spPr>
         <p:txBody>
           <a:bodyPr wrap="square" lIns="0" tIns="0" rIns="0" bIns="0" rtlCol="0" anchor="ctr"/>
           <a:lstStyle/>
           <a:p>
-            <a:pPr indent="0" marL="0">
+            <a:pPr marL="0" indent="0">
               <a:buNone/>
             </a:pPr>
             <a:r>
@@ -12728,9 +11864,9 @@
                 <a:solidFill>
                   <a:srgbClr val="1E3A5F"/>
                 </a:solidFill>
-                <a:latin typeface="PT Serif" pitchFamily="34" charset="0"/>
-                <a:ea typeface="PT Serif" pitchFamily="34" charset="-122"/>
-                <a:cs typeface="PT Serif" pitchFamily="34" charset="-120"/>
+                <a:latin typeface="PT Serif" panose="020A0603040505020204" pitchFamily="34" charset="0"/>
+                <a:ea typeface="PT Serif" panose="020A0603040505020204" pitchFamily="34" charset="-122"/>
+                <a:cs typeface="PT Serif" panose="020A0603040505020204" pitchFamily="34" charset="-120"/>
               </a:rPr>
               <a:t>Ресурсный контур</a:t>
             </a:r>
@@ -12753,13 +11889,12 @@
             <a:avLst/>
           </a:prstGeom>
           <a:noFill/>
-          <a:ln/>
         </p:spPr>
         <p:txBody>
           <a:bodyPr wrap="square" lIns="0" tIns="0" rIns="0" bIns="0" rtlCol="0" anchor="t"/>
           <a:lstStyle/>
           <a:p>
-            <a:pPr indent="0" marL="0">
+            <a:pPr marL="0" indent="0">
               <a:buNone/>
             </a:pPr>
             <a:r>
@@ -12767,9 +11902,9 @@
                 <a:solidFill>
                   <a:srgbClr val="23303F"/>
                 </a:solidFill>
-                <a:latin typeface="PT Sans" pitchFamily="34" charset="0"/>
-                <a:ea typeface="PT Sans" pitchFamily="34" charset="-122"/>
-                <a:cs typeface="PT Sans" pitchFamily="34" charset="-120"/>
+                <a:latin typeface="PT Sans" panose="020B0503020203020204" pitchFamily="34" charset="0"/>
+                <a:ea typeface="PT Sans" panose="020B0503020203020204" pitchFamily="34" charset="-122"/>
+                <a:cs typeface="PT Sans" panose="020B0503020203020204" pitchFamily="34" charset="-120"/>
               </a:rPr>
               <a:t>расходные материалы, заказы поставщикам, контроль остатков</a:t>
             </a:r>
@@ -12801,7 +11936,7 @@
             <a:prstDash val="solid"/>
           </a:ln>
           <a:effectLst>
-            <a:outerShdw sx="100000" sy="100000" kx="0" ky="0" algn="bl" rotWithShape="0" blurRad="101600" dist="38100" dir="5400000">
+            <a:outerShdw blurRad="101600" dist="38100" dir="5400000" algn="bl" rotWithShape="0">
               <a:srgbClr val="8499B5">
                 <a:alpha val="22000"/>
               </a:srgbClr>
@@ -12830,7 +11965,6 @@
           <a:solidFill>
             <a:srgbClr val="1E3A5F"/>
           </a:solidFill>
-          <a:ln/>
         </p:spPr>
         <p:txBody>
           <a:bodyPr/>
@@ -12854,7 +11988,6 @@
           <a:solidFill>
             <a:srgbClr val="1E3A5F"/>
           </a:solidFill>
-          <a:ln/>
         </p:spPr>
         <p:txBody>
           <a:bodyPr/>
@@ -12863,7 +11996,7 @@
       </p:sp>
       <p:pic>
         <p:nvPicPr>
-          <p:cNvPr id="20" name="Image 2" descr="preencoded.png">    </p:cNvPr>
+          <p:cNvPr id="20" name="Image 2" descr="preencoded.png"/>
           <p:cNvPicPr>
             <a:picLocks noChangeAspect="1"/>
           </p:cNvPicPr>
@@ -12900,13 +12033,12 @@
             <a:avLst/>
           </a:prstGeom>
           <a:noFill/>
-          <a:ln/>
         </p:spPr>
         <p:txBody>
           <a:bodyPr wrap="square" lIns="0" tIns="0" rIns="0" bIns="0" rtlCol="0" anchor="ctr"/>
           <a:lstStyle/>
           <a:p>
-            <a:pPr indent="0" marL="0">
+            <a:pPr marL="0" indent="0">
               <a:buNone/>
             </a:pPr>
             <a:r>
@@ -12914,9 +12046,9 @@
                 <a:solidFill>
                   <a:srgbClr val="1E3A5F"/>
                 </a:solidFill>
-                <a:latin typeface="PT Serif" pitchFamily="34" charset="0"/>
-                <a:ea typeface="PT Serif" pitchFamily="34" charset="-122"/>
-                <a:cs typeface="PT Serif" pitchFamily="34" charset="-120"/>
+                <a:latin typeface="PT Serif" panose="020A0603040505020204" pitchFamily="34" charset="0"/>
+                <a:ea typeface="PT Serif" panose="020A0603040505020204" pitchFamily="34" charset="-122"/>
+                <a:cs typeface="PT Serif" panose="020A0603040505020204" pitchFamily="34" charset="-120"/>
               </a:rPr>
               <a:t>Контрольный контур</a:t>
             </a:r>
@@ -12939,13 +12071,12 @@
             <a:avLst/>
           </a:prstGeom>
           <a:noFill/>
-          <a:ln/>
         </p:spPr>
         <p:txBody>
           <a:bodyPr wrap="square" lIns="0" tIns="0" rIns="0" bIns="0" rtlCol="0" anchor="t"/>
           <a:lstStyle/>
           <a:p>
-            <a:pPr indent="0" marL="0">
+            <a:pPr marL="0" indent="0">
               <a:buNone/>
             </a:pPr>
             <a:r>
@@ -12953,9 +12084,9 @@
                 <a:solidFill>
                   <a:srgbClr val="23303F"/>
                 </a:solidFill>
-                <a:latin typeface="PT Sans" pitchFamily="34" charset="0"/>
-                <a:ea typeface="PT Sans" pitchFamily="34" charset="-122"/>
-                <a:cs typeface="PT Sans" pitchFamily="34" charset="-120"/>
+                <a:latin typeface="PT Sans" panose="020B0503020203020204" pitchFamily="34" charset="0"/>
+                <a:ea typeface="PT Sans" panose="020B0503020203020204" pitchFamily="34" charset="-122"/>
+                <a:cs typeface="PT Sans" panose="020B0503020203020204" pitchFamily="34" charset="-120"/>
               </a:rPr>
               <a:t>график мастеров, отчётность, ключевые показатели</a:t>
             </a:r>
@@ -12987,7 +12118,7 @@
             <a:prstDash val="solid"/>
           </a:ln>
           <a:effectLst>
-            <a:outerShdw sx="100000" sy="100000" kx="0" ky="0" algn="bl" rotWithShape="0" blurRad="101600" dist="38100" dir="5400000">
+            <a:outerShdw blurRad="101600" dist="38100" dir="5400000" algn="bl" rotWithShape="0">
               <a:srgbClr val="8499B5">
                 <a:alpha val="22000"/>
               </a:srgbClr>
@@ -13016,7 +12147,6 @@
           <a:solidFill>
             <a:srgbClr val="1E3A5F"/>
           </a:solidFill>
-          <a:ln/>
         </p:spPr>
         <p:txBody>
           <a:bodyPr/>
@@ -13040,7 +12170,6 @@
           <a:solidFill>
             <a:srgbClr val="1E3A5F"/>
           </a:solidFill>
-          <a:ln/>
         </p:spPr>
         <p:txBody>
           <a:bodyPr/>
@@ -13049,7 +12178,7 @@
       </p:sp>
       <p:pic>
         <p:nvPicPr>
-          <p:cNvPr id="26" name="Image 3" descr="preencoded.png">    </p:cNvPr>
+          <p:cNvPr id="26" name="Image 3" descr="preencoded.png"/>
           <p:cNvPicPr>
             <a:picLocks noChangeAspect="1"/>
           </p:cNvPicPr>
@@ -13086,13 +12215,12 @@
             <a:avLst/>
           </a:prstGeom>
           <a:noFill/>
-          <a:ln/>
         </p:spPr>
         <p:txBody>
           <a:bodyPr wrap="square" lIns="0" tIns="0" rIns="0" bIns="0" rtlCol="0" anchor="ctr"/>
           <a:lstStyle/>
           <a:p>
-            <a:pPr indent="0" marL="0">
+            <a:pPr marL="0" indent="0">
               <a:buNone/>
             </a:pPr>
             <a:r>
@@ -13100,9 +12228,9 @@
                 <a:solidFill>
                   <a:srgbClr val="1E3A5F"/>
                 </a:solidFill>
-                <a:latin typeface="PT Serif" pitchFamily="34" charset="0"/>
-                <a:ea typeface="PT Serif" pitchFamily="34" charset="-122"/>
-                <a:cs typeface="PT Serif" pitchFamily="34" charset="-120"/>
+                <a:latin typeface="PT Serif" panose="020A0603040505020204" pitchFamily="34" charset="0"/>
+                <a:ea typeface="PT Serif" panose="020A0603040505020204" pitchFamily="34" charset="-122"/>
+                <a:cs typeface="PT Serif" panose="020A0603040505020204" pitchFamily="34" charset="-120"/>
               </a:rPr>
               <a:t>Коммуникационный контур</a:t>
             </a:r>
@@ -13125,13 +12253,12 @@
             <a:avLst/>
           </a:prstGeom>
           <a:noFill/>
-          <a:ln/>
         </p:spPr>
         <p:txBody>
           <a:bodyPr wrap="square" lIns="0" tIns="0" rIns="0" bIns="0" rtlCol="0" anchor="t"/>
           <a:lstStyle/>
           <a:p>
-            <a:pPr indent="0" marL="0">
+            <a:pPr marL="0" indent="0">
               <a:buNone/>
             </a:pPr>
             <a:r>
@@ -13139,9 +12266,9 @@
                 <a:solidFill>
                   <a:srgbClr val="23303F"/>
                 </a:solidFill>
-                <a:latin typeface="PT Sans" pitchFamily="34" charset="0"/>
-                <a:ea typeface="PT Sans" pitchFamily="34" charset="-122"/>
-                <a:cs typeface="PT Sans" pitchFamily="34" charset="-120"/>
+                <a:latin typeface="PT Sans" panose="020B0503020203020204" pitchFamily="34" charset="0"/>
+                <a:ea typeface="PT Sans" panose="020B0503020203020204" pitchFamily="34" charset="-122"/>
+                <a:cs typeface="PT Sans" panose="020B0503020203020204" pitchFamily="34" charset="-120"/>
               </a:rPr>
               <a:t>каналы записи, согласования, подтверждения</a:t>
             </a:r>
@@ -13173,7 +12300,7 @@
             <a:prstDash val="solid"/>
           </a:ln>
           <a:effectLst>
-            <a:outerShdw sx="100000" sy="100000" kx="0" ky="0" algn="bl" rotWithShape="0" blurRad="101600" dist="38100" dir="5400000">
+            <a:outerShdw blurRad="101600" dist="38100" dir="5400000" algn="bl" rotWithShape="0">
               <a:srgbClr val="8499B5">
                 <a:alpha val="22000"/>
               </a:srgbClr>
@@ -13202,7 +12329,6 @@
           <a:solidFill>
             <a:srgbClr val="B08D3E"/>
           </a:solidFill>
-          <a:ln/>
         </p:spPr>
         <p:txBody>
           <a:bodyPr/>
@@ -13226,7 +12352,6 @@
           <a:solidFill>
             <a:srgbClr val="B08D3E"/>
           </a:solidFill>
-          <a:ln/>
         </p:spPr>
         <p:txBody>
           <a:bodyPr/>
@@ -13235,7 +12360,7 @@
       </p:sp>
       <p:pic>
         <p:nvPicPr>
-          <p:cNvPr id="32" name="Image 4" descr="preencoded.png">    </p:cNvPr>
+          <p:cNvPr id="32" name="Image 4" descr="preencoded.png"/>
           <p:cNvPicPr>
             <a:picLocks noChangeAspect="1"/>
           </p:cNvPicPr>
@@ -13272,13 +12397,12 @@
             <a:avLst/>
           </a:prstGeom>
           <a:noFill/>
-          <a:ln/>
         </p:spPr>
         <p:txBody>
           <a:bodyPr wrap="square" lIns="0" tIns="0" rIns="0" bIns="0" rtlCol="0" anchor="ctr"/>
           <a:lstStyle/>
           <a:p>
-            <a:pPr indent="0" marL="0">
+            <a:pPr marL="0" indent="0">
               <a:buNone/>
             </a:pPr>
             <a:r>
@@ -13286,37 +12410,31 @@
                 <a:solidFill>
                   <a:srgbClr val="B08D3E"/>
                 </a:solidFill>
-                <a:latin typeface="PT Sans" pitchFamily="34" charset="0"/>
-                <a:ea typeface="PT Sans" pitchFamily="34" charset="-122"/>
-                <a:cs typeface="PT Sans" pitchFamily="34" charset="-120"/>
+                <a:latin typeface="PT Sans" panose="020B0503020203020204" pitchFamily="34" charset="0"/>
+                <a:ea typeface="PT Sans" panose="020B0503020203020204" pitchFamily="34" charset="-122"/>
+                <a:cs typeface="PT Sans" panose="020B0503020203020204" pitchFamily="34" charset="-120"/>
               </a:rPr>
               <a:t>Контур обучения: </a:t>
             </a:r>
-            <a:pPr indent="0" marL="0">
-              <a:buNone/>
-            </a:pPr>
             <a:r>
               <a:rPr lang="en-US" sz="1550" dirty="0">
                 <a:solidFill>
                   <a:srgbClr val="23303F"/>
                 </a:solidFill>
-                <a:latin typeface="PT Sans" pitchFamily="34" charset="0"/>
-                <a:ea typeface="PT Sans" pitchFamily="34" charset="-122"/>
-                <a:cs typeface="PT Sans" pitchFamily="34" charset="-120"/>
+                <a:latin typeface="PT Sans" panose="020B0503020203020204" pitchFamily="34" charset="0"/>
+                <a:ea typeface="PT Sans" panose="020B0503020203020204" pitchFamily="34" charset="-122"/>
+                <a:cs typeface="PT Sans" panose="020B0503020203020204" pitchFamily="34" charset="-120"/>
               </a:rPr>
               <a:t>курсы и заявки на обучение.   </a:t>
             </a:r>
-            <a:pPr indent="0" marL="0">
-              <a:buNone/>
-            </a:pPr>
             <a:r>
               <a:rPr lang="en-US" sz="1550" b="1" dirty="0">
                 <a:solidFill>
                   <a:srgbClr val="1E3A5F"/>
                 </a:solidFill>
-                <a:latin typeface="PT Sans" pitchFamily="34" charset="0"/>
-                <a:ea typeface="PT Sans" pitchFamily="34" charset="-122"/>
-                <a:cs typeface="PT Sans" pitchFamily="34" charset="-120"/>
+                <a:latin typeface="PT Sans" panose="020B0503020203020204" pitchFamily="34" charset="0"/>
+                <a:ea typeface="PT Sans" panose="020B0503020203020204" pitchFamily="34" charset="-122"/>
+                <a:cs typeface="PT Sans" panose="020B0503020203020204" pitchFamily="34" charset="-120"/>
               </a:rPr>
               <a:t>Максимум эффекта — на сводных, повторяющихся операциях.</a:t>
             </a:r>
@@ -13366,13 +12484,12 @@
             <a:avLst/>
           </a:prstGeom>
           <a:noFill/>
-          <a:ln/>
         </p:spPr>
         <p:txBody>
           <a:bodyPr wrap="square" lIns="0" tIns="0" rIns="0" bIns="0" rtlCol="0" anchor="ctr"/>
           <a:lstStyle/>
           <a:p>
-            <a:pPr indent="0" marL="0">
+            <a:pPr marL="0" indent="0">
               <a:buNone/>
             </a:pPr>
             <a:r>
@@ -13380,9 +12497,9 @@
                 <a:solidFill>
                   <a:srgbClr val="657384"/>
                 </a:solidFill>
-                <a:latin typeface="PT Sans" pitchFamily="34" charset="0"/>
-                <a:ea typeface="PT Sans" pitchFamily="34" charset="-122"/>
-                <a:cs typeface="PT Sans" pitchFamily="34" charset="-120"/>
+                <a:latin typeface="PT Sans" panose="020B0503020203020204" pitchFamily="34" charset="0"/>
+                <a:ea typeface="PT Sans" panose="020B0503020203020204" pitchFamily="34" charset="-122"/>
+                <a:cs typeface="PT Sans" panose="020B0503020203020204" pitchFamily="34" charset="-120"/>
               </a:rPr>
               <a:t>АРМ менеджера салона красоты  ·  ВСГУТУ  ·  Улан-Удэ, 2026</a:t>
             </a:r>
@@ -13405,13 +12522,12 @@
             <a:avLst/>
           </a:prstGeom>
           <a:noFill/>
-          <a:ln/>
         </p:spPr>
         <p:txBody>
           <a:bodyPr wrap="square" lIns="0" tIns="0" rIns="0" bIns="0" rtlCol="0" anchor="ctr"/>
           <a:lstStyle/>
           <a:p>
-            <a:pPr algn="r" indent="0" marL="0">
+            <a:pPr marL="0" indent="0" algn="r">
               <a:buNone/>
             </a:pPr>
             <a:r>
@@ -13419,9 +12535,9 @@
                 <a:solidFill>
                   <a:srgbClr val="657384"/>
                 </a:solidFill>
-                <a:latin typeface="PT Sans" pitchFamily="34" charset="0"/>
-                <a:ea typeface="PT Sans" pitchFamily="34" charset="-122"/>
-                <a:cs typeface="PT Sans" pitchFamily="34" charset="-120"/>
+                <a:latin typeface="PT Sans" panose="020B0503020203020204" pitchFamily="34" charset="0"/>
+                <a:ea typeface="PT Sans" panose="020B0503020203020204" pitchFamily="34" charset="-122"/>
+                <a:cs typeface="PT Sans" panose="020B0503020203020204" pitchFamily="34" charset="-120"/>
               </a:rPr>
               <a:t>06 / 15</a:t>
             </a:r>
@@ -13439,12 +12555,13 @@
 
 <file path=ppt/slides/slide7.xml><?xml version="1.0" encoding="utf-8"?>
 <p:sld xmlns:a="http://schemas.openxmlformats.org/drawingml/2006/main" xmlns:r="http://schemas.openxmlformats.org/officeDocument/2006/relationships" xmlns:p="http://schemas.openxmlformats.org/presentationml/2006/main">
-  <p:cSld name="Slide 6">
+  <p:cSld>
     <p:bg>
       <p:bgPr>
         <a:solidFill>
           <a:srgbClr val="FFFFFF"/>
         </a:solidFill>
+        <a:effectLst/>
       </p:bgPr>
     </p:bg>
     <p:spTree>
@@ -13478,7 +12595,6 @@
           <a:solidFill>
             <a:srgbClr val="B08D3E"/>
           </a:solidFill>
-          <a:ln/>
         </p:spPr>
         <p:txBody>
           <a:bodyPr/>
@@ -13500,23 +12616,22 @@
             <a:avLst/>
           </a:prstGeom>
           <a:noFill/>
-          <a:ln/>
         </p:spPr>
         <p:txBody>
           <a:bodyPr wrap="square" lIns="0" tIns="0" rIns="0" bIns="0" rtlCol="0" anchor="ctr"/>
           <a:lstStyle/>
           <a:p>
-            <a:pPr indent="0" marL="0">
-              <a:buNone/>
-            </a:pPr>
-            <a:r>
-              <a:rPr lang="en-US" sz="1250" b="1" spc="300" kern="0" dirty="0">
+            <a:pPr marL="0" indent="0">
+              <a:buNone/>
+            </a:pPr>
+            <a:r>
+              <a:rPr lang="en-US" sz="1250" b="1" kern="0" spc="300" dirty="0">
                 <a:solidFill>
                   <a:srgbClr val="B08D3E"/>
                 </a:solidFill>
-                <a:latin typeface="PT Sans" pitchFamily="34" charset="0"/>
-                <a:ea typeface="PT Sans" pitchFamily="34" charset="-122"/>
-                <a:cs typeface="PT Sans" pitchFamily="34" charset="-120"/>
+                <a:latin typeface="PT Sans" panose="020B0503020203020204" pitchFamily="34" charset="0"/>
+                <a:ea typeface="PT Sans" panose="020B0503020203020204" pitchFamily="34" charset="-122"/>
+                <a:cs typeface="PT Sans" panose="020B0503020203020204" pitchFamily="34" charset="-120"/>
               </a:rPr>
               <a:t>ПРОЕКТИРОВАНИЕ · AS-IS</a:t>
             </a:r>
@@ -13539,13 +12654,12 @@
             <a:avLst/>
           </a:prstGeom>
           <a:noFill/>
-          <a:ln/>
         </p:spPr>
         <p:txBody>
           <a:bodyPr wrap="square" lIns="0" tIns="0" rIns="0" bIns="0" rtlCol="0" anchor="ctr"/>
           <a:lstStyle/>
           <a:p>
-            <a:pPr indent="0" marL="0">
+            <a:pPr marL="0" indent="0">
               <a:buNone/>
             </a:pPr>
             <a:r>
@@ -13553,9 +12667,9 @@
                 <a:solidFill>
                   <a:srgbClr val="1E3A5F"/>
                 </a:solidFill>
-                <a:latin typeface="PT Serif" pitchFamily="34" charset="0"/>
-                <a:ea typeface="PT Serif" pitchFamily="34" charset="-122"/>
-                <a:cs typeface="PT Serif" pitchFamily="34" charset="-120"/>
+                <a:latin typeface="PT Serif" panose="020A0603040505020204" pitchFamily="34" charset="0"/>
+                <a:ea typeface="PT Serif" panose="020A0603040505020204" pitchFamily="34" charset="-122"/>
+                <a:cs typeface="PT Serif" panose="020A0603040505020204" pitchFamily="34" charset="-120"/>
               </a:rPr>
               <a:t>Процесс «как есть»</a:t>
             </a:r>
@@ -13587,7 +12701,7 @@
             <a:prstDash val="solid"/>
           </a:ln>
           <a:effectLst>
-            <a:outerShdw sx="100000" sy="100000" kx="0" ky="0" algn="bl" rotWithShape="0" blurRad="101600" dist="38100" dir="5400000">
+            <a:outerShdw blurRad="101600" dist="38100" dir="5400000" algn="bl" rotWithShape="0">
               <a:srgbClr val="8499B5">
                 <a:alpha val="22000"/>
               </a:srgbClr>
@@ -13601,7 +12715,7 @@
       </p:sp>
       <p:pic>
         <p:nvPicPr>
-          <p:cNvPr id="6" name="Image 0" descr="/Users/m/Documents/VKR_Stats/build/img_final/image10.png">    </p:cNvPr>
+          <p:cNvPr id="6" name="Image 0" descr="/Users/m/Documents/VKR_Stats/build/img_final/image10.png"/>
           <p:cNvPicPr>
             <a:picLocks noChangeAspect="1"/>
           </p:cNvPicPr>
@@ -13647,7 +12761,7 @@
             <a:prstDash val="solid"/>
           </a:ln>
           <a:effectLst>
-            <a:outerShdw sx="100000" sy="100000" kx="0" ky="0" algn="bl" rotWithShape="0" blurRad="101600" dist="38100" dir="5400000">
+            <a:outerShdw blurRad="101600" dist="38100" dir="5400000" algn="bl" rotWithShape="0">
               <a:srgbClr val="8499B5">
                 <a:alpha val="22000"/>
               </a:srgbClr>
@@ -13676,7 +12790,6 @@
           <a:solidFill>
             <a:srgbClr val="A8503F"/>
           </a:solidFill>
-          <a:ln/>
         </p:spPr>
         <p:txBody>
           <a:bodyPr/>
@@ -13698,13 +12811,12 @@
             <a:avLst/>
           </a:prstGeom>
           <a:noFill/>
-          <a:ln/>
         </p:spPr>
         <p:txBody>
           <a:bodyPr wrap="square" lIns="0" tIns="0" rIns="0" bIns="0" rtlCol="0" anchor="ctr"/>
           <a:lstStyle/>
           <a:p>
-            <a:pPr indent="0" marL="0">
+            <a:pPr marL="0" indent="0">
               <a:buNone/>
             </a:pPr>
             <a:r>
@@ -13712,23 +12824,20 @@
                 <a:solidFill>
                   <a:srgbClr val="A8503F"/>
                 </a:solidFill>
-                <a:latin typeface="PT Sans" pitchFamily="34" charset="0"/>
-                <a:ea typeface="PT Sans" pitchFamily="34" charset="-122"/>
-                <a:cs typeface="PT Sans" pitchFamily="34" charset="-120"/>
+                <a:latin typeface="PT Sans" panose="020B0503020203020204" pitchFamily="34" charset="0"/>
+                <a:ea typeface="PT Sans" panose="020B0503020203020204" pitchFamily="34" charset="-122"/>
+                <a:cs typeface="PT Sans" panose="020B0503020203020204" pitchFamily="34" charset="-120"/>
               </a:rPr>
               <a:t>Узкие места:  </a:t>
             </a:r>
-            <a:pPr indent="0" marL="0">
-              <a:buNone/>
-            </a:pPr>
             <a:r>
               <a:rPr lang="en-US" sz="1500" dirty="0">
                 <a:solidFill>
                   <a:srgbClr val="23303F"/>
                 </a:solidFill>
-                <a:latin typeface="PT Sans" pitchFamily="34" charset="0"/>
-                <a:ea typeface="PT Sans" pitchFamily="34" charset="-122"/>
-                <a:cs typeface="PT Sans" pitchFamily="34" charset="-120"/>
+                <a:latin typeface="PT Sans" panose="020B0503020203020204" pitchFamily="34" charset="0"/>
+                <a:ea typeface="PT Sans" panose="020B0503020203020204" pitchFamily="34" charset="-122"/>
+                <a:cs typeface="PT Sans" panose="020B0503020203020204" pitchFamily="34" charset="-120"/>
               </a:rPr>
               <a:t>ручные сверки  ·  потери заявок  ·  нет единой картины дня  ·  двойные записи</a:t>
             </a:r>
@@ -13778,13 +12887,12 @@
             <a:avLst/>
           </a:prstGeom>
           <a:noFill/>
-          <a:ln/>
         </p:spPr>
         <p:txBody>
           <a:bodyPr wrap="square" lIns="0" tIns="0" rIns="0" bIns="0" rtlCol="0" anchor="ctr"/>
           <a:lstStyle/>
           <a:p>
-            <a:pPr indent="0" marL="0">
+            <a:pPr marL="0" indent="0">
               <a:buNone/>
             </a:pPr>
             <a:r>
@@ -13792,9 +12900,9 @@
                 <a:solidFill>
                   <a:srgbClr val="657384"/>
                 </a:solidFill>
-                <a:latin typeface="PT Sans" pitchFamily="34" charset="0"/>
-                <a:ea typeface="PT Sans" pitchFamily="34" charset="-122"/>
-                <a:cs typeface="PT Sans" pitchFamily="34" charset="-120"/>
+                <a:latin typeface="PT Sans" panose="020B0503020203020204" pitchFamily="34" charset="0"/>
+                <a:ea typeface="PT Sans" panose="020B0503020203020204" pitchFamily="34" charset="-122"/>
+                <a:cs typeface="PT Sans" panose="020B0503020203020204" pitchFamily="34" charset="-120"/>
               </a:rPr>
               <a:t>АРМ менеджера салона красоты  ·  ВСГУТУ  ·  Улан-Удэ, 2026</a:t>
             </a:r>
@@ -13817,13 +12925,12 @@
             <a:avLst/>
           </a:prstGeom>
           <a:noFill/>
-          <a:ln/>
         </p:spPr>
         <p:txBody>
           <a:bodyPr wrap="square" lIns="0" tIns="0" rIns="0" bIns="0" rtlCol="0" anchor="ctr"/>
           <a:lstStyle/>
           <a:p>
-            <a:pPr algn="r" indent="0" marL="0">
+            <a:pPr marL="0" indent="0" algn="r">
               <a:buNone/>
             </a:pPr>
             <a:r>
@@ -13831,9 +12938,9 @@
                 <a:solidFill>
                   <a:srgbClr val="657384"/>
                 </a:solidFill>
-                <a:latin typeface="PT Sans" pitchFamily="34" charset="0"/>
-                <a:ea typeface="PT Sans" pitchFamily="34" charset="-122"/>
-                <a:cs typeface="PT Sans" pitchFamily="34" charset="-120"/>
+                <a:latin typeface="PT Sans" panose="020B0503020203020204" pitchFamily="34" charset="0"/>
+                <a:ea typeface="PT Sans" panose="020B0503020203020204" pitchFamily="34" charset="-122"/>
+                <a:cs typeface="PT Sans" panose="020B0503020203020204" pitchFamily="34" charset="-120"/>
               </a:rPr>
               <a:t>07 / 15</a:t>
             </a:r>
@@ -13851,12 +12958,13 @@
 
 <file path=ppt/slides/slide8.xml><?xml version="1.0" encoding="utf-8"?>
 <p:sld xmlns:a="http://schemas.openxmlformats.org/drawingml/2006/main" xmlns:r="http://schemas.openxmlformats.org/officeDocument/2006/relationships" xmlns:p="http://schemas.openxmlformats.org/presentationml/2006/main">
-  <p:cSld name="Slide 7">
+  <p:cSld>
     <p:bg>
       <p:bgPr>
         <a:solidFill>
           <a:srgbClr val="FFFFFF"/>
         </a:solidFill>
+        <a:effectLst/>
       </p:bgPr>
     </p:bg>
     <p:spTree>
@@ -13890,7 +12998,6 @@
           <a:solidFill>
             <a:srgbClr val="B08D3E"/>
           </a:solidFill>
-          <a:ln/>
         </p:spPr>
         <p:txBody>
           <a:bodyPr/>
@@ -13912,23 +13019,22 @@
             <a:avLst/>
           </a:prstGeom>
           <a:noFill/>
-          <a:ln/>
         </p:spPr>
         <p:txBody>
           <a:bodyPr wrap="square" lIns="0" tIns="0" rIns="0" bIns="0" rtlCol="0" anchor="ctr"/>
           <a:lstStyle/>
           <a:p>
-            <a:pPr indent="0" marL="0">
-              <a:buNone/>
-            </a:pPr>
-            <a:r>
-              <a:rPr lang="en-US" sz="1250" b="1" spc="300" kern="0" dirty="0">
+            <a:pPr marL="0" indent="0">
+              <a:buNone/>
+            </a:pPr>
+            <a:r>
+              <a:rPr lang="en-US" sz="1250" b="1" kern="0" spc="300" dirty="0">
                 <a:solidFill>
                   <a:srgbClr val="B08D3E"/>
                 </a:solidFill>
-                <a:latin typeface="PT Sans" pitchFamily="34" charset="0"/>
-                <a:ea typeface="PT Sans" pitchFamily="34" charset="-122"/>
-                <a:cs typeface="PT Sans" pitchFamily="34" charset="-120"/>
+                <a:latin typeface="PT Sans" panose="020B0503020203020204" pitchFamily="34" charset="0"/>
+                <a:ea typeface="PT Sans" panose="020B0503020203020204" pitchFamily="34" charset="-122"/>
+                <a:cs typeface="PT Sans" panose="020B0503020203020204" pitchFamily="34" charset="-120"/>
               </a:rPr>
               <a:t>ПРОЕКТИРОВАНИЕ · TO-BE</a:t>
             </a:r>
@@ -13951,13 +13057,12 @@
             <a:avLst/>
           </a:prstGeom>
           <a:noFill/>
-          <a:ln/>
         </p:spPr>
         <p:txBody>
           <a:bodyPr wrap="square" lIns="0" tIns="0" rIns="0" bIns="0" rtlCol="0" anchor="ctr"/>
           <a:lstStyle/>
           <a:p>
-            <a:pPr indent="0" marL="0">
+            <a:pPr marL="0" indent="0">
               <a:buNone/>
             </a:pPr>
             <a:r>
@@ -13965,9 +13070,9 @@
                 <a:solidFill>
                   <a:srgbClr val="1E3A5F"/>
                 </a:solidFill>
-                <a:latin typeface="PT Serif" pitchFamily="34" charset="0"/>
-                <a:ea typeface="PT Serif" pitchFamily="34" charset="-122"/>
-                <a:cs typeface="PT Serif" pitchFamily="34" charset="-120"/>
+                <a:latin typeface="PT Serif" panose="020A0603040505020204" pitchFamily="34" charset="0"/>
+                <a:ea typeface="PT Serif" panose="020A0603040505020204" pitchFamily="34" charset="-122"/>
+                <a:cs typeface="PT Serif" panose="020A0603040505020204" pitchFamily="34" charset="-120"/>
               </a:rPr>
               <a:t>Процесс «как должно быть»</a:t>
             </a:r>
@@ -13999,7 +13104,7 @@
             <a:prstDash val="solid"/>
           </a:ln>
           <a:effectLst>
-            <a:outerShdw sx="100000" sy="100000" kx="0" ky="0" algn="bl" rotWithShape="0" blurRad="101600" dist="38100" dir="5400000">
+            <a:outerShdw blurRad="101600" dist="38100" dir="5400000" algn="bl" rotWithShape="0">
               <a:srgbClr val="8499B5">
                 <a:alpha val="22000"/>
               </a:srgbClr>
@@ -14013,7 +13118,7 @@
       </p:sp>
       <p:pic>
         <p:nvPicPr>
-          <p:cNvPr id="6" name="Image 0" descr="/Users/m/Documents/VKR_Stats/build/img_final/image11.png">    </p:cNvPr>
+          <p:cNvPr id="6" name="Image 0" descr="/Users/m/Documents/VKR_Stats/build/img_final/image11.png"/>
           <p:cNvPicPr>
             <a:picLocks noChangeAspect="1"/>
           </p:cNvPicPr>
@@ -14059,7 +13164,7 @@
             <a:prstDash val="solid"/>
           </a:ln>
           <a:effectLst>
-            <a:outerShdw sx="100000" sy="100000" kx="0" ky="0" algn="bl" rotWithShape="0" blurRad="101600" dist="38100" dir="5400000">
+            <a:outerShdw blurRad="101600" dist="38100" dir="5400000" algn="bl" rotWithShape="0">
               <a:srgbClr val="8499B5">
                 <a:alpha val="22000"/>
               </a:srgbClr>
@@ -14088,7 +13193,6 @@
           <a:solidFill>
             <a:srgbClr val="2E7D5B"/>
           </a:solidFill>
-          <a:ln/>
         </p:spPr>
         <p:txBody>
           <a:bodyPr/>
@@ -14110,13 +13214,12 @@
             <a:avLst/>
           </a:prstGeom>
           <a:noFill/>
-          <a:ln/>
         </p:spPr>
         <p:txBody>
           <a:bodyPr wrap="square" lIns="0" tIns="0" rIns="0" bIns="0" rtlCol="0" anchor="ctr"/>
           <a:lstStyle/>
           <a:p>
-            <a:pPr algn="ctr" indent="0" marL="0">
+            <a:pPr marL="0" indent="0" algn="ctr">
               <a:buNone/>
             </a:pPr>
             <a:r>
@@ -14124,9 +13227,9 @@
                 <a:solidFill>
                   <a:srgbClr val="657384"/>
                 </a:solidFill>
-                <a:latin typeface="PT Sans" pitchFamily="34" charset="0"/>
-                <a:ea typeface="PT Sans" pitchFamily="34" charset="-122"/>
-                <a:cs typeface="PT Sans" pitchFamily="34" charset="-120"/>
+                <a:latin typeface="PT Sans" panose="020B0503020203020204" pitchFamily="34" charset="0"/>
+                <a:ea typeface="PT Sans" panose="020B0503020203020204" pitchFamily="34" charset="-122"/>
+                <a:cs typeface="PT Sans" panose="020B0503020203020204" pitchFamily="34" charset="-120"/>
               </a:rPr>
               <a:t>Запись клиента</a:t>
             </a:r>
@@ -14149,13 +13252,12 @@
             <a:avLst/>
           </a:prstGeom>
           <a:noFill/>
-          <a:ln/>
         </p:spPr>
         <p:txBody>
           <a:bodyPr wrap="square" lIns="0" tIns="0" rIns="0" bIns="0" rtlCol="0" anchor="ctr"/>
           <a:lstStyle/>
           <a:p>
-            <a:pPr algn="ctr" indent="0" marL="0">
+            <a:pPr marL="0" indent="0" algn="ctr">
               <a:buNone/>
             </a:pPr>
             <a:r>
@@ -14163,9 +13265,9 @@
                 <a:solidFill>
                   <a:srgbClr val="2E7D5B"/>
                 </a:solidFill>
-                <a:latin typeface="PT Serif" pitchFamily="34" charset="0"/>
-                <a:ea typeface="PT Serif" pitchFamily="34" charset="-122"/>
-                <a:cs typeface="PT Serif" pitchFamily="34" charset="-120"/>
+                <a:latin typeface="PT Serif" panose="020A0603040505020204" pitchFamily="34" charset="0"/>
+                <a:ea typeface="PT Serif" panose="020A0603040505020204" pitchFamily="34" charset="-122"/>
+                <a:cs typeface="PT Serif" panose="020A0603040505020204" pitchFamily="34" charset="-120"/>
               </a:rPr>
               <a:t>12 → 4 мин</a:t>
             </a:r>
@@ -14197,7 +13299,7 @@
             <a:prstDash val="solid"/>
           </a:ln>
           <a:effectLst>
-            <a:outerShdw sx="100000" sy="100000" kx="0" ky="0" algn="bl" rotWithShape="0" blurRad="101600" dist="38100" dir="5400000">
+            <a:outerShdw blurRad="101600" dist="38100" dir="5400000" algn="bl" rotWithShape="0">
               <a:srgbClr val="8499B5">
                 <a:alpha val="22000"/>
               </a:srgbClr>
@@ -14226,7 +13328,6 @@
           <a:solidFill>
             <a:srgbClr val="2E7D5B"/>
           </a:solidFill>
-          <a:ln/>
         </p:spPr>
         <p:txBody>
           <a:bodyPr/>
@@ -14248,13 +13349,12 @@
             <a:avLst/>
           </a:prstGeom>
           <a:noFill/>
-          <a:ln/>
         </p:spPr>
         <p:txBody>
           <a:bodyPr wrap="square" lIns="0" tIns="0" rIns="0" bIns="0" rtlCol="0" anchor="ctr"/>
           <a:lstStyle/>
           <a:p>
-            <a:pPr algn="ctr" indent="0" marL="0">
+            <a:pPr marL="0" indent="0" algn="ctr">
               <a:buNone/>
             </a:pPr>
             <a:r>
@@ -14262,9 +13362,9 @@
                 <a:solidFill>
                   <a:srgbClr val="657384"/>
                 </a:solidFill>
-                <a:latin typeface="PT Sans" pitchFamily="34" charset="0"/>
-                <a:ea typeface="PT Sans" pitchFamily="34" charset="-122"/>
-                <a:cs typeface="PT Sans" pitchFamily="34" charset="-120"/>
+                <a:latin typeface="PT Sans" panose="020B0503020203020204" pitchFamily="34" charset="0"/>
+                <a:ea typeface="PT Sans" panose="020B0503020203020204" pitchFamily="34" charset="-122"/>
+                <a:cs typeface="PT Sans" panose="020B0503020203020204" pitchFamily="34" charset="-120"/>
               </a:rPr>
               <a:t>Повторные согласования</a:t>
             </a:r>
@@ -14287,13 +13387,12 @@
             <a:avLst/>
           </a:prstGeom>
           <a:noFill/>
-          <a:ln/>
         </p:spPr>
         <p:txBody>
           <a:bodyPr wrap="square" lIns="0" tIns="0" rIns="0" bIns="0" rtlCol="0" anchor="ctr"/>
           <a:lstStyle/>
           <a:p>
-            <a:pPr algn="ctr" indent="0" marL="0">
+            <a:pPr marL="0" indent="0" algn="ctr">
               <a:buNone/>
             </a:pPr>
             <a:r>
@@ -14301,9 +13400,9 @@
                 <a:solidFill>
                   <a:srgbClr val="2E7D5B"/>
                 </a:solidFill>
-                <a:latin typeface="PT Serif" pitchFamily="34" charset="0"/>
-                <a:ea typeface="PT Serif" pitchFamily="34" charset="-122"/>
-                <a:cs typeface="PT Serif" pitchFamily="34" charset="-120"/>
+                <a:latin typeface="PT Serif" panose="020A0603040505020204" pitchFamily="34" charset="0"/>
+                <a:ea typeface="PT Serif" panose="020A0603040505020204" pitchFamily="34" charset="-122"/>
+                <a:cs typeface="PT Serif" panose="020A0603040505020204" pitchFamily="34" charset="-120"/>
               </a:rPr>
               <a:t>30% → ≤ 5%</a:t>
             </a:r>
@@ -14335,7 +13434,7 @@
             <a:prstDash val="solid"/>
           </a:ln>
           <a:effectLst>
-            <a:outerShdw sx="100000" sy="100000" kx="0" ky="0" algn="bl" rotWithShape="0" blurRad="101600" dist="38100" dir="5400000">
+            <a:outerShdw blurRad="101600" dist="38100" dir="5400000" algn="bl" rotWithShape="0">
               <a:srgbClr val="8499B5">
                 <a:alpha val="22000"/>
               </a:srgbClr>
@@ -14364,7 +13463,6 @@
           <a:solidFill>
             <a:srgbClr val="2E7D5B"/>
           </a:solidFill>
-          <a:ln/>
         </p:spPr>
         <p:txBody>
           <a:bodyPr/>
@@ -14386,13 +13484,12 @@
             <a:avLst/>
           </a:prstGeom>
           <a:noFill/>
-          <a:ln/>
         </p:spPr>
         <p:txBody>
           <a:bodyPr wrap="square" lIns="0" tIns="0" rIns="0" bIns="0" rtlCol="0" anchor="ctr"/>
           <a:lstStyle/>
           <a:p>
-            <a:pPr algn="ctr" indent="0" marL="0">
+            <a:pPr marL="0" indent="0" algn="ctr">
               <a:buNone/>
             </a:pPr>
             <a:r>
@@ -14400,9 +13497,9 @@
                 <a:solidFill>
                   <a:srgbClr val="657384"/>
                 </a:solidFill>
-                <a:latin typeface="PT Sans" pitchFamily="34" charset="0"/>
-                <a:ea typeface="PT Sans" pitchFamily="34" charset="-122"/>
-                <a:cs typeface="PT Sans" pitchFamily="34" charset="-120"/>
+                <a:latin typeface="PT Sans" panose="020B0503020203020204" pitchFamily="34" charset="0"/>
+                <a:ea typeface="PT Sans" panose="020B0503020203020204" pitchFamily="34" charset="-122"/>
+                <a:cs typeface="PT Sans" panose="020B0503020203020204" pitchFamily="34" charset="-120"/>
               </a:rPr>
               <a:t>График на неделю</a:t>
             </a:r>
@@ -14425,13 +13522,12 @@
             <a:avLst/>
           </a:prstGeom>
           <a:noFill/>
-          <a:ln/>
         </p:spPr>
         <p:txBody>
           <a:bodyPr wrap="square" lIns="0" tIns="0" rIns="0" bIns="0" rtlCol="0" anchor="ctr"/>
           <a:lstStyle/>
           <a:p>
-            <a:pPr algn="ctr" indent="0" marL="0">
+            <a:pPr marL="0" indent="0" algn="ctr">
               <a:buNone/>
             </a:pPr>
             <a:r>
@@ -14439,9 +13535,9 @@
                 <a:solidFill>
                   <a:srgbClr val="2E7D5B"/>
                 </a:solidFill>
-                <a:latin typeface="PT Serif" pitchFamily="34" charset="0"/>
-                <a:ea typeface="PT Serif" pitchFamily="34" charset="-122"/>
-                <a:cs typeface="PT Serif" pitchFamily="34" charset="-120"/>
+                <a:latin typeface="PT Serif" panose="020A0603040505020204" pitchFamily="34" charset="0"/>
+                <a:ea typeface="PT Serif" panose="020A0603040505020204" pitchFamily="34" charset="-122"/>
+                <a:cs typeface="PT Serif" panose="020A0603040505020204" pitchFamily="34" charset="-120"/>
               </a:rPr>
               <a:t>40 → 10 мин</a:t>
             </a:r>
@@ -14491,13 +13587,12 @@
             <a:avLst/>
           </a:prstGeom>
           <a:noFill/>
-          <a:ln/>
         </p:spPr>
         <p:txBody>
           <a:bodyPr wrap="square" lIns="0" tIns="0" rIns="0" bIns="0" rtlCol="0" anchor="ctr"/>
           <a:lstStyle/>
           <a:p>
-            <a:pPr indent="0" marL="0">
+            <a:pPr marL="0" indent="0">
               <a:buNone/>
             </a:pPr>
             <a:r>
@@ -14505,9 +13600,9 @@
                 <a:solidFill>
                   <a:srgbClr val="657384"/>
                 </a:solidFill>
-                <a:latin typeface="PT Sans" pitchFamily="34" charset="0"/>
-                <a:ea typeface="PT Sans" pitchFamily="34" charset="-122"/>
-                <a:cs typeface="PT Sans" pitchFamily="34" charset="-120"/>
+                <a:latin typeface="PT Sans" panose="020B0503020203020204" pitchFamily="34" charset="0"/>
+                <a:ea typeface="PT Sans" panose="020B0503020203020204" pitchFamily="34" charset="-122"/>
+                <a:cs typeface="PT Sans" panose="020B0503020203020204" pitchFamily="34" charset="-120"/>
               </a:rPr>
               <a:t>АРМ менеджера салона красоты  ·  ВСГУТУ  ·  Улан-Удэ, 2026</a:t>
             </a:r>
@@ -14530,13 +13625,12 @@
             <a:avLst/>
           </a:prstGeom>
           <a:noFill/>
-          <a:ln/>
         </p:spPr>
         <p:txBody>
           <a:bodyPr wrap="square" lIns="0" tIns="0" rIns="0" bIns="0" rtlCol="0" anchor="ctr"/>
           <a:lstStyle/>
           <a:p>
-            <a:pPr algn="r" indent="0" marL="0">
+            <a:pPr marL="0" indent="0" algn="r">
               <a:buNone/>
             </a:pPr>
             <a:r>
@@ -14544,9 +13638,9 @@
                 <a:solidFill>
                   <a:srgbClr val="657384"/>
                 </a:solidFill>
-                <a:latin typeface="PT Sans" pitchFamily="34" charset="0"/>
-                <a:ea typeface="PT Sans" pitchFamily="34" charset="-122"/>
-                <a:cs typeface="PT Sans" pitchFamily="34" charset="-120"/>
+                <a:latin typeface="PT Sans" panose="020B0503020203020204" pitchFamily="34" charset="0"/>
+                <a:ea typeface="PT Sans" panose="020B0503020203020204" pitchFamily="34" charset="-122"/>
+                <a:cs typeface="PT Sans" panose="020B0503020203020204" pitchFamily="34" charset="-120"/>
               </a:rPr>
               <a:t>08 / 15</a:t>
             </a:r>
@@ -14564,12 +13658,13 @@
 
 <file path=ppt/slides/slide9.xml><?xml version="1.0" encoding="utf-8"?>
 <p:sld xmlns:a="http://schemas.openxmlformats.org/drawingml/2006/main" xmlns:r="http://schemas.openxmlformats.org/officeDocument/2006/relationships" xmlns:p="http://schemas.openxmlformats.org/presentationml/2006/main">
-  <p:cSld name="Slide 8">
+  <p:cSld>
     <p:bg>
       <p:bgPr>
         <a:solidFill>
           <a:srgbClr val="FFFFFF"/>
         </a:solidFill>
+        <a:effectLst/>
       </p:bgPr>
     </p:bg>
     <p:spTree>
@@ -14603,7 +13698,6 @@
           <a:solidFill>
             <a:srgbClr val="B08D3E"/>
           </a:solidFill>
-          <a:ln/>
         </p:spPr>
         <p:txBody>
           <a:bodyPr/>
@@ -14625,23 +13719,22 @@
             <a:avLst/>
           </a:prstGeom>
           <a:noFill/>
-          <a:ln/>
         </p:spPr>
         <p:txBody>
           <a:bodyPr wrap="square" lIns="0" tIns="0" rIns="0" bIns="0" rtlCol="0" anchor="ctr"/>
           <a:lstStyle/>
           <a:p>
-            <a:pPr indent="0" marL="0">
-              <a:buNone/>
-            </a:pPr>
-            <a:r>
-              <a:rPr lang="en-US" sz="1250" b="1" spc="300" kern="0" dirty="0">
+            <a:pPr marL="0" indent="0">
+              <a:buNone/>
+            </a:pPr>
+            <a:r>
+              <a:rPr lang="en-US" sz="1250" b="1" kern="0" spc="300" dirty="0">
                 <a:solidFill>
                   <a:srgbClr val="B08D3E"/>
                 </a:solidFill>
-                <a:latin typeface="PT Sans" pitchFamily="34" charset="0"/>
-                <a:ea typeface="PT Sans" pitchFamily="34" charset="-122"/>
-                <a:cs typeface="PT Sans" pitchFamily="34" charset="-120"/>
+                <a:latin typeface="PT Sans" panose="020B0503020203020204" pitchFamily="34" charset="0"/>
+                <a:ea typeface="PT Sans" panose="020B0503020203020204" pitchFamily="34" charset="-122"/>
+                <a:cs typeface="PT Sans" panose="020B0503020203020204" pitchFamily="34" charset="-120"/>
               </a:rPr>
               <a:t>ПРОЕКТИРОВАНИЕ · ДАННЫЕ</a:t>
             </a:r>
@@ -14664,13 +13757,12 @@
             <a:avLst/>
           </a:prstGeom>
           <a:noFill/>
-          <a:ln/>
         </p:spPr>
         <p:txBody>
           <a:bodyPr wrap="square" lIns="0" tIns="0" rIns="0" bIns="0" rtlCol="0" anchor="ctr"/>
           <a:lstStyle/>
           <a:p>
-            <a:pPr indent="0" marL="0">
+            <a:pPr marL="0" indent="0">
               <a:buNone/>
             </a:pPr>
             <a:r>
@@ -14678,9 +13770,9 @@
                 <a:solidFill>
                   <a:srgbClr val="1E3A5F"/>
                 </a:solidFill>
-                <a:latin typeface="PT Serif" pitchFamily="34" charset="0"/>
-                <a:ea typeface="PT Serif" pitchFamily="34" charset="-122"/>
-                <a:cs typeface="PT Serif" pitchFamily="34" charset="-120"/>
+                <a:latin typeface="PT Serif" panose="020A0603040505020204" pitchFamily="34" charset="0"/>
+                <a:ea typeface="PT Serif" panose="020A0603040505020204" pitchFamily="34" charset="-122"/>
+                <a:cs typeface="PT Serif" panose="020A0603040505020204" pitchFamily="34" charset="-120"/>
               </a:rPr>
               <a:t>Модель данных (ER)</a:t>
             </a:r>
@@ -14712,7 +13804,7 @@
             <a:prstDash val="solid"/>
           </a:ln>
           <a:effectLst>
-            <a:outerShdw sx="100000" sy="100000" kx="0" ky="0" algn="bl" rotWithShape="0" blurRad="101600" dist="38100" dir="5400000">
+            <a:outerShdw blurRad="101600" dist="38100" dir="5400000" algn="bl" rotWithShape="0">
               <a:srgbClr val="8499B5">
                 <a:alpha val="22000"/>
               </a:srgbClr>
@@ -14726,7 +13818,7 @@
       </p:sp>
       <p:pic>
         <p:nvPicPr>
-          <p:cNvPr id="6" name="Image 0" descr="/Users/m/Documents/VKR_Stats/build/img_final/image12.png">    </p:cNvPr>
+          <p:cNvPr id="6" name="Image 0" descr="/Users/m/Documents/VKR_Stats/build/img_final/image12.png"/>
           <p:cNvPicPr>
             <a:picLocks noChangeAspect="1"/>
           </p:cNvPicPr>
@@ -14772,7 +13864,7 @@
             <a:prstDash val="solid"/>
           </a:ln>
           <a:effectLst>
-            <a:outerShdw sx="100000" sy="100000" kx="0" ky="0" algn="bl" rotWithShape="0" blurRad="101600" dist="38100" dir="5400000">
+            <a:outerShdw blurRad="101600" dist="38100" dir="5400000" algn="bl" rotWithShape="0">
               <a:srgbClr val="8499B5">
                 <a:alpha val="22000"/>
               </a:srgbClr>
@@ -14801,7 +13893,6 @@
           <a:solidFill>
             <a:srgbClr val="33598A"/>
           </a:solidFill>
-          <a:ln/>
         </p:spPr>
         <p:txBody>
           <a:bodyPr/>
@@ -14825,7 +13916,6 @@
           <a:solidFill>
             <a:srgbClr val="1E3A5F"/>
           </a:solidFill>
-          <a:ln/>
         </p:spPr>
         <p:txBody>
           <a:bodyPr/>
@@ -14834,7 +13924,7 @@
       </p:sp>
       <p:pic>
         <p:nvPicPr>
-          <p:cNvPr id="10" name="Image 1" descr="preencoded.png">    </p:cNvPr>
+          <p:cNvPr id="10" name="Image 1" descr="preencoded.png"/>
           <p:cNvPicPr>
             <a:picLocks noChangeAspect="1"/>
           </p:cNvPicPr>
@@ -14871,13 +13961,12 @@
             <a:avLst/>
           </a:prstGeom>
           <a:noFill/>
-          <a:ln/>
         </p:spPr>
         <p:txBody>
           <a:bodyPr wrap="square" lIns="0" tIns="0" rIns="0" bIns="0" rtlCol="0" anchor="ctr"/>
           <a:lstStyle/>
           <a:p>
-            <a:pPr indent="0" marL="0">
+            <a:pPr marL="0" indent="0">
               <a:buNone/>
             </a:pPr>
             <a:r>
@@ -14885,9 +13974,9 @@
                 <a:solidFill>
                   <a:srgbClr val="1E3A5F"/>
                 </a:solidFill>
-                <a:latin typeface="PT Serif" pitchFamily="34" charset="0"/>
-                <a:ea typeface="PT Serif" pitchFamily="34" charset="-122"/>
-                <a:cs typeface="PT Serif" pitchFamily="34" charset="-120"/>
+                <a:latin typeface="PT Serif" panose="020A0603040505020204" pitchFamily="34" charset="0"/>
+                <a:ea typeface="PT Serif" panose="020A0603040505020204" pitchFamily="34" charset="-122"/>
+                <a:cs typeface="PT Serif" panose="020A0603040505020204" pitchFamily="34" charset="-120"/>
               </a:rPr>
               <a:t>Ключевые сущности</a:t>
             </a:r>
@@ -14910,7 +13999,6 @@
             <a:avLst/>
           </a:prstGeom>
           <a:noFill/>
-          <a:ln/>
         </p:spPr>
         <p:txBody>
           <a:bodyPr wrap="square" lIns="0" tIns="0" rIns="0" bIns="0" rtlCol="0" anchor="t"/>
@@ -14928,9 +14016,9 @@
                 <a:solidFill>
                   <a:srgbClr val="23303F"/>
                 </a:solidFill>
-                <a:latin typeface="PT Sans" pitchFamily="34" charset="0"/>
-                <a:ea typeface="PT Sans" pitchFamily="34" charset="-122"/>
-                <a:cs typeface="PT Sans" pitchFamily="34" charset="-120"/>
+                <a:latin typeface="PT Sans" panose="020B0503020203020204" pitchFamily="34" charset="0"/>
+                <a:ea typeface="PT Sans" panose="020B0503020203020204" pitchFamily="34" charset="-122"/>
+                <a:cs typeface="PT Sans" panose="020B0503020203020204" pitchFamily="34" charset="-120"/>
               </a:rPr>
               <a:t>Клиент</a:t>
             </a:r>
@@ -14949,9 +14037,9 @@
                 <a:solidFill>
                   <a:srgbClr val="23303F"/>
                 </a:solidFill>
-                <a:latin typeface="PT Sans" pitchFamily="34" charset="0"/>
-                <a:ea typeface="PT Sans" pitchFamily="34" charset="-122"/>
-                <a:cs typeface="PT Sans" pitchFamily="34" charset="-120"/>
+                <a:latin typeface="PT Sans" panose="020B0503020203020204" pitchFamily="34" charset="0"/>
+                <a:ea typeface="PT Sans" panose="020B0503020203020204" pitchFamily="34" charset="-122"/>
+                <a:cs typeface="PT Sans" panose="020B0503020203020204" pitchFamily="34" charset="-120"/>
               </a:rPr>
               <a:t>Запись</a:t>
             </a:r>
@@ -14970,9 +14058,9 @@
                 <a:solidFill>
                   <a:srgbClr val="23303F"/>
                 </a:solidFill>
-                <a:latin typeface="PT Sans" pitchFamily="34" charset="0"/>
-                <a:ea typeface="PT Sans" pitchFamily="34" charset="-122"/>
-                <a:cs typeface="PT Sans" pitchFamily="34" charset="-120"/>
+                <a:latin typeface="PT Sans" panose="020B0503020203020204" pitchFamily="34" charset="0"/>
+                <a:ea typeface="PT Sans" panose="020B0503020203020204" pitchFamily="34" charset="-122"/>
+                <a:cs typeface="PT Sans" panose="020B0503020203020204" pitchFamily="34" charset="-120"/>
               </a:rPr>
               <a:t>Услуга</a:t>
             </a:r>
@@ -14991,9 +14079,9 @@
                 <a:solidFill>
                   <a:srgbClr val="23303F"/>
                 </a:solidFill>
-                <a:latin typeface="PT Sans" pitchFamily="34" charset="0"/>
-                <a:ea typeface="PT Sans" pitchFamily="34" charset="-122"/>
-                <a:cs typeface="PT Sans" pitchFamily="34" charset="-120"/>
+                <a:latin typeface="PT Sans" panose="020B0503020203020204" pitchFamily="34" charset="0"/>
+                <a:ea typeface="PT Sans" panose="020B0503020203020204" pitchFamily="34" charset="-122"/>
+                <a:cs typeface="PT Sans" panose="020B0503020203020204" pitchFamily="34" charset="-120"/>
               </a:rPr>
               <a:t>Мастер</a:t>
             </a:r>
@@ -15012,9 +14100,9 @@
                 <a:solidFill>
                   <a:srgbClr val="23303F"/>
                 </a:solidFill>
-                <a:latin typeface="PT Sans" pitchFamily="34" charset="0"/>
-                <a:ea typeface="PT Sans" pitchFamily="34" charset="-122"/>
-                <a:cs typeface="PT Sans" pitchFamily="34" charset="-120"/>
+                <a:latin typeface="PT Sans" panose="020B0503020203020204" pitchFamily="34" charset="0"/>
+                <a:ea typeface="PT Sans" panose="020B0503020203020204" pitchFamily="34" charset="-122"/>
+                <a:cs typeface="PT Sans" panose="020B0503020203020204" pitchFamily="34" charset="-120"/>
               </a:rPr>
               <a:t>Кабинет</a:t>
             </a:r>
@@ -15033,9 +14121,9 @@
                 <a:solidFill>
                   <a:srgbClr val="23303F"/>
                 </a:solidFill>
-                <a:latin typeface="PT Sans" pitchFamily="34" charset="0"/>
-                <a:ea typeface="PT Sans" pitchFamily="34" charset="-122"/>
-                <a:cs typeface="PT Sans" pitchFamily="34" charset="-120"/>
+                <a:latin typeface="PT Sans" panose="020B0503020203020204" pitchFamily="34" charset="0"/>
+                <a:ea typeface="PT Sans" panose="020B0503020203020204" pitchFamily="34" charset="-122"/>
+                <a:cs typeface="PT Sans" panose="020B0503020203020204" pitchFamily="34" charset="-120"/>
               </a:rPr>
               <a:t>Расходник</a:t>
             </a:r>
@@ -15054,9 +14142,9 @@
                 <a:solidFill>
                   <a:srgbClr val="23303F"/>
                 </a:solidFill>
-                <a:latin typeface="PT Sans" pitchFamily="34" charset="0"/>
-                <a:ea typeface="PT Sans" pitchFamily="34" charset="-122"/>
-                <a:cs typeface="PT Sans" pitchFamily="34" charset="-120"/>
+                <a:latin typeface="PT Sans" panose="020B0503020203020204" pitchFamily="34" charset="0"/>
+                <a:ea typeface="PT Sans" panose="020B0503020203020204" pitchFamily="34" charset="-122"/>
+                <a:cs typeface="PT Sans" panose="020B0503020203020204" pitchFamily="34" charset="-120"/>
               </a:rPr>
               <a:t>Заказ</a:t>
             </a:r>
@@ -15075,9 +14163,9 @@
                 <a:solidFill>
                   <a:srgbClr val="23303F"/>
                 </a:solidFill>
-                <a:latin typeface="PT Sans" pitchFamily="34" charset="0"/>
-                <a:ea typeface="PT Sans" pitchFamily="34" charset="-122"/>
-                <a:cs typeface="PT Sans" pitchFamily="34" charset="-120"/>
+                <a:latin typeface="PT Sans" panose="020B0503020203020204" pitchFamily="34" charset="0"/>
+                <a:ea typeface="PT Sans" panose="020B0503020203020204" pitchFamily="34" charset="-122"/>
+                <a:cs typeface="PT Sans" panose="020B0503020203020204" pitchFamily="34" charset="-120"/>
               </a:rPr>
               <a:t>Поставщик</a:t>
             </a:r>
@@ -15096,9 +14184,9 @@
                 <a:solidFill>
                   <a:srgbClr val="23303F"/>
                 </a:solidFill>
-                <a:latin typeface="PT Sans" pitchFamily="34" charset="0"/>
-                <a:ea typeface="PT Sans" pitchFamily="34" charset="-122"/>
-                <a:cs typeface="PT Sans" pitchFamily="34" charset="-120"/>
+                <a:latin typeface="PT Sans" panose="020B0503020203020204" pitchFamily="34" charset="0"/>
+                <a:ea typeface="PT Sans" panose="020B0503020203020204" pitchFamily="34" charset="-122"/>
+                <a:cs typeface="PT Sans" panose="020B0503020203020204" pitchFamily="34" charset="-120"/>
               </a:rPr>
               <a:t>Заявка на обучение</a:t>
             </a:r>
@@ -15117,9 +14205,9 @@
                 <a:solidFill>
                   <a:srgbClr val="23303F"/>
                 </a:solidFill>
-                <a:latin typeface="PT Sans" pitchFamily="34" charset="0"/>
-                <a:ea typeface="PT Sans" pitchFamily="34" charset="-122"/>
-                <a:cs typeface="PT Sans" pitchFamily="34" charset="-120"/>
+                <a:latin typeface="PT Sans" panose="020B0503020203020204" pitchFamily="34" charset="0"/>
+                <a:ea typeface="PT Sans" panose="020B0503020203020204" pitchFamily="34" charset="-122"/>
+                <a:cs typeface="PT Sans" panose="020B0503020203020204" pitchFamily="34" charset="-120"/>
               </a:rPr>
               <a:t>Курс</a:t>
             </a:r>
@@ -15169,13 +14257,12 @@
             <a:avLst/>
           </a:prstGeom>
           <a:noFill/>
-          <a:ln/>
         </p:spPr>
         <p:txBody>
           <a:bodyPr wrap="square" lIns="0" tIns="0" rIns="0" bIns="0" rtlCol="0" anchor="ctr"/>
           <a:lstStyle/>
           <a:p>
-            <a:pPr indent="0" marL="0">
+            <a:pPr marL="0" indent="0">
               <a:buNone/>
             </a:pPr>
             <a:r>
@@ -15183,9 +14270,9 @@
                 <a:solidFill>
                   <a:srgbClr val="657384"/>
                 </a:solidFill>
-                <a:latin typeface="PT Sans" pitchFamily="34" charset="0"/>
-                <a:ea typeface="PT Sans" pitchFamily="34" charset="-122"/>
-                <a:cs typeface="PT Sans" pitchFamily="34" charset="-120"/>
+                <a:latin typeface="PT Sans" panose="020B0503020203020204" pitchFamily="34" charset="0"/>
+                <a:ea typeface="PT Sans" panose="020B0503020203020204" pitchFamily="34" charset="-122"/>
+                <a:cs typeface="PT Sans" panose="020B0503020203020204" pitchFamily="34" charset="-120"/>
               </a:rPr>
               <a:t>АРМ менеджера салона красоты  ·  ВСГУТУ  ·  Улан-Удэ, 2026</a:t>
             </a:r>
@@ -15208,13 +14295,12 @@
             <a:avLst/>
           </a:prstGeom>
           <a:noFill/>
-          <a:ln/>
         </p:spPr>
         <p:txBody>
           <a:bodyPr wrap="square" lIns="0" tIns="0" rIns="0" bIns="0" rtlCol="0" anchor="ctr"/>
           <a:lstStyle/>
           <a:p>
-            <a:pPr algn="r" indent="0" marL="0">
+            <a:pPr marL="0" indent="0" algn="r">
               <a:buNone/>
             </a:pPr>
             <a:r>
@@ -15222,9 +14308,9 @@
                 <a:solidFill>
                   <a:srgbClr val="657384"/>
                 </a:solidFill>
-                <a:latin typeface="PT Sans" pitchFamily="34" charset="0"/>
-                <a:ea typeface="PT Sans" pitchFamily="34" charset="-122"/>
-                <a:cs typeface="PT Sans" pitchFamily="34" charset="-120"/>
+                <a:latin typeface="PT Sans" panose="020B0503020203020204" pitchFamily="34" charset="0"/>
+                <a:ea typeface="PT Sans" panose="020B0503020203020204" pitchFamily="34" charset="-122"/>
+                <a:cs typeface="PT Sans" panose="020B0503020203020204" pitchFamily="34" charset="-120"/>
               </a:rPr>
               <a:t>09 / 15</a:t>
             </a:r>
@@ -15283,7 +14369,7 @@
     </a:clrScheme>
     <a:fontScheme name="Office">
       <a:majorFont>
-        <a:latin typeface="Calibri Light" panose="020F0302020204030204"/>
+        <a:latin typeface="Calibri Light"/>
         <a:ea typeface=""/>
         <a:cs typeface=""/>
         <a:font script="Jpan" typeface="游ゴシック Light"/>
@@ -15316,26 +14402,9 @@
         <a:font script="Viet" typeface="Times New Roman"/>
         <a:font script="Uigh" typeface="Microsoft Uighur"/>
         <a:font script="Geor" typeface="Sylfaen"/>
-        <a:font script="Armn" typeface="Arial"/>
-        <a:font script="Bugi" typeface="Leelawadee UI"/>
-        <a:font script="Bopo" typeface="Microsoft JhengHei"/>
-        <a:font script="Java" typeface="Javanese Text"/>
-        <a:font script="Lisu" typeface="Segoe UI"/>
-        <a:font script="Mymr" typeface="Myanmar Text"/>
-        <a:font script="Nkoo" typeface="Ebrima"/>
-        <a:font script="Olck" typeface="Nirmala UI"/>
-        <a:font script="Osma" typeface="Ebrima"/>
-        <a:font script="Phag" typeface="Phagspa"/>
-        <a:font script="Syrn" typeface="Estrangelo Edessa"/>
-        <a:font script="Syrj" typeface="Estrangelo Edessa"/>
-        <a:font script="Syre" typeface="Estrangelo Edessa"/>
-        <a:font script="Sora" typeface="Nirmala UI"/>
-        <a:font script="Tale" typeface="Microsoft Tai Le"/>
-        <a:font script="Talu" typeface="Microsoft New Tai Lue"/>
-        <a:font script="Tfng" typeface="Ebrima"/>
       </a:majorFont>
       <a:minorFont>
-        <a:latin typeface="Calibri" panose="020F0502020204030204"/>
+        <a:latin typeface="Calibri"/>
         <a:ea typeface=""/>
         <a:cs typeface=""/>
         <a:font script="Jpan" typeface="游ゴシック"/>
@@ -15368,23 +14437,6 @@
         <a:font script="Viet" typeface="Arial"/>
         <a:font script="Uigh" typeface="Microsoft Uighur"/>
         <a:font script="Geor" typeface="Sylfaen"/>
-        <a:font script="Armn" typeface="Arial"/>
-        <a:font script="Bugi" typeface="Leelawadee UI"/>
-        <a:font script="Bopo" typeface="Microsoft JhengHei"/>
-        <a:font script="Java" typeface="Javanese Text"/>
-        <a:font script="Lisu" typeface="Segoe UI"/>
-        <a:font script="Mymr" typeface="Myanmar Text"/>
-        <a:font script="Nkoo" typeface="Ebrima"/>
-        <a:font script="Olck" typeface="Nirmala UI"/>
-        <a:font script="Osma" typeface="Ebrima"/>
-        <a:font script="Phag" typeface="Phagspa"/>
-        <a:font script="Syrn" typeface="Estrangelo Edessa"/>
-        <a:font script="Syrj" typeface="Estrangelo Edessa"/>
-        <a:font script="Syre" typeface="Estrangelo Edessa"/>
-        <a:font script="Sora" typeface="Nirmala UI"/>
-        <a:font script="Tale" typeface="Microsoft Tai Le"/>
-        <a:font script="Talu" typeface="Microsoft New Tai Lue"/>
-        <a:font script="Tfng" typeface="Ebrima"/>
       </a:minorFont>
     </a:fontScheme>
     <a:fmtScheme name="Office">
@@ -15525,8 +14577,265 @@
       </a:bgFillStyleLst>
     </a:fmtScheme>
   </a:themeElements>
-  <a:objectDefaults/>
-  <a:extraClrSchemeLst/>
+  <a:extLst>
+    <a:ext uri="{05A4C25C-085E-4340-85A3-A5531E510DB2}">
+      <thm15:themeFamily xmlns:thm15="http://schemas.microsoft.com/office/thememl/2012/main" name="Office Theme" id="{62F939B6-93AF-4DB8-9C6B-D6C7DFDC589F}" vid="{4A3C46E8-61CC-4603-A589-7422A47A8E4A}"/>
+    </a:ext>
+  </a:extLst>
+</a:theme>
+</file>
+
+<file path=ppt/theme/theme2.xml><?xml version="1.0" encoding="utf-8"?>
+<a:theme xmlns:a="http://schemas.openxmlformats.org/drawingml/2006/main" name="Office Theme">
+  <a:themeElements>
+    <a:clrScheme name="Office">
+      <a:dk1>
+        <a:sysClr val="windowText" lastClr="000000"/>
+      </a:dk1>
+      <a:lt1>
+        <a:sysClr val="window" lastClr="FFFFFF"/>
+      </a:lt1>
+      <a:dk2>
+        <a:srgbClr val="44546A"/>
+      </a:dk2>
+      <a:lt2>
+        <a:srgbClr val="E7E6E6"/>
+      </a:lt2>
+      <a:accent1>
+        <a:srgbClr val="4472C4"/>
+      </a:accent1>
+      <a:accent2>
+        <a:srgbClr val="ED7D31"/>
+      </a:accent2>
+      <a:accent3>
+        <a:srgbClr val="A5A5A5"/>
+      </a:accent3>
+      <a:accent4>
+        <a:srgbClr val="FFC000"/>
+      </a:accent4>
+      <a:accent5>
+        <a:srgbClr val="5B9BD5"/>
+      </a:accent5>
+      <a:accent6>
+        <a:srgbClr val="70AD47"/>
+      </a:accent6>
+      <a:hlink>
+        <a:srgbClr val="0563C1"/>
+      </a:hlink>
+      <a:folHlink>
+        <a:srgbClr val="954F72"/>
+      </a:folHlink>
+    </a:clrScheme>
+    <a:fontScheme name="Office">
+      <a:majorFont>
+        <a:latin typeface="Calibri Light"/>
+        <a:ea typeface=""/>
+        <a:cs typeface=""/>
+        <a:font script="Jpan" typeface="游ゴシック Light"/>
+        <a:font script="Hang" typeface="맑은 고딕"/>
+        <a:font script="Hans" typeface="等线 Light"/>
+        <a:font script="Hant" typeface="新細明體"/>
+        <a:font script="Arab" typeface="Times New Roman"/>
+        <a:font script="Hebr" typeface="Times New Roman"/>
+        <a:font script="Thai" typeface="Angsana New"/>
+        <a:font script="Ethi" typeface="Nyala"/>
+        <a:font script="Beng" typeface="Vrinda"/>
+        <a:font script="Gujr" typeface="Shruti"/>
+        <a:font script="Khmr" typeface="MoolBoran"/>
+        <a:font script="Knda" typeface="Tunga"/>
+        <a:font script="Guru" typeface="Raavi"/>
+        <a:font script="Cans" typeface="Euphemia"/>
+        <a:font script="Cher" typeface="Plantagenet Cherokee"/>
+        <a:font script="Yiii" typeface="Microsoft Yi Baiti"/>
+        <a:font script="Tibt" typeface="Microsoft Himalaya"/>
+        <a:font script="Thaa" typeface="MV Boli"/>
+        <a:font script="Deva" typeface="Mangal"/>
+        <a:font script="Telu" typeface="Gautami"/>
+        <a:font script="Taml" typeface="Latha"/>
+        <a:font script="Syrc" typeface="Estrangelo Edessa"/>
+        <a:font script="Orya" typeface="Kalinga"/>
+        <a:font script="Mlym" typeface="Kartika"/>
+        <a:font script="Laoo" typeface="DokChampa"/>
+        <a:font script="Sinh" typeface="Iskoola Pota"/>
+        <a:font script="Mong" typeface="Mongolian Baiti"/>
+        <a:font script="Viet" typeface="Times New Roman"/>
+        <a:font script="Uigh" typeface="Microsoft Uighur"/>
+        <a:font script="Geor" typeface="Sylfaen"/>
+      </a:majorFont>
+      <a:minorFont>
+        <a:latin typeface="Calibri"/>
+        <a:ea typeface=""/>
+        <a:cs typeface=""/>
+        <a:font script="Jpan" typeface="游ゴシック"/>
+        <a:font script="Hang" typeface="맑은 고딕"/>
+        <a:font script="Hans" typeface="等线"/>
+        <a:font script="Hant" typeface="新細明體"/>
+        <a:font script="Arab" typeface="Arial"/>
+        <a:font script="Hebr" typeface="Arial"/>
+        <a:font script="Thai" typeface="Cordia New"/>
+        <a:font script="Ethi" typeface="Nyala"/>
+        <a:font script="Beng" typeface="Vrinda"/>
+        <a:font script="Gujr" typeface="Shruti"/>
+        <a:font script="Khmr" typeface="DaunPenh"/>
+        <a:font script="Knda" typeface="Tunga"/>
+        <a:font script="Guru" typeface="Raavi"/>
+        <a:font script="Cans" typeface="Euphemia"/>
+        <a:font script="Cher" typeface="Plantagenet Cherokee"/>
+        <a:font script="Yiii" typeface="Microsoft Yi Baiti"/>
+        <a:font script="Tibt" typeface="Microsoft Himalaya"/>
+        <a:font script="Thaa" typeface="MV Boli"/>
+        <a:font script="Deva" typeface="Mangal"/>
+        <a:font script="Telu" typeface="Gautami"/>
+        <a:font script="Taml" typeface="Latha"/>
+        <a:font script="Syrc" typeface="Estrangelo Edessa"/>
+        <a:font script="Orya" typeface="Kalinga"/>
+        <a:font script="Mlym" typeface="Kartika"/>
+        <a:font script="Laoo" typeface="DokChampa"/>
+        <a:font script="Sinh" typeface="Iskoola Pota"/>
+        <a:font script="Mong" typeface="Mongolian Baiti"/>
+        <a:font script="Viet" typeface="Arial"/>
+        <a:font script="Uigh" typeface="Microsoft Uighur"/>
+        <a:font script="Geor" typeface="Sylfaen"/>
+      </a:minorFont>
+    </a:fontScheme>
+    <a:fmtScheme name="Office">
+      <a:fillStyleLst>
+        <a:solidFill>
+          <a:schemeClr val="phClr"/>
+        </a:solidFill>
+        <a:gradFill rotWithShape="1">
+          <a:gsLst>
+            <a:gs pos="0">
+              <a:schemeClr val="phClr">
+                <a:lumMod val="110000"/>
+                <a:satMod val="105000"/>
+                <a:tint val="67000"/>
+              </a:schemeClr>
+            </a:gs>
+            <a:gs pos="50000">
+              <a:schemeClr val="phClr">
+                <a:lumMod val="105000"/>
+                <a:satMod val="103000"/>
+                <a:tint val="73000"/>
+              </a:schemeClr>
+            </a:gs>
+            <a:gs pos="100000">
+              <a:schemeClr val="phClr">
+                <a:lumMod val="105000"/>
+                <a:satMod val="109000"/>
+                <a:tint val="81000"/>
+              </a:schemeClr>
+            </a:gs>
+          </a:gsLst>
+          <a:lin ang="5400000" scaled="0"/>
+        </a:gradFill>
+        <a:gradFill rotWithShape="1">
+          <a:gsLst>
+            <a:gs pos="0">
+              <a:schemeClr val="phClr">
+                <a:satMod val="103000"/>
+                <a:lumMod val="102000"/>
+                <a:tint val="94000"/>
+              </a:schemeClr>
+            </a:gs>
+            <a:gs pos="50000">
+              <a:schemeClr val="phClr">
+                <a:satMod val="110000"/>
+                <a:lumMod val="100000"/>
+                <a:shade val="100000"/>
+              </a:schemeClr>
+            </a:gs>
+            <a:gs pos="100000">
+              <a:schemeClr val="phClr">
+                <a:lumMod val="99000"/>
+                <a:satMod val="120000"/>
+                <a:shade val="78000"/>
+              </a:schemeClr>
+            </a:gs>
+          </a:gsLst>
+          <a:lin ang="5400000" scaled="0"/>
+        </a:gradFill>
+      </a:fillStyleLst>
+      <a:lnStyleLst>
+        <a:ln w="6350" cap="flat" cmpd="sng" algn="ctr">
+          <a:solidFill>
+            <a:schemeClr val="phClr"/>
+          </a:solidFill>
+          <a:prstDash val="solid"/>
+          <a:miter lim="800000"/>
+        </a:ln>
+        <a:ln w="12700" cap="flat" cmpd="sng" algn="ctr">
+          <a:solidFill>
+            <a:schemeClr val="phClr"/>
+          </a:solidFill>
+          <a:prstDash val="solid"/>
+          <a:miter lim="800000"/>
+        </a:ln>
+        <a:ln w="19050" cap="flat" cmpd="sng" algn="ctr">
+          <a:solidFill>
+            <a:schemeClr val="phClr"/>
+          </a:solidFill>
+          <a:prstDash val="solid"/>
+          <a:miter lim="800000"/>
+        </a:ln>
+      </a:lnStyleLst>
+      <a:effectStyleLst>
+        <a:effectStyle>
+          <a:effectLst/>
+        </a:effectStyle>
+        <a:effectStyle>
+          <a:effectLst/>
+        </a:effectStyle>
+        <a:effectStyle>
+          <a:effectLst>
+            <a:outerShdw blurRad="57150" dist="19050" dir="5400000" algn="ctr" rotWithShape="0">
+              <a:srgbClr val="000000">
+                <a:alpha val="63000"/>
+              </a:srgbClr>
+            </a:outerShdw>
+          </a:effectLst>
+        </a:effectStyle>
+      </a:effectStyleLst>
+      <a:bgFillStyleLst>
+        <a:solidFill>
+          <a:schemeClr val="phClr"/>
+        </a:solidFill>
+        <a:solidFill>
+          <a:schemeClr val="phClr">
+            <a:tint val="95000"/>
+            <a:satMod val="170000"/>
+          </a:schemeClr>
+        </a:solidFill>
+        <a:gradFill rotWithShape="1">
+          <a:gsLst>
+            <a:gs pos="0">
+              <a:schemeClr val="phClr">
+                <a:tint val="93000"/>
+                <a:satMod val="150000"/>
+                <a:shade val="98000"/>
+                <a:lumMod val="102000"/>
+              </a:schemeClr>
+            </a:gs>
+            <a:gs pos="50000">
+              <a:schemeClr val="phClr">
+                <a:tint val="98000"/>
+                <a:satMod val="130000"/>
+                <a:shade val="90000"/>
+                <a:lumMod val="103000"/>
+              </a:schemeClr>
+            </a:gs>
+            <a:gs pos="100000">
+              <a:schemeClr val="phClr">
+                <a:shade val="63000"/>
+                <a:satMod val="120000"/>
+              </a:schemeClr>
+            </a:gs>
+          </a:gsLst>
+          <a:lin ang="5400000" scaled="0"/>
+        </a:gradFill>
+      </a:bgFillStyleLst>
+    </a:fmtScheme>
+  </a:themeElements>
   <a:extLst>
     <a:ext uri="{05A4C25C-085E-4340-85A3-A5531E510DB2}">
       <thm15:themeFamily xmlns:thm15="http://schemas.microsoft.com/office/thememl/2012/main" name="Office Theme" id="{62F939B6-93AF-4DB8-9C6B-D6C7DFDC589F}" vid="{4A3C46E8-61CC-4603-A589-7422A47A8E4A}"/>
